--- a/docs/curso/slides/m01-fundamentos.pptx
+++ b/docs/curso/slides/m01-fundamentos.pptx
@@ -4665,6 +4665,54 @@
           <a:chExt cx="0" cy="0"/>
         </a:xfrm>
       </p:grpSpPr>
+      <p:sp>
+        <p:nvSpPr>
+          <p:cNvPr id="25" name="Slide Number Placeholder 0"/>
+          <p:cNvSpPr>
+            <a:spLocks noGrp="1"/>
+          </p:cNvSpPr>
+          <p:nvPr>
+            <p:ph type="sldNum" sz="quarter" idx="4294967295"/>
+          </p:nvPr>
+        </p:nvSpPr>
+        <p:spPr>
+          <a:xfrm>
+            <a:off x="11292840" y="6556248"/>
+            <a:ext cx="548640" cy="256032"/>
+          </a:xfrm>
+          <a:prstGeom prst="rect">
+            <a:avLst/>
+          </a:prstGeom>
+          <a:extLst>
+            <a:ext uri="{C572A759-6A51-4108-AA02-DFA0A04FC94B}">
+              <ma14:wrappingTextBoxFlag xmlns:ma14="http://schemas.microsoft.com/office/mac/drawingml/2011/main" val="0"/>
+            </a:ext>
+          </a:extLst>
+        </p:spPr>
+        <p:txBody>
+          <a:bodyPr/>
+          <a:lstStyle>
+            <a:lvl1pPr>
+              <a:defRPr sz="900">
+                <a:solidFill>
+                  <a:srgbClr val="1B3A6B"/>
+                </a:solidFill>
+                <a:latin typeface="Arial"/>
+                <a:ea typeface="Arial"/>
+                <a:cs typeface="Arial"/>
+              </a:defRPr>
+            </a:lvl1pPr>
+          </a:lstStyle>
+          <a:p>
+            <a:pPr algn="r"/>
+            <a:fld id="{F7021451-1387-4CA6-816F-3879F97B5CBC}" type="slidenum">
+              <a:rPr b="1" lang="en-US"/>
+              <a:t>1000</a:t>
+            </a:fld>
+            <a:endParaRPr lang="en-US"/>
+          </a:p>
+        </p:txBody>
+      </p:sp>
     </p:spTree>
   </p:cSld>
   <p:clrMapOvr>
@@ -4690,6 +4738,54 @@
           <a:chExt cx="0" cy="0"/>
         </a:xfrm>
       </p:grpSpPr>
+      <p:sp>
+        <p:nvSpPr>
+          <p:cNvPr id="25" name="Slide Number Placeholder 0"/>
+          <p:cNvSpPr>
+            <a:spLocks noGrp="1"/>
+          </p:cNvSpPr>
+          <p:nvPr>
+            <p:ph type="sldNum" sz="quarter" idx="4294967295"/>
+          </p:nvPr>
+        </p:nvSpPr>
+        <p:spPr>
+          <a:xfrm>
+            <a:off x="11292840" y="6556248"/>
+            <a:ext cx="548640" cy="256032"/>
+          </a:xfrm>
+          <a:prstGeom prst="rect">
+            <a:avLst/>
+          </a:prstGeom>
+          <a:extLst>
+            <a:ext uri="{C572A759-6A51-4108-AA02-DFA0A04FC94B}">
+              <ma14:wrappingTextBoxFlag xmlns:ma14="http://schemas.microsoft.com/office/mac/drawingml/2011/main" val="0"/>
+            </a:ext>
+          </a:extLst>
+        </p:spPr>
+        <p:txBody>
+          <a:bodyPr/>
+          <a:lstStyle>
+            <a:lvl1pPr>
+              <a:defRPr sz="900">
+                <a:solidFill>
+                  <a:srgbClr val="1B3A6B"/>
+                </a:solidFill>
+                <a:latin typeface="Arial"/>
+                <a:ea typeface="Arial"/>
+                <a:cs typeface="Arial"/>
+              </a:defRPr>
+            </a:lvl1pPr>
+          </a:lstStyle>
+          <a:p>
+            <a:pPr algn="r"/>
+            <a:fld id="{F7021451-1387-4CA6-816F-3879F97B5CBC}" type="slidenum">
+              <a:rPr b="1" lang="en-US"/>
+              <a:t>null</a:t>
+            </a:fld>
+            <a:endParaRPr lang="en-US"/>
+          </a:p>
+        </p:txBody>
+      </p:sp>
     </p:spTree>
   </p:cSld>
   <p:clrMap bg1="lt1" tx1="dk1" bg2="lt2" tx2="dk2" accent1="accent1" accent2="accent2" accent3="accent3" accent4="accent4" accent5="accent5" accent6="accent6" hlink="hlink" folHlink="folHlink"/>
@@ -5563,7 +5659,7 @@
         </p:blipFill>
         <p:spPr>
           <a:xfrm>
-            <a:off x="411480" y="6547104"/>
+            <a:off x="548640" y="6547104"/>
             <a:ext cx="274320" cy="274320"/>
           </a:xfrm>
           <a:prstGeom prst="rect">
@@ -5579,7 +5675,7 @@
         </p:nvSpPr>
         <p:spPr>
           <a:xfrm>
-            <a:off x="749808" y="6528816"/>
+            <a:off x="886968" y="6528816"/>
             <a:ext cx="6400800" cy="310896"/>
           </a:xfrm>
           <a:prstGeom prst="rect">
@@ -5619,7 +5715,7 @@
         <p:spPr>
           <a:xfrm>
             <a:off x="7132320" y="6528816"/>
-            <a:ext cx="4663440" cy="310896"/>
+            <a:ext cx="4023360" cy="310896"/>
           </a:xfrm>
           <a:prstGeom prst="rect">
             <a:avLst/>
@@ -5657,7 +5753,7 @@
         </p:nvSpPr>
         <p:spPr>
           <a:xfrm>
-            <a:off x="411480" y="384048"/>
+            <a:off x="548640" y="384048"/>
             <a:ext cx="82296" cy="658368"/>
           </a:xfrm>
           <a:prstGeom prst="rect">
@@ -5677,7 +5773,7 @@
         </p:nvSpPr>
         <p:spPr>
           <a:xfrm>
-            <a:off x="640080" y="292608"/>
+            <a:off x="777240" y="292608"/>
             <a:ext cx="10972800" cy="274320"/>
           </a:xfrm>
           <a:prstGeom prst="rect">
@@ -5716,8 +5812,8 @@
         </p:nvSpPr>
         <p:spPr>
           <a:xfrm>
-            <a:off x="640080" y="530352"/>
-            <a:ext cx="11155680" cy="566928"/>
+            <a:off x="777240" y="530352"/>
+            <a:ext cx="10881360" cy="566928"/>
           </a:xfrm>
           <a:prstGeom prst="rect">
             <a:avLst/>
@@ -5757,8 +5853,8 @@
         </p:nvSpPr>
         <p:spPr>
           <a:xfrm>
-            <a:off x="411480" y="2651760"/>
-            <a:ext cx="2944368" cy="1463040"/>
+            <a:off x="548640" y="2651760"/>
+            <a:ext cx="2852928" cy="1463040"/>
           </a:xfrm>
           <a:prstGeom prst="chevron">
             <a:avLst/>
@@ -5782,8 +5878,8 @@
         </p:nvSpPr>
         <p:spPr>
           <a:xfrm>
-            <a:off x="731520" y="2651760"/>
-            <a:ext cx="2423160" cy="1463040"/>
+            <a:off x="868680" y="2651760"/>
+            <a:ext cx="2331720" cy="1463040"/>
           </a:xfrm>
           <a:prstGeom prst="rect">
             <a:avLst/>
@@ -5823,8 +5919,8 @@
         </p:nvSpPr>
         <p:spPr>
           <a:xfrm>
-            <a:off x="3246120" y="2651760"/>
-            <a:ext cx="2944368" cy="1463040"/>
+            <a:off x="3291840" y="2651760"/>
+            <a:ext cx="2852928" cy="1463040"/>
           </a:xfrm>
           <a:prstGeom prst="chevron">
             <a:avLst/>
@@ -5848,8 +5944,8 @@
         </p:nvSpPr>
         <p:spPr>
           <a:xfrm>
-            <a:off x="3566160" y="2651760"/>
-            <a:ext cx="2423160" cy="1463040"/>
+            <a:off x="3611880" y="2651760"/>
+            <a:ext cx="2331720" cy="1463040"/>
           </a:xfrm>
           <a:prstGeom prst="rect">
             <a:avLst/>
@@ -5889,8 +5985,8 @@
         </p:nvSpPr>
         <p:spPr>
           <a:xfrm>
-            <a:off x="6080760" y="2651760"/>
-            <a:ext cx="2944368" cy="1463040"/>
+            <a:off x="6035040" y="2651760"/>
+            <a:ext cx="2852928" cy="1463040"/>
           </a:xfrm>
           <a:prstGeom prst="chevron">
             <a:avLst/>
@@ -5914,8 +6010,8 @@
         </p:nvSpPr>
         <p:spPr>
           <a:xfrm>
-            <a:off x="6400800" y="2651760"/>
-            <a:ext cx="2423160" cy="1463040"/>
+            <a:off x="6355080" y="2651760"/>
+            <a:ext cx="2331720" cy="1463040"/>
           </a:xfrm>
           <a:prstGeom prst="rect">
             <a:avLst/>
@@ -5955,8 +6051,8 @@
         </p:nvSpPr>
         <p:spPr>
           <a:xfrm>
-            <a:off x="8915400" y="2651760"/>
-            <a:ext cx="2944368" cy="1463040"/>
+            <a:off x="8778240" y="2651760"/>
+            <a:ext cx="2852928" cy="1463040"/>
           </a:xfrm>
           <a:prstGeom prst="chevron">
             <a:avLst/>
@@ -5980,8 +6076,8 @@
         </p:nvSpPr>
         <p:spPr>
           <a:xfrm>
-            <a:off x="9235440" y="2651760"/>
-            <a:ext cx="2423160" cy="1463040"/>
+            <a:off x="9098280" y="2651760"/>
+            <a:ext cx="2331720" cy="1463040"/>
           </a:xfrm>
           <a:prstGeom prst="rect">
             <a:avLst/>
@@ -6010,6 +6106,54 @@
               <a:t>Rede da distribuidora</a:t>
             </a:r>
             <a:endParaRPr lang="en-US" sz="1500" dirty="0"/>
+          </a:p>
+        </p:txBody>
+      </p:sp>
+      <p:sp>
+        <p:nvSpPr>
+          <p:cNvPr id="25" name="Slide Number Placeholder 0"/>
+          <p:cNvSpPr>
+            <a:spLocks noGrp="1"/>
+          </p:cNvSpPr>
+          <p:nvPr>
+            <p:ph type="sldNum" sz="quarter" idx="4294967295"/>
+          </p:nvPr>
+        </p:nvSpPr>
+        <p:spPr>
+          <a:xfrm>
+            <a:off x="11292840" y="6556248"/>
+            <a:ext cx="548640" cy="256032"/>
+          </a:xfrm>
+          <a:prstGeom prst="rect">
+            <a:avLst/>
+          </a:prstGeom>
+          <a:extLst>
+            <a:ext uri="{C572A759-6A51-4108-AA02-DFA0A04FC94B}">
+              <ma14:wrappingTextBoxFlag xmlns:ma14="http://schemas.microsoft.com/office/mac/drawingml/2011/main" val="0"/>
+            </a:ext>
+          </a:extLst>
+        </p:spPr>
+        <p:txBody>
+          <a:bodyPr/>
+          <a:lstStyle>
+            <a:lvl1pPr>
+              <a:defRPr sz="900">
+                <a:solidFill>
+                  <a:srgbClr val="1B3A6B"/>
+                </a:solidFill>
+                <a:latin typeface="Arial"/>
+                <a:ea typeface="Arial"/>
+                <a:cs typeface="Arial"/>
+              </a:defRPr>
+            </a:lvl1pPr>
+          </a:lstStyle>
+          <a:p>
+            <a:pPr algn="r"/>
+            <a:fld id="{F7021451-1387-4CA6-816F-3879F97B5CBC}" type="slidenum">
+              <a:rPr b="1" lang="en-US"/>
+              <a:t>10</a:t>
+            </a:fld>
+            <a:endParaRPr lang="en-US"/>
           </a:p>
         </p:txBody>
       </p:sp>
@@ -6086,7 +6230,7 @@
         </p:blipFill>
         <p:spPr>
           <a:xfrm>
-            <a:off x="411480" y="6547104"/>
+            <a:off x="548640" y="6547104"/>
             <a:ext cx="274320" cy="274320"/>
           </a:xfrm>
           <a:prstGeom prst="rect">
@@ -6102,7 +6246,7 @@
         </p:nvSpPr>
         <p:spPr>
           <a:xfrm>
-            <a:off x="749808" y="6528816"/>
+            <a:off x="886968" y="6528816"/>
             <a:ext cx="6400800" cy="310896"/>
           </a:xfrm>
           <a:prstGeom prst="rect">
@@ -6142,7 +6286,7 @@
         <p:spPr>
           <a:xfrm>
             <a:off x="7132320" y="6528816"/>
-            <a:ext cx="4663440" cy="310896"/>
+            <a:ext cx="4023360" cy="310896"/>
           </a:xfrm>
           <a:prstGeom prst="rect">
             <a:avLst/>
@@ -6180,7 +6324,7 @@
         </p:nvSpPr>
         <p:spPr>
           <a:xfrm>
-            <a:off x="411480" y="384048"/>
+            <a:off x="548640" y="384048"/>
             <a:ext cx="82296" cy="658368"/>
           </a:xfrm>
           <a:prstGeom prst="rect">
@@ -6200,7 +6344,7 @@
         </p:nvSpPr>
         <p:spPr>
           <a:xfrm>
-            <a:off x="640080" y="292608"/>
+            <a:off x="777240" y="292608"/>
             <a:ext cx="10972800" cy="274320"/>
           </a:xfrm>
           <a:prstGeom prst="rect">
@@ -6239,8 +6383,8 @@
         </p:nvSpPr>
         <p:spPr>
           <a:xfrm>
-            <a:off x="640080" y="530352"/>
-            <a:ext cx="11155680" cy="566928"/>
+            <a:off x="777240" y="530352"/>
+            <a:ext cx="10881360" cy="566928"/>
           </a:xfrm>
           <a:prstGeom prst="rect">
             <a:avLst/>
@@ -6280,8 +6424,8 @@
         </p:nvSpPr>
         <p:spPr>
           <a:xfrm>
-            <a:off x="411480" y="1325880"/>
-            <a:ext cx="11384280" cy="4937760"/>
+            <a:off x="548640" y="1325880"/>
+            <a:ext cx="11091672" cy="4937760"/>
           </a:xfrm>
           <a:prstGeom prst="roundRect">
             <a:avLst>
@@ -6302,8 +6446,8 @@
         </p:nvSpPr>
         <p:spPr>
           <a:xfrm>
-            <a:off x="777240" y="1554480"/>
-            <a:ext cx="10652760" cy="4480560"/>
+            <a:off x="914400" y="1554480"/>
+            <a:ext cx="10360152" cy="4480560"/>
           </a:xfrm>
           <a:prstGeom prst="rect">
             <a:avLst/>
@@ -6324,7 +6468,7 @@
               <a:buNone/>
             </a:pPr>
             <a:r>
-              <a:rPr lang="en-US" sz="2000" b="1" dirty="0">
+              <a:rPr lang="en-US" sz="2400" b="1" dirty="0">
                 <a:solidFill>
                   <a:srgbClr val="FFFFFF"/>
                 </a:solidFill>
@@ -6334,7 +6478,7 @@
               </a:rPr>
               <a:t>Geração mensal ≈ Potência (kWp) × Produtividade (kWh/kWp/mês)</a:t>
             </a:r>
-            <a:endParaRPr lang="en-US" sz="2000" dirty="0"/>
+            <a:endParaRPr lang="en-US" sz="2400" dirty="0"/>
           </a:p>
           <a:p>
             <a:pPr indent="0" marL="0">
@@ -6344,7 +6488,7 @@
               <a:buNone/>
             </a:pPr>
             <a:r>
-              <a:rPr lang="en-US" sz="2000" b="1" dirty="0">
+              <a:rPr lang="en-US" sz="2400" b="1" dirty="0">
                 <a:solidFill>
                   <a:srgbClr val="F7A23B"/>
                 </a:solidFill>
@@ -6354,7 +6498,55 @@
               </a:rPr>
               <a:t>Ex.: 500 kWp × 120 = 60.000 kWh/mês</a:t>
             </a:r>
-            <a:endParaRPr lang="en-US" sz="2000" dirty="0"/>
+            <a:endParaRPr lang="en-US" sz="2400" dirty="0"/>
+          </a:p>
+        </p:txBody>
+      </p:sp>
+      <p:sp>
+        <p:nvSpPr>
+          <p:cNvPr id="25" name="Slide Number Placeholder 0"/>
+          <p:cNvSpPr>
+            <a:spLocks noGrp="1"/>
+          </p:cNvSpPr>
+          <p:nvPr>
+            <p:ph type="sldNum" sz="quarter" idx="4294967295"/>
+          </p:nvPr>
+        </p:nvSpPr>
+        <p:spPr>
+          <a:xfrm>
+            <a:off x="11292840" y="6556248"/>
+            <a:ext cx="548640" cy="256032"/>
+          </a:xfrm>
+          <a:prstGeom prst="rect">
+            <a:avLst/>
+          </a:prstGeom>
+          <a:extLst>
+            <a:ext uri="{C572A759-6A51-4108-AA02-DFA0A04FC94B}">
+              <ma14:wrappingTextBoxFlag xmlns:ma14="http://schemas.microsoft.com/office/mac/drawingml/2011/main" val="0"/>
+            </a:ext>
+          </a:extLst>
+        </p:spPr>
+        <p:txBody>
+          <a:bodyPr/>
+          <a:lstStyle>
+            <a:lvl1pPr>
+              <a:defRPr sz="900">
+                <a:solidFill>
+                  <a:srgbClr val="1B3A6B"/>
+                </a:solidFill>
+                <a:latin typeface="Arial"/>
+                <a:ea typeface="Arial"/>
+                <a:cs typeface="Arial"/>
+              </a:defRPr>
+            </a:lvl1pPr>
+          </a:lstStyle>
+          <a:p>
+            <a:pPr algn="r"/>
+            <a:fld id="{F7021451-1387-4CA6-816F-3879F97B5CBC}" type="slidenum">
+              <a:rPr b="1" lang="en-US"/>
+              <a:t>11</a:t>
+            </a:fld>
+            <a:endParaRPr lang="en-US"/>
           </a:p>
         </p:txBody>
       </p:sp>
@@ -6431,7 +6623,7 @@
         </p:blipFill>
         <p:spPr>
           <a:xfrm>
-            <a:off x="411480" y="6547104"/>
+            <a:off x="548640" y="6547104"/>
             <a:ext cx="274320" cy="274320"/>
           </a:xfrm>
           <a:prstGeom prst="rect">
@@ -6447,7 +6639,7 @@
         </p:nvSpPr>
         <p:spPr>
           <a:xfrm>
-            <a:off x="749808" y="6528816"/>
+            <a:off x="886968" y="6528816"/>
             <a:ext cx="6400800" cy="310896"/>
           </a:xfrm>
           <a:prstGeom prst="rect">
@@ -6487,7 +6679,7 @@
         <p:spPr>
           <a:xfrm>
             <a:off x="7132320" y="6528816"/>
-            <a:ext cx="4663440" cy="310896"/>
+            <a:ext cx="4023360" cy="310896"/>
           </a:xfrm>
           <a:prstGeom prst="rect">
             <a:avLst/>
@@ -6525,7 +6717,7 @@
         </p:nvSpPr>
         <p:spPr>
           <a:xfrm>
-            <a:off x="411480" y="384048"/>
+            <a:off x="548640" y="384048"/>
             <a:ext cx="82296" cy="658368"/>
           </a:xfrm>
           <a:prstGeom prst="rect">
@@ -6545,7 +6737,7 @@
         </p:nvSpPr>
         <p:spPr>
           <a:xfrm>
-            <a:off x="640080" y="292608"/>
+            <a:off x="777240" y="292608"/>
             <a:ext cx="10972800" cy="274320"/>
           </a:xfrm>
           <a:prstGeom prst="rect">
@@ -6584,8 +6776,8 @@
         </p:nvSpPr>
         <p:spPr>
           <a:xfrm>
-            <a:off x="640080" y="530352"/>
-            <a:ext cx="11155680" cy="566928"/>
+            <a:off x="777240" y="530352"/>
+            <a:ext cx="10881360" cy="566928"/>
           </a:xfrm>
           <a:prstGeom prst="rect">
             <a:avLst/>
@@ -6625,12 +6817,12 @@
         </p:nvSpPr>
         <p:spPr>
           <a:xfrm>
-            <a:off x="411480" y="1325880"/>
-            <a:ext cx="3611880" cy="4937760"/>
+            <a:off x="548640" y="1325880"/>
+            <a:ext cx="3514344" cy="4937760"/>
           </a:xfrm>
           <a:prstGeom prst="roundRect">
             <a:avLst>
-              <a:gd name="adj" fmla="val 2025"/>
+              <a:gd name="adj" fmla="val 2082"/>
             </a:avLst>
           </a:prstGeom>
           <a:solidFill>
@@ -6659,8 +6851,8 @@
         </p:nvSpPr>
         <p:spPr>
           <a:xfrm>
-            <a:off x="411480" y="1325880"/>
-            <a:ext cx="3611880" cy="109728"/>
+            <a:off x="548640" y="1325880"/>
+            <a:ext cx="3514344" cy="109728"/>
           </a:xfrm>
           <a:prstGeom prst="rect">
             <a:avLst/>
@@ -6679,8 +6871,8 @@
         </p:nvSpPr>
         <p:spPr>
           <a:xfrm>
-            <a:off x="685800" y="1554480"/>
-            <a:ext cx="3063240" cy="685800"/>
+            <a:off x="822960" y="1554480"/>
+            <a:ext cx="2965704" cy="685800"/>
           </a:xfrm>
           <a:prstGeom prst="rect">
             <a:avLst/>
@@ -6720,8 +6912,8 @@
         </p:nvSpPr>
         <p:spPr>
           <a:xfrm>
-            <a:off x="685800" y="2286000"/>
-            <a:ext cx="3063240" cy="3749040"/>
+            <a:off x="822960" y="2286000"/>
+            <a:ext cx="2965704" cy="3749040"/>
           </a:xfrm>
           <a:prstGeom prst="rect">
             <a:avLst/>
@@ -6849,12 +7041,12 @@
         </p:nvSpPr>
         <p:spPr>
           <a:xfrm>
-            <a:off x="4297680" y="1325880"/>
-            <a:ext cx="3611880" cy="4937760"/>
+            <a:off x="4337304" y="1325880"/>
+            <a:ext cx="3514344" cy="4937760"/>
           </a:xfrm>
           <a:prstGeom prst="roundRect">
             <a:avLst>
-              <a:gd name="adj" fmla="val 2025"/>
+              <a:gd name="adj" fmla="val 2082"/>
             </a:avLst>
           </a:prstGeom>
           <a:solidFill>
@@ -6883,8 +7075,8 @@
         </p:nvSpPr>
         <p:spPr>
           <a:xfrm>
-            <a:off x="4297680" y="1325880"/>
-            <a:ext cx="3611880" cy="109728"/>
+            <a:off x="4337304" y="1325880"/>
+            <a:ext cx="3514344" cy="109728"/>
           </a:xfrm>
           <a:prstGeom prst="rect">
             <a:avLst/>
@@ -6903,8 +7095,8 @@
         </p:nvSpPr>
         <p:spPr>
           <a:xfrm>
-            <a:off x="4572000" y="1554480"/>
-            <a:ext cx="3063240" cy="685800"/>
+            <a:off x="4611624" y="1554480"/>
+            <a:ext cx="2965704" cy="685800"/>
           </a:xfrm>
           <a:prstGeom prst="rect">
             <a:avLst/>
@@ -6944,8 +7136,8 @@
         </p:nvSpPr>
         <p:spPr>
           <a:xfrm>
-            <a:off x="4572000" y="2286000"/>
-            <a:ext cx="3063240" cy="3749040"/>
+            <a:off x="4611624" y="2286000"/>
+            <a:ext cx="2965704" cy="3749040"/>
           </a:xfrm>
           <a:prstGeom prst="rect">
             <a:avLst/>
@@ -6963,7 +7155,7 @@
               <a:buNone/>
             </a:pPr>
             <a:r>
-              <a:rPr lang="en-US" sz="2000" dirty="0">
+              <a:rPr lang="en-US" sz="2200" dirty="0">
                 <a:solidFill>
                   <a:srgbClr val="1F2937"/>
                 </a:solidFill>
@@ -6973,7 +7165,7 @@
               </a:rPr>
               <a:t>Degradação típica: ~0,5% a 0,8% ao ano</a:t>
             </a:r>
-            <a:endParaRPr lang="en-US" sz="2000" dirty="0"/>
+            <a:endParaRPr lang="en-US" sz="2200" dirty="0"/>
           </a:p>
         </p:txBody>
       </p:sp>
@@ -6985,12 +7177,12 @@
         </p:nvSpPr>
         <p:spPr>
           <a:xfrm>
-            <a:off x="8183880" y="1325880"/>
-            <a:ext cx="3611880" cy="4937760"/>
+            <a:off x="8125968" y="1325880"/>
+            <a:ext cx="3514344" cy="4937760"/>
           </a:xfrm>
           <a:prstGeom prst="roundRect">
             <a:avLst>
-              <a:gd name="adj" fmla="val 2025"/>
+              <a:gd name="adj" fmla="val 2082"/>
             </a:avLst>
           </a:prstGeom>
           <a:solidFill>
@@ -7019,8 +7211,8 @@
         </p:nvSpPr>
         <p:spPr>
           <a:xfrm>
-            <a:off x="8183880" y="1325880"/>
-            <a:ext cx="3611880" cy="109728"/>
+            <a:off x="8125968" y="1325880"/>
+            <a:ext cx="3514344" cy="109728"/>
           </a:xfrm>
           <a:prstGeom prst="rect">
             <a:avLst/>
@@ -7039,8 +7231,8 @@
         </p:nvSpPr>
         <p:spPr>
           <a:xfrm>
-            <a:off x="8458200" y="1554480"/>
-            <a:ext cx="3063240" cy="685800"/>
+            <a:off x="8400288" y="1554480"/>
+            <a:ext cx="2965704" cy="685800"/>
           </a:xfrm>
           <a:prstGeom prst="rect">
             <a:avLst/>
@@ -7080,8 +7272,8 @@
         </p:nvSpPr>
         <p:spPr>
           <a:xfrm>
-            <a:off x="8458200" y="2286000"/>
-            <a:ext cx="3063240" cy="3749040"/>
+            <a:off x="8400288" y="2286000"/>
+            <a:ext cx="2965704" cy="3749040"/>
           </a:xfrm>
           <a:prstGeom prst="rect">
             <a:avLst/>
@@ -7103,7 +7295,7 @@
               <a:buChar char="●"/>
             </a:pPr>
             <a:r>
-              <a:rPr lang="en-US" sz="1600" dirty="0">
+              <a:rPr lang="en-US" sz="1700" dirty="0">
                 <a:solidFill>
                   <a:srgbClr val="1F2937"/>
                 </a:solidFill>
@@ -7113,7 +7305,7 @@
               </a:rPr>
               <a:t>Solo: maior escala</a:t>
             </a:r>
-            <a:endParaRPr lang="en-US" sz="1600" dirty="0"/>
+            <a:endParaRPr lang="en-US" sz="1700" dirty="0"/>
           </a:p>
           <a:p>
             <a:pPr marL="342900" indent="-342900">
@@ -7124,7 +7316,7 @@
               <a:buChar char="●"/>
             </a:pPr>
             <a:r>
-              <a:rPr lang="en-US" sz="1600" dirty="0">
+              <a:rPr lang="en-US" sz="1700" dirty="0">
                 <a:solidFill>
                   <a:srgbClr val="1F2937"/>
                 </a:solidFill>
@@ -7134,7 +7326,7 @@
               </a:rPr>
               <a:t>Telhado: aproveita estrutura existente</a:t>
             </a:r>
-            <a:endParaRPr lang="en-US" sz="1600" dirty="0"/>
+            <a:endParaRPr lang="en-US" sz="1700" dirty="0"/>
           </a:p>
           <a:p>
             <a:pPr marL="342900" indent="-342900">
@@ -7145,7 +7337,7 @@
               <a:buChar char="●"/>
             </a:pPr>
             <a:r>
-              <a:rPr lang="en-US" sz="1600" dirty="0">
+              <a:rPr lang="en-US" sz="1700" dirty="0">
                 <a:solidFill>
                   <a:srgbClr val="1F2937"/>
                 </a:solidFill>
@@ -7155,7 +7347,55 @@
               </a:rPr>
               <a:t>Ambos: precisam de conexão à rede</a:t>
             </a:r>
-            <a:endParaRPr lang="en-US" sz="1600" dirty="0"/>
+            <a:endParaRPr lang="en-US" sz="1700" dirty="0"/>
+          </a:p>
+        </p:txBody>
+      </p:sp>
+      <p:sp>
+        <p:nvSpPr>
+          <p:cNvPr id="25" name="Slide Number Placeholder 0"/>
+          <p:cNvSpPr>
+            <a:spLocks noGrp="1"/>
+          </p:cNvSpPr>
+          <p:nvPr>
+            <p:ph type="sldNum" sz="quarter" idx="4294967295"/>
+          </p:nvPr>
+        </p:nvSpPr>
+        <p:spPr>
+          <a:xfrm>
+            <a:off x="11292840" y="6556248"/>
+            <a:ext cx="548640" cy="256032"/>
+          </a:xfrm>
+          <a:prstGeom prst="rect">
+            <a:avLst/>
+          </a:prstGeom>
+          <a:extLst>
+            <a:ext uri="{C572A759-6A51-4108-AA02-DFA0A04FC94B}">
+              <ma14:wrappingTextBoxFlag xmlns:ma14="http://schemas.microsoft.com/office/mac/drawingml/2011/main" val="0"/>
+            </a:ext>
+          </a:extLst>
+        </p:spPr>
+        <p:txBody>
+          <a:bodyPr/>
+          <a:lstStyle>
+            <a:lvl1pPr>
+              <a:defRPr sz="900">
+                <a:solidFill>
+                  <a:srgbClr val="1B3A6B"/>
+                </a:solidFill>
+                <a:latin typeface="Arial"/>
+                <a:ea typeface="Arial"/>
+                <a:cs typeface="Arial"/>
+              </a:defRPr>
+            </a:lvl1pPr>
+          </a:lstStyle>
+          <a:p>
+            <a:pPr algn="r"/>
+            <a:fld id="{F7021451-1387-4CA6-816F-3879F97B5CBC}" type="slidenum">
+              <a:rPr b="1" lang="en-US"/>
+              <a:t>12</a:t>
+            </a:fld>
+            <a:endParaRPr lang="en-US"/>
           </a:p>
         </p:txBody>
       </p:sp>
@@ -7232,7 +7472,7 @@
         </p:blipFill>
         <p:spPr>
           <a:xfrm>
-            <a:off x="411480" y="6547104"/>
+            <a:off x="548640" y="6547104"/>
             <a:ext cx="274320" cy="274320"/>
           </a:xfrm>
           <a:prstGeom prst="rect">
@@ -7248,7 +7488,7 @@
         </p:nvSpPr>
         <p:spPr>
           <a:xfrm>
-            <a:off x="749808" y="6528816"/>
+            <a:off x="886968" y="6528816"/>
             <a:ext cx="6400800" cy="310896"/>
           </a:xfrm>
           <a:prstGeom prst="rect">
@@ -7288,7 +7528,7 @@
         <p:spPr>
           <a:xfrm>
             <a:off x="7132320" y="6528816"/>
-            <a:ext cx="4663440" cy="310896"/>
+            <a:ext cx="4023360" cy="310896"/>
           </a:xfrm>
           <a:prstGeom prst="rect">
             <a:avLst/>
@@ -7326,7 +7566,7 @@
         </p:nvSpPr>
         <p:spPr>
           <a:xfrm>
-            <a:off x="411480" y="384048"/>
+            <a:off x="548640" y="384048"/>
             <a:ext cx="82296" cy="658368"/>
           </a:xfrm>
           <a:prstGeom prst="rect">
@@ -7346,7 +7586,7 @@
         </p:nvSpPr>
         <p:spPr>
           <a:xfrm>
-            <a:off x="640080" y="292608"/>
+            <a:off x="777240" y="292608"/>
             <a:ext cx="10972800" cy="274320"/>
           </a:xfrm>
           <a:prstGeom prst="rect">
@@ -7385,8 +7625,8 @@
         </p:nvSpPr>
         <p:spPr>
           <a:xfrm>
-            <a:off x="640080" y="530352"/>
-            <a:ext cx="11155680" cy="566928"/>
+            <a:off x="777240" y="530352"/>
+            <a:ext cx="10881360" cy="566928"/>
           </a:xfrm>
           <a:prstGeom prst="rect">
             <a:avLst/>
@@ -7426,8 +7666,8 @@
         </p:nvSpPr>
         <p:spPr>
           <a:xfrm>
-            <a:off x="411480" y="1325880"/>
-            <a:ext cx="5577840" cy="2331720"/>
+            <a:off x="548640" y="1325880"/>
+            <a:ext cx="5431536" cy="2331720"/>
           </a:xfrm>
           <a:prstGeom prst="roundRect">
             <a:avLst>
@@ -7460,7 +7700,7 @@
         </p:nvSpPr>
         <p:spPr>
           <a:xfrm>
-            <a:off x="594360" y="1508760"/>
+            <a:off x="731520" y="1508760"/>
             <a:ext cx="457200" cy="457200"/>
           </a:xfrm>
           <a:prstGeom prst="ellipse">
@@ -7480,7 +7720,7 @@
         </p:nvSpPr>
         <p:spPr>
           <a:xfrm>
-            <a:off x="594360" y="1508760"/>
+            <a:off x="731520" y="1508760"/>
             <a:ext cx="457200" cy="457200"/>
           </a:xfrm>
           <a:prstGeom prst="rect">
@@ -7519,8 +7759,8 @@
         </p:nvSpPr>
         <p:spPr>
           <a:xfrm>
-            <a:off x="1188720" y="1435608"/>
-            <a:ext cx="4663440" cy="2112264"/>
+            <a:off x="1325880" y="1435608"/>
+            <a:ext cx="4517136" cy="2112264"/>
           </a:xfrm>
           <a:prstGeom prst="rect">
             <a:avLst/>
@@ -7560,8 +7800,8 @@
         </p:nvSpPr>
         <p:spPr>
           <a:xfrm>
-            <a:off x="6217920" y="1325880"/>
-            <a:ext cx="5577840" cy="2331720"/>
+            <a:off x="6208776" y="1325880"/>
+            <a:ext cx="5431536" cy="2331720"/>
           </a:xfrm>
           <a:prstGeom prst="roundRect">
             <a:avLst>
@@ -7594,7 +7834,7 @@
         </p:nvSpPr>
         <p:spPr>
           <a:xfrm>
-            <a:off x="6400800" y="1508760"/>
+            <a:off x="6391656" y="1508760"/>
             <a:ext cx="457200" cy="457200"/>
           </a:xfrm>
           <a:prstGeom prst="ellipse">
@@ -7614,7 +7854,7 @@
         </p:nvSpPr>
         <p:spPr>
           <a:xfrm>
-            <a:off x="6400800" y="1508760"/>
+            <a:off x="6391656" y="1508760"/>
             <a:ext cx="457200" cy="457200"/>
           </a:xfrm>
           <a:prstGeom prst="rect">
@@ -7653,8 +7893,8 @@
         </p:nvSpPr>
         <p:spPr>
           <a:xfrm>
-            <a:off x="6995160" y="1435608"/>
-            <a:ext cx="4663440" cy="2112264"/>
+            <a:off x="6986016" y="1435608"/>
+            <a:ext cx="4517136" cy="2112264"/>
           </a:xfrm>
           <a:prstGeom prst="rect">
             <a:avLst/>
@@ -7694,8 +7934,8 @@
         </p:nvSpPr>
         <p:spPr>
           <a:xfrm>
-            <a:off x="411480" y="3886200"/>
-            <a:ext cx="5577840" cy="2331720"/>
+            <a:off x="548640" y="3886200"/>
+            <a:ext cx="5431536" cy="2331720"/>
           </a:xfrm>
           <a:prstGeom prst="roundRect">
             <a:avLst>
@@ -7728,7 +7968,7 @@
         </p:nvSpPr>
         <p:spPr>
           <a:xfrm>
-            <a:off x="594360" y="4069080"/>
+            <a:off x="731520" y="4069080"/>
             <a:ext cx="457200" cy="457200"/>
           </a:xfrm>
           <a:prstGeom prst="ellipse">
@@ -7748,7 +7988,7 @@
         </p:nvSpPr>
         <p:spPr>
           <a:xfrm>
-            <a:off x="594360" y="4069080"/>
+            <a:off x="731520" y="4069080"/>
             <a:ext cx="457200" cy="457200"/>
           </a:xfrm>
           <a:prstGeom prst="rect">
@@ -7787,8 +8027,8 @@
         </p:nvSpPr>
         <p:spPr>
           <a:xfrm>
-            <a:off x="1188720" y="3995928"/>
-            <a:ext cx="4663440" cy="2112264"/>
+            <a:off x="1325880" y="3995928"/>
+            <a:ext cx="4517136" cy="2112264"/>
           </a:xfrm>
           <a:prstGeom prst="rect">
             <a:avLst/>
@@ -7828,8 +8068,8 @@
         </p:nvSpPr>
         <p:spPr>
           <a:xfrm>
-            <a:off x="6217920" y="3886200"/>
-            <a:ext cx="5577840" cy="2331720"/>
+            <a:off x="6208776" y="3886200"/>
+            <a:ext cx="5431536" cy="2331720"/>
           </a:xfrm>
           <a:prstGeom prst="roundRect">
             <a:avLst>
@@ -7862,7 +8102,7 @@
         </p:nvSpPr>
         <p:spPr>
           <a:xfrm>
-            <a:off x="6400800" y="4069080"/>
+            <a:off x="6391656" y="4069080"/>
             <a:ext cx="457200" cy="457200"/>
           </a:xfrm>
           <a:prstGeom prst="ellipse">
@@ -7882,7 +8122,7 @@
         </p:nvSpPr>
         <p:spPr>
           <a:xfrm>
-            <a:off x="6400800" y="4069080"/>
+            <a:off x="6391656" y="4069080"/>
             <a:ext cx="457200" cy="457200"/>
           </a:xfrm>
           <a:prstGeom prst="rect">
@@ -7921,8 +8161,8 @@
         </p:nvSpPr>
         <p:spPr>
           <a:xfrm>
-            <a:off x="6995160" y="3995928"/>
-            <a:ext cx="4663440" cy="2112264"/>
+            <a:off x="6986016" y="3995928"/>
+            <a:ext cx="4517136" cy="2112264"/>
           </a:xfrm>
           <a:prstGeom prst="rect">
             <a:avLst/>
@@ -7951,6 +8191,54 @@
               <a:t>Precisa estar na área da distribuidora dos clientes</a:t>
             </a:r>
             <a:endParaRPr lang="en-US" sz="1800" dirty="0"/>
+          </a:p>
+        </p:txBody>
+      </p:sp>
+      <p:sp>
+        <p:nvSpPr>
+          <p:cNvPr id="25" name="Slide Number Placeholder 0"/>
+          <p:cNvSpPr>
+            <a:spLocks noGrp="1"/>
+          </p:cNvSpPr>
+          <p:nvPr>
+            <p:ph type="sldNum" sz="quarter" idx="4294967295"/>
+          </p:nvPr>
+        </p:nvSpPr>
+        <p:spPr>
+          <a:xfrm>
+            <a:off x="11292840" y="6556248"/>
+            <a:ext cx="548640" cy="256032"/>
+          </a:xfrm>
+          <a:prstGeom prst="rect">
+            <a:avLst/>
+          </a:prstGeom>
+          <a:extLst>
+            <a:ext uri="{C572A759-6A51-4108-AA02-DFA0A04FC94B}">
+              <ma14:wrappingTextBoxFlag xmlns:ma14="http://schemas.microsoft.com/office/mac/drawingml/2011/main" val="0"/>
+            </a:ext>
+          </a:extLst>
+        </p:spPr>
+        <p:txBody>
+          <a:bodyPr/>
+          <a:lstStyle>
+            <a:lvl1pPr>
+              <a:defRPr sz="900">
+                <a:solidFill>
+                  <a:srgbClr val="1B3A6B"/>
+                </a:solidFill>
+                <a:latin typeface="Arial"/>
+                <a:ea typeface="Arial"/>
+                <a:cs typeface="Arial"/>
+              </a:defRPr>
+            </a:lvl1pPr>
+          </a:lstStyle>
+          <a:p>
+            <a:pPr algn="r"/>
+            <a:fld id="{F7021451-1387-4CA6-816F-3879F97B5CBC}" type="slidenum">
+              <a:rPr b="1" lang="en-US"/>
+              <a:t>13</a:t>
+            </a:fld>
+            <a:endParaRPr lang="en-US"/>
           </a:p>
         </p:txBody>
       </p:sp>
@@ -8014,6 +8302,45 @@
         </p:nvSpPr>
         <p:spPr>
           <a:xfrm>
+            <a:off x="457200" y="548640"/>
+            <a:ext cx="3474720" cy="1737360"/>
+          </a:xfrm>
+          <a:prstGeom prst="rect">
+            <a:avLst/>
+          </a:prstGeom>
+          <a:noFill/>
+          <a:ln/>
+        </p:spPr>
+        <p:txBody>
+          <a:bodyPr wrap="square" rtlCol="0" anchor="ctr"/>
+          <a:lstStyle/>
+          <a:p>
+            <a:pPr indent="0" marL="0">
+              <a:buNone/>
+            </a:pPr>
+            <a:r>
+              <a:rPr lang="en-US" sz="11000" b="1" dirty="0">
+                <a:solidFill>
+                  <a:srgbClr val="11396F"/>
+                </a:solidFill>
+                <a:latin typeface="Arial" pitchFamily="34" charset="0"/>
+                <a:ea typeface="Arial" pitchFamily="34" charset="-122"/>
+                <a:cs typeface="Arial" pitchFamily="34" charset="-120"/>
+              </a:rPr>
+              <a:t>03</a:t>
+            </a:r>
+            <a:endParaRPr lang="en-US" sz="11000" dirty="0"/>
+          </a:p>
+        </p:txBody>
+      </p:sp>
+      <p:sp>
+        <p:nvSpPr>
+          <p:cNvPr id="4" name="Text 2"/>
+          <p:cNvSpPr/>
+          <p:nvPr/>
+        </p:nvSpPr>
+        <p:spPr>
+          <a:xfrm>
             <a:off x="548640" y="2194560"/>
             <a:ext cx="3291840" cy="548640"/>
           </a:xfrm>
@@ -8047,7 +8374,46 @@
       </p:sp>
       <p:sp>
         <p:nvSpPr>
-          <p:cNvPr id="4" name="Text 2"/>
+          <p:cNvPr id="5" name="Text 3"/>
+          <p:cNvSpPr/>
+          <p:nvPr/>
+        </p:nvSpPr>
+        <p:spPr>
+          <a:xfrm>
+            <a:off x="548640" y="3200400"/>
+            <a:ext cx="3383280" cy="457200"/>
+          </a:xfrm>
+          <a:prstGeom prst="rect">
+            <a:avLst/>
+          </a:prstGeom>
+          <a:noFill/>
+          <a:ln/>
+        </p:spPr>
+        <p:txBody>
+          <a:bodyPr wrap="square" rtlCol="0" anchor="ctr"/>
+          <a:lstStyle/>
+          <a:p>
+            <a:pPr indent="0" marL="0">
+              <a:buNone/>
+            </a:pPr>
+            <a:r>
+              <a:rPr lang="en-US" sz="1100" dirty="0">
+                <a:solidFill>
+                  <a:srgbClr val="C7D2E3"/>
+                </a:solidFill>
+                <a:latin typeface="Arial" pitchFamily="34" charset="0"/>
+                <a:ea typeface="Arial" pitchFamily="34" charset="-122"/>
+                <a:cs typeface="Arial" pitchFamily="34" charset="-120"/>
+              </a:rPr>
+              <a:t>M1 · Etapa 1 · Fundamentos</a:t>
+            </a:r>
+            <a:endParaRPr lang="en-US" sz="1100" dirty="0"/>
+          </a:p>
+        </p:txBody>
+      </p:sp>
+      <p:sp>
+        <p:nvSpPr>
+          <p:cNvPr id="6" name="Text 4"/>
           <p:cNvSpPr/>
           <p:nvPr/>
         </p:nvSpPr>
@@ -8086,7 +8452,7 @@
       </p:sp>
       <p:pic>
         <p:nvPicPr>
-          <p:cNvPr id="5" name="Image 0" descr="/www/wwwroot/rexar/gdsolar/docs/curso/slides/assets/logo-gdsolar.png">    </p:cNvPr>
+          <p:cNvPr id="7" name="Image 0" descr="/www/wwwroot/rexar/gdsolar/docs/curso/slides/assets/logo-gdsolar.png">    </p:cNvPr>
           <p:cNvPicPr>
             <a:picLocks noChangeAspect="1"/>
           </p:cNvPicPr>
@@ -8110,7 +8476,7 @@
       </p:pic>
       <p:sp>
         <p:nvSpPr>
-          <p:cNvPr id="6" name="Text 3"/>
+          <p:cNvPr id="8" name="Text 5"/>
           <p:cNvSpPr/>
           <p:nvPr/>
         </p:nvSpPr>
@@ -8151,7 +8517,7 @@
       </p:sp>
       <p:sp>
         <p:nvSpPr>
-          <p:cNvPr id="7" name="Text 4"/>
+          <p:cNvPr id="9" name="Text 6"/>
           <p:cNvSpPr/>
           <p:nvPr/>
         </p:nvSpPr>
@@ -8192,7 +8558,7 @@
       </p:sp>
       <p:sp>
         <p:nvSpPr>
-          <p:cNvPr id="8" name="Text 5"/>
+          <p:cNvPr id="10" name="Text 7"/>
           <p:cNvSpPr/>
           <p:nvPr/>
         </p:nvSpPr>
@@ -8371,7 +8737,7 @@
         </p:blipFill>
         <p:spPr>
           <a:xfrm>
-            <a:off x="411480" y="6547104"/>
+            <a:off x="548640" y="6547104"/>
             <a:ext cx="274320" cy="274320"/>
           </a:xfrm>
           <a:prstGeom prst="rect">
@@ -8387,7 +8753,7 @@
         </p:nvSpPr>
         <p:spPr>
           <a:xfrm>
-            <a:off x="749808" y="6528816"/>
+            <a:off x="886968" y="6528816"/>
             <a:ext cx="6400800" cy="310896"/>
           </a:xfrm>
           <a:prstGeom prst="rect">
@@ -8427,7 +8793,7 @@
         <p:spPr>
           <a:xfrm>
             <a:off x="7132320" y="6528816"/>
-            <a:ext cx="4663440" cy="310896"/>
+            <a:ext cx="4023360" cy="310896"/>
           </a:xfrm>
           <a:prstGeom prst="rect">
             <a:avLst/>
@@ -8465,7 +8831,7 @@
         </p:nvSpPr>
         <p:spPr>
           <a:xfrm>
-            <a:off x="411480" y="384048"/>
+            <a:off x="548640" y="384048"/>
             <a:ext cx="82296" cy="658368"/>
           </a:xfrm>
           <a:prstGeom prst="rect">
@@ -8485,7 +8851,7 @@
         </p:nvSpPr>
         <p:spPr>
           <a:xfrm>
-            <a:off x="640080" y="292608"/>
+            <a:off x="777240" y="292608"/>
             <a:ext cx="10972800" cy="274320"/>
           </a:xfrm>
           <a:prstGeom prst="rect">
@@ -8524,8 +8890,8 @@
         </p:nvSpPr>
         <p:spPr>
           <a:xfrm>
-            <a:off x="640080" y="530352"/>
-            <a:ext cx="11155680" cy="566928"/>
+            <a:off x="777240" y="530352"/>
+            <a:ext cx="10881360" cy="566928"/>
           </a:xfrm>
           <a:prstGeom prst="rect">
             <a:avLst/>
@@ -8565,8 +8931,8 @@
         </p:nvSpPr>
         <p:spPr>
           <a:xfrm>
-            <a:off x="411480" y="1325880"/>
-            <a:ext cx="5554980" cy="4937760"/>
+            <a:off x="548640" y="1325880"/>
+            <a:ext cx="5408676" cy="4937760"/>
           </a:xfrm>
           <a:prstGeom prst="roundRect">
             <a:avLst>
@@ -8599,8 +8965,8 @@
         </p:nvSpPr>
         <p:spPr>
           <a:xfrm>
-            <a:off x="411480" y="1325880"/>
-            <a:ext cx="5554980" cy="109728"/>
+            <a:off x="548640" y="1325880"/>
+            <a:ext cx="5408676" cy="109728"/>
           </a:xfrm>
           <a:prstGeom prst="rect">
             <a:avLst/>
@@ -8619,8 +8985,8 @@
         </p:nvSpPr>
         <p:spPr>
           <a:xfrm>
-            <a:off x="685800" y="1554480"/>
-            <a:ext cx="5006340" cy="685800"/>
+            <a:off x="822960" y="1554480"/>
+            <a:ext cx="4860036" cy="685800"/>
           </a:xfrm>
           <a:prstGeom prst="rect">
             <a:avLst/>
@@ -8660,8 +9026,8 @@
         </p:nvSpPr>
         <p:spPr>
           <a:xfrm>
-            <a:off x="685800" y="2286000"/>
-            <a:ext cx="5006340" cy="3749040"/>
+            <a:off x="822960" y="2286000"/>
+            <a:ext cx="4860036" cy="3749040"/>
           </a:xfrm>
           <a:prstGeom prst="rect">
             <a:avLst/>
@@ -8679,7 +9045,7 @@
               <a:buNone/>
             </a:pPr>
             <a:r>
-              <a:rPr lang="en-US" sz="2000" dirty="0">
+              <a:rPr lang="en-US" sz="2200" dirty="0">
                 <a:solidFill>
                   <a:srgbClr val="1F2937"/>
                 </a:solidFill>
@@ -8689,7 +9055,7 @@
               </a:rPr>
               <a:t>Geração centralizada: grandes usinas, longe do consumo</a:t>
             </a:r>
-            <a:endParaRPr lang="en-US" sz="2000" dirty="0"/>
+            <a:endParaRPr lang="en-US" sz="2200" dirty="0"/>
           </a:p>
         </p:txBody>
       </p:sp>
@@ -8701,8 +9067,8 @@
         </p:nvSpPr>
         <p:spPr>
           <a:xfrm>
-            <a:off x="6240780" y="1325880"/>
-            <a:ext cx="5554980" cy="4937760"/>
+            <a:off x="6231636" y="1325880"/>
+            <a:ext cx="5408676" cy="4937760"/>
           </a:xfrm>
           <a:prstGeom prst="roundRect">
             <a:avLst>
@@ -8735,8 +9101,8 @@
         </p:nvSpPr>
         <p:spPr>
           <a:xfrm>
-            <a:off x="6240780" y="1325880"/>
-            <a:ext cx="5554980" cy="109728"/>
+            <a:off x="6231636" y="1325880"/>
+            <a:ext cx="5408676" cy="109728"/>
           </a:xfrm>
           <a:prstGeom prst="rect">
             <a:avLst/>
@@ -8755,8 +9121,8 @@
         </p:nvSpPr>
         <p:spPr>
           <a:xfrm>
-            <a:off x="6515100" y="1554480"/>
-            <a:ext cx="5006340" cy="685800"/>
+            <a:off x="6505956" y="1554480"/>
+            <a:ext cx="4860036" cy="685800"/>
           </a:xfrm>
           <a:prstGeom prst="rect">
             <a:avLst/>
@@ -8796,8 +9162,8 @@
         </p:nvSpPr>
         <p:spPr>
           <a:xfrm>
-            <a:off x="6515100" y="2286000"/>
-            <a:ext cx="5006340" cy="3749040"/>
+            <a:off x="6505956" y="2286000"/>
+            <a:ext cx="4860036" cy="3749040"/>
           </a:xfrm>
           <a:prstGeom prst="rect">
             <a:avLst/>
@@ -8851,6 +9217,54 @@
               <a:t>SIN = Sistema Interligado Nacional</a:t>
             </a:r>
             <a:endParaRPr lang="en-US" sz="1700" dirty="0"/>
+          </a:p>
+        </p:txBody>
+      </p:sp>
+      <p:sp>
+        <p:nvSpPr>
+          <p:cNvPr id="25" name="Slide Number Placeholder 0"/>
+          <p:cNvSpPr>
+            <a:spLocks noGrp="1"/>
+          </p:cNvSpPr>
+          <p:nvPr>
+            <p:ph type="sldNum" sz="quarter" idx="4294967295"/>
+          </p:nvPr>
+        </p:nvSpPr>
+        <p:spPr>
+          <a:xfrm>
+            <a:off x="11292840" y="6556248"/>
+            <a:ext cx="548640" cy="256032"/>
+          </a:xfrm>
+          <a:prstGeom prst="rect">
+            <a:avLst/>
+          </a:prstGeom>
+          <a:extLst>
+            <a:ext uri="{C572A759-6A51-4108-AA02-DFA0A04FC94B}">
+              <ma14:wrappingTextBoxFlag xmlns:ma14="http://schemas.microsoft.com/office/mac/drawingml/2011/main" val="0"/>
+            </a:ext>
+          </a:extLst>
+        </p:spPr>
+        <p:txBody>
+          <a:bodyPr/>
+          <a:lstStyle>
+            <a:lvl1pPr>
+              <a:defRPr sz="900">
+                <a:solidFill>
+                  <a:srgbClr val="1B3A6B"/>
+                </a:solidFill>
+                <a:latin typeface="Arial"/>
+                <a:ea typeface="Arial"/>
+                <a:cs typeface="Arial"/>
+              </a:defRPr>
+            </a:lvl1pPr>
+          </a:lstStyle>
+          <a:p>
+            <a:pPr algn="r"/>
+            <a:fld id="{F7021451-1387-4CA6-816F-3879F97B5CBC}" type="slidenum">
+              <a:rPr b="1" lang="en-US"/>
+              <a:t>15</a:t>
+            </a:fld>
+            <a:endParaRPr lang="en-US"/>
           </a:p>
         </p:txBody>
       </p:sp>
@@ -8927,7 +9341,7 @@
         </p:blipFill>
         <p:spPr>
           <a:xfrm>
-            <a:off x="411480" y="6547104"/>
+            <a:off x="548640" y="6547104"/>
             <a:ext cx="274320" cy="274320"/>
           </a:xfrm>
           <a:prstGeom prst="rect">
@@ -8943,7 +9357,7 @@
         </p:nvSpPr>
         <p:spPr>
           <a:xfrm>
-            <a:off x="749808" y="6528816"/>
+            <a:off x="886968" y="6528816"/>
             <a:ext cx="6400800" cy="310896"/>
           </a:xfrm>
           <a:prstGeom prst="rect">
@@ -8983,7 +9397,7 @@
         <p:spPr>
           <a:xfrm>
             <a:off x="7132320" y="6528816"/>
-            <a:ext cx="4663440" cy="310896"/>
+            <a:ext cx="4023360" cy="310896"/>
           </a:xfrm>
           <a:prstGeom prst="rect">
             <a:avLst/>
@@ -9021,7 +9435,7 @@
         </p:nvSpPr>
         <p:spPr>
           <a:xfrm>
-            <a:off x="411480" y="384048"/>
+            <a:off x="548640" y="384048"/>
             <a:ext cx="82296" cy="658368"/>
           </a:xfrm>
           <a:prstGeom prst="rect">
@@ -9041,7 +9455,7 @@
         </p:nvSpPr>
         <p:spPr>
           <a:xfrm>
-            <a:off x="640080" y="292608"/>
+            <a:off x="777240" y="292608"/>
             <a:ext cx="10972800" cy="274320"/>
           </a:xfrm>
           <a:prstGeom prst="rect">
@@ -9080,8 +9494,8 @@
         </p:nvSpPr>
         <p:spPr>
           <a:xfrm>
-            <a:off x="640080" y="530352"/>
-            <a:ext cx="11155680" cy="566928"/>
+            <a:off x="777240" y="530352"/>
+            <a:ext cx="10881360" cy="566928"/>
           </a:xfrm>
           <a:prstGeom prst="rect">
             <a:avLst/>
@@ -9121,8 +9535,8 @@
         </p:nvSpPr>
         <p:spPr>
           <a:xfrm>
-            <a:off x="411480" y="2651760"/>
-            <a:ext cx="2944368" cy="1463040"/>
+            <a:off x="548640" y="2651760"/>
+            <a:ext cx="2852928" cy="1463040"/>
           </a:xfrm>
           <a:prstGeom prst="chevron">
             <a:avLst/>
@@ -9146,8 +9560,8 @@
         </p:nvSpPr>
         <p:spPr>
           <a:xfrm>
-            <a:off x="731520" y="2651760"/>
-            <a:ext cx="2423160" cy="1463040"/>
+            <a:off x="868680" y="2651760"/>
+            <a:ext cx="2331720" cy="1463040"/>
           </a:xfrm>
           <a:prstGeom prst="rect">
             <a:avLst/>
@@ -9187,8 +9601,8 @@
         </p:nvSpPr>
         <p:spPr>
           <a:xfrm>
-            <a:off x="3246120" y="2651760"/>
-            <a:ext cx="2944368" cy="1463040"/>
+            <a:off x="3291840" y="2651760"/>
+            <a:ext cx="2852928" cy="1463040"/>
           </a:xfrm>
           <a:prstGeom prst="chevron">
             <a:avLst/>
@@ -9212,8 +9626,8 @@
         </p:nvSpPr>
         <p:spPr>
           <a:xfrm>
-            <a:off x="3566160" y="2651760"/>
-            <a:ext cx="2423160" cy="1463040"/>
+            <a:off x="3611880" y="2651760"/>
+            <a:ext cx="2331720" cy="1463040"/>
           </a:xfrm>
           <a:prstGeom prst="rect">
             <a:avLst/>
@@ -9253,8 +9667,8 @@
         </p:nvSpPr>
         <p:spPr>
           <a:xfrm>
-            <a:off x="6080760" y="2651760"/>
-            <a:ext cx="2944368" cy="1463040"/>
+            <a:off x="6035040" y="2651760"/>
+            <a:ext cx="2852928" cy="1463040"/>
           </a:xfrm>
           <a:prstGeom prst="chevron">
             <a:avLst/>
@@ -9278,8 +9692,8 @@
         </p:nvSpPr>
         <p:spPr>
           <a:xfrm>
-            <a:off x="6400800" y="2651760"/>
-            <a:ext cx="2423160" cy="1463040"/>
+            <a:off x="6355080" y="2651760"/>
+            <a:ext cx="2331720" cy="1463040"/>
           </a:xfrm>
           <a:prstGeom prst="rect">
             <a:avLst/>
@@ -9319,8 +9733,8 @@
         </p:nvSpPr>
         <p:spPr>
           <a:xfrm>
-            <a:off x="8915400" y="2651760"/>
-            <a:ext cx="2944368" cy="1463040"/>
+            <a:off x="8778240" y="2651760"/>
+            <a:ext cx="2852928" cy="1463040"/>
           </a:xfrm>
           <a:prstGeom prst="chevron">
             <a:avLst/>
@@ -9344,8 +9758,8 @@
         </p:nvSpPr>
         <p:spPr>
           <a:xfrm>
-            <a:off x="9235440" y="2651760"/>
-            <a:ext cx="2423160" cy="1463040"/>
+            <a:off x="9098280" y="2651760"/>
+            <a:ext cx="2331720" cy="1463040"/>
           </a:xfrm>
           <a:prstGeom prst="rect">
             <a:avLst/>
@@ -9374,6 +9788,54 @@
               <a:t>medidor do cliente</a:t>
             </a:r>
             <a:endParaRPr lang="en-US" sz="1500" dirty="0"/>
+          </a:p>
+        </p:txBody>
+      </p:sp>
+      <p:sp>
+        <p:nvSpPr>
+          <p:cNvPr id="25" name="Slide Number Placeholder 0"/>
+          <p:cNvSpPr>
+            <a:spLocks noGrp="1"/>
+          </p:cNvSpPr>
+          <p:nvPr>
+            <p:ph type="sldNum" sz="quarter" idx="4294967295"/>
+          </p:nvPr>
+        </p:nvSpPr>
+        <p:spPr>
+          <a:xfrm>
+            <a:off x="11292840" y="6556248"/>
+            <a:ext cx="548640" cy="256032"/>
+          </a:xfrm>
+          <a:prstGeom prst="rect">
+            <a:avLst/>
+          </a:prstGeom>
+          <a:extLst>
+            <a:ext uri="{C572A759-6A51-4108-AA02-DFA0A04FC94B}">
+              <ma14:wrappingTextBoxFlag xmlns:ma14="http://schemas.microsoft.com/office/mac/drawingml/2011/main" val="0"/>
+            </a:ext>
+          </a:extLst>
+        </p:spPr>
+        <p:txBody>
+          <a:bodyPr/>
+          <a:lstStyle>
+            <a:lvl1pPr>
+              <a:defRPr sz="900">
+                <a:solidFill>
+                  <a:srgbClr val="1B3A6B"/>
+                </a:solidFill>
+                <a:latin typeface="Arial"/>
+                <a:ea typeface="Arial"/>
+                <a:cs typeface="Arial"/>
+              </a:defRPr>
+            </a:lvl1pPr>
+          </a:lstStyle>
+          <a:p>
+            <a:pPr algn="r"/>
+            <a:fld id="{F7021451-1387-4CA6-816F-3879F97B5CBC}" type="slidenum">
+              <a:rPr b="1" lang="en-US"/>
+              <a:t>16</a:t>
+            </a:fld>
+            <a:endParaRPr lang="en-US"/>
           </a:p>
         </p:txBody>
       </p:sp>
@@ -9450,7 +9912,7 @@
         </p:blipFill>
         <p:spPr>
           <a:xfrm>
-            <a:off x="411480" y="6547104"/>
+            <a:off x="548640" y="6547104"/>
             <a:ext cx="274320" cy="274320"/>
           </a:xfrm>
           <a:prstGeom prst="rect">
@@ -9466,7 +9928,7 @@
         </p:nvSpPr>
         <p:spPr>
           <a:xfrm>
-            <a:off x="749808" y="6528816"/>
+            <a:off x="886968" y="6528816"/>
             <a:ext cx="6400800" cy="310896"/>
           </a:xfrm>
           <a:prstGeom prst="rect">
@@ -9506,7 +9968,7 @@
         <p:spPr>
           <a:xfrm>
             <a:off x="7132320" y="6528816"/>
-            <a:ext cx="4663440" cy="310896"/>
+            <a:ext cx="4023360" cy="310896"/>
           </a:xfrm>
           <a:prstGeom prst="rect">
             <a:avLst/>
@@ -9544,7 +10006,7 @@
         </p:nvSpPr>
         <p:spPr>
           <a:xfrm>
-            <a:off x="411480" y="384048"/>
+            <a:off x="548640" y="384048"/>
             <a:ext cx="82296" cy="658368"/>
           </a:xfrm>
           <a:prstGeom prst="rect">
@@ -9564,7 +10026,7 @@
         </p:nvSpPr>
         <p:spPr>
           <a:xfrm>
-            <a:off x="640080" y="292608"/>
+            <a:off x="777240" y="292608"/>
             <a:ext cx="10972800" cy="274320"/>
           </a:xfrm>
           <a:prstGeom prst="rect">
@@ -9603,8 +10065,8 @@
         </p:nvSpPr>
         <p:spPr>
           <a:xfrm>
-            <a:off x="640080" y="530352"/>
-            <a:ext cx="11155680" cy="566928"/>
+            <a:off x="777240" y="530352"/>
+            <a:ext cx="10881360" cy="566928"/>
           </a:xfrm>
           <a:prstGeom prst="rect">
             <a:avLst/>
@@ -9644,8 +10106,8 @@
         </p:nvSpPr>
         <p:spPr>
           <a:xfrm>
-            <a:off x="411480" y="1325880"/>
-            <a:ext cx="11384280" cy="4892040"/>
+            <a:off x="548640" y="1325880"/>
+            <a:ext cx="11091672" cy="4892040"/>
           </a:xfrm>
           <a:prstGeom prst="roundRect">
             <a:avLst>
@@ -9678,7 +10140,7 @@
         </p:nvSpPr>
         <p:spPr>
           <a:xfrm>
-            <a:off x="594360" y="1508760"/>
+            <a:off x="731520" y="1508760"/>
             <a:ext cx="457200" cy="457200"/>
           </a:xfrm>
           <a:prstGeom prst="ellipse">
@@ -9698,7 +10160,7 @@
         </p:nvSpPr>
         <p:spPr>
           <a:xfrm>
-            <a:off x="594360" y="1508760"/>
+            <a:off x="731520" y="1508760"/>
             <a:ext cx="457200" cy="457200"/>
           </a:xfrm>
           <a:prstGeom prst="rect">
@@ -9737,8 +10199,8 @@
         </p:nvSpPr>
         <p:spPr>
           <a:xfrm>
-            <a:off x="1188720" y="1435608"/>
-            <a:ext cx="10469880" cy="4672584"/>
+            <a:off x="1325880" y="1435608"/>
+            <a:ext cx="10177272" cy="4672584"/>
           </a:xfrm>
           <a:prstGeom prst="rect">
             <a:avLst/>
@@ -9767,6 +10229,54 @@
               <a:t>Geração distribuída: gerar perto de quem consome, ligado à rede de distribuição</a:t>
             </a:r>
             <a:endParaRPr lang="en-US" sz="1800" dirty="0"/>
+          </a:p>
+        </p:txBody>
+      </p:sp>
+      <p:sp>
+        <p:nvSpPr>
+          <p:cNvPr id="25" name="Slide Number Placeholder 0"/>
+          <p:cNvSpPr>
+            <a:spLocks noGrp="1"/>
+          </p:cNvSpPr>
+          <p:nvPr>
+            <p:ph type="sldNum" sz="quarter" idx="4294967295"/>
+          </p:nvPr>
+        </p:nvSpPr>
+        <p:spPr>
+          <a:xfrm>
+            <a:off x="11292840" y="6556248"/>
+            <a:ext cx="548640" cy="256032"/>
+          </a:xfrm>
+          <a:prstGeom prst="rect">
+            <a:avLst/>
+          </a:prstGeom>
+          <a:extLst>
+            <a:ext uri="{C572A759-6A51-4108-AA02-DFA0A04FC94B}">
+              <ma14:wrappingTextBoxFlag xmlns:ma14="http://schemas.microsoft.com/office/mac/drawingml/2011/main" val="0"/>
+            </a:ext>
+          </a:extLst>
+        </p:spPr>
+        <p:txBody>
+          <a:bodyPr/>
+          <a:lstStyle>
+            <a:lvl1pPr>
+              <a:defRPr sz="900">
+                <a:solidFill>
+                  <a:srgbClr val="1B3A6B"/>
+                </a:solidFill>
+                <a:latin typeface="Arial"/>
+                <a:ea typeface="Arial"/>
+                <a:cs typeface="Arial"/>
+              </a:defRPr>
+            </a:lvl1pPr>
+          </a:lstStyle>
+          <a:p>
+            <a:pPr algn="r"/>
+            <a:fld id="{F7021451-1387-4CA6-816F-3879F97B5CBC}" type="slidenum">
+              <a:rPr b="1" lang="en-US"/>
+              <a:t>17</a:t>
+            </a:fld>
+            <a:endParaRPr lang="en-US"/>
           </a:p>
         </p:txBody>
       </p:sp>
@@ -9843,7 +10353,7 @@
         </p:blipFill>
         <p:spPr>
           <a:xfrm>
-            <a:off x="411480" y="6547104"/>
+            <a:off x="548640" y="6547104"/>
             <a:ext cx="274320" cy="274320"/>
           </a:xfrm>
           <a:prstGeom prst="rect">
@@ -9859,7 +10369,7 @@
         </p:nvSpPr>
         <p:spPr>
           <a:xfrm>
-            <a:off x="749808" y="6528816"/>
+            <a:off x="886968" y="6528816"/>
             <a:ext cx="6400800" cy="310896"/>
           </a:xfrm>
           <a:prstGeom prst="rect">
@@ -9899,7 +10409,7 @@
         <p:spPr>
           <a:xfrm>
             <a:off x="7132320" y="6528816"/>
-            <a:ext cx="4663440" cy="310896"/>
+            <a:ext cx="4023360" cy="310896"/>
           </a:xfrm>
           <a:prstGeom prst="rect">
             <a:avLst/>
@@ -9937,7 +10447,7 @@
         </p:nvSpPr>
         <p:spPr>
           <a:xfrm>
-            <a:off x="411480" y="384048"/>
+            <a:off x="548640" y="384048"/>
             <a:ext cx="82296" cy="658368"/>
           </a:xfrm>
           <a:prstGeom prst="rect">
@@ -9957,7 +10467,7 @@
         </p:nvSpPr>
         <p:spPr>
           <a:xfrm>
-            <a:off x="640080" y="292608"/>
+            <a:off x="777240" y="292608"/>
             <a:ext cx="10972800" cy="274320"/>
           </a:xfrm>
           <a:prstGeom prst="rect">
@@ -9996,8 +10506,8 @@
         </p:nvSpPr>
         <p:spPr>
           <a:xfrm>
-            <a:off x="640080" y="530352"/>
-            <a:ext cx="11155680" cy="566928"/>
+            <a:off x="777240" y="530352"/>
+            <a:ext cx="10881360" cy="566928"/>
           </a:xfrm>
           <a:prstGeom prst="rect">
             <a:avLst/>
@@ -10037,8 +10547,8 @@
         </p:nvSpPr>
         <p:spPr>
           <a:xfrm>
-            <a:off x="411480" y="1325880"/>
-            <a:ext cx="5577840" cy="4892040"/>
+            <a:off x="548640" y="1325880"/>
+            <a:ext cx="5431536" cy="4892040"/>
           </a:xfrm>
           <a:prstGeom prst="roundRect">
             <a:avLst>
@@ -10071,7 +10581,7 @@
         </p:nvSpPr>
         <p:spPr>
           <a:xfrm>
-            <a:off x="594360" y="1508760"/>
+            <a:off x="731520" y="1508760"/>
             <a:ext cx="457200" cy="457200"/>
           </a:xfrm>
           <a:prstGeom prst="ellipse">
@@ -10091,7 +10601,7 @@
         </p:nvSpPr>
         <p:spPr>
           <a:xfrm>
-            <a:off x="594360" y="1508760"/>
+            <a:off x="731520" y="1508760"/>
             <a:ext cx="457200" cy="457200"/>
           </a:xfrm>
           <a:prstGeom prst="rect">
@@ -10130,8 +10640,8 @@
         </p:nvSpPr>
         <p:spPr>
           <a:xfrm>
-            <a:off x="1188720" y="1435608"/>
-            <a:ext cx="4663440" cy="4672584"/>
+            <a:off x="1325880" y="1435608"/>
+            <a:ext cx="4517136" cy="4672584"/>
           </a:xfrm>
           <a:prstGeom prst="rect">
             <a:avLst/>
@@ -10171,8 +10681,8 @@
         </p:nvSpPr>
         <p:spPr>
           <a:xfrm>
-            <a:off x="6217920" y="1325880"/>
-            <a:ext cx="5577840" cy="4892040"/>
+            <a:off x="6208776" y="1325880"/>
+            <a:ext cx="5431536" cy="4892040"/>
           </a:xfrm>
           <a:prstGeom prst="roundRect">
             <a:avLst>
@@ -10205,7 +10715,7 @@
         </p:nvSpPr>
         <p:spPr>
           <a:xfrm>
-            <a:off x="6400800" y="1508760"/>
+            <a:off x="6391656" y="1508760"/>
             <a:ext cx="457200" cy="457200"/>
           </a:xfrm>
           <a:prstGeom prst="ellipse">
@@ -10225,7 +10735,7 @@
         </p:nvSpPr>
         <p:spPr>
           <a:xfrm>
-            <a:off x="6400800" y="1508760"/>
+            <a:off x="6391656" y="1508760"/>
             <a:ext cx="457200" cy="457200"/>
           </a:xfrm>
           <a:prstGeom prst="rect">
@@ -10264,8 +10774,8 @@
         </p:nvSpPr>
         <p:spPr>
           <a:xfrm>
-            <a:off x="6995160" y="1435608"/>
-            <a:ext cx="4663440" cy="4672584"/>
+            <a:off x="6986016" y="1435608"/>
+            <a:ext cx="4517136" cy="4672584"/>
           </a:xfrm>
           <a:prstGeom prst="rect">
             <a:avLst/>
@@ -10294,6 +10804,54 @@
               <a:t>GD: gera perto, entra na rede local, vira crédito</a:t>
             </a:r>
             <a:endParaRPr lang="en-US" sz="1800" dirty="0"/>
+          </a:p>
+        </p:txBody>
+      </p:sp>
+      <p:sp>
+        <p:nvSpPr>
+          <p:cNvPr id="25" name="Slide Number Placeholder 0"/>
+          <p:cNvSpPr>
+            <a:spLocks noGrp="1"/>
+          </p:cNvSpPr>
+          <p:nvPr>
+            <p:ph type="sldNum" sz="quarter" idx="4294967295"/>
+          </p:nvPr>
+        </p:nvSpPr>
+        <p:spPr>
+          <a:xfrm>
+            <a:off x="11292840" y="6556248"/>
+            <a:ext cx="548640" cy="256032"/>
+          </a:xfrm>
+          <a:prstGeom prst="rect">
+            <a:avLst/>
+          </a:prstGeom>
+          <a:extLst>
+            <a:ext uri="{C572A759-6A51-4108-AA02-DFA0A04FC94B}">
+              <ma14:wrappingTextBoxFlag xmlns:ma14="http://schemas.microsoft.com/office/mac/drawingml/2011/main" val="0"/>
+            </a:ext>
+          </a:extLst>
+        </p:spPr>
+        <p:txBody>
+          <a:bodyPr/>
+          <a:lstStyle>
+            <a:lvl1pPr>
+              <a:defRPr sz="900">
+                <a:solidFill>
+                  <a:srgbClr val="1B3A6B"/>
+                </a:solidFill>
+                <a:latin typeface="Arial"/>
+                <a:ea typeface="Arial"/>
+                <a:cs typeface="Arial"/>
+              </a:defRPr>
+            </a:lvl1pPr>
+          </a:lstStyle>
+          <a:p>
+            <a:pPr algn="r"/>
+            <a:fld id="{F7021451-1387-4CA6-816F-3879F97B5CBC}" type="slidenum">
+              <a:rPr b="1" lang="en-US"/>
+              <a:t>18</a:t>
+            </a:fld>
+            <a:endParaRPr lang="en-US"/>
           </a:p>
         </p:txBody>
       </p:sp>
@@ -10357,6 +10915,45 @@
         </p:nvSpPr>
         <p:spPr>
           <a:xfrm>
+            <a:off x="457200" y="548640"/>
+            <a:ext cx="3474720" cy="1737360"/>
+          </a:xfrm>
+          <a:prstGeom prst="rect">
+            <a:avLst/>
+          </a:prstGeom>
+          <a:noFill/>
+          <a:ln/>
+        </p:spPr>
+        <p:txBody>
+          <a:bodyPr wrap="square" rtlCol="0" anchor="ctr"/>
+          <a:lstStyle/>
+          <a:p>
+            <a:pPr indent="0" marL="0">
+              <a:buNone/>
+            </a:pPr>
+            <a:r>
+              <a:rPr lang="en-US" sz="11000" b="1" dirty="0">
+                <a:solidFill>
+                  <a:srgbClr val="11396F"/>
+                </a:solidFill>
+                <a:latin typeface="Arial" pitchFamily="34" charset="0"/>
+                <a:ea typeface="Arial" pitchFamily="34" charset="-122"/>
+                <a:cs typeface="Arial" pitchFamily="34" charset="-120"/>
+              </a:rPr>
+              <a:t>04</a:t>
+            </a:r>
+            <a:endParaRPr lang="en-US" sz="11000" dirty="0"/>
+          </a:p>
+        </p:txBody>
+      </p:sp>
+      <p:sp>
+        <p:nvSpPr>
+          <p:cNvPr id="4" name="Text 2"/>
+          <p:cNvSpPr/>
+          <p:nvPr/>
+        </p:nvSpPr>
+        <p:spPr>
+          <a:xfrm>
             <a:off x="548640" y="2194560"/>
             <a:ext cx="3291840" cy="548640"/>
           </a:xfrm>
@@ -10390,7 +10987,46 @@
       </p:sp>
       <p:sp>
         <p:nvSpPr>
-          <p:cNvPr id="4" name="Text 2"/>
+          <p:cNvPr id="5" name="Text 3"/>
+          <p:cNvSpPr/>
+          <p:nvPr/>
+        </p:nvSpPr>
+        <p:spPr>
+          <a:xfrm>
+            <a:off x="548640" y="3200400"/>
+            <a:ext cx="3383280" cy="457200"/>
+          </a:xfrm>
+          <a:prstGeom prst="rect">
+            <a:avLst/>
+          </a:prstGeom>
+          <a:noFill/>
+          <a:ln/>
+        </p:spPr>
+        <p:txBody>
+          <a:bodyPr wrap="square" rtlCol="0" anchor="ctr"/>
+          <a:lstStyle/>
+          <a:p>
+            <a:pPr indent="0" marL="0">
+              <a:buNone/>
+            </a:pPr>
+            <a:r>
+              <a:rPr lang="en-US" sz="1100" dirty="0">
+                <a:solidFill>
+                  <a:srgbClr val="C7D2E3"/>
+                </a:solidFill>
+                <a:latin typeface="Arial" pitchFamily="34" charset="0"/>
+                <a:ea typeface="Arial" pitchFamily="34" charset="-122"/>
+                <a:cs typeface="Arial" pitchFamily="34" charset="-120"/>
+              </a:rPr>
+              <a:t>M1 · Etapa 1 · Fundamentos</a:t>
+            </a:r>
+            <a:endParaRPr lang="en-US" sz="1100" dirty="0"/>
+          </a:p>
+        </p:txBody>
+      </p:sp>
+      <p:sp>
+        <p:nvSpPr>
+          <p:cNvPr id="6" name="Text 4"/>
           <p:cNvSpPr/>
           <p:nvPr/>
         </p:nvSpPr>
@@ -10429,7 +11065,7 @@
       </p:sp>
       <p:pic>
         <p:nvPicPr>
-          <p:cNvPr id="5" name="Image 0" descr="/www/wwwroot/rexar/gdsolar/docs/curso/slides/assets/logo-gdsolar.png">    </p:cNvPr>
+          <p:cNvPr id="7" name="Image 0" descr="/www/wwwroot/rexar/gdsolar/docs/curso/slides/assets/logo-gdsolar.png">    </p:cNvPr>
           <p:cNvPicPr>
             <a:picLocks noChangeAspect="1"/>
           </p:cNvPicPr>
@@ -10453,7 +11089,7 @@
       </p:pic>
       <p:sp>
         <p:nvSpPr>
-          <p:cNvPr id="6" name="Text 3"/>
+          <p:cNvPr id="8" name="Text 5"/>
           <p:cNvSpPr/>
           <p:nvPr/>
         </p:nvSpPr>
@@ -10494,7 +11130,7 @@
       </p:sp>
       <p:sp>
         <p:nvSpPr>
-          <p:cNvPr id="7" name="Text 4"/>
+          <p:cNvPr id="9" name="Text 6"/>
           <p:cNvSpPr/>
           <p:nvPr/>
         </p:nvSpPr>
@@ -10535,7 +11171,7 @@
       </p:sp>
       <p:sp>
         <p:nvSpPr>
-          <p:cNvPr id="8" name="Text 5"/>
+          <p:cNvPr id="10" name="Text 7"/>
           <p:cNvSpPr/>
           <p:nvPr/>
         </p:nvSpPr>
@@ -10701,6 +11337,45 @@
         </p:nvSpPr>
         <p:spPr>
           <a:xfrm>
+            <a:off x="457200" y="548640"/>
+            <a:ext cx="3474720" cy="1737360"/>
+          </a:xfrm>
+          <a:prstGeom prst="rect">
+            <a:avLst/>
+          </a:prstGeom>
+          <a:noFill/>
+          <a:ln/>
+        </p:spPr>
+        <p:txBody>
+          <a:bodyPr wrap="square" rtlCol="0" anchor="ctr"/>
+          <a:lstStyle/>
+          <a:p>
+            <a:pPr indent="0" marL="0">
+              <a:buNone/>
+            </a:pPr>
+            <a:r>
+              <a:rPr lang="en-US" sz="11000" b="1" dirty="0">
+                <a:solidFill>
+                  <a:srgbClr val="11396F"/>
+                </a:solidFill>
+                <a:latin typeface="Arial" pitchFamily="34" charset="0"/>
+                <a:ea typeface="Arial" pitchFamily="34" charset="-122"/>
+                <a:cs typeface="Arial" pitchFamily="34" charset="-120"/>
+              </a:rPr>
+              <a:t>01</a:t>
+            </a:r>
+            <a:endParaRPr lang="en-US" sz="11000" dirty="0"/>
+          </a:p>
+        </p:txBody>
+      </p:sp>
+      <p:sp>
+        <p:nvSpPr>
+          <p:cNvPr id="4" name="Text 2"/>
+          <p:cNvSpPr/>
+          <p:nvPr/>
+        </p:nvSpPr>
+        <p:spPr>
+          <a:xfrm>
             <a:off x="548640" y="2194560"/>
             <a:ext cx="3291840" cy="548640"/>
           </a:xfrm>
@@ -10734,7 +11409,46 @@
       </p:sp>
       <p:sp>
         <p:nvSpPr>
-          <p:cNvPr id="4" name="Text 2"/>
+          <p:cNvPr id="5" name="Text 3"/>
+          <p:cNvSpPr/>
+          <p:nvPr/>
+        </p:nvSpPr>
+        <p:spPr>
+          <a:xfrm>
+            <a:off x="548640" y="3200400"/>
+            <a:ext cx="3383280" cy="457200"/>
+          </a:xfrm>
+          <a:prstGeom prst="rect">
+            <a:avLst/>
+          </a:prstGeom>
+          <a:noFill/>
+          <a:ln/>
+        </p:spPr>
+        <p:txBody>
+          <a:bodyPr wrap="square" rtlCol="0" anchor="ctr"/>
+          <a:lstStyle/>
+          <a:p>
+            <a:pPr indent="0" marL="0">
+              <a:buNone/>
+            </a:pPr>
+            <a:r>
+              <a:rPr lang="en-US" sz="1100" dirty="0">
+                <a:solidFill>
+                  <a:srgbClr val="C7D2E3"/>
+                </a:solidFill>
+                <a:latin typeface="Arial" pitchFamily="34" charset="0"/>
+                <a:ea typeface="Arial" pitchFamily="34" charset="-122"/>
+                <a:cs typeface="Arial" pitchFamily="34" charset="-120"/>
+              </a:rPr>
+              <a:t>M1 · Etapa 1 · Fundamentos</a:t>
+            </a:r>
+            <a:endParaRPr lang="en-US" sz="1100" dirty="0"/>
+          </a:p>
+        </p:txBody>
+      </p:sp>
+      <p:sp>
+        <p:nvSpPr>
+          <p:cNvPr id="6" name="Text 4"/>
           <p:cNvSpPr/>
           <p:nvPr/>
         </p:nvSpPr>
@@ -10773,7 +11487,7 @@
       </p:sp>
       <p:pic>
         <p:nvPicPr>
-          <p:cNvPr id="5" name="Image 0" descr="/www/wwwroot/rexar/gdsolar/docs/curso/slides/assets/logo-gdsolar.png">    </p:cNvPr>
+          <p:cNvPr id="7" name="Image 0" descr="/www/wwwroot/rexar/gdsolar/docs/curso/slides/assets/logo-gdsolar.png">    </p:cNvPr>
           <p:cNvPicPr>
             <a:picLocks noChangeAspect="1"/>
           </p:cNvPicPr>
@@ -10797,7 +11511,7 @@
       </p:pic>
       <p:sp>
         <p:nvSpPr>
-          <p:cNvPr id="6" name="Text 3"/>
+          <p:cNvPr id="8" name="Text 5"/>
           <p:cNvSpPr/>
           <p:nvPr/>
         </p:nvSpPr>
@@ -10838,7 +11552,7 @@
       </p:sp>
       <p:sp>
         <p:nvSpPr>
-          <p:cNvPr id="7" name="Text 4"/>
+          <p:cNvPr id="9" name="Text 6"/>
           <p:cNvSpPr/>
           <p:nvPr/>
         </p:nvSpPr>
@@ -10879,7 +11593,7 @@
       </p:sp>
       <p:sp>
         <p:nvSpPr>
-          <p:cNvPr id="8" name="Text 5"/>
+          <p:cNvPr id="10" name="Text 7"/>
           <p:cNvSpPr/>
           <p:nvPr/>
         </p:nvSpPr>
@@ -11079,7 +11793,7 @@
         </p:blipFill>
         <p:spPr>
           <a:xfrm>
-            <a:off x="411480" y="6547104"/>
+            <a:off x="548640" y="6547104"/>
             <a:ext cx="274320" cy="274320"/>
           </a:xfrm>
           <a:prstGeom prst="rect">
@@ -11095,7 +11809,7 @@
         </p:nvSpPr>
         <p:spPr>
           <a:xfrm>
-            <a:off x="749808" y="6528816"/>
+            <a:off x="886968" y="6528816"/>
             <a:ext cx="6400800" cy="310896"/>
           </a:xfrm>
           <a:prstGeom prst="rect">
@@ -11135,7 +11849,7 @@
         <p:spPr>
           <a:xfrm>
             <a:off x="7132320" y="6528816"/>
-            <a:ext cx="4663440" cy="310896"/>
+            <a:ext cx="4023360" cy="310896"/>
           </a:xfrm>
           <a:prstGeom prst="rect">
             <a:avLst/>
@@ -11173,7 +11887,7 @@
         </p:nvSpPr>
         <p:spPr>
           <a:xfrm>
-            <a:off x="411480" y="384048"/>
+            <a:off x="548640" y="384048"/>
             <a:ext cx="82296" cy="658368"/>
           </a:xfrm>
           <a:prstGeom prst="rect">
@@ -11193,7 +11907,7 @@
         </p:nvSpPr>
         <p:spPr>
           <a:xfrm>
-            <a:off x="640080" y="292608"/>
+            <a:off x="777240" y="292608"/>
             <a:ext cx="10972800" cy="274320"/>
           </a:xfrm>
           <a:prstGeom prst="rect">
@@ -11232,8 +11946,8 @@
         </p:nvSpPr>
         <p:spPr>
           <a:xfrm>
-            <a:off x="640080" y="530352"/>
-            <a:ext cx="11155680" cy="566928"/>
+            <a:off x="777240" y="530352"/>
+            <a:ext cx="10881360" cy="566928"/>
           </a:xfrm>
           <a:prstGeom prst="rect">
             <a:avLst/>
@@ -11273,12 +11987,12 @@
         </p:nvSpPr>
         <p:spPr>
           <a:xfrm>
-            <a:off x="411480" y="1325880"/>
-            <a:ext cx="3611880" cy="4937760"/>
+            <a:off x="548640" y="1325880"/>
+            <a:ext cx="3514344" cy="4937760"/>
           </a:xfrm>
           <a:prstGeom prst="roundRect">
             <a:avLst>
-              <a:gd name="adj" fmla="val 2025"/>
+              <a:gd name="adj" fmla="val 2082"/>
             </a:avLst>
           </a:prstGeom>
           <a:solidFill>
@@ -11307,8 +12021,8 @@
         </p:nvSpPr>
         <p:spPr>
           <a:xfrm>
-            <a:off x="411480" y="1325880"/>
-            <a:ext cx="3611880" cy="109728"/>
+            <a:off x="548640" y="1325880"/>
+            <a:ext cx="3514344" cy="109728"/>
           </a:xfrm>
           <a:prstGeom prst="rect">
             <a:avLst/>
@@ -11327,8 +12041,8 @@
         </p:nvSpPr>
         <p:spPr>
           <a:xfrm>
-            <a:off x="685800" y="1554480"/>
-            <a:ext cx="3063240" cy="685800"/>
+            <a:off x="822960" y="1554480"/>
+            <a:ext cx="2965704" cy="685800"/>
           </a:xfrm>
           <a:prstGeom prst="rect">
             <a:avLst/>
@@ -11368,8 +12082,8 @@
         </p:nvSpPr>
         <p:spPr>
           <a:xfrm>
-            <a:off x="685800" y="2286000"/>
-            <a:ext cx="3063240" cy="3749040"/>
+            <a:off x="822960" y="2286000"/>
+            <a:ext cx="2965704" cy="3749040"/>
           </a:xfrm>
           <a:prstGeom prst="rect">
             <a:avLst/>
@@ -11391,7 +12105,7 @@
               <a:buChar char="●"/>
             </a:pPr>
             <a:r>
-              <a:rPr lang="en-US" sz="1400" dirty="0">
+              <a:rPr lang="en-US" sz="1700" dirty="0">
                 <a:solidFill>
                   <a:srgbClr val="1F2937"/>
                 </a:solidFill>
@@ -11401,7 +12115,7 @@
               </a:rPr>
               <a:t>- MME — política energética</a:t>
             </a:r>
-            <a:endParaRPr lang="en-US" sz="1400" dirty="0"/>
+            <a:endParaRPr lang="en-US" sz="1700" dirty="0"/>
           </a:p>
           <a:p>
             <a:pPr marL="342900" indent="-342900">
@@ -11412,7 +12126,7 @@
               <a:buChar char="●"/>
             </a:pPr>
             <a:r>
-              <a:rPr lang="en-US" sz="1400" dirty="0">
+              <a:rPr lang="en-US" sz="1700" dirty="0">
                 <a:solidFill>
                   <a:srgbClr val="1F2937"/>
                 </a:solidFill>
@@ -11422,7 +12136,7 @@
               </a:rPr>
               <a:t>- ANEEL — regula e fiscaliza</a:t>
             </a:r>
-            <a:endParaRPr lang="en-US" sz="1400" dirty="0"/>
+            <a:endParaRPr lang="en-US" sz="1700" dirty="0"/>
           </a:p>
           <a:p>
             <a:pPr marL="342900" indent="-342900">
@@ -11433,7 +12147,7 @@
               <a:buChar char="●"/>
             </a:pPr>
             <a:r>
-              <a:rPr lang="en-US" sz="1400" dirty="0">
+              <a:rPr lang="en-US" sz="1700" dirty="0">
                 <a:solidFill>
                   <a:srgbClr val="1F2937"/>
                 </a:solidFill>
@@ -11443,7 +12157,7 @@
               </a:rPr>
               <a:t>- ONS — opera o sistema</a:t>
             </a:r>
-            <a:endParaRPr lang="en-US" sz="1400" dirty="0"/>
+            <a:endParaRPr lang="en-US" sz="1700" dirty="0"/>
           </a:p>
           <a:p>
             <a:pPr marL="342900" indent="-342900">
@@ -11454,7 +12168,7 @@
               <a:buChar char="●"/>
             </a:pPr>
             <a:r>
-              <a:rPr lang="en-US" sz="1400" dirty="0">
+              <a:rPr lang="en-US" sz="1700" dirty="0">
                 <a:solidFill>
                   <a:srgbClr val="1F2937"/>
                 </a:solidFill>
@@ -11464,7 +12178,7 @@
               </a:rPr>
               <a:t>- CCEE — contabiliza o mercado</a:t>
             </a:r>
-            <a:endParaRPr lang="en-US" sz="1400" dirty="0"/>
+            <a:endParaRPr lang="en-US" sz="1700" dirty="0"/>
           </a:p>
           <a:p>
             <a:pPr marL="342900" indent="-342900">
@@ -11475,7 +12189,7 @@
               <a:buChar char="●"/>
             </a:pPr>
             <a:r>
-              <a:rPr lang="en-US" sz="1400" dirty="0">
+              <a:rPr lang="en-US" sz="1700" dirty="0">
                 <a:solidFill>
                   <a:srgbClr val="1F2937"/>
                 </a:solidFill>
@@ -11485,7 +12199,7 @@
               </a:rPr>
               <a:t>- Distribuidoras — atendem o consumidor</a:t>
             </a:r>
-            <a:endParaRPr lang="en-US" sz="1400" dirty="0"/>
+            <a:endParaRPr lang="en-US" sz="1700" dirty="0"/>
           </a:p>
         </p:txBody>
       </p:sp>
@@ -11497,12 +12211,12 @@
         </p:nvSpPr>
         <p:spPr>
           <a:xfrm>
-            <a:off x="4297680" y="1325880"/>
-            <a:ext cx="3611880" cy="4937760"/>
+            <a:off x="4337304" y="1325880"/>
+            <a:ext cx="3514344" cy="4937760"/>
           </a:xfrm>
           <a:prstGeom prst="roundRect">
             <a:avLst>
-              <a:gd name="adj" fmla="val 2025"/>
+              <a:gd name="adj" fmla="val 2082"/>
             </a:avLst>
           </a:prstGeom>
           <a:solidFill>
@@ -11531,8 +12245,8 @@
         </p:nvSpPr>
         <p:spPr>
           <a:xfrm>
-            <a:off x="4297680" y="1325880"/>
-            <a:ext cx="3611880" cy="109728"/>
+            <a:off x="4337304" y="1325880"/>
+            <a:ext cx="3514344" cy="109728"/>
           </a:xfrm>
           <a:prstGeom prst="rect">
             <a:avLst/>
@@ -11551,8 +12265,8 @@
         </p:nvSpPr>
         <p:spPr>
           <a:xfrm>
-            <a:off x="4572000" y="1554480"/>
-            <a:ext cx="3063240" cy="685800"/>
+            <a:off x="4611624" y="1554480"/>
+            <a:ext cx="2965704" cy="685800"/>
           </a:xfrm>
           <a:prstGeom prst="rect">
             <a:avLst/>
@@ -11592,8 +12306,8 @@
         </p:nvSpPr>
         <p:spPr>
           <a:xfrm>
-            <a:off x="4572000" y="2286000"/>
-            <a:ext cx="3063240" cy="3749040"/>
+            <a:off x="4611624" y="2286000"/>
+            <a:ext cx="2965704" cy="3749040"/>
           </a:xfrm>
           <a:prstGeom prst="rect">
             <a:avLst/>
@@ -11611,7 +12325,7 @@
               <a:buNone/>
             </a:pPr>
             <a:r>
-              <a:rPr lang="en-US" sz="2000" dirty="0">
+              <a:rPr lang="en-US" sz="2200" dirty="0">
                 <a:solidFill>
                   <a:srgbClr val="1F2937"/>
                 </a:solidFill>
@@ -11621,7 +12335,7 @@
               </a:rPr>
               <a:t>ACR: o consumidor compra da distribuidora, pela tarifa da ANEEL</a:t>
             </a:r>
-            <a:endParaRPr lang="en-US" sz="2000" dirty="0"/>
+            <a:endParaRPr lang="en-US" sz="2200" dirty="0"/>
           </a:p>
         </p:txBody>
       </p:sp>
@@ -11633,12 +12347,12 @@
         </p:nvSpPr>
         <p:spPr>
           <a:xfrm>
-            <a:off x="8183880" y="1325880"/>
-            <a:ext cx="3611880" cy="4937760"/>
+            <a:off x="8125968" y="1325880"/>
+            <a:ext cx="3514344" cy="4937760"/>
           </a:xfrm>
           <a:prstGeom prst="roundRect">
             <a:avLst>
-              <a:gd name="adj" fmla="val 2025"/>
+              <a:gd name="adj" fmla="val 2082"/>
             </a:avLst>
           </a:prstGeom>
           <a:solidFill>
@@ -11667,8 +12381,8 @@
         </p:nvSpPr>
         <p:spPr>
           <a:xfrm>
-            <a:off x="8183880" y="1325880"/>
-            <a:ext cx="3611880" cy="109728"/>
+            <a:off x="8125968" y="1325880"/>
+            <a:ext cx="3514344" cy="109728"/>
           </a:xfrm>
           <a:prstGeom prst="rect">
             <a:avLst/>
@@ -11687,8 +12401,8 @@
         </p:nvSpPr>
         <p:spPr>
           <a:xfrm>
-            <a:off x="8458200" y="1554480"/>
-            <a:ext cx="3063240" cy="685800"/>
+            <a:off x="8400288" y="1554480"/>
+            <a:ext cx="2965704" cy="685800"/>
           </a:xfrm>
           <a:prstGeom prst="rect">
             <a:avLst/>
@@ -11728,8 +12442,8 @@
         </p:nvSpPr>
         <p:spPr>
           <a:xfrm>
-            <a:off x="8458200" y="2286000"/>
-            <a:ext cx="3063240" cy="3749040"/>
+            <a:off x="8400288" y="2286000"/>
+            <a:ext cx="2965704" cy="3749040"/>
           </a:xfrm>
           <a:prstGeom prst="rect">
             <a:avLst/>
@@ -11783,6 +12497,54 @@
               <a:t>hoje: em geral, grupo A</a:t>
             </a:r>
             <a:endParaRPr lang="en-US" sz="1700" dirty="0"/>
+          </a:p>
+        </p:txBody>
+      </p:sp>
+      <p:sp>
+        <p:nvSpPr>
+          <p:cNvPr id="25" name="Slide Number Placeholder 0"/>
+          <p:cNvSpPr>
+            <a:spLocks noGrp="1"/>
+          </p:cNvSpPr>
+          <p:nvPr>
+            <p:ph type="sldNum" sz="quarter" idx="4294967295"/>
+          </p:nvPr>
+        </p:nvSpPr>
+        <p:spPr>
+          <a:xfrm>
+            <a:off x="11292840" y="6556248"/>
+            <a:ext cx="548640" cy="256032"/>
+          </a:xfrm>
+          <a:prstGeom prst="rect">
+            <a:avLst/>
+          </a:prstGeom>
+          <a:extLst>
+            <a:ext uri="{C572A759-6A51-4108-AA02-DFA0A04FC94B}">
+              <ma14:wrappingTextBoxFlag xmlns:ma14="http://schemas.microsoft.com/office/mac/drawingml/2011/main" val="0"/>
+            </a:ext>
+          </a:extLst>
+        </p:spPr>
+        <p:txBody>
+          <a:bodyPr/>
+          <a:lstStyle>
+            <a:lvl1pPr>
+              <a:defRPr sz="900">
+                <a:solidFill>
+                  <a:srgbClr val="1B3A6B"/>
+                </a:solidFill>
+                <a:latin typeface="Arial"/>
+                <a:ea typeface="Arial"/>
+                <a:cs typeface="Arial"/>
+              </a:defRPr>
+            </a:lvl1pPr>
+          </a:lstStyle>
+          <a:p>
+            <a:pPr algn="r"/>
+            <a:fld id="{F7021451-1387-4CA6-816F-3879F97B5CBC}" type="slidenum">
+              <a:rPr b="1" lang="en-US"/>
+              <a:t>20</a:t>
+            </a:fld>
+            <a:endParaRPr lang="en-US"/>
           </a:p>
         </p:txBody>
       </p:sp>
@@ -11859,7 +12621,7 @@
         </p:blipFill>
         <p:spPr>
           <a:xfrm>
-            <a:off x="411480" y="6547104"/>
+            <a:off x="548640" y="6547104"/>
             <a:ext cx="274320" cy="274320"/>
           </a:xfrm>
           <a:prstGeom prst="rect">
@@ -11875,7 +12637,7 @@
         </p:nvSpPr>
         <p:spPr>
           <a:xfrm>
-            <a:off x="749808" y="6528816"/>
+            <a:off x="886968" y="6528816"/>
             <a:ext cx="6400800" cy="310896"/>
           </a:xfrm>
           <a:prstGeom prst="rect">
@@ -11915,7 +12677,7 @@
         <p:spPr>
           <a:xfrm>
             <a:off x="7132320" y="6528816"/>
-            <a:ext cx="4663440" cy="310896"/>
+            <a:ext cx="4023360" cy="310896"/>
           </a:xfrm>
           <a:prstGeom prst="rect">
             <a:avLst/>
@@ -11953,7 +12715,7 @@
         </p:nvSpPr>
         <p:spPr>
           <a:xfrm>
-            <a:off x="411480" y="384048"/>
+            <a:off x="548640" y="384048"/>
             <a:ext cx="82296" cy="658368"/>
           </a:xfrm>
           <a:prstGeom prst="rect">
@@ -11973,7 +12735,7 @@
         </p:nvSpPr>
         <p:spPr>
           <a:xfrm>
-            <a:off x="640080" y="292608"/>
+            <a:off x="777240" y="292608"/>
             <a:ext cx="10972800" cy="274320"/>
           </a:xfrm>
           <a:prstGeom prst="rect">
@@ -12012,8 +12774,8 @@
         </p:nvSpPr>
         <p:spPr>
           <a:xfrm>
-            <a:off x="640080" y="530352"/>
-            <a:ext cx="11155680" cy="566928"/>
+            <a:off x="777240" y="530352"/>
+            <a:ext cx="10881360" cy="566928"/>
           </a:xfrm>
           <a:prstGeom prst="rect">
             <a:avLst/>
@@ -12053,8 +12815,8 @@
         </p:nvSpPr>
         <p:spPr>
           <a:xfrm>
-            <a:off x="411480" y="1325880"/>
-            <a:ext cx="5577840" cy="4892040"/>
+            <a:off x="548640" y="1325880"/>
+            <a:ext cx="5431536" cy="4892040"/>
           </a:xfrm>
           <a:prstGeom prst="roundRect">
             <a:avLst>
@@ -12087,7 +12849,7 @@
         </p:nvSpPr>
         <p:spPr>
           <a:xfrm>
-            <a:off x="594360" y="1508760"/>
+            <a:off x="731520" y="1508760"/>
             <a:ext cx="457200" cy="457200"/>
           </a:xfrm>
           <a:prstGeom prst="ellipse">
@@ -12107,7 +12869,7 @@
         </p:nvSpPr>
         <p:spPr>
           <a:xfrm>
-            <a:off x="594360" y="1508760"/>
+            <a:off x="731520" y="1508760"/>
             <a:ext cx="457200" cy="457200"/>
           </a:xfrm>
           <a:prstGeom prst="rect">
@@ -12146,8 +12908,8 @@
         </p:nvSpPr>
         <p:spPr>
           <a:xfrm>
-            <a:off x="1188720" y="1435608"/>
-            <a:ext cx="4663440" cy="4672584"/>
+            <a:off x="1325880" y="1435608"/>
+            <a:ext cx="4517136" cy="4672584"/>
           </a:xfrm>
           <a:prstGeom prst="rect">
             <a:avLst/>
@@ -12187,8 +12949,8 @@
         </p:nvSpPr>
         <p:spPr>
           <a:xfrm>
-            <a:off x="6217920" y="1325880"/>
-            <a:ext cx="5577840" cy="4892040"/>
+            <a:off x="6208776" y="1325880"/>
+            <a:ext cx="5431536" cy="4892040"/>
           </a:xfrm>
           <a:prstGeom prst="roundRect">
             <a:avLst>
@@ -12221,7 +12983,7 @@
         </p:nvSpPr>
         <p:spPr>
           <a:xfrm>
-            <a:off x="6400800" y="1508760"/>
+            <a:off x="6391656" y="1508760"/>
             <a:ext cx="457200" cy="457200"/>
           </a:xfrm>
           <a:prstGeom prst="ellipse">
@@ -12241,7 +13003,7 @@
         </p:nvSpPr>
         <p:spPr>
           <a:xfrm>
-            <a:off x="6400800" y="1508760"/>
+            <a:off x="6391656" y="1508760"/>
             <a:ext cx="457200" cy="457200"/>
           </a:xfrm>
           <a:prstGeom prst="rect">
@@ -12280,8 +13042,8 @@
         </p:nvSpPr>
         <p:spPr>
           <a:xfrm>
-            <a:off x="6995160" y="1435608"/>
-            <a:ext cx="4663440" cy="4672584"/>
+            <a:off x="6986016" y="1435608"/>
+            <a:ext cx="4517136" cy="4672584"/>
           </a:xfrm>
           <a:prstGeom prst="rect">
             <a:avLst/>
@@ -12310,6 +13072,54 @@
               <a:t>É geração distribuída: o cliente continua na distribuidora e recebe créditos</a:t>
             </a:r>
             <a:endParaRPr lang="en-US" sz="1800" dirty="0"/>
+          </a:p>
+        </p:txBody>
+      </p:sp>
+      <p:sp>
+        <p:nvSpPr>
+          <p:cNvPr id="25" name="Slide Number Placeholder 0"/>
+          <p:cNvSpPr>
+            <a:spLocks noGrp="1"/>
+          </p:cNvSpPr>
+          <p:nvPr>
+            <p:ph type="sldNum" sz="quarter" idx="4294967295"/>
+          </p:nvPr>
+        </p:nvSpPr>
+        <p:spPr>
+          <a:xfrm>
+            <a:off x="11292840" y="6556248"/>
+            <a:ext cx="548640" cy="256032"/>
+          </a:xfrm>
+          <a:prstGeom prst="rect">
+            <a:avLst/>
+          </a:prstGeom>
+          <a:extLst>
+            <a:ext uri="{C572A759-6A51-4108-AA02-DFA0A04FC94B}">
+              <ma14:wrappingTextBoxFlag xmlns:ma14="http://schemas.microsoft.com/office/mac/drawingml/2011/main" val="0"/>
+            </a:ext>
+          </a:extLst>
+        </p:spPr>
+        <p:txBody>
+          <a:bodyPr/>
+          <a:lstStyle>
+            <a:lvl1pPr>
+              <a:defRPr sz="900">
+                <a:solidFill>
+                  <a:srgbClr val="1B3A6B"/>
+                </a:solidFill>
+                <a:latin typeface="Arial"/>
+                <a:ea typeface="Arial"/>
+                <a:cs typeface="Arial"/>
+              </a:defRPr>
+            </a:lvl1pPr>
+          </a:lstStyle>
+          <a:p>
+            <a:pPr algn="r"/>
+            <a:fld id="{F7021451-1387-4CA6-816F-3879F97B5CBC}" type="slidenum">
+              <a:rPr b="1" lang="en-US"/>
+              <a:t>21</a:t>
+            </a:fld>
+            <a:endParaRPr lang="en-US"/>
           </a:p>
         </p:txBody>
       </p:sp>
@@ -12386,7 +13196,7 @@
         </p:blipFill>
         <p:spPr>
           <a:xfrm>
-            <a:off x="411480" y="6547104"/>
+            <a:off x="548640" y="6547104"/>
             <a:ext cx="274320" cy="274320"/>
           </a:xfrm>
           <a:prstGeom prst="rect">
@@ -12402,7 +13212,7 @@
         </p:nvSpPr>
         <p:spPr>
           <a:xfrm>
-            <a:off x="749808" y="6528816"/>
+            <a:off x="886968" y="6528816"/>
             <a:ext cx="6400800" cy="310896"/>
           </a:xfrm>
           <a:prstGeom prst="rect">
@@ -12442,7 +13252,7 @@
         <p:spPr>
           <a:xfrm>
             <a:off x="7132320" y="6528816"/>
-            <a:ext cx="4663440" cy="310896"/>
+            <a:ext cx="4023360" cy="310896"/>
           </a:xfrm>
           <a:prstGeom prst="rect">
             <a:avLst/>
@@ -12480,7 +13290,7 @@
         </p:nvSpPr>
         <p:spPr>
           <a:xfrm>
-            <a:off x="411480" y="384048"/>
+            <a:off x="548640" y="384048"/>
             <a:ext cx="82296" cy="658368"/>
           </a:xfrm>
           <a:prstGeom prst="rect">
@@ -12500,7 +13310,7 @@
         </p:nvSpPr>
         <p:spPr>
           <a:xfrm>
-            <a:off x="640080" y="292608"/>
+            <a:off x="777240" y="292608"/>
             <a:ext cx="10972800" cy="274320"/>
           </a:xfrm>
           <a:prstGeom prst="rect">
@@ -12539,8 +13349,8 @@
         </p:nvSpPr>
         <p:spPr>
           <a:xfrm>
-            <a:off x="640080" y="530352"/>
-            <a:ext cx="11155680" cy="566928"/>
+            <a:off x="777240" y="530352"/>
+            <a:ext cx="10881360" cy="566928"/>
           </a:xfrm>
           <a:prstGeom prst="rect">
             <a:avLst/>
@@ -12580,8 +13390,8 @@
         </p:nvSpPr>
         <p:spPr>
           <a:xfrm>
-            <a:off x="411480" y="1325880"/>
-            <a:ext cx="3642360" cy="2331720"/>
+            <a:off x="548640" y="1325880"/>
+            <a:ext cx="3544824" cy="2331720"/>
           </a:xfrm>
           <a:prstGeom prst="roundRect">
             <a:avLst>
@@ -12614,7 +13424,7 @@
         </p:nvSpPr>
         <p:spPr>
           <a:xfrm>
-            <a:off x="594360" y="1508760"/>
+            <a:off x="731520" y="1508760"/>
             <a:ext cx="457200" cy="457200"/>
           </a:xfrm>
           <a:prstGeom prst="ellipse">
@@ -12634,7 +13444,7 @@
         </p:nvSpPr>
         <p:spPr>
           <a:xfrm>
-            <a:off x="594360" y="1508760"/>
+            <a:off x="731520" y="1508760"/>
             <a:ext cx="457200" cy="457200"/>
           </a:xfrm>
           <a:prstGeom prst="rect">
@@ -12673,8 +13483,8 @@
         </p:nvSpPr>
         <p:spPr>
           <a:xfrm>
-            <a:off x="1188720" y="1435608"/>
-            <a:ext cx="2727960" cy="2112264"/>
+            <a:off x="1325880" y="1435608"/>
+            <a:ext cx="2630424" cy="2112264"/>
           </a:xfrm>
           <a:prstGeom prst="rect">
             <a:avLst/>
@@ -12714,8 +13524,8 @@
         </p:nvSpPr>
         <p:spPr>
           <a:xfrm>
-            <a:off x="4282440" y="1325880"/>
-            <a:ext cx="3642360" cy="2331720"/>
+            <a:off x="4322064" y="1325880"/>
+            <a:ext cx="3544824" cy="2331720"/>
           </a:xfrm>
           <a:prstGeom prst="roundRect">
             <a:avLst>
@@ -12748,7 +13558,7 @@
         </p:nvSpPr>
         <p:spPr>
           <a:xfrm>
-            <a:off x="4465320" y="1508760"/>
+            <a:off x="4504944" y="1508760"/>
             <a:ext cx="457200" cy="457200"/>
           </a:xfrm>
           <a:prstGeom prst="ellipse">
@@ -12768,7 +13578,7 @@
         </p:nvSpPr>
         <p:spPr>
           <a:xfrm>
-            <a:off x="4465320" y="1508760"/>
+            <a:off x="4504944" y="1508760"/>
             <a:ext cx="457200" cy="457200"/>
           </a:xfrm>
           <a:prstGeom prst="rect">
@@ -12807,8 +13617,8 @@
         </p:nvSpPr>
         <p:spPr>
           <a:xfrm>
-            <a:off x="5059680" y="1435608"/>
-            <a:ext cx="2727960" cy="2112264"/>
+            <a:off x="5099304" y="1435608"/>
+            <a:ext cx="2630424" cy="2112264"/>
           </a:xfrm>
           <a:prstGeom prst="rect">
             <a:avLst/>
@@ -12848,8 +13658,8 @@
         </p:nvSpPr>
         <p:spPr>
           <a:xfrm>
-            <a:off x="8153400" y="1325880"/>
-            <a:ext cx="3642360" cy="2331720"/>
+            <a:off x="8095488" y="1325880"/>
+            <a:ext cx="3544824" cy="2331720"/>
           </a:xfrm>
           <a:prstGeom prst="roundRect">
             <a:avLst>
@@ -12882,7 +13692,7 @@
         </p:nvSpPr>
         <p:spPr>
           <a:xfrm>
-            <a:off x="8336280" y="1508760"/>
+            <a:off x="8278368" y="1508760"/>
             <a:ext cx="457200" cy="457200"/>
           </a:xfrm>
           <a:prstGeom prst="ellipse">
@@ -12902,7 +13712,7 @@
         </p:nvSpPr>
         <p:spPr>
           <a:xfrm>
-            <a:off x="8336280" y="1508760"/>
+            <a:off x="8278368" y="1508760"/>
             <a:ext cx="457200" cy="457200"/>
           </a:xfrm>
           <a:prstGeom prst="rect">
@@ -12941,8 +13751,8 @@
         </p:nvSpPr>
         <p:spPr>
           <a:xfrm>
-            <a:off x="8930640" y="1435608"/>
-            <a:ext cx="2727960" cy="2112264"/>
+            <a:off x="8872728" y="1435608"/>
+            <a:ext cx="2630424" cy="2112264"/>
           </a:xfrm>
           <a:prstGeom prst="rect">
             <a:avLst/>
@@ -12982,8 +13792,8 @@
         </p:nvSpPr>
         <p:spPr>
           <a:xfrm>
-            <a:off x="411480" y="3886200"/>
-            <a:ext cx="3642360" cy="2331720"/>
+            <a:off x="548640" y="3886200"/>
+            <a:ext cx="3544824" cy="2331720"/>
           </a:xfrm>
           <a:prstGeom prst="roundRect">
             <a:avLst>
@@ -13016,7 +13826,7 @@
         </p:nvSpPr>
         <p:spPr>
           <a:xfrm>
-            <a:off x="594360" y="4069080"/>
+            <a:off x="731520" y="4069080"/>
             <a:ext cx="457200" cy="457200"/>
           </a:xfrm>
           <a:prstGeom prst="ellipse">
@@ -13036,7 +13846,7 @@
         </p:nvSpPr>
         <p:spPr>
           <a:xfrm>
-            <a:off x="594360" y="4069080"/>
+            <a:off x="731520" y="4069080"/>
             <a:ext cx="457200" cy="457200"/>
           </a:xfrm>
           <a:prstGeom prst="rect">
@@ -13075,8 +13885,8 @@
         </p:nvSpPr>
         <p:spPr>
           <a:xfrm>
-            <a:off x="1188720" y="3995928"/>
-            <a:ext cx="2727960" cy="2112264"/>
+            <a:off x="1325880" y="3995928"/>
+            <a:ext cx="2630424" cy="2112264"/>
           </a:xfrm>
           <a:prstGeom prst="rect">
             <a:avLst/>
@@ -13116,8 +13926,8 @@
         </p:nvSpPr>
         <p:spPr>
           <a:xfrm>
-            <a:off x="4282440" y="3886200"/>
-            <a:ext cx="3642360" cy="2331720"/>
+            <a:off x="4322064" y="3886200"/>
+            <a:ext cx="3544824" cy="2331720"/>
           </a:xfrm>
           <a:prstGeom prst="roundRect">
             <a:avLst>
@@ -13150,7 +13960,7 @@
         </p:nvSpPr>
         <p:spPr>
           <a:xfrm>
-            <a:off x="4465320" y="4069080"/>
+            <a:off x="4504944" y="4069080"/>
             <a:ext cx="457200" cy="457200"/>
           </a:xfrm>
           <a:prstGeom prst="ellipse">
@@ -13170,7 +13980,7 @@
         </p:nvSpPr>
         <p:spPr>
           <a:xfrm>
-            <a:off x="4465320" y="4069080"/>
+            <a:off x="4504944" y="4069080"/>
             <a:ext cx="457200" cy="457200"/>
           </a:xfrm>
           <a:prstGeom prst="rect">
@@ -13209,8 +14019,8 @@
         </p:nvSpPr>
         <p:spPr>
           <a:xfrm>
-            <a:off x="5059680" y="3995928"/>
-            <a:ext cx="2727960" cy="2112264"/>
+            <a:off x="5099304" y="3995928"/>
+            <a:ext cx="2630424" cy="2112264"/>
           </a:xfrm>
           <a:prstGeom prst="rect">
             <a:avLst/>
@@ -13239,6 +14049,54 @@
               <a:t>Assinatura: GD dentro do ACR</a:t>
             </a:r>
             <a:endParaRPr lang="en-US" sz="1800" dirty="0"/>
+          </a:p>
+        </p:txBody>
+      </p:sp>
+      <p:sp>
+        <p:nvSpPr>
+          <p:cNvPr id="25" name="Slide Number Placeholder 0"/>
+          <p:cNvSpPr>
+            <a:spLocks noGrp="1"/>
+          </p:cNvSpPr>
+          <p:nvPr>
+            <p:ph type="sldNum" sz="quarter" idx="4294967295"/>
+          </p:nvPr>
+        </p:nvSpPr>
+        <p:spPr>
+          <a:xfrm>
+            <a:off x="11292840" y="6556248"/>
+            <a:ext cx="548640" cy="256032"/>
+          </a:xfrm>
+          <a:prstGeom prst="rect">
+            <a:avLst/>
+          </a:prstGeom>
+          <a:extLst>
+            <a:ext uri="{C572A759-6A51-4108-AA02-DFA0A04FC94B}">
+              <ma14:wrappingTextBoxFlag xmlns:ma14="http://schemas.microsoft.com/office/mac/drawingml/2011/main" val="0"/>
+            </a:ext>
+          </a:extLst>
+        </p:spPr>
+        <p:txBody>
+          <a:bodyPr/>
+          <a:lstStyle>
+            <a:lvl1pPr>
+              <a:defRPr sz="900">
+                <a:solidFill>
+                  <a:srgbClr val="1B3A6B"/>
+                </a:solidFill>
+                <a:latin typeface="Arial"/>
+                <a:ea typeface="Arial"/>
+                <a:cs typeface="Arial"/>
+              </a:defRPr>
+            </a:lvl1pPr>
+          </a:lstStyle>
+          <a:p>
+            <a:pPr algn="r"/>
+            <a:fld id="{F7021451-1387-4CA6-816F-3879F97B5CBC}" type="slidenum">
+              <a:rPr b="1" lang="en-US"/>
+              <a:t>22</a:t>
+            </a:fld>
+            <a:endParaRPr lang="en-US"/>
           </a:p>
         </p:txBody>
       </p:sp>
@@ -13302,6 +14160,45 @@
         </p:nvSpPr>
         <p:spPr>
           <a:xfrm>
+            <a:off x="457200" y="548640"/>
+            <a:ext cx="3474720" cy="1737360"/>
+          </a:xfrm>
+          <a:prstGeom prst="rect">
+            <a:avLst/>
+          </a:prstGeom>
+          <a:noFill/>
+          <a:ln/>
+        </p:spPr>
+        <p:txBody>
+          <a:bodyPr wrap="square" rtlCol="0" anchor="ctr"/>
+          <a:lstStyle/>
+          <a:p>
+            <a:pPr indent="0" marL="0">
+              <a:buNone/>
+            </a:pPr>
+            <a:r>
+              <a:rPr lang="en-US" sz="11000" b="1" dirty="0">
+                <a:solidFill>
+                  <a:srgbClr val="11396F"/>
+                </a:solidFill>
+                <a:latin typeface="Arial" pitchFamily="34" charset="0"/>
+                <a:ea typeface="Arial" pitchFamily="34" charset="-122"/>
+                <a:cs typeface="Arial" pitchFamily="34" charset="-120"/>
+              </a:rPr>
+              <a:t>05</a:t>
+            </a:r>
+            <a:endParaRPr lang="en-US" sz="11000" dirty="0"/>
+          </a:p>
+        </p:txBody>
+      </p:sp>
+      <p:sp>
+        <p:nvSpPr>
+          <p:cNvPr id="4" name="Text 2"/>
+          <p:cNvSpPr/>
+          <p:nvPr/>
+        </p:nvSpPr>
+        <p:spPr>
+          <a:xfrm>
             <a:off x="548640" y="2194560"/>
             <a:ext cx="3291840" cy="548640"/>
           </a:xfrm>
@@ -13335,7 +14232,46 @@
       </p:sp>
       <p:sp>
         <p:nvSpPr>
-          <p:cNvPr id="4" name="Text 2"/>
+          <p:cNvPr id="5" name="Text 3"/>
+          <p:cNvSpPr/>
+          <p:nvPr/>
+        </p:nvSpPr>
+        <p:spPr>
+          <a:xfrm>
+            <a:off x="548640" y="3200400"/>
+            <a:ext cx="3383280" cy="457200"/>
+          </a:xfrm>
+          <a:prstGeom prst="rect">
+            <a:avLst/>
+          </a:prstGeom>
+          <a:noFill/>
+          <a:ln/>
+        </p:spPr>
+        <p:txBody>
+          <a:bodyPr wrap="square" rtlCol="0" anchor="ctr"/>
+          <a:lstStyle/>
+          <a:p>
+            <a:pPr indent="0" marL="0">
+              <a:buNone/>
+            </a:pPr>
+            <a:r>
+              <a:rPr lang="en-US" sz="1100" dirty="0">
+                <a:solidFill>
+                  <a:srgbClr val="C7D2E3"/>
+                </a:solidFill>
+                <a:latin typeface="Arial" pitchFamily="34" charset="0"/>
+                <a:ea typeface="Arial" pitchFamily="34" charset="-122"/>
+                <a:cs typeface="Arial" pitchFamily="34" charset="-120"/>
+              </a:rPr>
+              <a:t>M1 · Etapa 1 · Fundamentos</a:t>
+            </a:r>
+            <a:endParaRPr lang="en-US" sz="1100" dirty="0"/>
+          </a:p>
+        </p:txBody>
+      </p:sp>
+      <p:sp>
+        <p:nvSpPr>
+          <p:cNvPr id="6" name="Text 4"/>
           <p:cNvSpPr/>
           <p:nvPr/>
         </p:nvSpPr>
@@ -13374,7 +14310,7 @@
       </p:sp>
       <p:pic>
         <p:nvPicPr>
-          <p:cNvPr id="5" name="Image 0" descr="/www/wwwroot/rexar/gdsolar/docs/curso/slides/assets/logo-gdsolar.png">    </p:cNvPr>
+          <p:cNvPr id="7" name="Image 0" descr="/www/wwwroot/rexar/gdsolar/docs/curso/slides/assets/logo-gdsolar.png">    </p:cNvPr>
           <p:cNvPicPr>
             <a:picLocks noChangeAspect="1"/>
           </p:cNvPicPr>
@@ -13398,7 +14334,7 @@
       </p:pic>
       <p:sp>
         <p:nvSpPr>
-          <p:cNvPr id="6" name="Text 3"/>
+          <p:cNvPr id="8" name="Text 5"/>
           <p:cNvSpPr/>
           <p:nvPr/>
         </p:nvSpPr>
@@ -13439,7 +14375,7 @@
       </p:sp>
       <p:sp>
         <p:nvSpPr>
-          <p:cNvPr id="7" name="Text 4"/>
+          <p:cNvPr id="9" name="Text 6"/>
           <p:cNvSpPr/>
           <p:nvPr/>
         </p:nvSpPr>
@@ -13480,7 +14416,7 @@
       </p:sp>
       <p:sp>
         <p:nvSpPr>
-          <p:cNvPr id="8" name="Text 5"/>
+          <p:cNvPr id="10" name="Text 7"/>
           <p:cNvSpPr/>
           <p:nvPr/>
         </p:nvSpPr>
@@ -13659,7 +14595,7 @@
         </p:blipFill>
         <p:spPr>
           <a:xfrm>
-            <a:off x="411480" y="6547104"/>
+            <a:off x="548640" y="6547104"/>
             <a:ext cx="274320" cy="274320"/>
           </a:xfrm>
           <a:prstGeom prst="rect">
@@ -13675,7 +14611,7 @@
         </p:nvSpPr>
         <p:spPr>
           <a:xfrm>
-            <a:off x="749808" y="6528816"/>
+            <a:off x="886968" y="6528816"/>
             <a:ext cx="6400800" cy="310896"/>
           </a:xfrm>
           <a:prstGeom prst="rect">
@@ -13715,7 +14651,7 @@
         <p:spPr>
           <a:xfrm>
             <a:off x="7132320" y="6528816"/>
-            <a:ext cx="4663440" cy="310896"/>
+            <a:ext cx="4023360" cy="310896"/>
           </a:xfrm>
           <a:prstGeom prst="rect">
             <a:avLst/>
@@ -13753,7 +14689,7 @@
         </p:nvSpPr>
         <p:spPr>
           <a:xfrm>
-            <a:off x="411480" y="384048"/>
+            <a:off x="548640" y="384048"/>
             <a:ext cx="82296" cy="658368"/>
           </a:xfrm>
           <a:prstGeom prst="rect">
@@ -13773,7 +14709,7 @@
         </p:nvSpPr>
         <p:spPr>
           <a:xfrm>
-            <a:off x="640080" y="292608"/>
+            <a:off x="777240" y="292608"/>
             <a:ext cx="10972800" cy="274320"/>
           </a:xfrm>
           <a:prstGeom prst="rect">
@@ -13812,8 +14748,8 @@
         </p:nvSpPr>
         <p:spPr>
           <a:xfrm>
-            <a:off x="640080" y="530352"/>
-            <a:ext cx="11155680" cy="566928"/>
+            <a:off x="777240" y="530352"/>
+            <a:ext cx="10881360" cy="566928"/>
           </a:xfrm>
           <a:prstGeom prst="rect">
             <a:avLst/>
@@ -13908,6 +14844,54 @@
               <a:t>Grupo B: baixa tensão (&lt; 2,3 kV) · paga só energia (kWh) · residências, comércios, pequenas empresas</a:t>
             </a:r>
             <a:endParaRPr lang="en-US" sz="1600" dirty="0"/>
+          </a:p>
+        </p:txBody>
+      </p:sp>
+      <p:sp>
+        <p:nvSpPr>
+          <p:cNvPr id="25" name="Slide Number Placeholder 0"/>
+          <p:cNvSpPr>
+            <a:spLocks noGrp="1"/>
+          </p:cNvSpPr>
+          <p:nvPr>
+            <p:ph type="sldNum" sz="quarter" idx="4294967295"/>
+          </p:nvPr>
+        </p:nvSpPr>
+        <p:spPr>
+          <a:xfrm>
+            <a:off x="11292840" y="6556248"/>
+            <a:ext cx="548640" cy="256032"/>
+          </a:xfrm>
+          <a:prstGeom prst="rect">
+            <a:avLst/>
+          </a:prstGeom>
+          <a:extLst>
+            <a:ext uri="{C572A759-6A51-4108-AA02-DFA0A04FC94B}">
+              <ma14:wrappingTextBoxFlag xmlns:ma14="http://schemas.microsoft.com/office/mac/drawingml/2011/main" val="0"/>
+            </a:ext>
+          </a:extLst>
+        </p:spPr>
+        <p:txBody>
+          <a:bodyPr/>
+          <a:lstStyle>
+            <a:lvl1pPr>
+              <a:defRPr sz="900">
+                <a:solidFill>
+                  <a:srgbClr val="1B3A6B"/>
+                </a:solidFill>
+                <a:latin typeface="Arial"/>
+                <a:ea typeface="Arial"/>
+                <a:cs typeface="Arial"/>
+              </a:defRPr>
+            </a:lvl1pPr>
+          </a:lstStyle>
+          <a:p>
+            <a:pPr algn="r"/>
+            <a:fld id="{F7021451-1387-4CA6-816F-3879F97B5CBC}" type="slidenum">
+              <a:rPr b="1" lang="en-US"/>
+              <a:t>24</a:t>
+            </a:fld>
+            <a:endParaRPr lang="en-US"/>
           </a:p>
         </p:txBody>
       </p:sp>
@@ -13984,7 +14968,7 @@
         </p:blipFill>
         <p:spPr>
           <a:xfrm>
-            <a:off x="411480" y="6547104"/>
+            <a:off x="548640" y="6547104"/>
             <a:ext cx="274320" cy="274320"/>
           </a:xfrm>
           <a:prstGeom prst="rect">
@@ -14000,7 +14984,7 @@
         </p:nvSpPr>
         <p:spPr>
           <a:xfrm>
-            <a:off x="749808" y="6528816"/>
+            <a:off x="886968" y="6528816"/>
             <a:ext cx="6400800" cy="310896"/>
           </a:xfrm>
           <a:prstGeom prst="rect">
@@ -14040,7 +15024,7 @@
         <p:spPr>
           <a:xfrm>
             <a:off x="7132320" y="6528816"/>
-            <a:ext cx="4663440" cy="310896"/>
+            <a:ext cx="4023360" cy="310896"/>
           </a:xfrm>
           <a:prstGeom prst="rect">
             <a:avLst/>
@@ -14078,7 +15062,7 @@
         </p:nvSpPr>
         <p:spPr>
           <a:xfrm>
-            <a:off x="411480" y="384048"/>
+            <a:off x="548640" y="384048"/>
             <a:ext cx="82296" cy="658368"/>
           </a:xfrm>
           <a:prstGeom prst="rect">
@@ -14098,7 +15082,7 @@
         </p:nvSpPr>
         <p:spPr>
           <a:xfrm>
-            <a:off x="640080" y="292608"/>
+            <a:off x="777240" y="292608"/>
             <a:ext cx="10972800" cy="274320"/>
           </a:xfrm>
           <a:prstGeom prst="rect">
@@ -14137,8 +15121,8 @@
         </p:nvSpPr>
         <p:spPr>
           <a:xfrm>
-            <a:off x="640080" y="530352"/>
-            <a:ext cx="11155680" cy="566928"/>
+            <a:off x="777240" y="530352"/>
+            <a:ext cx="10881360" cy="566928"/>
           </a:xfrm>
           <a:prstGeom prst="rect">
             <a:avLst/>
@@ -14185,16 +15169,16 @@
           </p:nvPr>
         </p:nvGraphicFramePr>
         <p:xfrm>
-          <a:off x="411480" y="1417320"/>
-          <a:ext cx="11384280" cy="914400"/>
+          <a:off x="548640" y="1417320"/>
+          <a:ext cx="11091672" cy="914400"/>
         </p:xfrm>
         <a:graphic>
           <a:graphicData uri="http://schemas.openxmlformats.org/drawingml/2006/table">
             <a:tbl>
               <a:tblPr/>
               <a:tblGrid>
-                <a:gridCol w="5692140"/>
-                <a:gridCol w="5692140"/>
+                <a:gridCol w="5545836"/>
+                <a:gridCol w="5545836"/>
               </a:tblGrid>
               <a:tr h="0">
                 <a:tc>
@@ -14890,6 +15874,54 @@
           </a:graphicData>
         </a:graphic>
       </p:graphicFrame>
+      <p:sp>
+        <p:nvSpPr>
+          <p:cNvPr id="25" name="Slide Number Placeholder 0"/>
+          <p:cNvSpPr>
+            <a:spLocks noGrp="1"/>
+          </p:cNvSpPr>
+          <p:nvPr>
+            <p:ph type="sldNum" sz="quarter" idx="4294967295"/>
+          </p:nvPr>
+        </p:nvSpPr>
+        <p:spPr>
+          <a:xfrm>
+            <a:off x="11292840" y="6556248"/>
+            <a:ext cx="548640" cy="256032"/>
+          </a:xfrm>
+          <a:prstGeom prst="rect">
+            <a:avLst/>
+          </a:prstGeom>
+          <a:extLst>
+            <a:ext uri="{C572A759-6A51-4108-AA02-DFA0A04FC94B}">
+              <ma14:wrappingTextBoxFlag xmlns:ma14="http://schemas.microsoft.com/office/mac/drawingml/2011/main" val="0"/>
+            </a:ext>
+          </a:extLst>
+        </p:spPr>
+        <p:txBody>
+          <a:bodyPr/>
+          <a:lstStyle>
+            <a:lvl1pPr>
+              <a:defRPr sz="900">
+                <a:solidFill>
+                  <a:srgbClr val="1B3A6B"/>
+                </a:solidFill>
+                <a:latin typeface="Arial"/>
+                <a:ea typeface="Arial"/>
+                <a:cs typeface="Arial"/>
+              </a:defRPr>
+            </a:lvl1pPr>
+          </a:lstStyle>
+          <a:p>
+            <a:pPr algn="r"/>
+            <a:fld id="{F7021451-1387-4CA6-816F-3879F97B5CBC}" type="slidenum">
+              <a:rPr b="1" lang="en-US"/>
+              <a:t>25</a:t>
+            </a:fld>
+            <a:endParaRPr lang="en-US"/>
+          </a:p>
+        </p:txBody>
+      </p:sp>
     </p:spTree>
   </p:cSld>
   <p:clrMapOvr>
@@ -14963,7 +15995,7 @@
         </p:blipFill>
         <p:spPr>
           <a:xfrm>
-            <a:off x="411480" y="6547104"/>
+            <a:off x="548640" y="6547104"/>
             <a:ext cx="274320" cy="274320"/>
           </a:xfrm>
           <a:prstGeom prst="rect">
@@ -14979,7 +16011,7 @@
         </p:nvSpPr>
         <p:spPr>
           <a:xfrm>
-            <a:off x="749808" y="6528816"/>
+            <a:off x="886968" y="6528816"/>
             <a:ext cx="6400800" cy="310896"/>
           </a:xfrm>
           <a:prstGeom prst="rect">
@@ -15019,7 +16051,7 @@
         <p:spPr>
           <a:xfrm>
             <a:off x="7132320" y="6528816"/>
-            <a:ext cx="4663440" cy="310896"/>
+            <a:ext cx="4023360" cy="310896"/>
           </a:xfrm>
           <a:prstGeom prst="rect">
             <a:avLst/>
@@ -15057,7 +16089,7 @@
         </p:nvSpPr>
         <p:spPr>
           <a:xfrm>
-            <a:off x="411480" y="384048"/>
+            <a:off x="548640" y="384048"/>
             <a:ext cx="82296" cy="658368"/>
           </a:xfrm>
           <a:prstGeom prst="rect">
@@ -15077,7 +16109,7 @@
         </p:nvSpPr>
         <p:spPr>
           <a:xfrm>
-            <a:off x="640080" y="292608"/>
+            <a:off x="777240" y="292608"/>
             <a:ext cx="10972800" cy="274320"/>
           </a:xfrm>
           <a:prstGeom prst="rect">
@@ -15116,8 +16148,8 @@
         </p:nvSpPr>
         <p:spPr>
           <a:xfrm>
-            <a:off x="640080" y="530352"/>
-            <a:ext cx="11155680" cy="566928"/>
+            <a:off x="777240" y="530352"/>
+            <a:ext cx="10881360" cy="566928"/>
           </a:xfrm>
           <a:prstGeom prst="rect">
             <a:avLst/>
@@ -15156,8 +16188,8 @@
           <p:nvPr/>
         </p:nvGraphicFramePr>
         <p:xfrm>
-          <a:off x="411480" y="1325880"/>
-          <a:ext cx="5852160" cy="4937760"/>
+          <a:off x="548640" y="1325880"/>
+          <a:ext cx="5669280" cy="4937760"/>
         </p:xfrm>
         <a:graphic xmlns:a="http://schemas.openxmlformats.org/drawingml/2006/main">
           <a:graphicData uri="http://schemas.openxmlformats.org/drawingml/2006/chart">
@@ -15180,16 +16212,16 @@
           </p:nvPr>
         </p:nvGraphicFramePr>
         <p:xfrm>
-          <a:off x="6492240" y="1600200"/>
-          <a:ext cx="5303520" cy="914400"/>
+          <a:off x="6446520" y="1600200"/>
+          <a:ext cx="5193792" cy="914400"/>
         </p:xfrm>
         <a:graphic>
           <a:graphicData uri="http://schemas.openxmlformats.org/drawingml/2006/table">
             <a:tbl>
               <a:tblPr/>
               <a:tblGrid>
-                <a:gridCol w="2651760"/>
-                <a:gridCol w="2651760"/>
+                <a:gridCol w="2596896"/>
+                <a:gridCol w="2596896"/>
               </a:tblGrid>
               <a:tr h="0">
                 <a:tc>
@@ -15747,6 +16779,54 @@
           </a:graphicData>
         </a:graphic>
       </p:graphicFrame>
+      <p:sp>
+        <p:nvSpPr>
+          <p:cNvPr id="25" name="Slide Number Placeholder 0"/>
+          <p:cNvSpPr>
+            <a:spLocks noGrp="1"/>
+          </p:cNvSpPr>
+          <p:nvPr>
+            <p:ph type="sldNum" sz="quarter" idx="4294967295"/>
+          </p:nvPr>
+        </p:nvSpPr>
+        <p:spPr>
+          <a:xfrm>
+            <a:off x="11292840" y="6556248"/>
+            <a:ext cx="548640" cy="256032"/>
+          </a:xfrm>
+          <a:prstGeom prst="rect">
+            <a:avLst/>
+          </a:prstGeom>
+          <a:extLst>
+            <a:ext uri="{C572A759-6A51-4108-AA02-DFA0A04FC94B}">
+              <ma14:wrappingTextBoxFlag xmlns:ma14="http://schemas.microsoft.com/office/mac/drawingml/2011/main" val="0"/>
+            </a:ext>
+          </a:extLst>
+        </p:spPr>
+        <p:txBody>
+          <a:bodyPr/>
+          <a:lstStyle>
+            <a:lvl1pPr>
+              <a:defRPr sz="900">
+                <a:solidFill>
+                  <a:srgbClr val="1B3A6B"/>
+                </a:solidFill>
+                <a:latin typeface="Arial"/>
+                <a:ea typeface="Arial"/>
+                <a:cs typeface="Arial"/>
+              </a:defRPr>
+            </a:lvl1pPr>
+          </a:lstStyle>
+          <a:p>
+            <a:pPr algn="r"/>
+            <a:fld id="{F7021451-1387-4CA6-816F-3879F97B5CBC}" type="slidenum">
+              <a:rPr b="1" lang="en-US"/>
+              <a:t>26</a:t>
+            </a:fld>
+            <a:endParaRPr lang="en-US"/>
+          </a:p>
+        </p:txBody>
+      </p:sp>
     </p:spTree>
   </p:cSld>
   <p:clrMapOvr>
@@ -15820,7 +16900,7 @@
         </p:blipFill>
         <p:spPr>
           <a:xfrm>
-            <a:off x="411480" y="6547104"/>
+            <a:off x="548640" y="6547104"/>
             <a:ext cx="274320" cy="274320"/>
           </a:xfrm>
           <a:prstGeom prst="rect">
@@ -15836,7 +16916,7 @@
         </p:nvSpPr>
         <p:spPr>
           <a:xfrm>
-            <a:off x="749808" y="6528816"/>
+            <a:off x="886968" y="6528816"/>
             <a:ext cx="6400800" cy="310896"/>
           </a:xfrm>
           <a:prstGeom prst="rect">
@@ -15876,7 +16956,7 @@
         <p:spPr>
           <a:xfrm>
             <a:off x="7132320" y="6528816"/>
-            <a:ext cx="4663440" cy="310896"/>
+            <a:ext cx="4023360" cy="310896"/>
           </a:xfrm>
           <a:prstGeom prst="rect">
             <a:avLst/>
@@ -15914,7 +16994,7 @@
         </p:nvSpPr>
         <p:spPr>
           <a:xfrm>
-            <a:off x="411480" y="384048"/>
+            <a:off x="548640" y="384048"/>
             <a:ext cx="82296" cy="658368"/>
           </a:xfrm>
           <a:prstGeom prst="rect">
@@ -15934,7 +17014,7 @@
         </p:nvSpPr>
         <p:spPr>
           <a:xfrm>
-            <a:off x="640080" y="292608"/>
+            <a:off x="777240" y="292608"/>
             <a:ext cx="10972800" cy="274320"/>
           </a:xfrm>
           <a:prstGeom prst="rect">
@@ -15973,8 +17053,8 @@
         </p:nvSpPr>
         <p:spPr>
           <a:xfrm>
-            <a:off x="640080" y="530352"/>
-            <a:ext cx="11155680" cy="566928"/>
+            <a:off x="777240" y="530352"/>
+            <a:ext cx="10881360" cy="566928"/>
           </a:xfrm>
           <a:prstGeom prst="rect">
             <a:avLst/>
@@ -16014,12 +17094,12 @@
         </p:nvSpPr>
         <p:spPr>
           <a:xfrm>
-            <a:off x="411480" y="1325880"/>
-            <a:ext cx="3642360" cy="4892040"/>
+            <a:off x="548640" y="1325880"/>
+            <a:ext cx="3544824" cy="4892040"/>
           </a:xfrm>
           <a:prstGeom prst="roundRect">
             <a:avLst>
-              <a:gd name="adj" fmla="val 2008"/>
+              <a:gd name="adj" fmla="val 2064"/>
             </a:avLst>
           </a:prstGeom>
           <a:solidFill>
@@ -16048,7 +17128,7 @@
         </p:nvSpPr>
         <p:spPr>
           <a:xfrm>
-            <a:off x="594360" y="1508760"/>
+            <a:off x="731520" y="1508760"/>
             <a:ext cx="457200" cy="457200"/>
           </a:xfrm>
           <a:prstGeom prst="ellipse">
@@ -16068,7 +17148,7 @@
         </p:nvSpPr>
         <p:spPr>
           <a:xfrm>
-            <a:off x="594360" y="1508760"/>
+            <a:off x="731520" y="1508760"/>
             <a:ext cx="457200" cy="457200"/>
           </a:xfrm>
           <a:prstGeom prst="rect">
@@ -16107,8 +17187,8 @@
         </p:nvSpPr>
         <p:spPr>
           <a:xfrm>
-            <a:off x="1188720" y="1435608"/>
-            <a:ext cx="2727960" cy="4672584"/>
+            <a:off x="1325880" y="1435608"/>
+            <a:ext cx="2630424" cy="4672584"/>
           </a:xfrm>
           <a:prstGeom prst="rect">
             <a:avLst/>
@@ -16148,12 +17228,12 @@
         </p:nvSpPr>
         <p:spPr>
           <a:xfrm>
-            <a:off x="4282440" y="1325880"/>
-            <a:ext cx="3642360" cy="4892040"/>
+            <a:off x="4322064" y="1325880"/>
+            <a:ext cx="3544824" cy="4892040"/>
           </a:xfrm>
           <a:prstGeom prst="roundRect">
             <a:avLst>
-              <a:gd name="adj" fmla="val 2008"/>
+              <a:gd name="adj" fmla="val 2064"/>
             </a:avLst>
           </a:prstGeom>
           <a:solidFill>
@@ -16182,7 +17262,7 @@
         </p:nvSpPr>
         <p:spPr>
           <a:xfrm>
-            <a:off x="4465320" y="1508760"/>
+            <a:off x="4504944" y="1508760"/>
             <a:ext cx="457200" cy="457200"/>
           </a:xfrm>
           <a:prstGeom prst="ellipse">
@@ -16202,7 +17282,7 @@
         </p:nvSpPr>
         <p:spPr>
           <a:xfrm>
-            <a:off x="4465320" y="1508760"/>
+            <a:off x="4504944" y="1508760"/>
             <a:ext cx="457200" cy="457200"/>
           </a:xfrm>
           <a:prstGeom prst="rect">
@@ -16241,8 +17321,8 @@
         </p:nvSpPr>
         <p:spPr>
           <a:xfrm>
-            <a:off x="5059680" y="1435608"/>
-            <a:ext cx="2727960" cy="4672584"/>
+            <a:off x="5099304" y="1435608"/>
+            <a:ext cx="2630424" cy="4672584"/>
           </a:xfrm>
           <a:prstGeom prst="rect">
             <a:avLst/>
@@ -16282,12 +17362,12 @@
         </p:nvSpPr>
         <p:spPr>
           <a:xfrm>
-            <a:off x="8153400" y="1325880"/>
-            <a:ext cx="3642360" cy="4892040"/>
+            <a:off x="8095488" y="1325880"/>
+            <a:ext cx="3544824" cy="4892040"/>
           </a:xfrm>
           <a:prstGeom prst="roundRect">
             <a:avLst>
-              <a:gd name="adj" fmla="val 2008"/>
+              <a:gd name="adj" fmla="val 2064"/>
             </a:avLst>
           </a:prstGeom>
           <a:solidFill>
@@ -16316,7 +17396,7 @@
         </p:nvSpPr>
         <p:spPr>
           <a:xfrm>
-            <a:off x="8336280" y="1508760"/>
+            <a:off x="8278368" y="1508760"/>
             <a:ext cx="457200" cy="457200"/>
           </a:xfrm>
           <a:prstGeom prst="ellipse">
@@ -16336,7 +17416,7 @@
         </p:nvSpPr>
         <p:spPr>
           <a:xfrm>
-            <a:off x="8336280" y="1508760"/>
+            <a:off x="8278368" y="1508760"/>
             <a:ext cx="457200" cy="457200"/>
           </a:xfrm>
           <a:prstGeom prst="rect">
@@ -16375,8 +17455,8 @@
         </p:nvSpPr>
         <p:spPr>
           <a:xfrm>
-            <a:off x="8930640" y="1435608"/>
-            <a:ext cx="2727960" cy="4672584"/>
+            <a:off x="8872728" y="1435608"/>
+            <a:ext cx="2630424" cy="4672584"/>
           </a:xfrm>
           <a:prstGeom prst="rect">
             <a:avLst/>
@@ -16405,6 +17485,54 @@
               <a:t>tipo de fornecimento (mono/bi/trifásico)</a:t>
             </a:r>
             <a:endParaRPr lang="en-US" sz="1800" dirty="0"/>
+          </a:p>
+        </p:txBody>
+      </p:sp>
+      <p:sp>
+        <p:nvSpPr>
+          <p:cNvPr id="25" name="Slide Number Placeholder 0"/>
+          <p:cNvSpPr>
+            <a:spLocks noGrp="1"/>
+          </p:cNvSpPr>
+          <p:nvPr>
+            <p:ph type="sldNum" sz="quarter" idx="4294967295"/>
+          </p:nvPr>
+        </p:nvSpPr>
+        <p:spPr>
+          <a:xfrm>
+            <a:off x="11292840" y="6556248"/>
+            <a:ext cx="548640" cy="256032"/>
+          </a:xfrm>
+          <a:prstGeom prst="rect">
+            <a:avLst/>
+          </a:prstGeom>
+          <a:extLst>
+            <a:ext uri="{C572A759-6A51-4108-AA02-DFA0A04FC94B}">
+              <ma14:wrappingTextBoxFlag xmlns:ma14="http://schemas.microsoft.com/office/mac/drawingml/2011/main" val="0"/>
+            </a:ext>
+          </a:extLst>
+        </p:spPr>
+        <p:txBody>
+          <a:bodyPr/>
+          <a:lstStyle>
+            <a:lvl1pPr>
+              <a:defRPr sz="900">
+                <a:solidFill>
+                  <a:srgbClr val="1B3A6B"/>
+                </a:solidFill>
+                <a:latin typeface="Arial"/>
+                <a:ea typeface="Arial"/>
+                <a:cs typeface="Arial"/>
+              </a:defRPr>
+            </a:lvl1pPr>
+          </a:lstStyle>
+          <a:p>
+            <a:pPr algn="r"/>
+            <a:fld id="{F7021451-1387-4CA6-816F-3879F97B5CBC}" type="slidenum">
+              <a:rPr b="1" lang="en-US"/>
+              <a:t>27</a:t>
+            </a:fld>
+            <a:endParaRPr lang="en-US"/>
           </a:p>
         </p:txBody>
       </p:sp>
@@ -16481,7 +17609,7 @@
         </p:blipFill>
         <p:spPr>
           <a:xfrm>
-            <a:off x="411480" y="6547104"/>
+            <a:off x="548640" y="6547104"/>
             <a:ext cx="274320" cy="274320"/>
           </a:xfrm>
           <a:prstGeom prst="rect">
@@ -16497,7 +17625,7 @@
         </p:nvSpPr>
         <p:spPr>
           <a:xfrm>
-            <a:off x="749808" y="6528816"/>
+            <a:off x="886968" y="6528816"/>
             <a:ext cx="6400800" cy="310896"/>
           </a:xfrm>
           <a:prstGeom prst="rect">
@@ -16537,7 +17665,7 @@
         <p:spPr>
           <a:xfrm>
             <a:off x="7132320" y="6528816"/>
-            <a:ext cx="4663440" cy="310896"/>
+            <a:ext cx="4023360" cy="310896"/>
           </a:xfrm>
           <a:prstGeom prst="rect">
             <a:avLst/>
@@ -16575,7 +17703,7 @@
         </p:nvSpPr>
         <p:spPr>
           <a:xfrm>
-            <a:off x="411480" y="384048"/>
+            <a:off x="548640" y="384048"/>
             <a:ext cx="82296" cy="658368"/>
           </a:xfrm>
           <a:prstGeom prst="rect">
@@ -16595,7 +17723,7 @@
         </p:nvSpPr>
         <p:spPr>
           <a:xfrm>
-            <a:off x="640080" y="292608"/>
+            <a:off x="777240" y="292608"/>
             <a:ext cx="10972800" cy="274320"/>
           </a:xfrm>
           <a:prstGeom prst="rect">
@@ -16634,8 +17762,8 @@
         </p:nvSpPr>
         <p:spPr>
           <a:xfrm>
-            <a:off x="640080" y="530352"/>
-            <a:ext cx="11155680" cy="566928"/>
+            <a:off x="777240" y="530352"/>
+            <a:ext cx="10881360" cy="566928"/>
           </a:xfrm>
           <a:prstGeom prst="rect">
             <a:avLst/>
@@ -16675,12 +17803,12 @@
         </p:nvSpPr>
         <p:spPr>
           <a:xfrm>
-            <a:off x="411480" y="1325880"/>
-            <a:ext cx="3642360" cy="4892040"/>
+            <a:off x="548640" y="1325880"/>
+            <a:ext cx="3544824" cy="4892040"/>
           </a:xfrm>
           <a:prstGeom prst="roundRect">
             <a:avLst>
-              <a:gd name="adj" fmla="val 2008"/>
+              <a:gd name="adj" fmla="val 2064"/>
             </a:avLst>
           </a:prstGeom>
           <a:solidFill>
@@ -16709,7 +17837,7 @@
         </p:nvSpPr>
         <p:spPr>
           <a:xfrm>
-            <a:off x="594360" y="1508760"/>
+            <a:off x="731520" y="1508760"/>
             <a:ext cx="457200" cy="457200"/>
           </a:xfrm>
           <a:prstGeom prst="ellipse">
@@ -16729,7 +17857,7 @@
         </p:nvSpPr>
         <p:spPr>
           <a:xfrm>
-            <a:off x="594360" y="1508760"/>
+            <a:off x="731520" y="1508760"/>
             <a:ext cx="457200" cy="457200"/>
           </a:xfrm>
           <a:prstGeom prst="rect">
@@ -16768,8 +17896,8 @@
         </p:nvSpPr>
         <p:spPr>
           <a:xfrm>
-            <a:off x="1188720" y="1435608"/>
-            <a:ext cx="2727960" cy="4672584"/>
+            <a:off x="1325880" y="1435608"/>
+            <a:ext cx="2630424" cy="4672584"/>
           </a:xfrm>
           <a:prstGeom prst="rect">
             <a:avLst/>
@@ -16809,12 +17937,12 @@
         </p:nvSpPr>
         <p:spPr>
           <a:xfrm>
-            <a:off x="4282440" y="1325880"/>
-            <a:ext cx="3642360" cy="4892040"/>
+            <a:off x="4322064" y="1325880"/>
+            <a:ext cx="3544824" cy="4892040"/>
           </a:xfrm>
           <a:prstGeom prst="roundRect">
             <a:avLst>
-              <a:gd name="adj" fmla="val 2008"/>
+              <a:gd name="adj" fmla="val 2064"/>
             </a:avLst>
           </a:prstGeom>
           <a:solidFill>
@@ -16843,7 +17971,7 @@
         </p:nvSpPr>
         <p:spPr>
           <a:xfrm>
-            <a:off x="4465320" y="1508760"/>
+            <a:off x="4504944" y="1508760"/>
             <a:ext cx="457200" cy="457200"/>
           </a:xfrm>
           <a:prstGeom prst="ellipse">
@@ -16863,7 +17991,7 @@
         </p:nvSpPr>
         <p:spPr>
           <a:xfrm>
-            <a:off x="4465320" y="1508760"/>
+            <a:off x="4504944" y="1508760"/>
             <a:ext cx="457200" cy="457200"/>
           </a:xfrm>
           <a:prstGeom prst="rect">
@@ -16902,8 +18030,8 @@
         </p:nvSpPr>
         <p:spPr>
           <a:xfrm>
-            <a:off x="5059680" y="1435608"/>
-            <a:ext cx="2727960" cy="4672584"/>
+            <a:off x="5099304" y="1435608"/>
+            <a:ext cx="2630424" cy="4672584"/>
           </a:xfrm>
           <a:prstGeom prst="rect">
             <a:avLst/>
@@ -16943,12 +18071,12 @@
         </p:nvSpPr>
         <p:spPr>
           <a:xfrm>
-            <a:off x="8153400" y="1325880"/>
-            <a:ext cx="3642360" cy="4892040"/>
+            <a:off x="8095488" y="1325880"/>
+            <a:ext cx="3544824" cy="4892040"/>
           </a:xfrm>
           <a:prstGeom prst="roundRect">
             <a:avLst>
-              <a:gd name="adj" fmla="val 2008"/>
+              <a:gd name="adj" fmla="val 2064"/>
             </a:avLst>
           </a:prstGeom>
           <a:solidFill>
@@ -16977,7 +18105,7 @@
         </p:nvSpPr>
         <p:spPr>
           <a:xfrm>
-            <a:off x="8336280" y="1508760"/>
+            <a:off x="8278368" y="1508760"/>
             <a:ext cx="457200" cy="457200"/>
           </a:xfrm>
           <a:prstGeom prst="ellipse">
@@ -16997,7 +18125,7 @@
         </p:nvSpPr>
         <p:spPr>
           <a:xfrm>
-            <a:off x="8336280" y="1508760"/>
+            <a:off x="8278368" y="1508760"/>
             <a:ext cx="457200" cy="457200"/>
           </a:xfrm>
           <a:prstGeom prst="rect">
@@ -17036,8 +18164,8 @@
         </p:nvSpPr>
         <p:spPr>
           <a:xfrm>
-            <a:off x="8930640" y="1435608"/>
-            <a:ext cx="2727960" cy="4672584"/>
+            <a:off x="8872728" y="1435608"/>
+            <a:ext cx="2630424" cy="4672584"/>
           </a:xfrm>
           <a:prstGeom prst="rect">
             <a:avLst/>
@@ -17066,6 +18194,54 @@
               <a:t>Custo de disponibilidade: 30/50/100 kWh</a:t>
             </a:r>
             <a:endParaRPr lang="en-US" sz="1800" dirty="0"/>
+          </a:p>
+        </p:txBody>
+      </p:sp>
+      <p:sp>
+        <p:nvSpPr>
+          <p:cNvPr id="25" name="Slide Number Placeholder 0"/>
+          <p:cNvSpPr>
+            <a:spLocks noGrp="1"/>
+          </p:cNvSpPr>
+          <p:nvPr>
+            <p:ph type="sldNum" sz="quarter" idx="4294967295"/>
+          </p:nvPr>
+        </p:nvSpPr>
+        <p:spPr>
+          <a:xfrm>
+            <a:off x="11292840" y="6556248"/>
+            <a:ext cx="548640" cy="256032"/>
+          </a:xfrm>
+          <a:prstGeom prst="rect">
+            <a:avLst/>
+          </a:prstGeom>
+          <a:extLst>
+            <a:ext uri="{C572A759-6A51-4108-AA02-DFA0A04FC94B}">
+              <ma14:wrappingTextBoxFlag xmlns:ma14="http://schemas.microsoft.com/office/mac/drawingml/2011/main" val="0"/>
+            </a:ext>
+          </a:extLst>
+        </p:spPr>
+        <p:txBody>
+          <a:bodyPr/>
+          <a:lstStyle>
+            <a:lvl1pPr>
+              <a:defRPr sz="900">
+                <a:solidFill>
+                  <a:srgbClr val="1B3A6B"/>
+                </a:solidFill>
+                <a:latin typeface="Arial"/>
+                <a:ea typeface="Arial"/>
+                <a:cs typeface="Arial"/>
+              </a:defRPr>
+            </a:lvl1pPr>
+          </a:lstStyle>
+          <a:p>
+            <a:pPr algn="r"/>
+            <a:fld id="{F7021451-1387-4CA6-816F-3879F97B5CBC}" type="slidenum">
+              <a:rPr b="1" lang="en-US"/>
+              <a:t>28</a:t>
+            </a:fld>
+            <a:endParaRPr lang="en-US"/>
           </a:p>
         </p:txBody>
       </p:sp>
@@ -17129,6 +18305,45 @@
         </p:nvSpPr>
         <p:spPr>
           <a:xfrm>
+            <a:off x="457200" y="548640"/>
+            <a:ext cx="3474720" cy="1737360"/>
+          </a:xfrm>
+          <a:prstGeom prst="rect">
+            <a:avLst/>
+          </a:prstGeom>
+          <a:noFill/>
+          <a:ln/>
+        </p:spPr>
+        <p:txBody>
+          <a:bodyPr wrap="square" rtlCol="0" anchor="ctr"/>
+          <a:lstStyle/>
+          <a:p>
+            <a:pPr indent="0" marL="0">
+              <a:buNone/>
+            </a:pPr>
+            <a:r>
+              <a:rPr lang="en-US" sz="11000" b="1" dirty="0">
+                <a:solidFill>
+                  <a:srgbClr val="11396F"/>
+                </a:solidFill>
+                <a:latin typeface="Arial" pitchFamily="34" charset="0"/>
+                <a:ea typeface="Arial" pitchFamily="34" charset="-122"/>
+                <a:cs typeface="Arial" pitchFamily="34" charset="-120"/>
+              </a:rPr>
+              <a:t>06</a:t>
+            </a:r>
+            <a:endParaRPr lang="en-US" sz="11000" dirty="0"/>
+          </a:p>
+        </p:txBody>
+      </p:sp>
+      <p:sp>
+        <p:nvSpPr>
+          <p:cNvPr id="4" name="Text 2"/>
+          <p:cNvSpPr/>
+          <p:nvPr/>
+        </p:nvSpPr>
+        <p:spPr>
+          <a:xfrm>
             <a:off x="548640" y="2194560"/>
             <a:ext cx="3291840" cy="548640"/>
           </a:xfrm>
@@ -17162,7 +18377,46 @@
       </p:sp>
       <p:sp>
         <p:nvSpPr>
-          <p:cNvPr id="4" name="Text 2"/>
+          <p:cNvPr id="5" name="Text 3"/>
+          <p:cNvSpPr/>
+          <p:nvPr/>
+        </p:nvSpPr>
+        <p:spPr>
+          <a:xfrm>
+            <a:off x="548640" y="3200400"/>
+            <a:ext cx="3383280" cy="457200"/>
+          </a:xfrm>
+          <a:prstGeom prst="rect">
+            <a:avLst/>
+          </a:prstGeom>
+          <a:noFill/>
+          <a:ln/>
+        </p:spPr>
+        <p:txBody>
+          <a:bodyPr wrap="square" rtlCol="0" anchor="ctr"/>
+          <a:lstStyle/>
+          <a:p>
+            <a:pPr indent="0" marL="0">
+              <a:buNone/>
+            </a:pPr>
+            <a:r>
+              <a:rPr lang="en-US" sz="1100" dirty="0">
+                <a:solidFill>
+                  <a:srgbClr val="C7D2E3"/>
+                </a:solidFill>
+                <a:latin typeface="Arial" pitchFamily="34" charset="0"/>
+                <a:ea typeface="Arial" pitchFamily="34" charset="-122"/>
+                <a:cs typeface="Arial" pitchFamily="34" charset="-120"/>
+              </a:rPr>
+              <a:t>M1 · Etapa 1 · Fundamentos</a:t>
+            </a:r>
+            <a:endParaRPr lang="en-US" sz="1100" dirty="0"/>
+          </a:p>
+        </p:txBody>
+      </p:sp>
+      <p:sp>
+        <p:nvSpPr>
+          <p:cNvPr id="6" name="Text 4"/>
           <p:cNvSpPr/>
           <p:nvPr/>
         </p:nvSpPr>
@@ -17201,7 +18455,7 @@
       </p:sp>
       <p:pic>
         <p:nvPicPr>
-          <p:cNvPr id="5" name="Image 0" descr="/www/wwwroot/rexar/gdsolar/docs/curso/slides/assets/logo-gdsolar.png">    </p:cNvPr>
+          <p:cNvPr id="7" name="Image 0" descr="/www/wwwroot/rexar/gdsolar/docs/curso/slides/assets/logo-gdsolar.png">    </p:cNvPr>
           <p:cNvPicPr>
             <a:picLocks noChangeAspect="1"/>
           </p:cNvPicPr>
@@ -17225,7 +18479,7 @@
       </p:pic>
       <p:sp>
         <p:nvSpPr>
-          <p:cNvPr id="6" name="Text 3"/>
+          <p:cNvPr id="8" name="Text 5"/>
           <p:cNvSpPr/>
           <p:nvPr/>
         </p:nvSpPr>
@@ -17266,7 +18520,7 @@
       </p:sp>
       <p:sp>
         <p:nvSpPr>
-          <p:cNvPr id="7" name="Text 4"/>
+          <p:cNvPr id="9" name="Text 6"/>
           <p:cNvSpPr/>
           <p:nvPr/>
         </p:nvSpPr>
@@ -17307,7 +18561,7 @@
       </p:sp>
       <p:sp>
         <p:nvSpPr>
-          <p:cNvPr id="8" name="Text 5"/>
+          <p:cNvPr id="10" name="Text 7"/>
           <p:cNvSpPr/>
           <p:nvPr/>
         </p:nvSpPr>
@@ -17486,7 +18740,7 @@
         </p:blipFill>
         <p:spPr>
           <a:xfrm>
-            <a:off x="411480" y="6547104"/>
+            <a:off x="548640" y="6547104"/>
             <a:ext cx="274320" cy="274320"/>
           </a:xfrm>
           <a:prstGeom prst="rect">
@@ -17502,7 +18756,7 @@
         </p:nvSpPr>
         <p:spPr>
           <a:xfrm>
-            <a:off x="749808" y="6528816"/>
+            <a:off x="886968" y="6528816"/>
             <a:ext cx="6400800" cy="310896"/>
           </a:xfrm>
           <a:prstGeom prst="rect">
@@ -17542,7 +18796,7 @@
         <p:spPr>
           <a:xfrm>
             <a:off x="7132320" y="6528816"/>
-            <a:ext cx="4663440" cy="310896"/>
+            <a:ext cx="4023360" cy="310896"/>
           </a:xfrm>
           <a:prstGeom prst="rect">
             <a:avLst/>
@@ -17580,7 +18834,7 @@
         </p:nvSpPr>
         <p:spPr>
           <a:xfrm>
-            <a:off x="411480" y="384048"/>
+            <a:off x="548640" y="384048"/>
             <a:ext cx="82296" cy="658368"/>
           </a:xfrm>
           <a:prstGeom prst="rect">
@@ -17600,7 +18854,7 @@
         </p:nvSpPr>
         <p:spPr>
           <a:xfrm>
-            <a:off x="640080" y="292608"/>
+            <a:off x="777240" y="292608"/>
             <a:ext cx="10972800" cy="274320"/>
           </a:xfrm>
           <a:prstGeom prst="rect">
@@ -17639,8 +18893,8 @@
         </p:nvSpPr>
         <p:spPr>
           <a:xfrm>
-            <a:off x="640080" y="530352"/>
-            <a:ext cx="11155680" cy="566928"/>
+            <a:off x="777240" y="530352"/>
+            <a:ext cx="10881360" cy="566928"/>
           </a:xfrm>
           <a:prstGeom prst="rect">
             <a:avLst/>
@@ -17680,12 +18934,12 @@
         </p:nvSpPr>
         <p:spPr>
           <a:xfrm>
-            <a:off x="411480" y="1325880"/>
-            <a:ext cx="3642360" cy="4892040"/>
+            <a:off x="548640" y="1325880"/>
+            <a:ext cx="3544824" cy="4892040"/>
           </a:xfrm>
           <a:prstGeom prst="roundRect">
             <a:avLst>
-              <a:gd name="adj" fmla="val 2008"/>
+              <a:gd name="adj" fmla="val 2064"/>
             </a:avLst>
           </a:prstGeom>
           <a:solidFill>
@@ -17714,7 +18968,7 @@
         </p:nvSpPr>
         <p:spPr>
           <a:xfrm>
-            <a:off x="594360" y="1508760"/>
+            <a:off x="731520" y="1508760"/>
             <a:ext cx="457200" cy="457200"/>
           </a:xfrm>
           <a:prstGeom prst="ellipse">
@@ -17734,7 +18988,7 @@
         </p:nvSpPr>
         <p:spPr>
           <a:xfrm>
-            <a:off x="594360" y="1508760"/>
+            <a:off x="731520" y="1508760"/>
             <a:ext cx="457200" cy="457200"/>
           </a:xfrm>
           <a:prstGeom prst="rect">
@@ -17773,8 +19027,8 @@
         </p:nvSpPr>
         <p:spPr>
           <a:xfrm>
-            <a:off x="1188720" y="1435608"/>
-            <a:ext cx="2727960" cy="4672584"/>
+            <a:off x="1325880" y="1435608"/>
+            <a:ext cx="2630424" cy="4672584"/>
           </a:xfrm>
           <a:prstGeom prst="rect">
             <a:avLst/>
@@ -17814,12 +19068,12 @@
         </p:nvSpPr>
         <p:spPr>
           <a:xfrm>
-            <a:off x="4282440" y="1325880"/>
-            <a:ext cx="3642360" cy="4892040"/>
+            <a:off x="4322064" y="1325880"/>
+            <a:ext cx="3544824" cy="4892040"/>
           </a:xfrm>
           <a:prstGeom prst="roundRect">
             <a:avLst>
-              <a:gd name="adj" fmla="val 2008"/>
+              <a:gd name="adj" fmla="val 2064"/>
             </a:avLst>
           </a:prstGeom>
           <a:solidFill>
@@ -17848,7 +19102,7 @@
         </p:nvSpPr>
         <p:spPr>
           <a:xfrm>
-            <a:off x="4465320" y="1508760"/>
+            <a:off x="4504944" y="1508760"/>
             <a:ext cx="457200" cy="457200"/>
           </a:xfrm>
           <a:prstGeom prst="ellipse">
@@ -17868,7 +19122,7 @@
         </p:nvSpPr>
         <p:spPr>
           <a:xfrm>
-            <a:off x="4465320" y="1508760"/>
+            <a:off x="4504944" y="1508760"/>
             <a:ext cx="457200" cy="457200"/>
           </a:xfrm>
           <a:prstGeom prst="rect">
@@ -17907,8 +19161,8 @@
         </p:nvSpPr>
         <p:spPr>
           <a:xfrm>
-            <a:off x="5059680" y="1435608"/>
-            <a:ext cx="2727960" cy="4672584"/>
+            <a:off x="5099304" y="1435608"/>
+            <a:ext cx="2630424" cy="4672584"/>
           </a:xfrm>
           <a:prstGeom prst="rect">
             <a:avLst/>
@@ -17948,12 +19202,12 @@
         </p:nvSpPr>
         <p:spPr>
           <a:xfrm>
-            <a:off x="8153400" y="1325880"/>
-            <a:ext cx="3642360" cy="4892040"/>
+            <a:off x="8095488" y="1325880"/>
+            <a:ext cx="3544824" cy="4892040"/>
           </a:xfrm>
           <a:prstGeom prst="roundRect">
             <a:avLst>
-              <a:gd name="adj" fmla="val 2008"/>
+              <a:gd name="adj" fmla="val 2064"/>
             </a:avLst>
           </a:prstGeom>
           <a:solidFill>
@@ -17982,7 +19236,7 @@
         </p:nvSpPr>
         <p:spPr>
           <a:xfrm>
-            <a:off x="8336280" y="1508760"/>
+            <a:off x="8278368" y="1508760"/>
             <a:ext cx="457200" cy="457200"/>
           </a:xfrm>
           <a:prstGeom prst="ellipse">
@@ -18002,7 +19256,7 @@
         </p:nvSpPr>
         <p:spPr>
           <a:xfrm>
-            <a:off x="8336280" y="1508760"/>
+            <a:off x="8278368" y="1508760"/>
             <a:ext cx="457200" cy="457200"/>
           </a:xfrm>
           <a:prstGeom prst="rect">
@@ -18041,8 +19295,8 @@
         </p:nvSpPr>
         <p:spPr>
           <a:xfrm>
-            <a:off x="8930640" y="1435608"/>
-            <a:ext cx="2727960" cy="4672584"/>
+            <a:off x="8872728" y="1435608"/>
+            <a:ext cx="2630424" cy="4672584"/>
           </a:xfrm>
           <a:prstGeom prst="rect">
             <a:avLst/>
@@ -18071,6 +19325,54 @@
               <a:t>kW = 1.000 W</a:t>
             </a:r>
             <a:endParaRPr lang="en-US" sz="1800" dirty="0"/>
+          </a:p>
+        </p:txBody>
+      </p:sp>
+      <p:sp>
+        <p:nvSpPr>
+          <p:cNvPr id="25" name="Slide Number Placeholder 0"/>
+          <p:cNvSpPr>
+            <a:spLocks noGrp="1"/>
+          </p:cNvSpPr>
+          <p:nvPr>
+            <p:ph type="sldNum" sz="quarter" idx="4294967295"/>
+          </p:nvPr>
+        </p:nvSpPr>
+        <p:spPr>
+          <a:xfrm>
+            <a:off x="11292840" y="6556248"/>
+            <a:ext cx="548640" cy="256032"/>
+          </a:xfrm>
+          <a:prstGeom prst="rect">
+            <a:avLst/>
+          </a:prstGeom>
+          <a:extLst>
+            <a:ext uri="{C572A759-6A51-4108-AA02-DFA0A04FC94B}">
+              <ma14:wrappingTextBoxFlag xmlns:ma14="http://schemas.microsoft.com/office/mac/drawingml/2011/main" val="0"/>
+            </a:ext>
+          </a:extLst>
+        </p:spPr>
+        <p:txBody>
+          <a:bodyPr/>
+          <a:lstStyle>
+            <a:lvl1pPr>
+              <a:defRPr sz="900">
+                <a:solidFill>
+                  <a:srgbClr val="1B3A6B"/>
+                </a:solidFill>
+                <a:latin typeface="Arial"/>
+                <a:ea typeface="Arial"/>
+                <a:cs typeface="Arial"/>
+              </a:defRPr>
+            </a:lvl1pPr>
+          </a:lstStyle>
+          <a:p>
+            <a:pPr algn="r"/>
+            <a:fld id="{F7021451-1387-4CA6-816F-3879F97B5CBC}" type="slidenum">
+              <a:rPr b="1" lang="en-US"/>
+              <a:t>3</a:t>
+            </a:fld>
+            <a:endParaRPr lang="en-US"/>
           </a:p>
         </p:txBody>
       </p:sp>
@@ -18147,7 +19449,7 @@
         </p:blipFill>
         <p:spPr>
           <a:xfrm>
-            <a:off x="411480" y="6547104"/>
+            <a:off x="548640" y="6547104"/>
             <a:ext cx="274320" cy="274320"/>
           </a:xfrm>
           <a:prstGeom prst="rect">
@@ -18163,7 +19465,7 @@
         </p:nvSpPr>
         <p:spPr>
           <a:xfrm>
-            <a:off x="749808" y="6528816"/>
+            <a:off x="886968" y="6528816"/>
             <a:ext cx="6400800" cy="310896"/>
           </a:xfrm>
           <a:prstGeom prst="rect">
@@ -18203,7 +19505,7 @@
         <p:spPr>
           <a:xfrm>
             <a:off x="7132320" y="6528816"/>
-            <a:ext cx="4663440" cy="310896"/>
+            <a:ext cx="4023360" cy="310896"/>
           </a:xfrm>
           <a:prstGeom prst="rect">
             <a:avLst/>
@@ -18241,7 +19543,7 @@
         </p:nvSpPr>
         <p:spPr>
           <a:xfrm>
-            <a:off x="411480" y="384048"/>
+            <a:off x="548640" y="384048"/>
             <a:ext cx="82296" cy="658368"/>
           </a:xfrm>
           <a:prstGeom prst="rect">
@@ -18261,7 +19563,7 @@
         </p:nvSpPr>
         <p:spPr>
           <a:xfrm>
-            <a:off x="640080" y="292608"/>
+            <a:off x="777240" y="292608"/>
             <a:ext cx="10972800" cy="274320"/>
           </a:xfrm>
           <a:prstGeom prst="rect">
@@ -18300,8 +19602,8 @@
         </p:nvSpPr>
         <p:spPr>
           <a:xfrm>
-            <a:off x="640080" y="530352"/>
-            <a:ext cx="11155680" cy="566928"/>
+            <a:off x="777240" y="530352"/>
+            <a:ext cx="10881360" cy="566928"/>
           </a:xfrm>
           <a:prstGeom prst="rect">
             <a:avLst/>
@@ -18341,12 +19643,12 @@
         </p:nvSpPr>
         <p:spPr>
           <a:xfrm>
-            <a:off x="411480" y="1325880"/>
-            <a:ext cx="3611880" cy="4937760"/>
+            <a:off x="548640" y="1325880"/>
+            <a:ext cx="3514344" cy="4937760"/>
           </a:xfrm>
           <a:prstGeom prst="roundRect">
             <a:avLst>
-              <a:gd name="adj" fmla="val 2025"/>
+              <a:gd name="adj" fmla="val 2082"/>
             </a:avLst>
           </a:prstGeom>
           <a:solidFill>
@@ -18375,8 +19677,8 @@
         </p:nvSpPr>
         <p:spPr>
           <a:xfrm>
-            <a:off x="411480" y="1325880"/>
-            <a:ext cx="3611880" cy="109728"/>
+            <a:off x="548640" y="1325880"/>
+            <a:ext cx="3514344" cy="109728"/>
           </a:xfrm>
           <a:prstGeom prst="rect">
             <a:avLst/>
@@ -18395,8 +19697,8 @@
         </p:nvSpPr>
         <p:spPr>
           <a:xfrm>
-            <a:off x="685800" y="1554480"/>
-            <a:ext cx="3063240" cy="685800"/>
+            <a:off x="822960" y="1554480"/>
+            <a:ext cx="2965704" cy="685800"/>
           </a:xfrm>
           <a:prstGeom prst="rect">
             <a:avLst/>
@@ -18436,8 +19738,8 @@
         </p:nvSpPr>
         <p:spPr>
           <a:xfrm>
-            <a:off x="685800" y="2286000"/>
-            <a:ext cx="3063240" cy="3749040"/>
+            <a:off x="822960" y="2286000"/>
+            <a:ext cx="2965704" cy="3749040"/>
           </a:xfrm>
           <a:prstGeom prst="rect">
             <a:avLst/>
@@ -18459,7 +19761,7 @@
               <a:buChar char="●"/>
             </a:pPr>
             <a:r>
-              <a:rPr lang="en-US" sz="1600" dirty="0">
+              <a:rPr lang="en-US" sz="1700" dirty="0">
                 <a:solidFill>
                   <a:srgbClr val="1F2937"/>
                 </a:solidFill>
@@ -18469,7 +19771,7 @@
               </a:rPr>
               <a:t>Tarifa (sem impostos) = TE + TUSD</a:t>
             </a:r>
-            <a:endParaRPr lang="en-US" sz="1600" dirty="0"/>
+            <a:endParaRPr lang="en-US" sz="1700" dirty="0"/>
           </a:p>
           <a:p>
             <a:pPr marL="342900" indent="-342900">
@@ -18480,7 +19782,7 @@
               <a:buChar char="●"/>
             </a:pPr>
             <a:r>
-              <a:rPr lang="en-US" sz="1600" dirty="0">
+              <a:rPr lang="en-US" sz="1700" dirty="0">
                 <a:solidFill>
                   <a:srgbClr val="1F2937"/>
                 </a:solidFill>
@@ -18490,7 +19792,7 @@
               </a:rPr>
               <a:t>Ex. ilustrativo: R$ 0,35 + R$ 0,45 = R$ 0,80/kWh</a:t>
             </a:r>
-            <a:endParaRPr lang="en-US" sz="1600" dirty="0"/>
+            <a:endParaRPr lang="en-US" sz="1700" dirty="0"/>
           </a:p>
         </p:txBody>
       </p:sp>
@@ -18502,12 +19804,12 @@
         </p:nvSpPr>
         <p:spPr>
           <a:xfrm>
-            <a:off x="4297680" y="1325880"/>
-            <a:ext cx="3611880" cy="4937760"/>
+            <a:off x="4337304" y="1325880"/>
+            <a:ext cx="3514344" cy="4937760"/>
           </a:xfrm>
           <a:prstGeom prst="roundRect">
             <a:avLst>
-              <a:gd name="adj" fmla="val 2025"/>
+              <a:gd name="adj" fmla="val 2082"/>
             </a:avLst>
           </a:prstGeom>
           <a:solidFill>
@@ -18536,8 +19838,8 @@
         </p:nvSpPr>
         <p:spPr>
           <a:xfrm>
-            <a:off x="4297680" y="1325880"/>
-            <a:ext cx="3611880" cy="109728"/>
+            <a:off x="4337304" y="1325880"/>
+            <a:ext cx="3514344" cy="109728"/>
           </a:xfrm>
           <a:prstGeom prst="rect">
             <a:avLst/>
@@ -18556,8 +19858,8 @@
         </p:nvSpPr>
         <p:spPr>
           <a:xfrm>
-            <a:off x="4572000" y="1554480"/>
-            <a:ext cx="3063240" cy="685800"/>
+            <a:off x="4611624" y="1554480"/>
+            <a:ext cx="2965704" cy="685800"/>
           </a:xfrm>
           <a:prstGeom prst="rect">
             <a:avLst/>
@@ -18597,8 +19899,8 @@
         </p:nvSpPr>
         <p:spPr>
           <a:xfrm>
-            <a:off x="4572000" y="2286000"/>
-            <a:ext cx="3063240" cy="3749040"/>
+            <a:off x="4611624" y="2286000"/>
+            <a:ext cx="2965704" cy="3749040"/>
           </a:xfrm>
           <a:prstGeom prst="rect">
             <a:avLst/>
@@ -18616,7 +19918,7 @@
               <a:buNone/>
             </a:pPr>
             <a:r>
-              <a:rPr lang="en-US" sz="1800" dirty="0">
+              <a:rPr lang="en-US" sz="2200" dirty="0">
                 <a:solidFill>
                   <a:srgbClr val="1F2937"/>
                 </a:solidFill>
@@ -18626,7 +19928,7 @@
               </a:rPr>
               <a:t>TUSD (ex.: R$ 0,45) = Fio A R$ 0,05 + Fio B R$ 0,20 + Encargos R$ 0,12 + Perdas R$ 0,08</a:t>
             </a:r>
-            <a:endParaRPr lang="en-US" sz="1800" dirty="0"/>
+            <a:endParaRPr lang="en-US" sz="2200" dirty="0"/>
           </a:p>
         </p:txBody>
       </p:sp>
@@ -18638,12 +19940,12 @@
         </p:nvSpPr>
         <p:spPr>
           <a:xfrm>
-            <a:off x="8183880" y="1325880"/>
-            <a:ext cx="3611880" cy="4937760"/>
+            <a:off x="8125968" y="1325880"/>
+            <a:ext cx="3514344" cy="4937760"/>
           </a:xfrm>
           <a:prstGeom prst="roundRect">
             <a:avLst>
-              <a:gd name="adj" fmla="val 2025"/>
+              <a:gd name="adj" fmla="val 2082"/>
             </a:avLst>
           </a:prstGeom>
           <a:solidFill>
@@ -18672,8 +19974,8 @@
         </p:nvSpPr>
         <p:spPr>
           <a:xfrm>
-            <a:off x="8183880" y="1325880"/>
-            <a:ext cx="3611880" cy="109728"/>
+            <a:off x="8125968" y="1325880"/>
+            <a:ext cx="3514344" cy="109728"/>
           </a:xfrm>
           <a:prstGeom prst="rect">
             <a:avLst/>
@@ -18692,8 +19994,8 @@
         </p:nvSpPr>
         <p:spPr>
           <a:xfrm>
-            <a:off x="8458200" y="1554480"/>
-            <a:ext cx="3063240" cy="685800"/>
+            <a:off x="8400288" y="1554480"/>
+            <a:ext cx="2965704" cy="685800"/>
           </a:xfrm>
           <a:prstGeom prst="rect">
             <a:avLst/>
@@ -18733,8 +20035,8 @@
         </p:nvSpPr>
         <p:spPr>
           <a:xfrm>
-            <a:off x="8458200" y="2286000"/>
-            <a:ext cx="3063240" cy="3749040"/>
+            <a:off x="8400288" y="2286000"/>
+            <a:ext cx="2965704" cy="3749040"/>
           </a:xfrm>
           <a:prstGeom prst="rect">
             <a:avLst/>
@@ -18756,7 +20058,7 @@
               <a:buChar char="●"/>
             </a:pPr>
             <a:r>
-              <a:rPr lang="en-US" sz="1600" dirty="0">
+              <a:rPr lang="en-US" sz="1700" dirty="0">
                 <a:solidFill>
                   <a:srgbClr val="1F2937"/>
                 </a:solidFill>
@@ -18766,7 +20068,7 @@
               </a:rPr>
               <a:t>Antes de 2023: crédito abatia (quase) tudo</a:t>
             </a:r>
-            <a:endParaRPr lang="en-US" sz="1600" dirty="0"/>
+            <a:endParaRPr lang="en-US" sz="1700" dirty="0"/>
           </a:p>
           <a:p>
             <a:pPr marL="342900" indent="-342900">
@@ -18777,7 +20079,7 @@
               <a:buChar char="●"/>
             </a:pPr>
             <a:r>
-              <a:rPr lang="en-US" sz="1600" dirty="0">
+              <a:rPr lang="en-US" sz="1700" dirty="0">
                 <a:solidFill>
                   <a:srgbClr val="1F2937"/>
                 </a:solidFill>
@@ -18787,7 +20089,55 @@
               </a:rPr>
               <a:t>Novos projetos: parte do Fio B volta a ser paga, subindo até 2028</a:t>
             </a:r>
-            <a:endParaRPr lang="en-US" sz="1600" dirty="0"/>
+            <a:endParaRPr lang="en-US" sz="1700" dirty="0"/>
+          </a:p>
+        </p:txBody>
+      </p:sp>
+      <p:sp>
+        <p:nvSpPr>
+          <p:cNvPr id="25" name="Slide Number Placeholder 0"/>
+          <p:cNvSpPr>
+            <a:spLocks noGrp="1"/>
+          </p:cNvSpPr>
+          <p:nvPr>
+            <p:ph type="sldNum" sz="quarter" idx="4294967295"/>
+          </p:nvPr>
+        </p:nvSpPr>
+        <p:spPr>
+          <a:xfrm>
+            <a:off x="11292840" y="6556248"/>
+            <a:ext cx="548640" cy="256032"/>
+          </a:xfrm>
+          <a:prstGeom prst="rect">
+            <a:avLst/>
+          </a:prstGeom>
+          <a:extLst>
+            <a:ext uri="{C572A759-6A51-4108-AA02-DFA0A04FC94B}">
+              <ma14:wrappingTextBoxFlag xmlns:ma14="http://schemas.microsoft.com/office/mac/drawingml/2011/main" val="0"/>
+            </a:ext>
+          </a:extLst>
+        </p:spPr>
+        <p:txBody>
+          <a:bodyPr/>
+          <a:lstStyle>
+            <a:lvl1pPr>
+              <a:defRPr sz="900">
+                <a:solidFill>
+                  <a:srgbClr val="1B3A6B"/>
+                </a:solidFill>
+                <a:latin typeface="Arial"/>
+                <a:ea typeface="Arial"/>
+                <a:cs typeface="Arial"/>
+              </a:defRPr>
+            </a:lvl1pPr>
+          </a:lstStyle>
+          <a:p>
+            <a:pPr algn="r"/>
+            <a:fld id="{F7021451-1387-4CA6-816F-3879F97B5CBC}" type="slidenum">
+              <a:rPr b="1" lang="en-US"/>
+              <a:t>30</a:t>
+            </a:fld>
+            <a:endParaRPr lang="en-US"/>
           </a:p>
         </p:txBody>
       </p:sp>
@@ -18864,7 +20214,7 @@
         </p:blipFill>
         <p:spPr>
           <a:xfrm>
-            <a:off x="411480" y="6547104"/>
+            <a:off x="548640" y="6547104"/>
             <a:ext cx="274320" cy="274320"/>
           </a:xfrm>
           <a:prstGeom prst="rect">
@@ -18880,7 +20230,7 @@
         </p:nvSpPr>
         <p:spPr>
           <a:xfrm>
-            <a:off x="749808" y="6528816"/>
+            <a:off x="886968" y="6528816"/>
             <a:ext cx="6400800" cy="310896"/>
           </a:xfrm>
           <a:prstGeom prst="rect">
@@ -18920,7 +20270,7 @@
         <p:spPr>
           <a:xfrm>
             <a:off x="7132320" y="6528816"/>
-            <a:ext cx="4663440" cy="310896"/>
+            <a:ext cx="4023360" cy="310896"/>
           </a:xfrm>
           <a:prstGeom prst="rect">
             <a:avLst/>
@@ -18958,7 +20308,7 @@
         </p:nvSpPr>
         <p:spPr>
           <a:xfrm>
-            <a:off x="411480" y="384048"/>
+            <a:off x="548640" y="384048"/>
             <a:ext cx="82296" cy="658368"/>
           </a:xfrm>
           <a:prstGeom prst="rect">
@@ -18978,7 +20328,7 @@
         </p:nvSpPr>
         <p:spPr>
           <a:xfrm>
-            <a:off x="640080" y="292608"/>
+            <a:off x="777240" y="292608"/>
             <a:ext cx="10972800" cy="274320"/>
           </a:xfrm>
           <a:prstGeom prst="rect">
@@ -19017,8 +20367,8 @@
         </p:nvSpPr>
         <p:spPr>
           <a:xfrm>
-            <a:off x="640080" y="530352"/>
-            <a:ext cx="11155680" cy="566928"/>
+            <a:off x="777240" y="530352"/>
+            <a:ext cx="10881360" cy="566928"/>
           </a:xfrm>
           <a:prstGeom prst="rect">
             <a:avLst/>
@@ -19058,8 +20408,8 @@
         </p:nvSpPr>
         <p:spPr>
           <a:xfrm>
-            <a:off x="411480" y="1325880"/>
-            <a:ext cx="11384280" cy="4937760"/>
+            <a:off x="548640" y="1325880"/>
+            <a:ext cx="11091672" cy="4937760"/>
           </a:xfrm>
           <a:prstGeom prst="roundRect">
             <a:avLst>
@@ -19085,7 +20435,7 @@
         </p:nvSpPr>
         <p:spPr>
           <a:xfrm>
-            <a:off x="594360" y="1508760"/>
+            <a:off x="731520" y="1508760"/>
             <a:ext cx="822960" cy="384048"/>
           </a:xfrm>
           <a:prstGeom prst="roundRect">
@@ -19107,7 +20457,7 @@
         </p:nvSpPr>
         <p:spPr>
           <a:xfrm>
-            <a:off x="594360" y="1508760"/>
+            <a:off x="731520" y="1508760"/>
             <a:ext cx="822960" cy="384048"/>
           </a:xfrm>
           <a:prstGeom prst="rect">
@@ -19146,8 +20496,8 @@
         </p:nvSpPr>
         <p:spPr>
           <a:xfrm>
-            <a:off x="1508760" y="1463040"/>
-            <a:ext cx="10149840" cy="502920"/>
+            <a:off x="1645920" y="1463040"/>
+            <a:ext cx="9857232" cy="502920"/>
           </a:xfrm>
           <a:prstGeom prst="rect">
             <a:avLst/>
@@ -19187,8 +20537,8 @@
         </p:nvSpPr>
         <p:spPr>
           <a:xfrm>
-            <a:off x="640080" y="2057400"/>
-            <a:ext cx="10927080" cy="4069080"/>
+            <a:off x="777240" y="2057400"/>
+            <a:ext cx="10634472" cy="4069080"/>
           </a:xfrm>
           <a:prstGeom prst="rect">
             <a:avLst/>
@@ -19217,6 +20567,54 @@
               <a:t>Fonte oficial: tarifas homologadas pela ANEEL para cada distribuidora</a:t>
             </a:r>
             <a:endParaRPr lang="en-US" sz="1500" dirty="0"/>
+          </a:p>
+        </p:txBody>
+      </p:sp>
+      <p:sp>
+        <p:nvSpPr>
+          <p:cNvPr id="25" name="Slide Number Placeholder 0"/>
+          <p:cNvSpPr>
+            <a:spLocks noGrp="1"/>
+          </p:cNvSpPr>
+          <p:nvPr>
+            <p:ph type="sldNum" sz="quarter" idx="4294967295"/>
+          </p:nvPr>
+        </p:nvSpPr>
+        <p:spPr>
+          <a:xfrm>
+            <a:off x="11292840" y="6556248"/>
+            <a:ext cx="548640" cy="256032"/>
+          </a:xfrm>
+          <a:prstGeom prst="rect">
+            <a:avLst/>
+          </a:prstGeom>
+          <a:extLst>
+            <a:ext uri="{C572A759-6A51-4108-AA02-DFA0A04FC94B}">
+              <ma14:wrappingTextBoxFlag xmlns:ma14="http://schemas.microsoft.com/office/mac/drawingml/2011/main" val="0"/>
+            </a:ext>
+          </a:extLst>
+        </p:spPr>
+        <p:txBody>
+          <a:bodyPr/>
+          <a:lstStyle>
+            <a:lvl1pPr>
+              <a:defRPr sz="900">
+                <a:solidFill>
+                  <a:srgbClr val="1B3A6B"/>
+                </a:solidFill>
+                <a:latin typeface="Arial"/>
+                <a:ea typeface="Arial"/>
+                <a:cs typeface="Arial"/>
+              </a:defRPr>
+            </a:lvl1pPr>
+          </a:lstStyle>
+          <a:p>
+            <a:pPr algn="r"/>
+            <a:fld id="{F7021451-1387-4CA6-816F-3879F97B5CBC}" type="slidenum">
+              <a:rPr b="1" lang="en-US"/>
+              <a:t>31</a:t>
+            </a:fld>
+            <a:endParaRPr lang="en-US"/>
           </a:p>
         </p:txBody>
       </p:sp>
@@ -19293,7 +20691,7 @@
         </p:blipFill>
         <p:spPr>
           <a:xfrm>
-            <a:off x="411480" y="6547104"/>
+            <a:off x="548640" y="6547104"/>
             <a:ext cx="274320" cy="274320"/>
           </a:xfrm>
           <a:prstGeom prst="rect">
@@ -19309,7 +20707,7 @@
         </p:nvSpPr>
         <p:spPr>
           <a:xfrm>
-            <a:off x="749808" y="6528816"/>
+            <a:off x="886968" y="6528816"/>
             <a:ext cx="6400800" cy="310896"/>
           </a:xfrm>
           <a:prstGeom prst="rect">
@@ -19349,7 +20747,7 @@
         <p:spPr>
           <a:xfrm>
             <a:off x="7132320" y="6528816"/>
-            <a:ext cx="4663440" cy="310896"/>
+            <a:ext cx="4023360" cy="310896"/>
           </a:xfrm>
           <a:prstGeom prst="rect">
             <a:avLst/>
@@ -19387,7 +20785,7 @@
         </p:nvSpPr>
         <p:spPr>
           <a:xfrm>
-            <a:off x="411480" y="384048"/>
+            <a:off x="548640" y="384048"/>
             <a:ext cx="82296" cy="658368"/>
           </a:xfrm>
           <a:prstGeom prst="rect">
@@ -19407,7 +20805,7 @@
         </p:nvSpPr>
         <p:spPr>
           <a:xfrm>
-            <a:off x="640080" y="292608"/>
+            <a:off x="777240" y="292608"/>
             <a:ext cx="10972800" cy="274320"/>
           </a:xfrm>
           <a:prstGeom prst="rect">
@@ -19446,8 +20844,8 @@
         </p:nvSpPr>
         <p:spPr>
           <a:xfrm>
-            <a:off x="640080" y="530352"/>
-            <a:ext cx="11155680" cy="566928"/>
+            <a:off x="777240" y="530352"/>
+            <a:ext cx="10881360" cy="566928"/>
           </a:xfrm>
           <a:prstGeom prst="rect">
             <a:avLst/>
@@ -19487,8 +20885,8 @@
         </p:nvSpPr>
         <p:spPr>
           <a:xfrm>
-            <a:off x="411480" y="1325880"/>
-            <a:ext cx="5577840" cy="2331720"/>
+            <a:off x="548640" y="1325880"/>
+            <a:ext cx="5431536" cy="2331720"/>
           </a:xfrm>
           <a:prstGeom prst="roundRect">
             <a:avLst>
@@ -19521,7 +20919,7 @@
         </p:nvSpPr>
         <p:spPr>
           <a:xfrm>
-            <a:off x="594360" y="1508760"/>
+            <a:off x="731520" y="1508760"/>
             <a:ext cx="457200" cy="457200"/>
           </a:xfrm>
           <a:prstGeom prst="ellipse">
@@ -19541,7 +20939,7 @@
         </p:nvSpPr>
         <p:spPr>
           <a:xfrm>
-            <a:off x="594360" y="1508760"/>
+            <a:off x="731520" y="1508760"/>
             <a:ext cx="457200" cy="457200"/>
           </a:xfrm>
           <a:prstGeom prst="rect">
@@ -19580,8 +20978,8 @@
         </p:nvSpPr>
         <p:spPr>
           <a:xfrm>
-            <a:off x="1188720" y="1435608"/>
-            <a:ext cx="4663440" cy="2112264"/>
+            <a:off x="1325880" y="1435608"/>
+            <a:ext cx="4517136" cy="2112264"/>
           </a:xfrm>
           <a:prstGeom prst="rect">
             <a:avLst/>
@@ -19621,8 +21019,8 @@
         </p:nvSpPr>
         <p:spPr>
           <a:xfrm>
-            <a:off x="6217920" y="1325880"/>
-            <a:ext cx="5577840" cy="2331720"/>
+            <a:off x="6208776" y="1325880"/>
+            <a:ext cx="5431536" cy="2331720"/>
           </a:xfrm>
           <a:prstGeom prst="roundRect">
             <a:avLst>
@@ -19655,7 +21053,7 @@
         </p:nvSpPr>
         <p:spPr>
           <a:xfrm>
-            <a:off x="6400800" y="1508760"/>
+            <a:off x="6391656" y="1508760"/>
             <a:ext cx="457200" cy="457200"/>
           </a:xfrm>
           <a:prstGeom prst="ellipse">
@@ -19675,7 +21073,7 @@
         </p:nvSpPr>
         <p:spPr>
           <a:xfrm>
-            <a:off x="6400800" y="1508760"/>
+            <a:off x="6391656" y="1508760"/>
             <a:ext cx="457200" cy="457200"/>
           </a:xfrm>
           <a:prstGeom prst="rect">
@@ -19714,8 +21112,8 @@
         </p:nvSpPr>
         <p:spPr>
           <a:xfrm>
-            <a:off x="6995160" y="1435608"/>
-            <a:ext cx="4663440" cy="2112264"/>
+            <a:off x="6986016" y="1435608"/>
+            <a:ext cx="4517136" cy="2112264"/>
           </a:xfrm>
           <a:prstGeom prst="rect">
             <a:avLst/>
@@ -19755,8 +21153,8 @@
         </p:nvSpPr>
         <p:spPr>
           <a:xfrm>
-            <a:off x="411480" y="3886200"/>
-            <a:ext cx="5577840" cy="2331720"/>
+            <a:off x="548640" y="3886200"/>
+            <a:ext cx="5431536" cy="2331720"/>
           </a:xfrm>
           <a:prstGeom prst="roundRect">
             <a:avLst>
@@ -19789,7 +21187,7 @@
         </p:nvSpPr>
         <p:spPr>
           <a:xfrm>
-            <a:off x="594360" y="4069080"/>
+            <a:off x="731520" y="4069080"/>
             <a:ext cx="457200" cy="457200"/>
           </a:xfrm>
           <a:prstGeom prst="ellipse">
@@ -19809,7 +21207,7 @@
         </p:nvSpPr>
         <p:spPr>
           <a:xfrm>
-            <a:off x="594360" y="4069080"/>
+            <a:off x="731520" y="4069080"/>
             <a:ext cx="457200" cy="457200"/>
           </a:xfrm>
           <a:prstGeom prst="rect">
@@ -19848,8 +21246,8 @@
         </p:nvSpPr>
         <p:spPr>
           <a:xfrm>
-            <a:off x="1188720" y="3995928"/>
-            <a:ext cx="4663440" cy="2112264"/>
+            <a:off x="1325880" y="3995928"/>
+            <a:ext cx="4517136" cy="2112264"/>
           </a:xfrm>
           <a:prstGeom prst="rect">
             <a:avLst/>
@@ -19889,8 +21287,8 @@
         </p:nvSpPr>
         <p:spPr>
           <a:xfrm>
-            <a:off x="6217920" y="3886200"/>
-            <a:ext cx="5577840" cy="2331720"/>
+            <a:off x="6208776" y="3886200"/>
+            <a:ext cx="5431536" cy="2331720"/>
           </a:xfrm>
           <a:prstGeom prst="roundRect">
             <a:avLst>
@@ -19923,7 +21321,7 @@
         </p:nvSpPr>
         <p:spPr>
           <a:xfrm>
-            <a:off x="6400800" y="4069080"/>
+            <a:off x="6391656" y="4069080"/>
             <a:ext cx="457200" cy="457200"/>
           </a:xfrm>
           <a:prstGeom prst="ellipse">
@@ -19943,7 +21341,7 @@
         </p:nvSpPr>
         <p:spPr>
           <a:xfrm>
-            <a:off x="6400800" y="4069080"/>
+            <a:off x="6391656" y="4069080"/>
             <a:ext cx="457200" cy="457200"/>
           </a:xfrm>
           <a:prstGeom prst="rect">
@@ -19982,8 +21380,8 @@
         </p:nvSpPr>
         <p:spPr>
           <a:xfrm>
-            <a:off x="6995160" y="3995928"/>
-            <a:ext cx="4663440" cy="2112264"/>
+            <a:off x="6986016" y="3995928"/>
+            <a:ext cx="4517136" cy="2112264"/>
           </a:xfrm>
           <a:prstGeom prst="rect">
             <a:avLst/>
@@ -20012,6 +21410,54 @@
               <a:t>Novos projetos de GD: parte do Fio B continua sendo paga</a:t>
             </a:r>
             <a:endParaRPr lang="en-US" sz="1800" dirty="0"/>
+          </a:p>
+        </p:txBody>
+      </p:sp>
+      <p:sp>
+        <p:nvSpPr>
+          <p:cNvPr id="25" name="Slide Number Placeholder 0"/>
+          <p:cNvSpPr>
+            <a:spLocks noGrp="1"/>
+          </p:cNvSpPr>
+          <p:nvPr>
+            <p:ph type="sldNum" sz="quarter" idx="4294967295"/>
+          </p:nvPr>
+        </p:nvSpPr>
+        <p:spPr>
+          <a:xfrm>
+            <a:off x="11292840" y="6556248"/>
+            <a:ext cx="548640" cy="256032"/>
+          </a:xfrm>
+          <a:prstGeom prst="rect">
+            <a:avLst/>
+          </a:prstGeom>
+          <a:extLst>
+            <a:ext uri="{C572A759-6A51-4108-AA02-DFA0A04FC94B}">
+              <ma14:wrappingTextBoxFlag xmlns:ma14="http://schemas.microsoft.com/office/mac/drawingml/2011/main" val="0"/>
+            </a:ext>
+          </a:extLst>
+        </p:spPr>
+        <p:txBody>
+          <a:bodyPr/>
+          <a:lstStyle>
+            <a:lvl1pPr>
+              <a:defRPr sz="900">
+                <a:solidFill>
+                  <a:srgbClr val="1B3A6B"/>
+                </a:solidFill>
+                <a:latin typeface="Arial"/>
+                <a:ea typeface="Arial"/>
+                <a:cs typeface="Arial"/>
+              </a:defRPr>
+            </a:lvl1pPr>
+          </a:lstStyle>
+          <a:p>
+            <a:pPr algn="r"/>
+            <a:fld id="{F7021451-1387-4CA6-816F-3879F97B5CBC}" type="slidenum">
+              <a:rPr b="1" lang="en-US"/>
+              <a:t>32</a:t>
+            </a:fld>
+            <a:endParaRPr lang="en-US"/>
           </a:p>
         </p:txBody>
       </p:sp>
@@ -20075,6 +21521,45 @@
         </p:nvSpPr>
         <p:spPr>
           <a:xfrm>
+            <a:off x="457200" y="548640"/>
+            <a:ext cx="3474720" cy="1737360"/>
+          </a:xfrm>
+          <a:prstGeom prst="rect">
+            <a:avLst/>
+          </a:prstGeom>
+          <a:noFill/>
+          <a:ln/>
+        </p:spPr>
+        <p:txBody>
+          <a:bodyPr wrap="square" rtlCol="0" anchor="ctr"/>
+          <a:lstStyle/>
+          <a:p>
+            <a:pPr indent="0" marL="0">
+              <a:buNone/>
+            </a:pPr>
+            <a:r>
+              <a:rPr lang="en-US" sz="11000" b="1" dirty="0">
+                <a:solidFill>
+                  <a:srgbClr val="11396F"/>
+                </a:solidFill>
+                <a:latin typeface="Arial" pitchFamily="34" charset="0"/>
+                <a:ea typeface="Arial" pitchFamily="34" charset="-122"/>
+                <a:cs typeface="Arial" pitchFamily="34" charset="-120"/>
+              </a:rPr>
+              <a:t>07</a:t>
+            </a:r>
+            <a:endParaRPr lang="en-US" sz="11000" dirty="0"/>
+          </a:p>
+        </p:txBody>
+      </p:sp>
+      <p:sp>
+        <p:nvSpPr>
+          <p:cNvPr id="4" name="Text 2"/>
+          <p:cNvSpPr/>
+          <p:nvPr/>
+        </p:nvSpPr>
+        <p:spPr>
+          <a:xfrm>
             <a:off x="548640" y="2194560"/>
             <a:ext cx="3291840" cy="548640"/>
           </a:xfrm>
@@ -20108,7 +21593,46 @@
       </p:sp>
       <p:sp>
         <p:nvSpPr>
-          <p:cNvPr id="4" name="Text 2"/>
+          <p:cNvPr id="5" name="Text 3"/>
+          <p:cNvSpPr/>
+          <p:nvPr/>
+        </p:nvSpPr>
+        <p:spPr>
+          <a:xfrm>
+            <a:off x="548640" y="3200400"/>
+            <a:ext cx="3383280" cy="457200"/>
+          </a:xfrm>
+          <a:prstGeom prst="rect">
+            <a:avLst/>
+          </a:prstGeom>
+          <a:noFill/>
+          <a:ln/>
+        </p:spPr>
+        <p:txBody>
+          <a:bodyPr wrap="square" rtlCol="0" anchor="ctr"/>
+          <a:lstStyle/>
+          <a:p>
+            <a:pPr indent="0" marL="0">
+              <a:buNone/>
+            </a:pPr>
+            <a:r>
+              <a:rPr lang="en-US" sz="1100" dirty="0">
+                <a:solidFill>
+                  <a:srgbClr val="C7D2E3"/>
+                </a:solidFill>
+                <a:latin typeface="Arial" pitchFamily="34" charset="0"/>
+                <a:ea typeface="Arial" pitchFamily="34" charset="-122"/>
+                <a:cs typeface="Arial" pitchFamily="34" charset="-120"/>
+              </a:rPr>
+              <a:t>M1 · Etapa 1 · Fundamentos</a:t>
+            </a:r>
+            <a:endParaRPr lang="en-US" sz="1100" dirty="0"/>
+          </a:p>
+        </p:txBody>
+      </p:sp>
+      <p:sp>
+        <p:nvSpPr>
+          <p:cNvPr id="6" name="Text 4"/>
           <p:cNvSpPr/>
           <p:nvPr/>
         </p:nvSpPr>
@@ -20147,7 +21671,7 @@
       </p:sp>
       <p:pic>
         <p:nvPicPr>
-          <p:cNvPr id="5" name="Image 0" descr="/www/wwwroot/rexar/gdsolar/docs/curso/slides/assets/logo-gdsolar.png">    </p:cNvPr>
+          <p:cNvPr id="7" name="Image 0" descr="/www/wwwroot/rexar/gdsolar/docs/curso/slides/assets/logo-gdsolar.png">    </p:cNvPr>
           <p:cNvPicPr>
             <a:picLocks noChangeAspect="1"/>
           </p:cNvPicPr>
@@ -20171,7 +21695,7 @@
       </p:pic>
       <p:sp>
         <p:nvSpPr>
-          <p:cNvPr id="6" name="Text 3"/>
+          <p:cNvPr id="8" name="Text 5"/>
           <p:cNvSpPr/>
           <p:nvPr/>
         </p:nvSpPr>
@@ -20212,7 +21736,7 @@
       </p:sp>
       <p:sp>
         <p:nvSpPr>
-          <p:cNvPr id="7" name="Text 4"/>
+          <p:cNvPr id="9" name="Text 6"/>
           <p:cNvSpPr/>
           <p:nvPr/>
         </p:nvSpPr>
@@ -20253,7 +21777,7 @@
       </p:sp>
       <p:sp>
         <p:nvSpPr>
-          <p:cNvPr id="8" name="Text 5"/>
+          <p:cNvPr id="10" name="Text 7"/>
           <p:cNvSpPr/>
           <p:nvPr/>
         </p:nvSpPr>
@@ -20432,7 +21956,7 @@
         </p:blipFill>
         <p:spPr>
           <a:xfrm>
-            <a:off x="411480" y="6547104"/>
+            <a:off x="548640" y="6547104"/>
             <a:ext cx="274320" cy="274320"/>
           </a:xfrm>
           <a:prstGeom prst="rect">
@@ -20448,7 +21972,7 @@
         </p:nvSpPr>
         <p:spPr>
           <a:xfrm>
-            <a:off x="749808" y="6528816"/>
+            <a:off x="886968" y="6528816"/>
             <a:ext cx="6400800" cy="310896"/>
           </a:xfrm>
           <a:prstGeom prst="rect">
@@ -20488,7 +22012,7 @@
         <p:spPr>
           <a:xfrm>
             <a:off x="7132320" y="6528816"/>
-            <a:ext cx="4663440" cy="310896"/>
+            <a:ext cx="4023360" cy="310896"/>
           </a:xfrm>
           <a:prstGeom prst="rect">
             <a:avLst/>
@@ -20526,7 +22050,7 @@
         </p:nvSpPr>
         <p:spPr>
           <a:xfrm>
-            <a:off x="411480" y="384048"/>
+            <a:off x="548640" y="384048"/>
             <a:ext cx="82296" cy="658368"/>
           </a:xfrm>
           <a:prstGeom prst="rect">
@@ -20546,7 +22070,7 @@
         </p:nvSpPr>
         <p:spPr>
           <a:xfrm>
-            <a:off x="640080" y="292608"/>
+            <a:off x="777240" y="292608"/>
             <a:ext cx="10972800" cy="274320"/>
           </a:xfrm>
           <a:prstGeom prst="rect">
@@ -20585,8 +22109,8 @@
         </p:nvSpPr>
         <p:spPr>
           <a:xfrm>
-            <a:off x="640080" y="530352"/>
-            <a:ext cx="11155680" cy="566928"/>
+            <a:off x="777240" y="530352"/>
+            <a:ext cx="10881360" cy="566928"/>
           </a:xfrm>
           <a:prstGeom prst="rect">
             <a:avLst/>
@@ -20626,8 +22150,8 @@
         </p:nvSpPr>
         <p:spPr>
           <a:xfrm>
-            <a:off x="411480" y="1325880"/>
-            <a:ext cx="5554980" cy="4937760"/>
+            <a:off x="548640" y="1325880"/>
+            <a:ext cx="5408676" cy="4937760"/>
           </a:xfrm>
           <a:prstGeom prst="roundRect">
             <a:avLst>
@@ -20660,8 +22184,8 @@
         </p:nvSpPr>
         <p:spPr>
           <a:xfrm>
-            <a:off x="411480" y="1325880"/>
-            <a:ext cx="5554980" cy="109728"/>
+            <a:off x="548640" y="1325880"/>
+            <a:ext cx="5408676" cy="109728"/>
           </a:xfrm>
           <a:prstGeom prst="rect">
             <a:avLst/>
@@ -20680,8 +22204,8 @@
         </p:nvSpPr>
         <p:spPr>
           <a:xfrm>
-            <a:off x="685800" y="1554480"/>
-            <a:ext cx="5006340" cy="685800"/>
+            <a:off x="822960" y="1554480"/>
+            <a:ext cx="4860036" cy="685800"/>
           </a:xfrm>
           <a:prstGeom prst="rect">
             <a:avLst/>
@@ -20721,8 +22245,8 @@
         </p:nvSpPr>
         <p:spPr>
           <a:xfrm>
-            <a:off x="685800" y="2286000"/>
-            <a:ext cx="5006340" cy="3749040"/>
+            <a:off x="822960" y="2286000"/>
+            <a:ext cx="4860036" cy="3749040"/>
           </a:xfrm>
           <a:prstGeom prst="rect">
             <a:avLst/>
@@ -20829,8 +22353,8 @@
         </p:nvSpPr>
         <p:spPr>
           <a:xfrm>
-            <a:off x="6240780" y="1325880"/>
-            <a:ext cx="5554980" cy="4937760"/>
+            <a:off x="6231636" y="1325880"/>
+            <a:ext cx="5408676" cy="4937760"/>
           </a:xfrm>
           <a:prstGeom prst="roundRect">
             <a:avLst>
@@ -20863,8 +22387,8 @@
         </p:nvSpPr>
         <p:spPr>
           <a:xfrm>
-            <a:off x="6240780" y="1325880"/>
-            <a:ext cx="5554980" cy="109728"/>
+            <a:off x="6231636" y="1325880"/>
+            <a:ext cx="5408676" cy="109728"/>
           </a:xfrm>
           <a:prstGeom prst="rect">
             <a:avLst/>
@@ -20883,8 +22407,8 @@
         </p:nvSpPr>
         <p:spPr>
           <a:xfrm>
-            <a:off x="6515100" y="1554480"/>
-            <a:ext cx="5006340" cy="685800"/>
+            <a:off x="6505956" y="1554480"/>
+            <a:ext cx="4860036" cy="685800"/>
           </a:xfrm>
           <a:prstGeom prst="rect">
             <a:avLst/>
@@ -20924,8 +22448,8 @@
         </p:nvSpPr>
         <p:spPr>
           <a:xfrm>
-            <a:off x="6515100" y="2286000"/>
-            <a:ext cx="5006340" cy="3749040"/>
+            <a:off x="6505956" y="2286000"/>
+            <a:ext cx="4860036" cy="3749040"/>
           </a:xfrm>
           <a:prstGeom prst="rect">
             <a:avLst/>
@@ -20947,7 +22471,7 @@
               <a:buChar char="●"/>
             </a:pPr>
             <a:r>
-              <a:rPr lang="en-US" sz="1600" dirty="0">
+              <a:rPr lang="en-US" sz="1700" dirty="0">
                 <a:solidFill>
                   <a:srgbClr val="1F2937"/>
                 </a:solidFill>
@@ -20957,7 +22481,7 @@
               </a:rPr>
               <a:t>ICMS — estadual · alíquota do estado</a:t>
             </a:r>
-            <a:endParaRPr lang="en-US" sz="1600" dirty="0"/>
+            <a:endParaRPr lang="en-US" sz="1700" dirty="0"/>
           </a:p>
           <a:p>
             <a:pPr marL="342900" indent="-342900">
@@ -20968,7 +22492,7 @@
               <a:buChar char="●"/>
             </a:pPr>
             <a:r>
-              <a:rPr lang="en-US" sz="1600" dirty="0">
+              <a:rPr lang="en-US" sz="1700" dirty="0">
                 <a:solidFill>
                   <a:srgbClr val="1F2937"/>
                 </a:solidFill>
@@ -20978,7 +22502,7 @@
               </a:rPr>
               <a:t>PIS/COFINS — federais · variam mês a mês</a:t>
             </a:r>
-            <a:endParaRPr lang="en-US" sz="1600" dirty="0"/>
+            <a:endParaRPr lang="en-US" sz="1700" dirty="0"/>
           </a:p>
           <a:p>
             <a:pPr marL="342900" indent="-342900">
@@ -20989,7 +22513,7 @@
               <a:buChar char="●"/>
             </a:pPr>
             <a:r>
-              <a:rPr lang="en-US" sz="1600" dirty="0">
+              <a:rPr lang="en-US" sz="1700" dirty="0">
                 <a:solidFill>
                   <a:srgbClr val="1F2937"/>
                 </a:solidFill>
@@ -20999,7 +22523,55 @@
               </a:rPr>
               <a:t>CIP/COSIP — municipal · iluminação pública</a:t>
             </a:r>
-            <a:endParaRPr lang="en-US" sz="1600" dirty="0"/>
+            <a:endParaRPr lang="en-US" sz="1700" dirty="0"/>
+          </a:p>
+        </p:txBody>
+      </p:sp>
+      <p:sp>
+        <p:nvSpPr>
+          <p:cNvPr id="25" name="Slide Number Placeholder 0"/>
+          <p:cNvSpPr>
+            <a:spLocks noGrp="1"/>
+          </p:cNvSpPr>
+          <p:nvPr>
+            <p:ph type="sldNum" sz="quarter" idx="4294967295"/>
+          </p:nvPr>
+        </p:nvSpPr>
+        <p:spPr>
+          <a:xfrm>
+            <a:off x="11292840" y="6556248"/>
+            <a:ext cx="548640" cy="256032"/>
+          </a:xfrm>
+          <a:prstGeom prst="rect">
+            <a:avLst/>
+          </a:prstGeom>
+          <a:extLst>
+            <a:ext uri="{C572A759-6A51-4108-AA02-DFA0A04FC94B}">
+              <ma14:wrappingTextBoxFlag xmlns:ma14="http://schemas.microsoft.com/office/mac/drawingml/2011/main" val="0"/>
+            </a:ext>
+          </a:extLst>
+        </p:spPr>
+        <p:txBody>
+          <a:bodyPr/>
+          <a:lstStyle>
+            <a:lvl1pPr>
+              <a:defRPr sz="900">
+                <a:solidFill>
+                  <a:srgbClr val="1B3A6B"/>
+                </a:solidFill>
+                <a:latin typeface="Arial"/>
+                <a:ea typeface="Arial"/>
+                <a:cs typeface="Arial"/>
+              </a:defRPr>
+            </a:lvl1pPr>
+          </a:lstStyle>
+          <a:p>
+            <a:pPr algn="r"/>
+            <a:fld id="{F7021451-1387-4CA6-816F-3879F97B5CBC}" type="slidenum">
+              <a:rPr b="1" lang="en-US"/>
+              <a:t>34</a:t>
+            </a:fld>
+            <a:endParaRPr lang="en-US"/>
           </a:p>
         </p:txBody>
       </p:sp>
@@ -21076,7 +22648,7 @@
         </p:blipFill>
         <p:spPr>
           <a:xfrm>
-            <a:off x="411480" y="6547104"/>
+            <a:off x="548640" y="6547104"/>
             <a:ext cx="274320" cy="274320"/>
           </a:xfrm>
           <a:prstGeom prst="rect">
@@ -21092,7 +22664,7 @@
         </p:nvSpPr>
         <p:spPr>
           <a:xfrm>
-            <a:off x="749808" y="6528816"/>
+            <a:off x="886968" y="6528816"/>
             <a:ext cx="6400800" cy="310896"/>
           </a:xfrm>
           <a:prstGeom prst="rect">
@@ -21132,7 +22704,7 @@
         <p:spPr>
           <a:xfrm>
             <a:off x="7132320" y="6528816"/>
-            <a:ext cx="4663440" cy="310896"/>
+            <a:ext cx="4023360" cy="310896"/>
           </a:xfrm>
           <a:prstGeom prst="rect">
             <a:avLst/>
@@ -21170,7 +22742,7 @@
         </p:nvSpPr>
         <p:spPr>
           <a:xfrm>
-            <a:off x="411480" y="384048"/>
+            <a:off x="548640" y="384048"/>
             <a:ext cx="82296" cy="658368"/>
           </a:xfrm>
           <a:prstGeom prst="rect">
@@ -21190,7 +22762,7 @@
         </p:nvSpPr>
         <p:spPr>
           <a:xfrm>
-            <a:off x="640080" y="292608"/>
+            <a:off x="777240" y="292608"/>
             <a:ext cx="10972800" cy="274320"/>
           </a:xfrm>
           <a:prstGeom prst="rect">
@@ -21229,8 +22801,8 @@
         </p:nvSpPr>
         <p:spPr>
           <a:xfrm>
-            <a:off x="640080" y="530352"/>
-            <a:ext cx="11155680" cy="566928"/>
+            <a:off x="777240" y="530352"/>
+            <a:ext cx="10881360" cy="566928"/>
           </a:xfrm>
           <a:prstGeom prst="rect">
             <a:avLst/>
@@ -21270,8 +22842,8 @@
         </p:nvSpPr>
         <p:spPr>
           <a:xfrm>
-            <a:off x="411480" y="1325880"/>
-            <a:ext cx="11384280" cy="4937760"/>
+            <a:off x="548640" y="1325880"/>
+            <a:ext cx="11091672" cy="4937760"/>
           </a:xfrm>
           <a:prstGeom prst="roundRect">
             <a:avLst>
@@ -21292,8 +22864,8 @@
         </p:nvSpPr>
         <p:spPr>
           <a:xfrm>
-            <a:off x="777240" y="1554480"/>
-            <a:ext cx="10652760" cy="4480560"/>
+            <a:off x="914400" y="1554480"/>
+            <a:ext cx="10360152" cy="4480560"/>
           </a:xfrm>
           <a:prstGeom prst="rect">
             <a:avLst/>
@@ -21314,7 +22886,7 @@
               <a:buNone/>
             </a:pPr>
             <a:r>
-              <a:rPr lang="en-US" sz="1800" b="1" dirty="0">
+              <a:rPr lang="en-US" sz="2400" b="1" dirty="0">
                 <a:solidFill>
                   <a:srgbClr val="FFFFFF"/>
                 </a:solidFill>
@@ -21324,7 +22896,7 @@
               </a:rPr>
               <a:t>Tarifa com impostos = Tarifa sem impostos ÷ (1 − (ICMS + PIS + COFINS))</a:t>
             </a:r>
-            <a:endParaRPr lang="en-US" sz="1800" dirty="0"/>
+            <a:endParaRPr lang="en-US" sz="2400" dirty="0"/>
           </a:p>
           <a:p>
             <a:pPr indent="0" marL="0">
@@ -21334,7 +22906,7 @@
               <a:buNone/>
             </a:pPr>
             <a:r>
-              <a:rPr lang="en-US" sz="1800" b="1" dirty="0">
+              <a:rPr lang="en-US" sz="2400" b="1" dirty="0">
                 <a:solidFill>
                   <a:srgbClr val="F7A23B"/>
                 </a:solidFill>
@@ -21344,7 +22916,55 @@
               </a:rPr>
               <a:t>Ex.: R$ 0,80 ÷ (1 − (0,18 + 0,05)) = R$ 0,80 ÷ 0,77 ≈ R$ 1,04/kWh</a:t>
             </a:r>
-            <a:endParaRPr lang="en-US" sz="1800" dirty="0"/>
+            <a:endParaRPr lang="en-US" sz="2400" dirty="0"/>
+          </a:p>
+        </p:txBody>
+      </p:sp>
+      <p:sp>
+        <p:nvSpPr>
+          <p:cNvPr id="25" name="Slide Number Placeholder 0"/>
+          <p:cNvSpPr>
+            <a:spLocks noGrp="1"/>
+          </p:cNvSpPr>
+          <p:nvPr>
+            <p:ph type="sldNum" sz="quarter" idx="4294967295"/>
+          </p:nvPr>
+        </p:nvSpPr>
+        <p:spPr>
+          <a:xfrm>
+            <a:off x="11292840" y="6556248"/>
+            <a:ext cx="548640" cy="256032"/>
+          </a:xfrm>
+          <a:prstGeom prst="rect">
+            <a:avLst/>
+          </a:prstGeom>
+          <a:extLst>
+            <a:ext uri="{C572A759-6A51-4108-AA02-DFA0A04FC94B}">
+              <ma14:wrappingTextBoxFlag xmlns:ma14="http://schemas.microsoft.com/office/mac/drawingml/2011/main" val="0"/>
+            </a:ext>
+          </a:extLst>
+        </p:spPr>
+        <p:txBody>
+          <a:bodyPr/>
+          <a:lstStyle>
+            <a:lvl1pPr>
+              <a:defRPr sz="900">
+                <a:solidFill>
+                  <a:srgbClr val="1B3A6B"/>
+                </a:solidFill>
+                <a:latin typeface="Arial"/>
+                <a:ea typeface="Arial"/>
+                <a:cs typeface="Arial"/>
+              </a:defRPr>
+            </a:lvl1pPr>
+          </a:lstStyle>
+          <a:p>
+            <a:pPr algn="r"/>
+            <a:fld id="{F7021451-1387-4CA6-816F-3879F97B5CBC}" type="slidenum">
+              <a:rPr b="1" lang="en-US"/>
+              <a:t>35</a:t>
+            </a:fld>
+            <a:endParaRPr lang="en-US"/>
           </a:p>
         </p:txBody>
       </p:sp>
@@ -21421,7 +23041,7 @@
         </p:blipFill>
         <p:spPr>
           <a:xfrm>
-            <a:off x="411480" y="6547104"/>
+            <a:off x="548640" y="6547104"/>
             <a:ext cx="274320" cy="274320"/>
           </a:xfrm>
           <a:prstGeom prst="rect">
@@ -21437,7 +23057,7 @@
         </p:nvSpPr>
         <p:spPr>
           <a:xfrm>
-            <a:off x="749808" y="6528816"/>
+            <a:off x="886968" y="6528816"/>
             <a:ext cx="6400800" cy="310896"/>
           </a:xfrm>
           <a:prstGeom prst="rect">
@@ -21477,7 +23097,7 @@
         <p:spPr>
           <a:xfrm>
             <a:off x="7132320" y="6528816"/>
-            <a:ext cx="4663440" cy="310896"/>
+            <a:ext cx="4023360" cy="310896"/>
           </a:xfrm>
           <a:prstGeom prst="rect">
             <a:avLst/>
@@ -21515,7 +23135,7 @@
         </p:nvSpPr>
         <p:spPr>
           <a:xfrm>
-            <a:off x="411480" y="384048"/>
+            <a:off x="548640" y="384048"/>
             <a:ext cx="82296" cy="658368"/>
           </a:xfrm>
           <a:prstGeom prst="rect">
@@ -21535,7 +23155,7 @@
         </p:nvSpPr>
         <p:spPr>
           <a:xfrm>
-            <a:off x="640080" y="292608"/>
+            <a:off x="777240" y="292608"/>
             <a:ext cx="10972800" cy="274320"/>
           </a:xfrm>
           <a:prstGeom prst="rect">
@@ -21574,8 +23194,8 @@
         </p:nvSpPr>
         <p:spPr>
           <a:xfrm>
-            <a:off x="640080" y="530352"/>
-            <a:ext cx="11155680" cy="566928"/>
+            <a:off x="777240" y="530352"/>
+            <a:ext cx="10881360" cy="566928"/>
           </a:xfrm>
           <a:prstGeom prst="rect">
             <a:avLst/>
@@ -21615,8 +23235,8 @@
         </p:nvSpPr>
         <p:spPr>
           <a:xfrm>
-            <a:off x="411480" y="1325880"/>
-            <a:ext cx="11384280" cy="4892040"/>
+            <a:off x="548640" y="1325880"/>
+            <a:ext cx="11091672" cy="4892040"/>
           </a:xfrm>
           <a:prstGeom prst="roundRect">
             <a:avLst>
@@ -21649,7 +23269,7 @@
         </p:nvSpPr>
         <p:spPr>
           <a:xfrm>
-            <a:off x="594360" y="1508760"/>
+            <a:off x="731520" y="1508760"/>
             <a:ext cx="457200" cy="457200"/>
           </a:xfrm>
           <a:prstGeom prst="ellipse">
@@ -21669,7 +23289,7 @@
         </p:nvSpPr>
         <p:spPr>
           <a:xfrm>
-            <a:off x="594360" y="1508760"/>
+            <a:off x="731520" y="1508760"/>
             <a:ext cx="457200" cy="457200"/>
           </a:xfrm>
           <a:prstGeom prst="rect">
@@ -21708,8 +23328,8 @@
         </p:nvSpPr>
         <p:spPr>
           <a:xfrm>
-            <a:off x="1188720" y="1435608"/>
-            <a:ext cx="10469880" cy="4672584"/>
+            <a:off x="1325880" y="1435608"/>
+            <a:ext cx="10177272" cy="4672584"/>
           </a:xfrm>
           <a:prstGeom prst="rect">
             <a:avLst/>
@@ -21738,6 +23358,54 @@
               <a:t>Tributos sobre a energia compensada: regras específicas — estudaremos no M11</a:t>
             </a:r>
             <a:endParaRPr lang="en-US" sz="1800" dirty="0"/>
+          </a:p>
+        </p:txBody>
+      </p:sp>
+      <p:sp>
+        <p:nvSpPr>
+          <p:cNvPr id="25" name="Slide Number Placeholder 0"/>
+          <p:cNvSpPr>
+            <a:spLocks noGrp="1"/>
+          </p:cNvSpPr>
+          <p:nvPr>
+            <p:ph type="sldNum" sz="quarter" idx="4294967295"/>
+          </p:nvPr>
+        </p:nvSpPr>
+        <p:spPr>
+          <a:xfrm>
+            <a:off x="11292840" y="6556248"/>
+            <a:ext cx="548640" cy="256032"/>
+          </a:xfrm>
+          <a:prstGeom prst="rect">
+            <a:avLst/>
+          </a:prstGeom>
+          <a:extLst>
+            <a:ext uri="{C572A759-6A51-4108-AA02-DFA0A04FC94B}">
+              <ma14:wrappingTextBoxFlag xmlns:ma14="http://schemas.microsoft.com/office/mac/drawingml/2011/main" val="0"/>
+            </a:ext>
+          </a:extLst>
+        </p:spPr>
+        <p:txBody>
+          <a:bodyPr/>
+          <a:lstStyle>
+            <a:lvl1pPr>
+              <a:defRPr sz="900">
+                <a:solidFill>
+                  <a:srgbClr val="1B3A6B"/>
+                </a:solidFill>
+                <a:latin typeface="Arial"/>
+                <a:ea typeface="Arial"/>
+                <a:cs typeface="Arial"/>
+              </a:defRPr>
+            </a:lvl1pPr>
+          </a:lstStyle>
+          <a:p>
+            <a:pPr algn="r"/>
+            <a:fld id="{F7021451-1387-4CA6-816F-3879F97B5CBC}" type="slidenum">
+              <a:rPr b="1" lang="en-US"/>
+              <a:t>36</a:t>
+            </a:fld>
+            <a:endParaRPr lang="en-US"/>
           </a:p>
         </p:txBody>
       </p:sp>
@@ -21814,7 +23482,7 @@
         </p:blipFill>
         <p:spPr>
           <a:xfrm>
-            <a:off x="411480" y="6547104"/>
+            <a:off x="548640" y="6547104"/>
             <a:ext cx="274320" cy="274320"/>
           </a:xfrm>
           <a:prstGeom prst="rect">
@@ -21830,7 +23498,7 @@
         </p:nvSpPr>
         <p:spPr>
           <a:xfrm>
-            <a:off x="749808" y="6528816"/>
+            <a:off x="886968" y="6528816"/>
             <a:ext cx="6400800" cy="310896"/>
           </a:xfrm>
           <a:prstGeom prst="rect">
@@ -21870,7 +23538,7 @@
         <p:spPr>
           <a:xfrm>
             <a:off x="7132320" y="6528816"/>
-            <a:ext cx="4663440" cy="310896"/>
+            <a:ext cx="4023360" cy="310896"/>
           </a:xfrm>
           <a:prstGeom prst="rect">
             <a:avLst/>
@@ -21908,7 +23576,7 @@
         </p:nvSpPr>
         <p:spPr>
           <a:xfrm>
-            <a:off x="411480" y="384048"/>
+            <a:off x="548640" y="384048"/>
             <a:ext cx="82296" cy="658368"/>
           </a:xfrm>
           <a:prstGeom prst="rect">
@@ -21928,7 +23596,7 @@
         </p:nvSpPr>
         <p:spPr>
           <a:xfrm>
-            <a:off x="640080" y="292608"/>
+            <a:off x="777240" y="292608"/>
             <a:ext cx="10972800" cy="274320"/>
           </a:xfrm>
           <a:prstGeom prst="rect">
@@ -21967,8 +23635,8 @@
         </p:nvSpPr>
         <p:spPr>
           <a:xfrm>
-            <a:off x="640080" y="530352"/>
-            <a:ext cx="11155680" cy="566928"/>
+            <a:off x="777240" y="530352"/>
+            <a:ext cx="10881360" cy="566928"/>
           </a:xfrm>
           <a:prstGeom prst="rect">
             <a:avLst/>
@@ -22008,8 +23676,8 @@
         </p:nvSpPr>
         <p:spPr>
           <a:xfrm>
-            <a:off x="411480" y="1325880"/>
-            <a:ext cx="11384280" cy="4892040"/>
+            <a:off x="548640" y="1325880"/>
+            <a:ext cx="11091672" cy="4892040"/>
           </a:xfrm>
           <a:prstGeom prst="roundRect">
             <a:avLst>
@@ -22042,7 +23710,7 @@
         </p:nvSpPr>
         <p:spPr>
           <a:xfrm>
-            <a:off x="594360" y="1508760"/>
+            <a:off x="731520" y="1508760"/>
             <a:ext cx="457200" cy="457200"/>
           </a:xfrm>
           <a:prstGeom prst="ellipse">
@@ -22062,7 +23730,7 @@
         </p:nvSpPr>
         <p:spPr>
           <a:xfrm>
-            <a:off x="594360" y="1508760"/>
+            <a:off x="731520" y="1508760"/>
             <a:ext cx="457200" cy="457200"/>
           </a:xfrm>
           <a:prstGeom prst="rect">
@@ -22101,8 +23769,8 @@
         </p:nvSpPr>
         <p:spPr>
           <a:xfrm>
-            <a:off x="1188720" y="1435608"/>
-            <a:ext cx="10469880" cy="4672584"/>
+            <a:off x="1325880" y="1435608"/>
+            <a:ext cx="10177272" cy="4672584"/>
           </a:xfrm>
           <a:prstGeom prst="rect">
             <a:avLst/>
@@ -22131,6 +23799,54 @@
               <a:t>Conta = kWh × tarifa com impostos + bandeira + iluminação pública</a:t>
             </a:r>
             <a:endParaRPr lang="en-US" sz="1800" dirty="0"/>
+          </a:p>
+        </p:txBody>
+      </p:sp>
+      <p:sp>
+        <p:nvSpPr>
+          <p:cNvPr id="25" name="Slide Number Placeholder 0"/>
+          <p:cNvSpPr>
+            <a:spLocks noGrp="1"/>
+          </p:cNvSpPr>
+          <p:nvPr>
+            <p:ph type="sldNum" sz="quarter" idx="4294967295"/>
+          </p:nvPr>
+        </p:nvSpPr>
+        <p:spPr>
+          <a:xfrm>
+            <a:off x="11292840" y="6556248"/>
+            <a:ext cx="548640" cy="256032"/>
+          </a:xfrm>
+          <a:prstGeom prst="rect">
+            <a:avLst/>
+          </a:prstGeom>
+          <a:extLst>
+            <a:ext uri="{C572A759-6A51-4108-AA02-DFA0A04FC94B}">
+              <ma14:wrappingTextBoxFlag xmlns:ma14="http://schemas.microsoft.com/office/mac/drawingml/2011/main" val="0"/>
+            </a:ext>
+          </a:extLst>
+        </p:spPr>
+        <p:txBody>
+          <a:bodyPr/>
+          <a:lstStyle>
+            <a:lvl1pPr>
+              <a:defRPr sz="900">
+                <a:solidFill>
+                  <a:srgbClr val="1B3A6B"/>
+                </a:solidFill>
+                <a:latin typeface="Arial"/>
+                <a:ea typeface="Arial"/>
+                <a:cs typeface="Arial"/>
+              </a:defRPr>
+            </a:lvl1pPr>
+          </a:lstStyle>
+          <a:p>
+            <a:pPr algn="r"/>
+            <a:fld id="{F7021451-1387-4CA6-816F-3879F97B5CBC}" type="slidenum">
+              <a:rPr b="1" lang="en-US"/>
+              <a:t>37</a:t>
+            </a:fld>
+            <a:endParaRPr lang="en-US"/>
           </a:p>
         </p:txBody>
       </p:sp>
@@ -22194,6 +23910,45 @@
         </p:nvSpPr>
         <p:spPr>
           <a:xfrm>
+            <a:off x="457200" y="548640"/>
+            <a:ext cx="3474720" cy="1737360"/>
+          </a:xfrm>
+          <a:prstGeom prst="rect">
+            <a:avLst/>
+          </a:prstGeom>
+          <a:noFill/>
+          <a:ln/>
+        </p:spPr>
+        <p:txBody>
+          <a:bodyPr wrap="square" rtlCol="0" anchor="ctr"/>
+          <a:lstStyle/>
+          <a:p>
+            <a:pPr indent="0" marL="0">
+              <a:buNone/>
+            </a:pPr>
+            <a:r>
+              <a:rPr lang="en-US" sz="11000" b="1" dirty="0">
+                <a:solidFill>
+                  <a:srgbClr val="11396F"/>
+                </a:solidFill>
+                <a:latin typeface="Arial" pitchFamily="34" charset="0"/>
+                <a:ea typeface="Arial" pitchFamily="34" charset="-122"/>
+                <a:cs typeface="Arial" pitchFamily="34" charset="-120"/>
+              </a:rPr>
+              <a:t>08</a:t>
+            </a:r>
+            <a:endParaRPr lang="en-US" sz="11000" dirty="0"/>
+          </a:p>
+        </p:txBody>
+      </p:sp>
+      <p:sp>
+        <p:nvSpPr>
+          <p:cNvPr id="4" name="Text 2"/>
+          <p:cNvSpPr/>
+          <p:nvPr/>
+        </p:nvSpPr>
+        <p:spPr>
+          <a:xfrm>
             <a:off x="548640" y="2194560"/>
             <a:ext cx="3291840" cy="548640"/>
           </a:xfrm>
@@ -22227,7 +23982,46 @@
       </p:sp>
       <p:sp>
         <p:nvSpPr>
-          <p:cNvPr id="4" name="Text 2"/>
+          <p:cNvPr id="5" name="Text 3"/>
+          <p:cNvSpPr/>
+          <p:nvPr/>
+        </p:nvSpPr>
+        <p:spPr>
+          <a:xfrm>
+            <a:off x="548640" y="3200400"/>
+            <a:ext cx="3383280" cy="457200"/>
+          </a:xfrm>
+          <a:prstGeom prst="rect">
+            <a:avLst/>
+          </a:prstGeom>
+          <a:noFill/>
+          <a:ln/>
+        </p:spPr>
+        <p:txBody>
+          <a:bodyPr wrap="square" rtlCol="0" anchor="ctr"/>
+          <a:lstStyle/>
+          <a:p>
+            <a:pPr indent="0" marL="0">
+              <a:buNone/>
+            </a:pPr>
+            <a:r>
+              <a:rPr lang="en-US" sz="1100" dirty="0">
+                <a:solidFill>
+                  <a:srgbClr val="C7D2E3"/>
+                </a:solidFill>
+                <a:latin typeface="Arial" pitchFamily="34" charset="0"/>
+                <a:ea typeface="Arial" pitchFamily="34" charset="-122"/>
+                <a:cs typeface="Arial" pitchFamily="34" charset="-120"/>
+              </a:rPr>
+              <a:t>M1 · Etapa 1 · Fundamentos</a:t>
+            </a:r>
+            <a:endParaRPr lang="en-US" sz="1100" dirty="0"/>
+          </a:p>
+        </p:txBody>
+      </p:sp>
+      <p:sp>
+        <p:nvSpPr>
+          <p:cNvPr id="6" name="Text 4"/>
           <p:cNvSpPr/>
           <p:nvPr/>
         </p:nvSpPr>
@@ -22266,7 +24060,7 @@
       </p:sp>
       <p:pic>
         <p:nvPicPr>
-          <p:cNvPr id="5" name="Image 0" descr="/www/wwwroot/rexar/gdsolar/docs/curso/slides/assets/logo-gdsolar.png">    </p:cNvPr>
+          <p:cNvPr id="7" name="Image 0" descr="/www/wwwroot/rexar/gdsolar/docs/curso/slides/assets/logo-gdsolar.png">    </p:cNvPr>
           <p:cNvPicPr>
             <a:picLocks noChangeAspect="1"/>
           </p:cNvPicPr>
@@ -22290,7 +24084,7 @@
       </p:pic>
       <p:sp>
         <p:nvSpPr>
-          <p:cNvPr id="6" name="Text 3"/>
+          <p:cNvPr id="8" name="Text 5"/>
           <p:cNvSpPr/>
           <p:nvPr/>
         </p:nvSpPr>
@@ -22331,7 +24125,7 @@
       </p:sp>
       <p:sp>
         <p:nvSpPr>
-          <p:cNvPr id="7" name="Text 4"/>
+          <p:cNvPr id="9" name="Text 6"/>
           <p:cNvSpPr/>
           <p:nvPr/>
         </p:nvSpPr>
@@ -22372,7 +24166,7 @@
       </p:sp>
       <p:sp>
         <p:nvSpPr>
-          <p:cNvPr id="8" name="Text 5"/>
+          <p:cNvPr id="10" name="Text 7"/>
           <p:cNvSpPr/>
           <p:nvPr/>
         </p:nvSpPr>
@@ -22509,7 +24303,7 @@
         </p:blipFill>
         <p:spPr>
           <a:xfrm>
-            <a:off x="411480" y="6547104"/>
+            <a:off x="548640" y="6547104"/>
             <a:ext cx="274320" cy="274320"/>
           </a:xfrm>
           <a:prstGeom prst="rect">
@@ -22525,7 +24319,7 @@
         </p:nvSpPr>
         <p:spPr>
           <a:xfrm>
-            <a:off x="749808" y="6528816"/>
+            <a:off x="886968" y="6528816"/>
             <a:ext cx="6400800" cy="310896"/>
           </a:xfrm>
           <a:prstGeom prst="rect">
@@ -22565,7 +24359,7 @@
         <p:spPr>
           <a:xfrm>
             <a:off x="7132320" y="6528816"/>
-            <a:ext cx="4663440" cy="310896"/>
+            <a:ext cx="4023360" cy="310896"/>
           </a:xfrm>
           <a:prstGeom prst="rect">
             <a:avLst/>
@@ -22603,7 +24397,7 @@
         </p:nvSpPr>
         <p:spPr>
           <a:xfrm>
-            <a:off x="411480" y="384048"/>
+            <a:off x="548640" y="384048"/>
             <a:ext cx="82296" cy="658368"/>
           </a:xfrm>
           <a:prstGeom prst="rect">
@@ -22623,7 +24417,7 @@
         </p:nvSpPr>
         <p:spPr>
           <a:xfrm>
-            <a:off x="640080" y="292608"/>
+            <a:off x="777240" y="292608"/>
             <a:ext cx="10972800" cy="274320"/>
           </a:xfrm>
           <a:prstGeom prst="rect">
@@ -22662,8 +24456,8 @@
         </p:nvSpPr>
         <p:spPr>
           <a:xfrm>
-            <a:off x="640080" y="530352"/>
-            <a:ext cx="11155680" cy="566928"/>
+            <a:off x="777240" y="530352"/>
+            <a:ext cx="10881360" cy="566928"/>
           </a:xfrm>
           <a:prstGeom prst="rect">
             <a:avLst/>
@@ -22703,8 +24497,8 @@
         </p:nvSpPr>
         <p:spPr>
           <a:xfrm>
-            <a:off x="411480" y="1325880"/>
-            <a:ext cx="3642360" cy="2331720"/>
+            <a:off x="548640" y="1325880"/>
+            <a:ext cx="3544824" cy="2331720"/>
           </a:xfrm>
           <a:prstGeom prst="roundRect">
             <a:avLst>
@@ -22737,7 +24531,7 @@
         </p:nvSpPr>
         <p:spPr>
           <a:xfrm>
-            <a:off x="594360" y="1508760"/>
+            <a:off x="731520" y="1508760"/>
             <a:ext cx="457200" cy="457200"/>
           </a:xfrm>
           <a:prstGeom prst="ellipse">
@@ -22757,7 +24551,7 @@
         </p:nvSpPr>
         <p:spPr>
           <a:xfrm>
-            <a:off x="594360" y="1508760"/>
+            <a:off x="731520" y="1508760"/>
             <a:ext cx="457200" cy="457200"/>
           </a:xfrm>
           <a:prstGeom prst="rect">
@@ -22796,8 +24590,8 @@
         </p:nvSpPr>
         <p:spPr>
           <a:xfrm>
-            <a:off x="1188720" y="1435608"/>
-            <a:ext cx="2727960" cy="2112264"/>
+            <a:off x="1325880" y="1435608"/>
+            <a:ext cx="2630424" cy="2112264"/>
           </a:xfrm>
           <a:prstGeom prst="rect">
             <a:avLst/>
@@ -22837,8 +24631,8 @@
         </p:nvSpPr>
         <p:spPr>
           <a:xfrm>
-            <a:off x="4282440" y="1325880"/>
-            <a:ext cx="3642360" cy="2331720"/>
+            <a:off x="4322064" y="1325880"/>
+            <a:ext cx="3544824" cy="2331720"/>
           </a:xfrm>
           <a:prstGeom prst="roundRect">
             <a:avLst>
@@ -22871,7 +24665,7 @@
         </p:nvSpPr>
         <p:spPr>
           <a:xfrm>
-            <a:off x="4465320" y="1508760"/>
+            <a:off x="4504944" y="1508760"/>
             <a:ext cx="457200" cy="457200"/>
           </a:xfrm>
           <a:prstGeom prst="ellipse">
@@ -22891,7 +24685,7 @@
         </p:nvSpPr>
         <p:spPr>
           <a:xfrm>
-            <a:off x="4465320" y="1508760"/>
+            <a:off x="4504944" y="1508760"/>
             <a:ext cx="457200" cy="457200"/>
           </a:xfrm>
           <a:prstGeom prst="rect">
@@ -22930,8 +24724,8 @@
         </p:nvSpPr>
         <p:spPr>
           <a:xfrm>
-            <a:off x="5059680" y="1435608"/>
-            <a:ext cx="2727960" cy="2112264"/>
+            <a:off x="5099304" y="1435608"/>
+            <a:ext cx="2630424" cy="2112264"/>
           </a:xfrm>
           <a:prstGeom prst="rect">
             <a:avLst/>
@@ -22971,8 +24765,8 @@
         </p:nvSpPr>
         <p:spPr>
           <a:xfrm>
-            <a:off x="8153400" y="1325880"/>
-            <a:ext cx="3642360" cy="2331720"/>
+            <a:off x="8095488" y="1325880"/>
+            <a:ext cx="3544824" cy="2331720"/>
           </a:xfrm>
           <a:prstGeom prst="roundRect">
             <a:avLst>
@@ -23005,7 +24799,7 @@
         </p:nvSpPr>
         <p:spPr>
           <a:xfrm>
-            <a:off x="8336280" y="1508760"/>
+            <a:off x="8278368" y="1508760"/>
             <a:ext cx="457200" cy="457200"/>
           </a:xfrm>
           <a:prstGeom prst="ellipse">
@@ -23025,7 +24819,7 @@
         </p:nvSpPr>
         <p:spPr>
           <a:xfrm>
-            <a:off x="8336280" y="1508760"/>
+            <a:off x="8278368" y="1508760"/>
             <a:ext cx="457200" cy="457200"/>
           </a:xfrm>
           <a:prstGeom prst="rect">
@@ -23064,8 +24858,8 @@
         </p:nvSpPr>
         <p:spPr>
           <a:xfrm>
-            <a:off x="8930640" y="1435608"/>
-            <a:ext cx="2727960" cy="2112264"/>
+            <a:off x="8872728" y="1435608"/>
+            <a:ext cx="2630424" cy="2112264"/>
           </a:xfrm>
           <a:prstGeom prst="rect">
             <a:avLst/>
@@ -23105,8 +24899,8 @@
         </p:nvSpPr>
         <p:spPr>
           <a:xfrm>
-            <a:off x="411480" y="3886200"/>
-            <a:ext cx="3642360" cy="2331720"/>
+            <a:off x="548640" y="3886200"/>
+            <a:ext cx="3544824" cy="2331720"/>
           </a:xfrm>
           <a:prstGeom prst="roundRect">
             <a:avLst>
@@ -23139,7 +24933,7 @@
         </p:nvSpPr>
         <p:spPr>
           <a:xfrm>
-            <a:off x="594360" y="4069080"/>
+            <a:off x="731520" y="4069080"/>
             <a:ext cx="457200" cy="457200"/>
           </a:xfrm>
           <a:prstGeom prst="ellipse">
@@ -23159,7 +24953,7 @@
         </p:nvSpPr>
         <p:spPr>
           <a:xfrm>
-            <a:off x="594360" y="4069080"/>
+            <a:off x="731520" y="4069080"/>
             <a:ext cx="457200" cy="457200"/>
           </a:xfrm>
           <a:prstGeom prst="rect">
@@ -23198,8 +24992,8 @@
         </p:nvSpPr>
         <p:spPr>
           <a:xfrm>
-            <a:off x="1188720" y="3995928"/>
-            <a:ext cx="2727960" cy="2112264"/>
+            <a:off x="1325880" y="3995928"/>
+            <a:ext cx="2630424" cy="2112264"/>
           </a:xfrm>
           <a:prstGeom prst="rect">
             <a:avLst/>
@@ -23239,8 +25033,8 @@
         </p:nvSpPr>
         <p:spPr>
           <a:xfrm>
-            <a:off x="4282440" y="3886200"/>
-            <a:ext cx="3642360" cy="2331720"/>
+            <a:off x="4322064" y="3886200"/>
+            <a:ext cx="3544824" cy="2331720"/>
           </a:xfrm>
           <a:prstGeom prst="roundRect">
             <a:avLst>
@@ -23273,7 +25067,7 @@
         </p:nvSpPr>
         <p:spPr>
           <a:xfrm>
-            <a:off x="4465320" y="4069080"/>
+            <a:off x="4504944" y="4069080"/>
             <a:ext cx="457200" cy="457200"/>
           </a:xfrm>
           <a:prstGeom prst="ellipse">
@@ -23293,7 +25087,7 @@
         </p:nvSpPr>
         <p:spPr>
           <a:xfrm>
-            <a:off x="4465320" y="4069080"/>
+            <a:off x="4504944" y="4069080"/>
             <a:ext cx="457200" cy="457200"/>
           </a:xfrm>
           <a:prstGeom prst="rect">
@@ -23332,8 +25126,8 @@
         </p:nvSpPr>
         <p:spPr>
           <a:xfrm>
-            <a:off x="5059680" y="3995928"/>
-            <a:ext cx="2727960" cy="2112264"/>
+            <a:off x="5099304" y="3995928"/>
+            <a:ext cx="2630424" cy="2112264"/>
           </a:xfrm>
           <a:prstGeom prst="rect">
             <a:avLst/>
@@ -23373,8 +25167,8 @@
         </p:nvSpPr>
         <p:spPr>
           <a:xfrm>
-            <a:off x="8153400" y="3886200"/>
-            <a:ext cx="3642360" cy="2331720"/>
+            <a:off x="8095488" y="3886200"/>
+            <a:ext cx="3544824" cy="2331720"/>
           </a:xfrm>
           <a:prstGeom prst="roundRect">
             <a:avLst>
@@ -23407,7 +25201,7 @@
         </p:nvSpPr>
         <p:spPr>
           <a:xfrm>
-            <a:off x="8336280" y="4069080"/>
+            <a:off x="8278368" y="4069080"/>
             <a:ext cx="457200" cy="457200"/>
           </a:xfrm>
           <a:prstGeom prst="ellipse">
@@ -23427,7 +25221,7 @@
         </p:nvSpPr>
         <p:spPr>
           <a:xfrm>
-            <a:off x="8336280" y="4069080"/>
+            <a:off x="8278368" y="4069080"/>
             <a:ext cx="457200" cy="457200"/>
           </a:xfrm>
           <a:prstGeom prst="rect">
@@ -23466,8 +25260,8 @@
         </p:nvSpPr>
         <p:spPr>
           <a:xfrm>
-            <a:off x="8930640" y="3995928"/>
-            <a:ext cx="2727960" cy="2112264"/>
+            <a:off x="8872728" y="3995928"/>
+            <a:ext cx="2630424" cy="2112264"/>
           </a:xfrm>
           <a:prstGeom prst="rect">
             <a:avLst/>
@@ -23496,6 +25290,54 @@
               <a:t>Tarifa com impostos aproximada (valor ÷ kWh)</a:t>
             </a:r>
             <a:endParaRPr lang="en-US" sz="1800" dirty="0"/>
+          </a:p>
+        </p:txBody>
+      </p:sp>
+      <p:sp>
+        <p:nvSpPr>
+          <p:cNvPr id="25" name="Slide Number Placeholder 0"/>
+          <p:cNvSpPr>
+            <a:spLocks noGrp="1"/>
+          </p:cNvSpPr>
+          <p:nvPr>
+            <p:ph type="sldNum" sz="quarter" idx="4294967295"/>
+          </p:nvPr>
+        </p:nvSpPr>
+        <p:spPr>
+          <a:xfrm>
+            <a:off x="11292840" y="6556248"/>
+            <a:ext cx="548640" cy="256032"/>
+          </a:xfrm>
+          <a:prstGeom prst="rect">
+            <a:avLst/>
+          </a:prstGeom>
+          <a:extLst>
+            <a:ext uri="{C572A759-6A51-4108-AA02-DFA0A04FC94B}">
+              <ma14:wrappingTextBoxFlag xmlns:ma14="http://schemas.microsoft.com/office/mac/drawingml/2011/main" val="0"/>
+            </a:ext>
+          </a:extLst>
+        </p:spPr>
+        <p:txBody>
+          <a:bodyPr/>
+          <a:lstStyle>
+            <a:lvl1pPr>
+              <a:defRPr sz="900">
+                <a:solidFill>
+                  <a:srgbClr val="1B3A6B"/>
+                </a:solidFill>
+                <a:latin typeface="Arial"/>
+                <a:ea typeface="Arial"/>
+                <a:cs typeface="Arial"/>
+              </a:defRPr>
+            </a:lvl1pPr>
+          </a:lstStyle>
+          <a:p>
+            <a:pPr algn="r"/>
+            <a:fld id="{F7021451-1387-4CA6-816F-3879F97B5CBC}" type="slidenum">
+              <a:rPr b="1" lang="en-US"/>
+              <a:t>39</a:t>
+            </a:fld>
+            <a:endParaRPr lang="en-US"/>
           </a:p>
         </p:txBody>
       </p:sp>
@@ -23572,7 +25414,7 @@
         </p:blipFill>
         <p:spPr>
           <a:xfrm>
-            <a:off x="411480" y="6547104"/>
+            <a:off x="548640" y="6547104"/>
             <a:ext cx="274320" cy="274320"/>
           </a:xfrm>
           <a:prstGeom prst="rect">
@@ -23588,7 +25430,7 @@
         </p:nvSpPr>
         <p:spPr>
           <a:xfrm>
-            <a:off x="749808" y="6528816"/>
+            <a:off x="886968" y="6528816"/>
             <a:ext cx="6400800" cy="310896"/>
           </a:xfrm>
           <a:prstGeom prst="rect">
@@ -23628,7 +25470,7 @@
         <p:spPr>
           <a:xfrm>
             <a:off x="7132320" y="6528816"/>
-            <a:ext cx="4663440" cy="310896"/>
+            <a:ext cx="4023360" cy="310896"/>
           </a:xfrm>
           <a:prstGeom prst="rect">
             <a:avLst/>
@@ -23666,7 +25508,7 @@
         </p:nvSpPr>
         <p:spPr>
           <a:xfrm>
-            <a:off x="411480" y="384048"/>
+            <a:off x="548640" y="384048"/>
             <a:ext cx="82296" cy="658368"/>
           </a:xfrm>
           <a:prstGeom prst="rect">
@@ -23686,7 +25528,7 @@
         </p:nvSpPr>
         <p:spPr>
           <a:xfrm>
-            <a:off x="640080" y="292608"/>
+            <a:off x="777240" y="292608"/>
             <a:ext cx="10972800" cy="274320"/>
           </a:xfrm>
           <a:prstGeom prst="rect">
@@ -23725,8 +25567,8 @@
         </p:nvSpPr>
         <p:spPr>
           <a:xfrm>
-            <a:off x="640080" y="530352"/>
-            <a:ext cx="11155680" cy="566928"/>
+            <a:off x="777240" y="530352"/>
+            <a:ext cx="10881360" cy="566928"/>
           </a:xfrm>
           <a:prstGeom prst="rect">
             <a:avLst/>
@@ -23766,8 +25608,8 @@
         </p:nvSpPr>
         <p:spPr>
           <a:xfrm>
-            <a:off x="411480" y="1325880"/>
-            <a:ext cx="11384280" cy="4937760"/>
+            <a:off x="548640" y="1325880"/>
+            <a:ext cx="11091672" cy="4937760"/>
           </a:xfrm>
           <a:prstGeom prst="roundRect">
             <a:avLst>
@@ -23788,8 +25630,8 @@
         </p:nvSpPr>
         <p:spPr>
           <a:xfrm>
-            <a:off x="777240" y="1554480"/>
-            <a:ext cx="10652760" cy="4480560"/>
+            <a:off x="914400" y="1554480"/>
+            <a:ext cx="10360152" cy="4480560"/>
           </a:xfrm>
           <a:prstGeom prst="rect">
             <a:avLst/>
@@ -23810,7 +25652,7 @@
               <a:buNone/>
             </a:pPr>
             <a:r>
-              <a:rPr lang="en-US" sz="2000" b="1" dirty="0">
+              <a:rPr lang="en-US" sz="2400" b="1" dirty="0">
                 <a:solidFill>
                   <a:srgbClr val="FFFFFF"/>
                 </a:solidFill>
@@ -23820,7 +25662,7 @@
               </a:rPr>
               <a:t>Energia (kWh) = Potência (kW) × Tempo (h)</a:t>
             </a:r>
-            <a:endParaRPr lang="en-US" sz="2000" dirty="0"/>
+            <a:endParaRPr lang="en-US" sz="2400" dirty="0"/>
           </a:p>
           <a:p>
             <a:pPr indent="0" marL="0">
@@ -23830,7 +25672,7 @@
               <a:buNone/>
             </a:pPr>
             <a:r>
-              <a:rPr lang="en-US" sz="2000" b="1" dirty="0">
+              <a:rPr lang="en-US" sz="2400" b="1" dirty="0">
                 <a:solidFill>
                   <a:srgbClr val="F7A23B"/>
                 </a:solidFill>
@@ -23840,7 +25682,55 @@
               </a:rPr>
               <a:t>Chuveiro: 5,5 kW × 0,25 h × 30 dias = 41,25 kWh/mês</a:t>
             </a:r>
-            <a:endParaRPr lang="en-US" sz="2000" dirty="0"/>
+            <a:endParaRPr lang="en-US" sz="2400" dirty="0"/>
+          </a:p>
+        </p:txBody>
+      </p:sp>
+      <p:sp>
+        <p:nvSpPr>
+          <p:cNvPr id="25" name="Slide Number Placeholder 0"/>
+          <p:cNvSpPr>
+            <a:spLocks noGrp="1"/>
+          </p:cNvSpPr>
+          <p:nvPr>
+            <p:ph type="sldNum" sz="quarter" idx="4294967295"/>
+          </p:nvPr>
+        </p:nvSpPr>
+        <p:spPr>
+          <a:xfrm>
+            <a:off x="11292840" y="6556248"/>
+            <a:ext cx="548640" cy="256032"/>
+          </a:xfrm>
+          <a:prstGeom prst="rect">
+            <a:avLst/>
+          </a:prstGeom>
+          <a:extLst>
+            <a:ext uri="{C572A759-6A51-4108-AA02-DFA0A04FC94B}">
+              <ma14:wrappingTextBoxFlag xmlns:ma14="http://schemas.microsoft.com/office/mac/drawingml/2011/main" val="0"/>
+            </a:ext>
+          </a:extLst>
+        </p:spPr>
+        <p:txBody>
+          <a:bodyPr/>
+          <a:lstStyle>
+            <a:lvl1pPr>
+              <a:defRPr sz="900">
+                <a:solidFill>
+                  <a:srgbClr val="1B3A6B"/>
+                </a:solidFill>
+                <a:latin typeface="Arial"/>
+                <a:ea typeface="Arial"/>
+                <a:cs typeface="Arial"/>
+              </a:defRPr>
+            </a:lvl1pPr>
+          </a:lstStyle>
+          <a:p>
+            <a:pPr algn="r"/>
+            <a:fld id="{F7021451-1387-4CA6-816F-3879F97B5CBC}" type="slidenum">
+              <a:rPr b="1" lang="en-US"/>
+              <a:t>4</a:t>
+            </a:fld>
+            <a:endParaRPr lang="en-US"/>
           </a:p>
         </p:txBody>
       </p:sp>
@@ -23917,7 +25807,7 @@
         </p:blipFill>
         <p:spPr>
           <a:xfrm>
-            <a:off x="411480" y="6547104"/>
+            <a:off x="548640" y="6547104"/>
             <a:ext cx="274320" cy="274320"/>
           </a:xfrm>
           <a:prstGeom prst="rect">
@@ -23933,7 +25823,7 @@
         </p:nvSpPr>
         <p:spPr>
           <a:xfrm>
-            <a:off x="749808" y="6528816"/>
+            <a:off x="886968" y="6528816"/>
             <a:ext cx="6400800" cy="310896"/>
           </a:xfrm>
           <a:prstGeom prst="rect">
@@ -23973,7 +25863,7 @@
         <p:spPr>
           <a:xfrm>
             <a:off x="7132320" y="6528816"/>
-            <a:ext cx="4663440" cy="310896"/>
+            <a:ext cx="4023360" cy="310896"/>
           </a:xfrm>
           <a:prstGeom prst="rect">
             <a:avLst/>
@@ -24011,7 +25901,7 @@
         </p:nvSpPr>
         <p:spPr>
           <a:xfrm>
-            <a:off x="411480" y="384048"/>
+            <a:off x="548640" y="384048"/>
             <a:ext cx="82296" cy="658368"/>
           </a:xfrm>
           <a:prstGeom prst="rect">
@@ -24031,7 +25921,7 @@
         </p:nvSpPr>
         <p:spPr>
           <a:xfrm>
-            <a:off x="640080" y="292608"/>
+            <a:off x="777240" y="292608"/>
             <a:ext cx="10972800" cy="274320"/>
           </a:xfrm>
           <a:prstGeom prst="rect">
@@ -24070,8 +25960,8 @@
         </p:nvSpPr>
         <p:spPr>
           <a:xfrm>
-            <a:off x="640080" y="530352"/>
-            <a:ext cx="11155680" cy="566928"/>
+            <a:off x="777240" y="530352"/>
+            <a:ext cx="10881360" cy="566928"/>
           </a:xfrm>
           <a:prstGeom prst="rect">
             <a:avLst/>
@@ -24425,6 +26315,54 @@
               <a:t>Energia injetada / consumo injetado = os créditos da GD na fatura (detalhes no M7)</a:t>
             </a:r>
             <a:endParaRPr lang="en-US" sz="1500" dirty="0"/>
+          </a:p>
+        </p:txBody>
+      </p:sp>
+      <p:sp>
+        <p:nvSpPr>
+          <p:cNvPr id="25" name="Slide Number Placeholder 0"/>
+          <p:cNvSpPr>
+            <a:spLocks noGrp="1"/>
+          </p:cNvSpPr>
+          <p:nvPr>
+            <p:ph type="sldNum" sz="quarter" idx="4294967295"/>
+          </p:nvPr>
+        </p:nvSpPr>
+        <p:spPr>
+          <a:xfrm>
+            <a:off x="11292840" y="6556248"/>
+            <a:ext cx="548640" cy="256032"/>
+          </a:xfrm>
+          <a:prstGeom prst="rect">
+            <a:avLst/>
+          </a:prstGeom>
+          <a:extLst>
+            <a:ext uri="{C572A759-6A51-4108-AA02-DFA0A04FC94B}">
+              <ma14:wrappingTextBoxFlag xmlns:ma14="http://schemas.microsoft.com/office/mac/drawingml/2011/main" val="0"/>
+            </a:ext>
+          </a:extLst>
+        </p:spPr>
+        <p:txBody>
+          <a:bodyPr/>
+          <a:lstStyle>
+            <a:lvl1pPr>
+              <a:defRPr sz="900">
+                <a:solidFill>
+                  <a:srgbClr val="1B3A6B"/>
+                </a:solidFill>
+                <a:latin typeface="Arial"/>
+                <a:ea typeface="Arial"/>
+                <a:cs typeface="Arial"/>
+              </a:defRPr>
+            </a:lvl1pPr>
+          </a:lstStyle>
+          <a:p>
+            <a:pPr algn="r"/>
+            <a:fld id="{F7021451-1387-4CA6-816F-3879F97B5CBC}" type="slidenum">
+              <a:rPr b="1" lang="en-US"/>
+              <a:t>40</a:t>
+            </a:fld>
+            <a:endParaRPr lang="en-US"/>
           </a:p>
         </p:txBody>
       </p:sp>
@@ -24501,7 +26439,7 @@
         </p:blipFill>
         <p:spPr>
           <a:xfrm>
-            <a:off x="411480" y="6547104"/>
+            <a:off x="548640" y="6547104"/>
             <a:ext cx="274320" cy="274320"/>
           </a:xfrm>
           <a:prstGeom prst="rect">
@@ -24517,7 +26455,7 @@
         </p:nvSpPr>
         <p:spPr>
           <a:xfrm>
-            <a:off x="749808" y="6528816"/>
+            <a:off x="886968" y="6528816"/>
             <a:ext cx="6400800" cy="310896"/>
           </a:xfrm>
           <a:prstGeom prst="rect">
@@ -24557,7 +26495,7 @@
         <p:spPr>
           <a:xfrm>
             <a:off x="7132320" y="6528816"/>
-            <a:ext cx="4663440" cy="310896"/>
+            <a:ext cx="4023360" cy="310896"/>
           </a:xfrm>
           <a:prstGeom prst="rect">
             <a:avLst/>
@@ -24595,7 +26533,7 @@
         </p:nvSpPr>
         <p:spPr>
           <a:xfrm>
-            <a:off x="411480" y="384048"/>
+            <a:off x="548640" y="384048"/>
             <a:ext cx="82296" cy="658368"/>
           </a:xfrm>
           <a:prstGeom prst="rect">
@@ -24615,7 +26553,7 @@
         </p:nvSpPr>
         <p:spPr>
           <a:xfrm>
-            <a:off x="640080" y="292608"/>
+            <a:off x="777240" y="292608"/>
             <a:ext cx="10972800" cy="274320"/>
           </a:xfrm>
           <a:prstGeom prst="rect">
@@ -24654,8 +26592,8 @@
         </p:nvSpPr>
         <p:spPr>
           <a:xfrm>
-            <a:off x="640080" y="530352"/>
-            <a:ext cx="11155680" cy="566928"/>
+            <a:off x="777240" y="530352"/>
+            <a:ext cx="10881360" cy="566928"/>
           </a:xfrm>
           <a:prstGeom prst="rect">
             <a:avLst/>
@@ -24695,8 +26633,8 @@
         </p:nvSpPr>
         <p:spPr>
           <a:xfrm>
-            <a:off x="411480" y="1325880"/>
-            <a:ext cx="5577840" cy="411480"/>
+            <a:off x="548640" y="1325880"/>
+            <a:ext cx="5394960" cy="411480"/>
           </a:xfrm>
           <a:prstGeom prst="rect">
             <a:avLst/>
@@ -24734,8 +26672,8 @@
         </p:nvSpPr>
         <p:spPr>
           <a:xfrm>
-            <a:off x="411480" y="1783080"/>
-            <a:ext cx="5577840" cy="4480560"/>
+            <a:off x="548640" y="1783080"/>
+            <a:ext cx="5394960" cy="4480560"/>
           </a:xfrm>
           <a:prstGeom prst="rect">
             <a:avLst/>
@@ -24818,8 +26756,8 @@
         </p:nvSpPr>
         <p:spPr>
           <a:xfrm>
-            <a:off x="6309360" y="1325880"/>
-            <a:ext cx="5486400" cy="4937760"/>
+            <a:off x="6172200" y="1325880"/>
+            <a:ext cx="5468112" cy="4937760"/>
           </a:xfrm>
           <a:prstGeom prst="roundRect">
             <a:avLst>
@@ -24840,8 +26778,8 @@
         </p:nvSpPr>
         <p:spPr>
           <a:xfrm>
-            <a:off x="6629400" y="1554480"/>
-            <a:ext cx="4846320" cy="4480560"/>
+            <a:off x="6492240" y="1554480"/>
+            <a:ext cx="4828032" cy="4480560"/>
           </a:xfrm>
           <a:prstGeom prst="rect">
             <a:avLst/>
@@ -24885,6 +26823,54 @@
               <a:t>Raio-X de uma conta de luz real: pegue a sua conta de luz (ou de um cliente potencial, com autorização) e preencha o modelo "Raio-X da fatura": grupo, classe, ligação, consumo dos últimos 12 meses (média), tarifa com e sem impostos, valor da bandeira, tributos. Esconda dados pessoais antes de postar.</a:t>
             </a:r>
             <a:endParaRPr lang="en-US" sz="1300" dirty="0"/>
+          </a:p>
+        </p:txBody>
+      </p:sp>
+      <p:sp>
+        <p:nvSpPr>
+          <p:cNvPr id="25" name="Slide Number Placeholder 0"/>
+          <p:cNvSpPr>
+            <a:spLocks noGrp="1"/>
+          </p:cNvSpPr>
+          <p:nvPr>
+            <p:ph type="sldNum" sz="quarter" idx="4294967295"/>
+          </p:nvPr>
+        </p:nvSpPr>
+        <p:spPr>
+          <a:xfrm>
+            <a:off x="11292840" y="6556248"/>
+            <a:ext cx="548640" cy="256032"/>
+          </a:xfrm>
+          <a:prstGeom prst="rect">
+            <a:avLst/>
+          </a:prstGeom>
+          <a:extLst>
+            <a:ext uri="{C572A759-6A51-4108-AA02-DFA0A04FC94B}">
+              <ma14:wrappingTextBoxFlag xmlns:ma14="http://schemas.microsoft.com/office/mac/drawingml/2011/main" val="0"/>
+            </a:ext>
+          </a:extLst>
+        </p:spPr>
+        <p:txBody>
+          <a:bodyPr/>
+          <a:lstStyle>
+            <a:lvl1pPr>
+              <a:defRPr sz="900">
+                <a:solidFill>
+                  <a:srgbClr val="1B3A6B"/>
+                </a:solidFill>
+                <a:latin typeface="Arial"/>
+                <a:ea typeface="Arial"/>
+                <a:cs typeface="Arial"/>
+              </a:defRPr>
+            </a:lvl1pPr>
+          </a:lstStyle>
+          <a:p>
+            <a:pPr algn="r"/>
+            <a:fld id="{F7021451-1387-4CA6-816F-3879F97B5CBC}" type="slidenum">
+              <a:rPr b="1" lang="en-US"/>
+              <a:t>41</a:t>
+            </a:fld>
+            <a:endParaRPr lang="en-US"/>
           </a:p>
         </p:txBody>
       </p:sp>
@@ -24961,7 +26947,7 @@
         </p:blipFill>
         <p:spPr>
           <a:xfrm>
-            <a:off x="411480" y="6547104"/>
+            <a:off x="548640" y="6547104"/>
             <a:ext cx="274320" cy="274320"/>
           </a:xfrm>
           <a:prstGeom prst="rect">
@@ -24977,7 +26963,7 @@
         </p:nvSpPr>
         <p:spPr>
           <a:xfrm>
-            <a:off x="749808" y="6528816"/>
+            <a:off x="886968" y="6528816"/>
             <a:ext cx="6400800" cy="310896"/>
           </a:xfrm>
           <a:prstGeom prst="rect">
@@ -25017,7 +27003,7 @@
         <p:spPr>
           <a:xfrm>
             <a:off x="7132320" y="6528816"/>
-            <a:ext cx="4663440" cy="310896"/>
+            <a:ext cx="4023360" cy="310896"/>
           </a:xfrm>
           <a:prstGeom prst="rect">
             <a:avLst/>
@@ -25055,7 +27041,7 @@
         </p:nvSpPr>
         <p:spPr>
           <a:xfrm>
-            <a:off x="411480" y="384048"/>
+            <a:off x="548640" y="384048"/>
             <a:ext cx="82296" cy="658368"/>
           </a:xfrm>
           <a:prstGeom prst="rect">
@@ -25075,7 +27061,7 @@
         </p:nvSpPr>
         <p:spPr>
           <a:xfrm>
-            <a:off x="640080" y="292608"/>
+            <a:off x="777240" y="292608"/>
             <a:ext cx="10972800" cy="274320"/>
           </a:xfrm>
           <a:prstGeom prst="rect">
@@ -25114,8 +27100,8 @@
         </p:nvSpPr>
         <p:spPr>
           <a:xfrm>
-            <a:off x="640080" y="530352"/>
-            <a:ext cx="11155680" cy="566928"/>
+            <a:off x="777240" y="530352"/>
+            <a:ext cx="10881360" cy="566928"/>
           </a:xfrm>
           <a:prstGeom prst="rect">
             <a:avLst/>
@@ -25154,8 +27140,8 @@
           <p:nvPr/>
         </p:nvGraphicFramePr>
         <p:xfrm>
-          <a:off x="411480" y="1325880"/>
-          <a:ext cx="5852160" cy="4937760"/>
+          <a:off x="548640" y="1325880"/>
+          <a:ext cx="5669280" cy="4937760"/>
         </p:xfrm>
         <a:graphic xmlns:a="http://schemas.openxmlformats.org/drawingml/2006/main">
           <a:graphicData uri="http://schemas.openxmlformats.org/drawingml/2006/chart">
@@ -25178,16 +27164,16 @@
           </p:nvPr>
         </p:nvGraphicFramePr>
         <p:xfrm>
-          <a:off x="6492240" y="1600200"/>
-          <a:ext cx="5303520" cy="914400"/>
+          <a:off x="6446520" y="1600200"/>
+          <a:ext cx="5193792" cy="914400"/>
         </p:xfrm>
         <a:graphic>
           <a:graphicData uri="http://schemas.openxmlformats.org/drawingml/2006/table">
             <a:tbl>
               <a:tblPr/>
               <a:tblGrid>
-                <a:gridCol w="2651760"/>
-                <a:gridCol w="2651760"/>
+                <a:gridCol w="2596896"/>
+                <a:gridCol w="2596896"/>
               </a:tblGrid>
               <a:tr h="0">
                 <a:tc>
@@ -26021,6 +28007,54 @@
           </a:graphicData>
         </a:graphic>
       </p:graphicFrame>
+      <p:sp>
+        <p:nvSpPr>
+          <p:cNvPr id="25" name="Slide Number Placeholder 0"/>
+          <p:cNvSpPr>
+            <a:spLocks noGrp="1"/>
+          </p:cNvSpPr>
+          <p:nvPr>
+            <p:ph type="sldNum" sz="quarter" idx="4294967295"/>
+          </p:nvPr>
+        </p:nvSpPr>
+        <p:spPr>
+          <a:xfrm>
+            <a:off x="11292840" y="6556248"/>
+            <a:ext cx="548640" cy="256032"/>
+          </a:xfrm>
+          <a:prstGeom prst="rect">
+            <a:avLst/>
+          </a:prstGeom>
+          <a:extLst>
+            <a:ext uri="{C572A759-6A51-4108-AA02-DFA0A04FC94B}">
+              <ma14:wrappingTextBoxFlag xmlns:ma14="http://schemas.microsoft.com/office/mac/drawingml/2011/main" val="0"/>
+            </a:ext>
+          </a:extLst>
+        </p:spPr>
+        <p:txBody>
+          <a:bodyPr/>
+          <a:lstStyle>
+            <a:lvl1pPr>
+              <a:defRPr sz="900">
+                <a:solidFill>
+                  <a:srgbClr val="1B3A6B"/>
+                </a:solidFill>
+                <a:latin typeface="Arial"/>
+                <a:ea typeface="Arial"/>
+                <a:cs typeface="Arial"/>
+              </a:defRPr>
+            </a:lvl1pPr>
+          </a:lstStyle>
+          <a:p>
+            <a:pPr algn="r"/>
+            <a:fld id="{F7021451-1387-4CA6-816F-3879F97B5CBC}" type="slidenum">
+              <a:rPr b="1" lang="en-US"/>
+              <a:t>5</a:t>
+            </a:fld>
+            <a:endParaRPr lang="en-US"/>
+          </a:p>
+        </p:txBody>
+      </p:sp>
     </p:spTree>
   </p:cSld>
   <p:clrMapOvr>
@@ -26094,7 +28128,7 @@
         </p:blipFill>
         <p:spPr>
           <a:xfrm>
-            <a:off x="411480" y="6547104"/>
+            <a:off x="548640" y="6547104"/>
             <a:ext cx="274320" cy="274320"/>
           </a:xfrm>
           <a:prstGeom prst="rect">
@@ -26110,7 +28144,7 @@
         </p:nvSpPr>
         <p:spPr>
           <a:xfrm>
-            <a:off x="749808" y="6528816"/>
+            <a:off x="886968" y="6528816"/>
             <a:ext cx="6400800" cy="310896"/>
           </a:xfrm>
           <a:prstGeom prst="rect">
@@ -26150,7 +28184,7 @@
         <p:spPr>
           <a:xfrm>
             <a:off x="7132320" y="6528816"/>
-            <a:ext cx="4663440" cy="310896"/>
+            <a:ext cx="4023360" cy="310896"/>
           </a:xfrm>
           <a:prstGeom prst="rect">
             <a:avLst/>
@@ -26188,7 +28222,7 @@
         </p:nvSpPr>
         <p:spPr>
           <a:xfrm>
-            <a:off x="411480" y="384048"/>
+            <a:off x="548640" y="384048"/>
             <a:ext cx="82296" cy="658368"/>
           </a:xfrm>
           <a:prstGeom prst="rect">
@@ -26208,7 +28242,7 @@
         </p:nvSpPr>
         <p:spPr>
           <a:xfrm>
-            <a:off x="640080" y="292608"/>
+            <a:off x="777240" y="292608"/>
             <a:ext cx="10972800" cy="274320"/>
           </a:xfrm>
           <a:prstGeom prst="rect">
@@ -26247,8 +28281,8 @@
         </p:nvSpPr>
         <p:spPr>
           <a:xfrm>
-            <a:off x="640080" y="530352"/>
-            <a:ext cx="11155680" cy="566928"/>
+            <a:off x="777240" y="530352"/>
+            <a:ext cx="10881360" cy="566928"/>
           </a:xfrm>
           <a:prstGeom prst="rect">
             <a:avLst/>
@@ -26288,8 +28322,8 @@
         </p:nvSpPr>
         <p:spPr>
           <a:xfrm>
-            <a:off x="411480" y="1325880"/>
-            <a:ext cx="11384280" cy="4937760"/>
+            <a:off x="548640" y="1325880"/>
+            <a:ext cx="11091672" cy="4937760"/>
           </a:xfrm>
           <a:prstGeom prst="roundRect">
             <a:avLst>
@@ -26310,8 +28344,8 @@
         </p:nvSpPr>
         <p:spPr>
           <a:xfrm>
-            <a:off x="777240" y="1554480"/>
-            <a:ext cx="10652760" cy="4480560"/>
+            <a:off x="914400" y="1554480"/>
+            <a:ext cx="10360152" cy="4480560"/>
           </a:xfrm>
           <a:prstGeom prst="rect">
             <a:avLst/>
@@ -26332,7 +28366,7 @@
               <a:buNone/>
             </a:pPr>
             <a:r>
-              <a:rPr lang="en-US" sz="2000" b="1" dirty="0">
+              <a:rPr lang="en-US" sz="2400" b="1" dirty="0">
                 <a:solidFill>
                   <a:srgbClr val="FFFFFF"/>
                 </a:solidFill>
@@ -26342,7 +28376,7 @@
               </a:rPr>
               <a:t>Conta ≈ consumo (kWh) × tarifa (R$/kWh) + impostos e taxas</a:t>
             </a:r>
-            <a:endParaRPr lang="en-US" sz="2000" dirty="0"/>
+            <a:endParaRPr lang="en-US" sz="2400" dirty="0"/>
           </a:p>
           <a:p>
             <a:pPr indent="0" marL="0">
@@ -26352,7 +28386,7 @@
               <a:buNone/>
             </a:pPr>
             <a:r>
-              <a:rPr lang="en-US" sz="2000" b="1" dirty="0">
+              <a:rPr lang="en-US" sz="2400" b="1" dirty="0">
                 <a:solidFill>
                   <a:srgbClr val="F7A23B"/>
                 </a:solidFill>
@@ -26362,7 +28396,55 @@
               </a:rPr>
               <a:t>Ex.: 450 kWh × R$ 1,00 = R$ 450</a:t>
             </a:r>
-            <a:endParaRPr lang="en-US" sz="2000" dirty="0"/>
+            <a:endParaRPr lang="en-US" sz="2400" dirty="0"/>
+          </a:p>
+        </p:txBody>
+      </p:sp>
+      <p:sp>
+        <p:nvSpPr>
+          <p:cNvPr id="25" name="Slide Number Placeholder 0"/>
+          <p:cNvSpPr>
+            <a:spLocks noGrp="1"/>
+          </p:cNvSpPr>
+          <p:nvPr>
+            <p:ph type="sldNum" sz="quarter" idx="4294967295"/>
+          </p:nvPr>
+        </p:nvSpPr>
+        <p:spPr>
+          <a:xfrm>
+            <a:off x="11292840" y="6556248"/>
+            <a:ext cx="548640" cy="256032"/>
+          </a:xfrm>
+          <a:prstGeom prst="rect">
+            <a:avLst/>
+          </a:prstGeom>
+          <a:extLst>
+            <a:ext uri="{C572A759-6A51-4108-AA02-DFA0A04FC94B}">
+              <ma14:wrappingTextBoxFlag xmlns:ma14="http://schemas.microsoft.com/office/mac/drawingml/2011/main" val="0"/>
+            </a:ext>
+          </a:extLst>
+        </p:spPr>
+        <p:txBody>
+          <a:bodyPr/>
+          <a:lstStyle>
+            <a:lvl1pPr>
+              <a:defRPr sz="900">
+                <a:solidFill>
+                  <a:srgbClr val="1B3A6B"/>
+                </a:solidFill>
+                <a:latin typeface="Arial"/>
+                <a:ea typeface="Arial"/>
+                <a:cs typeface="Arial"/>
+              </a:defRPr>
+            </a:lvl1pPr>
+          </a:lstStyle>
+          <a:p>
+            <a:pPr algn="r"/>
+            <a:fld id="{F7021451-1387-4CA6-816F-3879F97B5CBC}" type="slidenum">
+              <a:rPr b="1" lang="en-US"/>
+              <a:t>6</a:t>
+            </a:fld>
+            <a:endParaRPr lang="en-US"/>
           </a:p>
         </p:txBody>
       </p:sp>
@@ -26439,7 +28521,7 @@
         </p:blipFill>
         <p:spPr>
           <a:xfrm>
-            <a:off x="411480" y="6547104"/>
+            <a:off x="548640" y="6547104"/>
             <a:ext cx="274320" cy="274320"/>
           </a:xfrm>
           <a:prstGeom prst="rect">
@@ -26455,7 +28537,7 @@
         </p:nvSpPr>
         <p:spPr>
           <a:xfrm>
-            <a:off x="749808" y="6528816"/>
+            <a:off x="886968" y="6528816"/>
             <a:ext cx="6400800" cy="310896"/>
           </a:xfrm>
           <a:prstGeom prst="rect">
@@ -26495,7 +28577,7 @@
         <p:spPr>
           <a:xfrm>
             <a:off x="7132320" y="6528816"/>
-            <a:ext cx="4663440" cy="310896"/>
+            <a:ext cx="4023360" cy="310896"/>
           </a:xfrm>
           <a:prstGeom prst="rect">
             <a:avLst/>
@@ -26533,7 +28615,7 @@
         </p:nvSpPr>
         <p:spPr>
           <a:xfrm>
-            <a:off x="411480" y="384048"/>
+            <a:off x="548640" y="384048"/>
             <a:ext cx="82296" cy="658368"/>
           </a:xfrm>
           <a:prstGeom prst="rect">
@@ -26553,7 +28635,7 @@
         </p:nvSpPr>
         <p:spPr>
           <a:xfrm>
-            <a:off x="640080" y="292608"/>
+            <a:off x="777240" y="292608"/>
             <a:ext cx="10972800" cy="274320"/>
           </a:xfrm>
           <a:prstGeom prst="rect">
@@ -26592,8 +28674,8 @@
         </p:nvSpPr>
         <p:spPr>
           <a:xfrm>
-            <a:off x="640080" y="530352"/>
-            <a:ext cx="11155680" cy="566928"/>
+            <a:off x="777240" y="530352"/>
+            <a:ext cx="10881360" cy="566928"/>
           </a:xfrm>
           <a:prstGeom prst="rect">
             <a:avLst/>
@@ -26633,8 +28715,8 @@
         </p:nvSpPr>
         <p:spPr>
           <a:xfrm>
-            <a:off x="411480" y="1325880"/>
-            <a:ext cx="11384280" cy="4892040"/>
+            <a:off x="548640" y="1325880"/>
+            <a:ext cx="11091672" cy="4892040"/>
           </a:xfrm>
           <a:prstGeom prst="roundRect">
             <a:avLst>
@@ -26667,7 +28749,7 @@
         </p:nvSpPr>
         <p:spPr>
           <a:xfrm>
-            <a:off x="594360" y="1508760"/>
+            <a:off x="731520" y="1508760"/>
             <a:ext cx="457200" cy="457200"/>
           </a:xfrm>
           <a:prstGeom prst="ellipse">
@@ -26687,7 +28769,7 @@
         </p:nvSpPr>
         <p:spPr>
           <a:xfrm>
-            <a:off x="594360" y="1508760"/>
+            <a:off x="731520" y="1508760"/>
             <a:ext cx="457200" cy="457200"/>
           </a:xfrm>
           <a:prstGeom prst="rect">
@@ -26726,8 +28808,8 @@
         </p:nvSpPr>
         <p:spPr>
           <a:xfrm>
-            <a:off x="1188720" y="1435608"/>
-            <a:ext cx="10469880" cy="4672584"/>
+            <a:off x="1325880" y="1435608"/>
+            <a:ext cx="10177272" cy="4672584"/>
           </a:xfrm>
           <a:prstGeom prst="rect">
             <a:avLst/>
@@ -26756,6 +28838,54 @@
               <a:t>kWp = quilowatt-pico: potência máxima dos painéis em condições ideais</a:t>
             </a:r>
             <a:endParaRPr lang="en-US" sz="1800" dirty="0"/>
+          </a:p>
+        </p:txBody>
+      </p:sp>
+      <p:sp>
+        <p:nvSpPr>
+          <p:cNvPr id="25" name="Slide Number Placeholder 0"/>
+          <p:cNvSpPr>
+            <a:spLocks noGrp="1"/>
+          </p:cNvSpPr>
+          <p:nvPr>
+            <p:ph type="sldNum" sz="quarter" idx="4294967295"/>
+          </p:nvPr>
+        </p:nvSpPr>
+        <p:spPr>
+          <a:xfrm>
+            <a:off x="11292840" y="6556248"/>
+            <a:ext cx="548640" cy="256032"/>
+          </a:xfrm>
+          <a:prstGeom prst="rect">
+            <a:avLst/>
+          </a:prstGeom>
+          <a:extLst>
+            <a:ext uri="{C572A759-6A51-4108-AA02-DFA0A04FC94B}">
+              <ma14:wrappingTextBoxFlag xmlns:ma14="http://schemas.microsoft.com/office/mac/drawingml/2011/main" val="0"/>
+            </a:ext>
+          </a:extLst>
+        </p:spPr>
+        <p:txBody>
+          <a:bodyPr/>
+          <a:lstStyle>
+            <a:lvl1pPr>
+              <a:defRPr sz="900">
+                <a:solidFill>
+                  <a:srgbClr val="1B3A6B"/>
+                </a:solidFill>
+                <a:latin typeface="Arial"/>
+                <a:ea typeface="Arial"/>
+                <a:cs typeface="Arial"/>
+              </a:defRPr>
+            </a:lvl1pPr>
+          </a:lstStyle>
+          <a:p>
+            <a:pPr algn="r"/>
+            <a:fld id="{F7021451-1387-4CA6-816F-3879F97B5CBC}" type="slidenum">
+              <a:rPr b="1" lang="en-US"/>
+              <a:t>7</a:t>
+            </a:fld>
+            <a:endParaRPr lang="en-US"/>
           </a:p>
         </p:txBody>
       </p:sp>
@@ -26832,7 +28962,7 @@
         </p:blipFill>
         <p:spPr>
           <a:xfrm>
-            <a:off x="411480" y="6547104"/>
+            <a:off x="548640" y="6547104"/>
             <a:ext cx="274320" cy="274320"/>
           </a:xfrm>
           <a:prstGeom prst="rect">
@@ -26848,7 +28978,7 @@
         </p:nvSpPr>
         <p:spPr>
           <a:xfrm>
-            <a:off x="749808" y="6528816"/>
+            <a:off x="886968" y="6528816"/>
             <a:ext cx="6400800" cy="310896"/>
           </a:xfrm>
           <a:prstGeom prst="rect">
@@ -26888,7 +29018,7 @@
         <p:spPr>
           <a:xfrm>
             <a:off x="7132320" y="6528816"/>
-            <a:ext cx="4663440" cy="310896"/>
+            <a:ext cx="4023360" cy="310896"/>
           </a:xfrm>
           <a:prstGeom prst="rect">
             <a:avLst/>
@@ -26926,7 +29056,7 @@
         </p:nvSpPr>
         <p:spPr>
           <a:xfrm>
-            <a:off x="411480" y="384048"/>
+            <a:off x="548640" y="384048"/>
             <a:ext cx="82296" cy="658368"/>
           </a:xfrm>
           <a:prstGeom prst="rect">
@@ -26946,7 +29076,7 @@
         </p:nvSpPr>
         <p:spPr>
           <a:xfrm>
-            <a:off x="640080" y="292608"/>
+            <a:off x="777240" y="292608"/>
             <a:ext cx="10972800" cy="274320"/>
           </a:xfrm>
           <a:prstGeom prst="rect">
@@ -26985,8 +29115,8 @@
         </p:nvSpPr>
         <p:spPr>
           <a:xfrm>
-            <a:off x="640080" y="530352"/>
-            <a:ext cx="11155680" cy="566928"/>
+            <a:off x="777240" y="530352"/>
+            <a:ext cx="10881360" cy="566928"/>
           </a:xfrm>
           <a:prstGeom prst="rect">
             <a:avLst/>
@@ -27026,12 +29156,12 @@
         </p:nvSpPr>
         <p:spPr>
           <a:xfrm>
-            <a:off x="411480" y="1325880"/>
-            <a:ext cx="3642360" cy="4892040"/>
+            <a:off x="548640" y="1325880"/>
+            <a:ext cx="3544824" cy="4892040"/>
           </a:xfrm>
           <a:prstGeom prst="roundRect">
             <a:avLst>
-              <a:gd name="adj" fmla="val 2008"/>
+              <a:gd name="adj" fmla="val 2064"/>
             </a:avLst>
           </a:prstGeom>
           <a:solidFill>
@@ -27060,7 +29190,7 @@
         </p:nvSpPr>
         <p:spPr>
           <a:xfrm>
-            <a:off x="594360" y="1508760"/>
+            <a:off x="731520" y="1508760"/>
             <a:ext cx="457200" cy="457200"/>
           </a:xfrm>
           <a:prstGeom prst="ellipse">
@@ -27080,7 +29210,7 @@
         </p:nvSpPr>
         <p:spPr>
           <a:xfrm>
-            <a:off x="594360" y="1508760"/>
+            <a:off x="731520" y="1508760"/>
             <a:ext cx="457200" cy="457200"/>
           </a:xfrm>
           <a:prstGeom prst="rect">
@@ -27119,8 +29249,8 @@
         </p:nvSpPr>
         <p:spPr>
           <a:xfrm>
-            <a:off x="1188720" y="1435608"/>
-            <a:ext cx="2727960" cy="4672584"/>
+            <a:off x="1325880" y="1435608"/>
+            <a:ext cx="2630424" cy="4672584"/>
           </a:xfrm>
           <a:prstGeom prst="rect">
             <a:avLst/>
@@ -27160,12 +29290,12 @@
         </p:nvSpPr>
         <p:spPr>
           <a:xfrm>
-            <a:off x="4282440" y="1325880"/>
-            <a:ext cx="3642360" cy="4892040"/>
+            <a:off x="4322064" y="1325880"/>
+            <a:ext cx="3544824" cy="4892040"/>
           </a:xfrm>
           <a:prstGeom prst="roundRect">
             <a:avLst>
-              <a:gd name="adj" fmla="val 2008"/>
+              <a:gd name="adj" fmla="val 2064"/>
             </a:avLst>
           </a:prstGeom>
           <a:solidFill>
@@ -27194,7 +29324,7 @@
         </p:nvSpPr>
         <p:spPr>
           <a:xfrm>
-            <a:off x="4465320" y="1508760"/>
+            <a:off x="4504944" y="1508760"/>
             <a:ext cx="457200" cy="457200"/>
           </a:xfrm>
           <a:prstGeom prst="ellipse">
@@ -27214,7 +29344,7 @@
         </p:nvSpPr>
         <p:spPr>
           <a:xfrm>
-            <a:off x="4465320" y="1508760"/>
+            <a:off x="4504944" y="1508760"/>
             <a:ext cx="457200" cy="457200"/>
           </a:xfrm>
           <a:prstGeom prst="rect">
@@ -27253,8 +29383,8 @@
         </p:nvSpPr>
         <p:spPr>
           <a:xfrm>
-            <a:off x="5059680" y="1435608"/>
-            <a:ext cx="2727960" cy="4672584"/>
+            <a:off x="5099304" y="1435608"/>
+            <a:ext cx="2630424" cy="4672584"/>
           </a:xfrm>
           <a:prstGeom prst="rect">
             <a:avLst/>
@@ -27294,12 +29424,12 @@
         </p:nvSpPr>
         <p:spPr>
           <a:xfrm>
-            <a:off x="8153400" y="1325880"/>
-            <a:ext cx="3642360" cy="4892040"/>
+            <a:off x="8095488" y="1325880"/>
+            <a:ext cx="3544824" cy="4892040"/>
           </a:xfrm>
           <a:prstGeom prst="roundRect">
             <a:avLst>
-              <a:gd name="adj" fmla="val 2008"/>
+              <a:gd name="adj" fmla="val 2064"/>
             </a:avLst>
           </a:prstGeom>
           <a:solidFill>
@@ -27328,7 +29458,7 @@
         </p:nvSpPr>
         <p:spPr>
           <a:xfrm>
-            <a:off x="8336280" y="1508760"/>
+            <a:off x="8278368" y="1508760"/>
             <a:ext cx="457200" cy="457200"/>
           </a:xfrm>
           <a:prstGeom prst="ellipse">
@@ -27348,7 +29478,7 @@
         </p:nvSpPr>
         <p:spPr>
           <a:xfrm>
-            <a:off x="8336280" y="1508760"/>
+            <a:off x="8278368" y="1508760"/>
             <a:ext cx="457200" cy="457200"/>
           </a:xfrm>
           <a:prstGeom prst="rect">
@@ -27387,8 +29517,8 @@
         </p:nvSpPr>
         <p:spPr>
           <a:xfrm>
-            <a:off x="8930640" y="1435608"/>
-            <a:ext cx="2727960" cy="4672584"/>
+            <a:off x="8872728" y="1435608"/>
+            <a:ext cx="2630424" cy="4672584"/>
           </a:xfrm>
           <a:prstGeom prst="rect">
             <a:avLst/>
@@ -27417,6 +29547,54 @@
               <a:t>kWp = tamanho da usina</a:t>
             </a:r>
             <a:endParaRPr lang="en-US" sz="1800" dirty="0"/>
+          </a:p>
+        </p:txBody>
+      </p:sp>
+      <p:sp>
+        <p:nvSpPr>
+          <p:cNvPr id="25" name="Slide Number Placeholder 0"/>
+          <p:cNvSpPr>
+            <a:spLocks noGrp="1"/>
+          </p:cNvSpPr>
+          <p:nvPr>
+            <p:ph type="sldNum" sz="quarter" idx="4294967295"/>
+          </p:nvPr>
+        </p:nvSpPr>
+        <p:spPr>
+          <a:xfrm>
+            <a:off x="11292840" y="6556248"/>
+            <a:ext cx="548640" cy="256032"/>
+          </a:xfrm>
+          <a:prstGeom prst="rect">
+            <a:avLst/>
+          </a:prstGeom>
+          <a:extLst>
+            <a:ext uri="{C572A759-6A51-4108-AA02-DFA0A04FC94B}">
+              <ma14:wrappingTextBoxFlag xmlns:ma14="http://schemas.microsoft.com/office/mac/drawingml/2011/main" val="0"/>
+            </a:ext>
+          </a:extLst>
+        </p:spPr>
+        <p:txBody>
+          <a:bodyPr/>
+          <a:lstStyle>
+            <a:lvl1pPr>
+              <a:defRPr sz="900">
+                <a:solidFill>
+                  <a:srgbClr val="1B3A6B"/>
+                </a:solidFill>
+                <a:latin typeface="Arial"/>
+                <a:ea typeface="Arial"/>
+                <a:cs typeface="Arial"/>
+              </a:defRPr>
+            </a:lvl1pPr>
+          </a:lstStyle>
+          <a:p>
+            <a:pPr algn="r"/>
+            <a:fld id="{F7021451-1387-4CA6-816F-3879F97B5CBC}" type="slidenum">
+              <a:rPr b="1" lang="en-US"/>
+              <a:t>8</a:t>
+            </a:fld>
+            <a:endParaRPr lang="en-US"/>
           </a:p>
         </p:txBody>
       </p:sp>
@@ -27480,6 +29658,45 @@
         </p:nvSpPr>
         <p:spPr>
           <a:xfrm>
+            <a:off x="457200" y="548640"/>
+            <a:ext cx="3474720" cy="1737360"/>
+          </a:xfrm>
+          <a:prstGeom prst="rect">
+            <a:avLst/>
+          </a:prstGeom>
+          <a:noFill/>
+          <a:ln/>
+        </p:spPr>
+        <p:txBody>
+          <a:bodyPr wrap="square" rtlCol="0" anchor="ctr"/>
+          <a:lstStyle/>
+          <a:p>
+            <a:pPr indent="0" marL="0">
+              <a:buNone/>
+            </a:pPr>
+            <a:r>
+              <a:rPr lang="en-US" sz="11000" b="1" dirty="0">
+                <a:solidFill>
+                  <a:srgbClr val="11396F"/>
+                </a:solidFill>
+                <a:latin typeface="Arial" pitchFamily="34" charset="0"/>
+                <a:ea typeface="Arial" pitchFamily="34" charset="-122"/>
+                <a:cs typeface="Arial" pitchFamily="34" charset="-120"/>
+              </a:rPr>
+              <a:t>02</a:t>
+            </a:r>
+            <a:endParaRPr lang="en-US" sz="11000" dirty="0"/>
+          </a:p>
+        </p:txBody>
+      </p:sp>
+      <p:sp>
+        <p:nvSpPr>
+          <p:cNvPr id="4" name="Text 2"/>
+          <p:cNvSpPr/>
+          <p:nvPr/>
+        </p:nvSpPr>
+        <p:spPr>
+          <a:xfrm>
             <a:off x="548640" y="2194560"/>
             <a:ext cx="3291840" cy="548640"/>
           </a:xfrm>
@@ -27513,7 +29730,46 @@
       </p:sp>
       <p:sp>
         <p:nvSpPr>
-          <p:cNvPr id="4" name="Text 2"/>
+          <p:cNvPr id="5" name="Text 3"/>
+          <p:cNvSpPr/>
+          <p:nvPr/>
+        </p:nvSpPr>
+        <p:spPr>
+          <a:xfrm>
+            <a:off x="548640" y="3200400"/>
+            <a:ext cx="3383280" cy="457200"/>
+          </a:xfrm>
+          <a:prstGeom prst="rect">
+            <a:avLst/>
+          </a:prstGeom>
+          <a:noFill/>
+          <a:ln/>
+        </p:spPr>
+        <p:txBody>
+          <a:bodyPr wrap="square" rtlCol="0" anchor="ctr"/>
+          <a:lstStyle/>
+          <a:p>
+            <a:pPr indent="0" marL="0">
+              <a:buNone/>
+            </a:pPr>
+            <a:r>
+              <a:rPr lang="en-US" sz="1100" dirty="0">
+                <a:solidFill>
+                  <a:srgbClr val="C7D2E3"/>
+                </a:solidFill>
+                <a:latin typeface="Arial" pitchFamily="34" charset="0"/>
+                <a:ea typeface="Arial" pitchFamily="34" charset="-122"/>
+                <a:cs typeface="Arial" pitchFamily="34" charset="-120"/>
+              </a:rPr>
+              <a:t>M1 · Etapa 1 · Fundamentos</a:t>
+            </a:r>
+            <a:endParaRPr lang="en-US" sz="1100" dirty="0"/>
+          </a:p>
+        </p:txBody>
+      </p:sp>
+      <p:sp>
+        <p:nvSpPr>
+          <p:cNvPr id="6" name="Text 4"/>
           <p:cNvSpPr/>
           <p:nvPr/>
         </p:nvSpPr>
@@ -27552,7 +29808,7 @@
       </p:sp>
       <p:pic>
         <p:nvPicPr>
-          <p:cNvPr id="5" name="Image 0" descr="/www/wwwroot/rexar/gdsolar/docs/curso/slides/assets/logo-gdsolar.png">    </p:cNvPr>
+          <p:cNvPr id="7" name="Image 0" descr="/www/wwwroot/rexar/gdsolar/docs/curso/slides/assets/logo-gdsolar.png">    </p:cNvPr>
           <p:cNvPicPr>
             <a:picLocks noChangeAspect="1"/>
           </p:cNvPicPr>
@@ -27576,7 +29832,7 @@
       </p:pic>
       <p:sp>
         <p:nvSpPr>
-          <p:cNvPr id="6" name="Text 3"/>
+          <p:cNvPr id="8" name="Text 5"/>
           <p:cNvSpPr/>
           <p:nvPr/>
         </p:nvSpPr>
@@ -27617,7 +29873,7 @@
       </p:sp>
       <p:sp>
         <p:nvSpPr>
-          <p:cNvPr id="7" name="Text 4"/>
+          <p:cNvPr id="9" name="Text 6"/>
           <p:cNvSpPr/>
           <p:nvPr/>
         </p:nvSpPr>
@@ -27658,7 +29914,7 @@
       </p:sp>
       <p:sp>
         <p:nvSpPr>
-          <p:cNvPr id="8" name="Text 5"/>
+          <p:cNvPr id="10" name="Text 7"/>
           <p:cNvSpPr/>
           <p:nvPr/>
         </p:nvSpPr>

--- a/docs/curso/slides/m01-fundamentos.pptx
+++ b/docs/curso/slides/m01-fundamentos.pptx
@@ -51,9 +51,10 @@
     <p:sldId id="299" r:id="rId45"/>
     <p:sldId id="300" r:id="rId46"/>
     <p:sldId id="301" r:id="rId47"/>
+    <p:sldId id="302" r:id="rId48"/>
   </p:sldIdLst>
   <p:notesMasterIdLst>
-    <p:notesMasterId r:id="rId48"/>
+    <p:notesMasterId r:id="rId49"/>
   </p:notesMasterIdLst>
   <p:sldSz cx="12192000" cy="6858000"/>
   <p:notesSz cx="6858000" cy="12192000"/>
@@ -3105,8 +3106,7 @@
             <a:r>
               <a:rPr lang="en-US" dirty="0"/>
               <a:t>A tarifa tem duas partes: a TE, que paga a energia, e a TUSD, que paga o uso das redes.
-Dentro da TUSD está o Fio B, que remunera a rede da distribuidora. No exemplo da tela, ele é um quarto da tarifa.
-Para projetos novos, a lei fez uma parte do Fio B deixar de ser compensada, crescendo até 2028. Em 2026, sessenta por cento do Fio B continua sendo pago. No exemplo, o crédito cai de oitenta para sessenta e oito centavos. Esse número é a base de toda a conta do negócio.</a:t>
+Dentro da TUSD está o Fio B, que remunera a rede da distribuidora. No exemplo da tela, ele é um quarto da tarifa.</a:t>
             </a:r>
             <a:endParaRPr lang="en-US" dirty="0"/>
           </a:p>
@@ -3194,7 +3194,7 @@
           <a:p>
             <a:r>
               <a:rPr lang="en-US" dirty="0"/>
-              <a:t>Fonte oficial: tarifas homologadas pela ANEEL para cada distribuidora</a:t>
+              <a:t>Para projetos novos, a lei fez uma parte do Fio B deixar de ser compensada, crescendo até 2028. Em 2026, sessenta por cento do Fio B continua sendo pago. No exemplo, o crédito cai de oitenta para sessenta e oito centavos. Esse número é a base de toda a conta do negócio.</a:t>
             </a:r>
             <a:endParaRPr lang="en-US" dirty="0"/>
           </a:p>
@@ -3458,8 +3458,7 @@
           <a:p>
             <a:r>
               <a:rPr lang="en-US" dirty="0"/>
-              <a:t>As bandeiras sinalizam o custo de gerar energia e acrescentam valor por quilowatt-hora. São um bom argumento comercial, mas prometa só o que a fatura mostra.
-Os tributos são calculados por dentro: fazem parte da própria base de cálculo.</a:t>
+              <a:t/>
             </a:r>
             <a:endParaRPr lang="en-US" dirty="0"/>
           </a:p>
@@ -3547,7 +3546,8 @@
           <a:p>
             <a:r>
               <a:rPr lang="en-US" dirty="0"/>
-              <a:t>Por isso a tarifa com impostos é a tarifa dividida por um menos as alíquotas. No exemplo, oitenta centavos viram cerca de um real e quatro.</a:t>
+              <a:t>As bandeiras sinalizam o custo de gerar energia e acrescentam valor por quilowatt-hora. São um bom argumento comercial, mas prometa só o que a fatura mostra.
+Os tributos são calculados por dentro: fazem parte da própria base de cálculo.</a:t>
             </a:r>
             <a:endParaRPr lang="en-US" dirty="0"/>
           </a:p>
@@ -3635,7 +3635,7 @@
           <a:p>
             <a:r>
               <a:rPr lang="en-US" dirty="0"/>
-              <a:t>Sobre a energia compensada há regras específicas, que variam por estado. Vamos tratá-las no módulo de gestão.</a:t>
+              <a:t>Por isso a tarifa com impostos é a tarifa dividida por um menos as alíquotas. No exemplo, oitenta centavos viram cerca de um real e quatro.</a:t>
             </a:r>
             <a:endParaRPr lang="en-US" dirty="0"/>
           </a:p>
@@ -3723,7 +3723,7 @@
           <a:p>
             <a:r>
               <a:rPr lang="en-US" dirty="0"/>
-              <a:t/>
+              <a:t>Sobre a energia compensada há regras específicas, que variam por estado. Vamos tratá-las no módulo de gestão.</a:t>
             </a:r>
             <a:endParaRPr lang="en-US" dirty="0"/>
           </a:p>
@@ -4075,10 +4075,7 @@
           <a:p>
             <a:r>
               <a:rPr lang="en-US" dirty="0"/>
-              <a:t>Em Cliente Consumidor, Clientes, abra a Padaria e a fatura mais recente. Atalho: Financeiro, Faturas de Concessionárias.
-Abra o PDF original e localize titular, instalação, classe, ligação, consumo, tributos, bandeira e total.
-Compare com o Resumo Técnico extraído automaticamente: os campos devem bater. Veja o status da extração.
-Localize a seção Energia Injetada e Consumo Injetado: são os créditos da geração distribuída, base da cobrança.</a:t>
+              <a:t/>
             </a:r>
             <a:endParaRPr lang="en-US" dirty="0"/>
           </a:p>
@@ -4166,7 +4163,10 @@
           <a:p>
             <a:r>
               <a:rPr lang="en-US" dirty="0"/>
-              <a:t/>
+              <a:t>Em Cliente Consumidor, Clientes, abra a Padaria e a fatura mais recente. Atalho: Financeiro, Faturas de Concessionárias.
+Abra o PDF original e localize titular, instalação, classe, ligação, consumo, tributos, bandeira e total.
+Compare com o Resumo Técnico extraído automaticamente: os campos devem bater. Veja o status da extração.
+Localize a seção Energia Injetada e Consumo Injetado: são os créditos da geração distribuída, base da cobrança.</a:t>
             </a:r>
             <a:endParaRPr lang="en-US" dirty="0"/>
           </a:p>
@@ -4630,6 +4630,94 @@
             <a:fld id="{F7021451-1387-4CA6-816F-3879F97B5CBC}" type="slidenum">
               <a:rPr lang="en-US"/>
               <a:t>46</a:t>
+            </a:fld>
+            <a:endParaRPr lang="en-US"/>
+          </a:p>
+        </p:txBody>
+      </p:sp>
+    </p:spTree>
+    <p:extLst>
+      <p:ext uri="{BB962C8B-B14F-4D97-AF65-F5344CB8AC3E}">
+        <p14:creationId xmlns:p14="http://schemas.microsoft.com/office/powerpoint/2010/main" val="1024086991"/>
+      </p:ext>
+    </p:extLst>
+  </p:cSld>
+  <p:clrMapOvr>
+    <a:masterClrMapping/>
+  </p:clrMapOvr>
+</p:notes>
+</file>
+
+<file path=ppt/notesSlides/notesSlide47.xml><?xml version="1.0" encoding="utf-8"?>
+<p:notes xmlns:a="http://schemas.openxmlformats.org/drawingml/2006/main" xmlns:r="http://schemas.openxmlformats.org/officeDocument/2006/relationships" xmlns:p="http://schemas.openxmlformats.org/presentationml/2006/main">
+  <p:cSld>
+    <p:spTree>
+      <p:nvGrpSpPr>
+        <p:cNvPr id="1" name=""/>
+        <p:cNvGrpSpPr/>
+        <p:nvPr/>
+      </p:nvGrpSpPr>
+      <p:grpSpPr>
+        <a:xfrm>
+          <a:off x="0" y="0"/>
+          <a:ext cx="0" cy="0"/>
+          <a:chOff x="0" y="0"/>
+          <a:chExt cx="0" cy="0"/>
+        </a:xfrm>
+      </p:grpSpPr>
+      <p:sp>
+        <p:nvSpPr>
+          <p:cNvPr id="2" name="Slide Image Placeholder 1"/>
+          <p:cNvSpPr>
+            <a:spLocks noGrp="1" noRot="1" noChangeAspect="1"/>
+          </p:cNvSpPr>
+          <p:nvPr>
+            <p:ph type="sldImg"/>
+          </p:nvPr>
+        </p:nvSpPr>
+        <p:spPr/>
+      </p:sp>
+      <p:sp>
+        <p:nvSpPr>
+          <p:cNvPr id="3" name="Notes Placeholder 2"/>
+          <p:cNvSpPr>
+            <a:spLocks noGrp="1"/>
+          </p:cNvSpPr>
+          <p:nvPr>
+            <p:ph type="body" idx="1"/>
+          </p:nvPr>
+        </p:nvSpPr>
+        <p:spPr/>
+        <p:txBody>
+          <a:bodyPr/>
+          <a:lstStyle/>
+          <a:p>
+            <a:r>
+              <a:rPr lang="en-US" dirty="0"/>
+              <a:t/>
+            </a:r>
+            <a:endParaRPr lang="en-US" dirty="0"/>
+          </a:p>
+        </p:txBody>
+      </p:sp>
+      <p:sp>
+        <p:nvSpPr>
+          <p:cNvPr id="4" name="Slide Number Placeholder 3"/>
+          <p:cNvSpPr>
+            <a:spLocks noGrp="1"/>
+          </p:cNvSpPr>
+          <p:nvPr>
+            <p:ph type="sldNum" sz="quarter" idx="10"/>
+          </p:nvPr>
+        </p:nvSpPr>
+        <p:spPr/>
+        <p:txBody>
+          <a:bodyPr/>
+          <a:lstStyle/>
+          <a:p>
+            <a:fld id="{F7021451-1387-4CA6-816F-3879F97B5CBC}" type="slidenum">
+              <a:rPr lang="en-US"/>
+              <a:t>47</a:t>
             </a:fld>
             <a:endParaRPr lang="en-US"/>
           </a:p>
@@ -5871,7 +5959,7 @@
                 <a:ea typeface="Arial" pitchFamily="34" charset="-122"/>
                 <a:cs typeface="Arial" pitchFamily="34" charset="-120"/>
               </a:rPr>
-              <a:t>8. lendo uma fatura de concessionária na plataforma</a:t>
+              <a:t>8. Lendo uma fatura de concessionária na plataforma</a:t>
             </a:r>
             <a:endParaRPr lang="en-US" sz="1200" dirty="0"/>
           </a:p>
@@ -7829,7 +7917,7 @@
               <a:buNone/>
             </a:pPr>
             <a:r>
-              <a:rPr lang="en-US" sz="1300" i="1" dirty="0">
+              <a:rPr lang="en-US" sz="1500" i="1" dirty="0">
                 <a:solidFill>
                   <a:srgbClr val="64748B"/>
                 </a:solidFill>
@@ -7839,7 +7927,7 @@
               </a:rPr>
               <a:t>Os painéis também perdem um pouco de eficiência por ano. Em contratos longos, considere isso.</a:t>
             </a:r>
-            <a:endParaRPr lang="en-US" sz="1300" dirty="0"/>
+            <a:endParaRPr lang="en-US" sz="1500" dirty="0"/>
           </a:p>
         </p:txBody>
       </p:sp>
@@ -8111,7 +8199,7 @@
               <a:buNone/>
             </a:pPr>
             <a:r>
-              <a:rPr lang="en-US" sz="1300" i="1" dirty="0">
+              <a:rPr lang="en-US" sz="1400" i="1" dirty="0">
                 <a:solidFill>
                   <a:srgbClr val="64748B"/>
                 </a:solidFill>
@@ -8121,7 +8209,7 @@
               </a:rPr>
               <a:t>Mais do que onde a usina está, importa que ela esteja na área da distribuidora dos seus clientes, legalmente conectada e gerando o que promete.</a:t>
             </a:r>
-            <a:endParaRPr lang="en-US" sz="1300" dirty="0"/>
+            <a:endParaRPr lang="en-US" sz="1400" dirty="0"/>
           </a:p>
         </p:txBody>
       </p:sp>
@@ -9095,7 +9183,7 @@
             <a:r>
               <a:rPr lang="en-US" sz="11000" b="1" dirty="0">
                 <a:solidFill>
-                  <a:srgbClr val="11396F"/>
+                  <a:srgbClr val="F7A23B"/>
                 </a:solidFill>
                 <a:latin typeface="Arial" pitchFamily="34" charset="0"/>
                 <a:ea typeface="Arial" pitchFamily="34" charset="-122"/>
@@ -9218,7 +9306,7 @@
                 <a:ea typeface="Arial" pitchFamily="34" charset="-122"/>
                 <a:cs typeface="Arial" pitchFamily="34" charset="-120"/>
               </a:rPr>
-              <a:t>Aula</a:t>
+              <a:t>Aula teórica</a:t>
             </a:r>
             <a:endParaRPr lang="en-US" sz="1400" dirty="0"/>
           </a:p>
@@ -9817,7 +9905,7 @@
               <a:buNone/>
             </a:pPr>
             <a:r>
-              <a:rPr lang="en-US" sz="1300" i="1" dirty="0">
+              <a:rPr lang="en-US" sz="1500" i="1" dirty="0">
                 <a:solidFill>
                   <a:srgbClr val="64748B"/>
                 </a:solidFill>
@@ -9827,7 +9915,7 @@
               </a:rPr>
               <a:t>Tradicionalmente, a energia vem de grandes usinas longe das cidades.</a:t>
             </a:r>
-            <a:endParaRPr lang="en-US" sz="1300" dirty="0"/>
+            <a:endParaRPr lang="en-US" sz="1500" dirty="0"/>
           </a:p>
         </p:txBody>
       </p:sp>
@@ -10078,7 +10166,7 @@
               <a:buNone/>
             </a:pPr>
             <a:r>
-              <a:rPr lang="en-US" sz="1300" i="1" dirty="0">
+              <a:rPr lang="en-US" sz="1400" i="1" dirty="0">
                 <a:solidFill>
                   <a:srgbClr val="64748B"/>
                 </a:solidFill>
@@ -10088,7 +10176,7 @@
               </a:rPr>
               <a:t>Ela viaja por linhas de transmissão de alta tensão, no Sistema Interligado Nacional. Transmitir custa caro, e esse custo é o Fio A da sua conta.</a:t>
             </a:r>
-            <a:endParaRPr lang="en-US" sz="1300" dirty="0"/>
+            <a:endParaRPr lang="en-US" sz="1400" dirty="0"/>
           </a:p>
         </p:txBody>
       </p:sp>
@@ -11064,12 +11152,12 @@
         </p:nvSpPr>
         <p:spPr>
           <a:xfrm>
-            <a:off x="548640" y="1325880"/>
-            <a:ext cx="11091672" cy="3977640"/>
+            <a:off x="1463040" y="1600200"/>
+            <a:ext cx="9262872" cy="3429000"/>
           </a:xfrm>
           <a:prstGeom prst="roundRect">
             <a:avLst>
-              <a:gd name="adj" fmla="val 1839"/>
+              <a:gd name="adj" fmla="val 3200"/>
             </a:avLst>
           </a:prstGeom>
           <a:solidFill>
@@ -11082,9 +11170,9 @@
             <a:prstDash val="solid"/>
           </a:ln>
           <a:effectLst>
-            <a:outerShdw sx="100000" sy="100000" kx="0" ky="0" algn="bl" rotWithShape="0" blurRad="38100" dist="12700" dir="5400000">
+            <a:outerShdw sx="100000" sy="100000" kx="0" ky="0" algn="bl" rotWithShape="0" blurRad="50800" dist="12700" dir="5400000">
               <a:srgbClr val="000000">
-                <a:alpha val="8000"/>
+                <a:alpha val="10000"/>
               </a:srgbClr>
             </a:outerShdw>
           </a:effectLst>
@@ -11098,14 +11186,14 @@
         </p:nvSpPr>
         <p:spPr>
           <a:xfrm>
-            <a:off x="731520" y="1508760"/>
-            <a:ext cx="457200" cy="457200"/>
-          </a:xfrm>
-          <a:prstGeom prst="ellipse">
+            <a:off x="1463040" y="1600200"/>
+            <a:ext cx="128016" cy="3429000"/>
+          </a:xfrm>
+          <a:prstGeom prst="rect">
             <a:avLst/>
           </a:prstGeom>
           <a:solidFill>
-            <a:srgbClr val="1B3A6B"/>
+            <a:srgbClr val="F7A23B"/>
           </a:solidFill>
           <a:ln/>
         </p:spPr>
@@ -11118,8 +11206,8 @@
         </p:nvSpPr>
         <p:spPr>
           <a:xfrm>
-            <a:off x="731520" y="1508760"/>
-            <a:ext cx="457200" cy="457200"/>
+            <a:off x="2011680" y="1783080"/>
+            <a:ext cx="8412480" cy="3063240"/>
           </a:xfrm>
           <a:prstGeom prst="rect">
             <a:avLst/>
@@ -11135,50 +11223,9 @@
               <a:buNone/>
             </a:pPr>
             <a:r>
-              <a:rPr lang="en-US" sz="1400" b="1" dirty="0">
-                <a:solidFill>
-                  <a:srgbClr val="FFFFFF"/>
-                </a:solidFill>
-                <a:latin typeface="Arial" pitchFamily="34" charset="0"/>
-                <a:ea typeface="Arial" pitchFamily="34" charset="-122"/>
-                <a:cs typeface="Arial" pitchFamily="34" charset="-120"/>
-              </a:rPr>
-              <a:t>1</a:t>
-            </a:r>
-            <a:endParaRPr lang="en-US" sz="1400" dirty="0"/>
-          </a:p>
-        </p:txBody>
-      </p:sp>
-      <p:sp>
-        <p:nvSpPr>
-          <p:cNvPr id="12" name="Text 9"/>
-          <p:cNvSpPr/>
-          <p:nvPr/>
-        </p:nvSpPr>
-        <p:spPr>
-          <a:xfrm>
-            <a:off x="1325880" y="1435608"/>
-            <a:ext cx="10177272" cy="3758184"/>
-          </a:xfrm>
-          <a:prstGeom prst="rect">
-            <a:avLst/>
-          </a:prstGeom>
-          <a:noFill/>
-          <a:ln/>
-        </p:spPr>
-        <p:txBody>
-          <a:bodyPr wrap="square" rtlCol="0" anchor="ctr">
-            <a:normAutofit/>
-          </a:bodyPr>
-          <a:lstStyle/>
-          <a:p>
-            <a:pPr indent="0" marL="0">
-              <a:buNone/>
-            </a:pPr>
-            <a:r>
-              <a:rPr lang="en-US" sz="1800" dirty="0">
-                <a:solidFill>
-                  <a:srgbClr val="1F2937"/>
+              <a:rPr lang="en-US" sz="3200" b="1" dirty="0">
+                <a:solidFill>
+                  <a:srgbClr val="1B3A6B"/>
                 </a:solidFill>
                 <a:latin typeface="Arial" pitchFamily="34" charset="0"/>
                 <a:ea typeface="Arial" pitchFamily="34" charset="-122"/>
@@ -11186,13 +11233,13 @@
               </a:rPr>
               <a:t>Geração distribuída: gerar perto de quem consome, ligado à rede de distribuição</a:t>
             </a:r>
-            <a:endParaRPr lang="en-US" sz="1800" dirty="0"/>
-          </a:p>
-        </p:txBody>
-      </p:sp>
-      <p:sp>
-        <p:nvSpPr>
-          <p:cNvPr id="13" name="Shape 10"/>
+            <a:endParaRPr lang="en-US" sz="3200" dirty="0"/>
+          </a:p>
+        </p:txBody>
+      </p:sp>
+      <p:sp>
+        <p:nvSpPr>
+          <p:cNvPr id="12" name="Shape 9"/>
           <p:cNvSpPr/>
           <p:nvPr/>
         </p:nvSpPr>
@@ -11219,7 +11266,7 @@
       </p:sp>
       <p:sp>
         <p:nvSpPr>
-          <p:cNvPr id="14" name="Shape 11"/>
+          <p:cNvPr id="13" name="Shape 10"/>
           <p:cNvSpPr/>
           <p:nvPr/>
         </p:nvSpPr>
@@ -11239,7 +11286,7 @@
       </p:sp>
       <p:sp>
         <p:nvSpPr>
-          <p:cNvPr id="15" name="Text 12"/>
+          <p:cNvPr id="14" name="Text 11"/>
           <p:cNvSpPr/>
           <p:nvPr/>
         </p:nvSpPr>
@@ -11978,7 +12025,7 @@
             <a:r>
               <a:rPr lang="en-US" sz="11000" b="1" dirty="0">
                 <a:solidFill>
-                  <a:srgbClr val="11396F"/>
+                  <a:srgbClr val="F7A23B"/>
                 </a:solidFill>
                 <a:latin typeface="Arial" pitchFamily="34" charset="0"/>
                 <a:ea typeface="Arial" pitchFamily="34" charset="-122"/>
@@ -12101,7 +12148,7 @@
                 <a:ea typeface="Arial" pitchFamily="34" charset="-122"/>
                 <a:cs typeface="Arial" pitchFamily="34" charset="-120"/>
               </a:rPr>
-              <a:t>Aula</a:t>
+              <a:t>Aula teórica</a:t>
             </a:r>
             <a:endParaRPr lang="en-US" sz="1400" dirty="0"/>
           </a:p>
@@ -12400,7 +12447,7 @@
             <a:r>
               <a:rPr lang="en-US" sz="11000" b="1" dirty="0">
                 <a:solidFill>
-                  <a:srgbClr val="11396F"/>
+                  <a:srgbClr val="F7A23B"/>
                 </a:solidFill>
                 <a:latin typeface="Arial" pitchFamily="34" charset="0"/>
                 <a:ea typeface="Arial" pitchFamily="34" charset="-122"/>
@@ -12523,7 +12570,7 @@
                 <a:ea typeface="Arial" pitchFamily="34" charset="-122"/>
                 <a:cs typeface="Arial" pitchFamily="34" charset="-120"/>
               </a:rPr>
-              <a:t>Aula</a:t>
+              <a:t>Aula teórica</a:t>
             </a:r>
             <a:endParaRPr lang="en-US" sz="1400" dirty="0"/>
           </a:p>
@@ -13292,7 +13339,7 @@
               <a:buNone/>
             </a:pPr>
             <a:r>
-              <a:rPr lang="en-US" sz="1300" i="1" dirty="0">
+              <a:rPr lang="en-US" sz="1400" i="1" dirty="0">
                 <a:solidFill>
                   <a:srgbClr val="64748B"/>
                 </a:solidFill>
@@ -13302,7 +13349,7 @@
               </a:rPr>
               <a:t>A ANEEL regula e fiscaliza. A distribuidora é o seu parceiro operacional do dia a dia: conexão da usina, rateio dos créditos e faturas.</a:t>
             </a:r>
-            <a:endParaRPr lang="en-US" sz="1300" dirty="0"/>
+            <a:endParaRPr lang="en-US" sz="1400" dirty="0"/>
           </a:p>
         </p:txBody>
       </p:sp>
@@ -13426,7 +13473,7 @@
               <a:buNone/>
             </a:pPr>
             <a:r>
-              <a:rPr lang="en-US" sz="1300" i="1" dirty="0">
+              <a:rPr lang="en-US" sz="1500" i="1" dirty="0">
                 <a:solidFill>
                   <a:srgbClr val="64748B"/>
                 </a:solidFill>
@@ -13436,7 +13483,7 @@
               </a:rPr>
               <a:t>No mercado regulado, onde estão residências e pequenos comércios, o consumidor compra da distribuidora pela tarifa da ANEEL.</a:t>
             </a:r>
-            <a:endParaRPr lang="en-US" sz="1300" dirty="0"/>
+            <a:endParaRPr lang="en-US" sz="1500" dirty="0"/>
           </a:p>
         </p:txBody>
       </p:sp>
@@ -15466,7 +15513,7 @@
             <a:r>
               <a:rPr lang="en-US" sz="11000" b="1" dirty="0">
                 <a:solidFill>
-                  <a:srgbClr val="11396F"/>
+                  <a:srgbClr val="F7A23B"/>
                 </a:solidFill>
                 <a:latin typeface="Arial" pitchFamily="34" charset="0"/>
                 <a:ea typeface="Arial" pitchFamily="34" charset="-122"/>
@@ -15589,7 +15636,7 @@
                 <a:ea typeface="Arial" pitchFamily="34" charset="-122"/>
                 <a:cs typeface="Arial" pitchFamily="34" charset="-120"/>
               </a:rPr>
-              <a:t>Aula</a:t>
+              <a:t>Aula teórica</a:t>
             </a:r>
             <a:endParaRPr lang="en-US" sz="1400" dirty="0"/>
           </a:p>
@@ -19955,7 +20002,7 @@
             <a:r>
               <a:rPr lang="en-US" sz="11000" b="1" dirty="0">
                 <a:solidFill>
-                  <a:srgbClr val="11396F"/>
+                  <a:srgbClr val="F7A23B"/>
                 </a:solidFill>
                 <a:latin typeface="Arial" pitchFamily="34" charset="0"/>
                 <a:ea typeface="Arial" pitchFamily="34" charset="-122"/>
@@ -20078,7 +20125,7 @@
                 <a:ea typeface="Arial" pitchFamily="34" charset="-122"/>
                 <a:cs typeface="Arial" pitchFamily="34" charset="-120"/>
               </a:rPr>
-              <a:t>Aula</a:t>
+              <a:t>Aula teórica</a:t>
             </a:r>
             <a:endParaRPr lang="en-US" sz="1400" dirty="0"/>
           </a:p>
@@ -20292,7 +20339,7 @@
                 <a:ea typeface="Arial" pitchFamily="34" charset="-122"/>
                 <a:cs typeface="Arial" pitchFamily="34" charset="-120"/>
               </a:rPr>
-              <a:t>Passo a passo na plataforma</a:t>
+              <a:t>Onde encontrar os valores oficiais</a:t>
             </a:r>
             <a:endParaRPr lang="en-US" sz="1500" dirty="0"/>
           </a:p>
@@ -21361,11 +21408,11 @@
         <p:spPr>
           <a:xfrm>
             <a:off x="548640" y="1325880"/>
-            <a:ext cx="3514344" cy="4937760"/>
+            <a:ext cx="5408676" cy="4937760"/>
           </a:xfrm>
           <a:prstGeom prst="roundRect">
             <a:avLst>
-              <a:gd name="adj" fmla="val 2082"/>
+              <a:gd name="adj" fmla="val 1481"/>
             </a:avLst>
           </a:prstGeom>
           <a:solidFill>
@@ -21395,7 +21442,7 @@
         <p:spPr>
           <a:xfrm>
             <a:off x="548640" y="1325880"/>
-            <a:ext cx="3514344" cy="109728"/>
+            <a:ext cx="5408676" cy="109728"/>
           </a:xfrm>
           <a:prstGeom prst="rect">
             <a:avLst/>
@@ -21415,7 +21462,7 @@
         <p:spPr>
           <a:xfrm>
             <a:off x="822960" y="1554480"/>
-            <a:ext cx="2965704" cy="685800"/>
+            <a:ext cx="4860036" cy="685800"/>
           </a:xfrm>
           <a:prstGeom prst="rect">
             <a:avLst/>
@@ -21456,7 +21503,7 @@
         <p:spPr>
           <a:xfrm>
             <a:off x="822960" y="2286000"/>
-            <a:ext cx="2965704" cy="2286000"/>
+            <a:ext cx="4860036" cy="2286000"/>
           </a:xfrm>
           <a:prstGeom prst="rect">
             <a:avLst/>
@@ -21522,7 +21569,7 @@
         <p:spPr>
           <a:xfrm>
             <a:off x="822960" y="4663440"/>
-            <a:ext cx="2965704" cy="18288"/>
+            <a:ext cx="4860036" cy="18288"/>
           </a:xfrm>
           <a:prstGeom prst="rect">
             <a:avLst/>
@@ -21542,7 +21589,7 @@
         <p:spPr>
           <a:xfrm>
             <a:off x="822960" y="4754880"/>
-            <a:ext cx="2965704" cy="1371600"/>
+            <a:ext cx="4860036" cy="1371600"/>
           </a:xfrm>
           <a:prstGeom prst="rect">
             <a:avLst/>
@@ -21558,7 +21605,7 @@
               <a:buNone/>
             </a:pPr>
             <a:r>
-              <a:rPr lang="en-US" sz="1300" i="1" dirty="0">
+              <a:rPr lang="en-US" sz="1400" i="1" dirty="0">
                 <a:solidFill>
                   <a:srgbClr val="64748B"/>
                 </a:solidFill>
@@ -21568,7 +21615,7 @@
               </a:rPr>
               <a:t>A tarifa tem duas partes: a TE, que paga a energia, e a TUSD, que paga o uso das redes.</a:t>
             </a:r>
-            <a:endParaRPr lang="en-US" sz="1300" dirty="0"/>
+            <a:endParaRPr lang="en-US" sz="1400" dirty="0"/>
           </a:p>
         </p:txBody>
       </p:sp>
@@ -21580,12 +21627,12 @@
         </p:nvSpPr>
         <p:spPr>
           <a:xfrm>
-            <a:off x="4337304" y="1325880"/>
-            <a:ext cx="3514344" cy="4937760"/>
+            <a:off x="6231636" y="1325880"/>
+            <a:ext cx="5408676" cy="4937760"/>
           </a:xfrm>
           <a:prstGeom prst="roundRect">
             <a:avLst>
-              <a:gd name="adj" fmla="val 2082"/>
+              <a:gd name="adj" fmla="val 1481"/>
             </a:avLst>
           </a:prstGeom>
           <a:solidFill>
@@ -21614,8 +21661,8 @@
         </p:nvSpPr>
         <p:spPr>
           <a:xfrm>
-            <a:off x="4337304" y="1325880"/>
-            <a:ext cx="3514344" cy="109728"/>
+            <a:off x="6231636" y="1325880"/>
+            <a:ext cx="5408676" cy="109728"/>
           </a:xfrm>
           <a:prstGeom prst="rect">
             <a:avLst/>
@@ -21634,8 +21681,8 @@
         </p:nvSpPr>
         <p:spPr>
           <a:xfrm>
-            <a:off x="4611624" y="1554480"/>
-            <a:ext cx="2965704" cy="685800"/>
+            <a:off x="6505956" y="1554480"/>
+            <a:ext cx="4860036" cy="685800"/>
           </a:xfrm>
           <a:prstGeom prst="rect">
             <a:avLst/>
@@ -21675,8 +21722,8 @@
         </p:nvSpPr>
         <p:spPr>
           <a:xfrm>
-            <a:off x="4611624" y="4023360"/>
-            <a:ext cx="2965704" cy="2103120"/>
+            <a:off x="6505956" y="4023360"/>
+            <a:ext cx="4860036" cy="2103120"/>
           </a:xfrm>
           <a:prstGeom prst="rect">
             <a:avLst/>
@@ -21692,7 +21739,7 @@
               <a:buNone/>
             </a:pPr>
             <a:r>
-              <a:rPr lang="en-US" sz="1300" i="1" dirty="0">
+              <a:rPr lang="en-US" sz="1500" i="1" dirty="0">
                 <a:solidFill>
                   <a:srgbClr val="64748B"/>
                 </a:solidFill>
@@ -21702,7 +21749,7 @@
               </a:rPr>
               <a:t>Dentro da TUSD está o Fio B, que remunera a rede da distribuidora. No exemplo da tela, ele é um quarto da tarifa.</a:t>
             </a:r>
-            <a:endParaRPr lang="en-US" sz="1300" dirty="0"/>
+            <a:endParaRPr lang="en-US" sz="1500" dirty="0"/>
           </a:p>
         </p:txBody>
       </p:sp>
@@ -21714,8 +21761,8 @@
         </p:nvSpPr>
         <p:spPr>
           <a:xfrm>
-            <a:off x="4611624" y="2286000"/>
-            <a:ext cx="2965704" cy="1645920"/>
+            <a:off x="6505956" y="2286000"/>
+            <a:ext cx="4860036" cy="1645920"/>
           </a:xfrm>
           <a:prstGeom prst="rect">
             <a:avLst/>
@@ -21733,7 +21780,7 @@
               <a:buNone/>
             </a:pPr>
             <a:r>
-              <a:rPr lang="en-US" sz="1900" dirty="0">
+              <a:rPr lang="en-US" sz="2200" dirty="0">
                 <a:solidFill>
                   <a:srgbClr val="1F2937"/>
                 </a:solidFill>
@@ -21743,227 +21790,7 @@
               </a:rPr>
               <a:t>TUSD (ex.: R$ 0,45) = Fio A R$ 0,05 + Fio B R$ 0,20 + Encargos R$ 0,12 + Perdas R$ 0,08</a:t>
             </a:r>
-            <a:endParaRPr lang="en-US" sz="1900" dirty="0"/>
-          </a:p>
-        </p:txBody>
-      </p:sp>
-      <p:sp>
-        <p:nvSpPr>
-          <p:cNvPr id="20" name="Shape 17"/>
-          <p:cNvSpPr/>
-          <p:nvPr/>
-        </p:nvSpPr>
-        <p:spPr>
-          <a:xfrm>
-            <a:off x="8125968" y="1325880"/>
-            <a:ext cx="3514344" cy="4937760"/>
-          </a:xfrm>
-          <a:prstGeom prst="roundRect">
-            <a:avLst>
-              <a:gd name="adj" fmla="val 2082"/>
-            </a:avLst>
-          </a:prstGeom>
-          <a:solidFill>
-            <a:srgbClr val="FFFFFF"/>
-          </a:solidFill>
-          <a:ln w="9525">
-            <a:solidFill>
-              <a:srgbClr val="D8E0EC"/>
-            </a:solidFill>
-            <a:prstDash val="solid"/>
-          </a:ln>
-          <a:effectLst>
-            <a:outerShdw sx="100000" sy="100000" kx="0" ky="0" algn="bl" rotWithShape="0" blurRad="38100" dist="12700" dir="5400000">
-              <a:srgbClr val="000000">
-                <a:alpha val="8000"/>
-              </a:srgbClr>
-            </a:outerShdw>
-          </a:effectLst>
-        </p:spPr>
-      </p:sp>
-      <p:sp>
-        <p:nvSpPr>
-          <p:cNvPr id="21" name="Shape 18"/>
-          <p:cNvSpPr/>
-          <p:nvPr/>
-        </p:nvSpPr>
-        <p:spPr>
-          <a:xfrm>
-            <a:off x="8125968" y="1325880"/>
-            <a:ext cx="3514344" cy="109728"/>
-          </a:xfrm>
-          <a:prstGeom prst="rect">
-            <a:avLst/>
-          </a:prstGeom>
-          <a:solidFill>
-            <a:srgbClr val="1B3A6B"/>
-          </a:solidFill>
-          <a:ln/>
-        </p:spPr>
-      </p:sp>
-      <p:sp>
-        <p:nvSpPr>
-          <p:cNvPr id="22" name="Text 19"/>
-          <p:cNvSpPr/>
-          <p:nvPr/>
-        </p:nvSpPr>
-        <p:spPr>
-          <a:xfrm>
-            <a:off x="8400288" y="1554480"/>
-            <a:ext cx="2965704" cy="685800"/>
-          </a:xfrm>
-          <a:prstGeom prst="rect">
-            <a:avLst/>
-          </a:prstGeom>
-          <a:noFill/>
-          <a:ln/>
-        </p:spPr>
-        <p:txBody>
-          <a:bodyPr wrap="square" rtlCol="0" anchor="t">
-            <a:normAutofit/>
-          </a:bodyPr>
-          <a:lstStyle/>
-          <a:p>
-            <a:pPr indent="0" marL="0">
-              <a:buNone/>
-            </a:pPr>
-            <a:r>
-              <a:rPr lang="en-US" sz="1600" b="1" dirty="0">
-                <a:solidFill>
-                  <a:srgbClr val="1B3A6B"/>
-                </a:solidFill>
-                <a:latin typeface="Arial" pitchFamily="34" charset="0"/>
-                <a:ea typeface="Arial" pitchFamily="34" charset="-122"/>
-                <a:cs typeface="Arial" pitchFamily="34" charset="-120"/>
-              </a:rPr>
-              <a:t>Por que o Fio B é o personagem principal</a:t>
-            </a:r>
-            <a:endParaRPr lang="en-US" sz="1600" dirty="0"/>
-          </a:p>
-        </p:txBody>
-      </p:sp>
-      <p:sp>
-        <p:nvSpPr>
-          <p:cNvPr id="23" name="Text 20"/>
-          <p:cNvSpPr/>
-          <p:nvPr/>
-        </p:nvSpPr>
-        <p:spPr>
-          <a:xfrm>
-            <a:off x="8400288" y="2286000"/>
-            <a:ext cx="2965704" cy="2286000"/>
-          </a:xfrm>
-          <a:prstGeom prst="rect">
-            <a:avLst/>
-          </a:prstGeom>
-          <a:noFill/>
-          <a:ln/>
-        </p:spPr>
-        <p:txBody>
-          <a:bodyPr wrap="square" rtlCol="0" anchor="t">
-            <a:normAutofit/>
-          </a:bodyPr>
-          <a:lstStyle/>
-          <a:p>
-            <a:pPr marL="342900" indent="-342900">
-              <a:spcAft>
-                <a:spcPts val="600"/>
-              </a:spcAft>
-              <a:buSzPct val="100000"/>
-              <a:buChar char="●"/>
-            </a:pPr>
-            <a:r>
-              <a:rPr lang="en-US" sz="1700" dirty="0">
-                <a:solidFill>
-                  <a:srgbClr val="1F2937"/>
-                </a:solidFill>
-                <a:latin typeface="Arial" pitchFamily="34" charset="0"/>
-                <a:ea typeface="Arial" pitchFamily="34" charset="-122"/>
-                <a:cs typeface="Arial" pitchFamily="34" charset="-120"/>
-              </a:rPr>
-              <a:t>Antes de 2023: crédito abatia (quase) tudo</a:t>
-            </a:r>
-            <a:endParaRPr lang="en-US" sz="1700" dirty="0"/>
-          </a:p>
-          <a:p>
-            <a:pPr marL="342900" indent="-342900">
-              <a:spcAft>
-                <a:spcPts val="600"/>
-              </a:spcAft>
-              <a:buSzPct val="100000"/>
-              <a:buChar char="●"/>
-            </a:pPr>
-            <a:r>
-              <a:rPr lang="en-US" sz="1700" dirty="0">
-                <a:solidFill>
-                  <a:srgbClr val="1F2937"/>
-                </a:solidFill>
-                <a:latin typeface="Arial" pitchFamily="34" charset="0"/>
-                <a:ea typeface="Arial" pitchFamily="34" charset="-122"/>
-                <a:cs typeface="Arial" pitchFamily="34" charset="-120"/>
-              </a:rPr>
-              <a:t>Novos projetos: parte do Fio B volta a ser paga, subindo até 2028</a:t>
-            </a:r>
-            <a:endParaRPr lang="en-US" sz="1700" dirty="0"/>
-          </a:p>
-        </p:txBody>
-      </p:sp>
-      <p:sp>
-        <p:nvSpPr>
-          <p:cNvPr id="24" name="Shape 21"/>
-          <p:cNvSpPr/>
-          <p:nvPr/>
-        </p:nvSpPr>
-        <p:spPr>
-          <a:xfrm>
-            <a:off x="8400288" y="4663440"/>
-            <a:ext cx="2965704" cy="18288"/>
-          </a:xfrm>
-          <a:prstGeom prst="rect">
-            <a:avLst/>
-          </a:prstGeom>
-          <a:solidFill>
-            <a:srgbClr val="D8E0EC"/>
-          </a:solidFill>
-          <a:ln/>
-        </p:spPr>
-      </p:sp>
-      <p:sp>
-        <p:nvSpPr>
-          <p:cNvPr id="25" name="Text 22"/>
-          <p:cNvSpPr/>
-          <p:nvPr/>
-        </p:nvSpPr>
-        <p:spPr>
-          <a:xfrm>
-            <a:off x="8400288" y="4754880"/>
-            <a:ext cx="2965704" cy="1371600"/>
-          </a:xfrm>
-          <a:prstGeom prst="rect">
-            <a:avLst/>
-          </a:prstGeom>
-          <a:noFill/>
-          <a:ln/>
-        </p:spPr>
-        <p:txBody>
-          <a:bodyPr wrap="square" rtlCol="0" anchor="t"/>
-          <a:lstStyle/>
-          <a:p>
-            <a:pPr indent="0" marL="0">
-              <a:buNone/>
-            </a:pPr>
-            <a:r>
-              <a:rPr lang="en-US" sz="1100" i="1" dirty="0">
-                <a:solidFill>
-                  <a:srgbClr val="64748B"/>
-                </a:solidFill>
-                <a:latin typeface="Arial" pitchFamily="34" charset="0"/>
-                <a:ea typeface="Arial" pitchFamily="34" charset="-122"/>
-                <a:cs typeface="Arial" pitchFamily="34" charset="-120"/>
-              </a:rPr>
-              <a:t>Para projetos novos, a lei fez uma parte do Fio B deixar de ser compensada, crescendo até 2028. Em 2026, sessenta por cento do Fio B continua sendo pago. No exemplo, o crédito cai de oitenta para sessenta e oito centavos. Esse número é a base de toda a conta do negócio.</a:t>
-            </a:r>
-            <a:endParaRPr lang="en-US" sz="1100" dirty="0"/>
+            <a:endParaRPr lang="en-US" sz="2200" dirty="0"/>
           </a:p>
         </p:txBody>
       </p:sp>
@@ -22268,7 +22095,7 @@
                 <a:ea typeface="Arial" pitchFamily="34" charset="-122"/>
                 <a:cs typeface="Arial" pitchFamily="34" charset="-120"/>
               </a:rPr>
-              <a:t>Passo a passo na plataforma</a:t>
+              <a:t>Por que o Fio B é o personagem principal</a:t>
             </a:r>
             <a:endParaRPr lang="en-US" sz="2600" dirty="0"/>
           </a:p>
@@ -22283,11 +22110,11 @@
         <p:spPr>
           <a:xfrm>
             <a:off x="548640" y="1325880"/>
-            <a:ext cx="11091672" cy="4937760"/>
+            <a:ext cx="5431536" cy="3977640"/>
           </a:xfrm>
           <a:prstGeom prst="roundRect">
             <a:avLst>
-              <a:gd name="adj" fmla="val 1481"/>
+              <a:gd name="adj" fmla="val 1839"/>
             </a:avLst>
           </a:prstGeom>
           <a:solidFill>
@@ -22299,6 +22126,13 @@
             </a:solidFill>
             <a:prstDash val="solid"/>
           </a:ln>
+          <a:effectLst>
+            <a:outerShdw sx="100000" sy="100000" kx="0" ky="0" algn="bl" rotWithShape="0" blurRad="38100" dist="12700" dir="5400000">
+              <a:srgbClr val="000000">
+                <a:alpha val="8000"/>
+              </a:srgbClr>
+            </a:outerShdw>
+          </a:effectLst>
         </p:spPr>
       </p:sp>
       <p:sp>
@@ -22310,12 +22144,144 @@
         <p:spPr>
           <a:xfrm>
             <a:off x="731520" y="1508760"/>
-            <a:ext cx="822960" cy="384048"/>
+            <a:ext cx="457200" cy="457200"/>
+          </a:xfrm>
+          <a:prstGeom prst="ellipse">
+            <a:avLst/>
+          </a:prstGeom>
+          <a:solidFill>
+            <a:srgbClr val="1B3A6B"/>
+          </a:solidFill>
+          <a:ln/>
+        </p:spPr>
+      </p:sp>
+      <p:sp>
+        <p:nvSpPr>
+          <p:cNvPr id="11" name="Text 8"/>
+          <p:cNvSpPr/>
+          <p:nvPr/>
+        </p:nvSpPr>
+        <p:spPr>
+          <a:xfrm>
+            <a:off x="731520" y="1508760"/>
+            <a:ext cx="457200" cy="457200"/>
+          </a:xfrm>
+          <a:prstGeom prst="rect">
+            <a:avLst/>
+          </a:prstGeom>
+          <a:noFill/>
+          <a:ln/>
+        </p:spPr>
+        <p:txBody>
+          <a:bodyPr wrap="square" rtlCol="0" anchor="ctr"/>
+          <a:lstStyle/>
+          <a:p>
+            <a:pPr algn="ctr" indent="0" marL="0">
+              <a:buNone/>
+            </a:pPr>
+            <a:r>
+              <a:rPr lang="en-US" sz="1400" b="1" dirty="0">
+                <a:solidFill>
+                  <a:srgbClr val="FFFFFF"/>
+                </a:solidFill>
+                <a:latin typeface="Arial" pitchFamily="34" charset="0"/>
+                <a:ea typeface="Arial" pitchFamily="34" charset="-122"/>
+                <a:cs typeface="Arial" pitchFamily="34" charset="-120"/>
+              </a:rPr>
+              <a:t>1</a:t>
+            </a:r>
+            <a:endParaRPr lang="en-US" sz="1400" dirty="0"/>
+          </a:p>
+        </p:txBody>
+      </p:sp>
+      <p:sp>
+        <p:nvSpPr>
+          <p:cNvPr id="12" name="Text 9"/>
+          <p:cNvSpPr/>
+          <p:nvPr/>
+        </p:nvSpPr>
+        <p:spPr>
+          <a:xfrm>
+            <a:off x="1325880" y="1435608"/>
+            <a:ext cx="4517136" cy="3758184"/>
+          </a:xfrm>
+          <a:prstGeom prst="rect">
+            <a:avLst/>
+          </a:prstGeom>
+          <a:noFill/>
+          <a:ln/>
+        </p:spPr>
+        <p:txBody>
+          <a:bodyPr wrap="square" rtlCol="0" anchor="ctr">
+            <a:normAutofit/>
+          </a:bodyPr>
+          <a:lstStyle/>
+          <a:p>
+            <a:pPr indent="0" marL="0">
+              <a:buNone/>
+            </a:pPr>
+            <a:r>
+              <a:rPr lang="en-US" sz="1800" dirty="0">
+                <a:solidFill>
+                  <a:srgbClr val="1F2937"/>
+                </a:solidFill>
+                <a:latin typeface="Arial" pitchFamily="34" charset="0"/>
+                <a:ea typeface="Arial" pitchFamily="34" charset="-122"/>
+                <a:cs typeface="Arial" pitchFamily="34" charset="-120"/>
+              </a:rPr>
+              <a:t>Antes de 2023: crédito abatia (quase) tudo</a:t>
+            </a:r>
+            <a:endParaRPr lang="en-US" sz="1800" dirty="0"/>
+          </a:p>
+        </p:txBody>
+      </p:sp>
+      <p:sp>
+        <p:nvSpPr>
+          <p:cNvPr id="13" name="Shape 10"/>
+          <p:cNvSpPr/>
+          <p:nvPr/>
+        </p:nvSpPr>
+        <p:spPr>
+          <a:xfrm>
+            <a:off x="6208776" y="1325880"/>
+            <a:ext cx="5431536" cy="3977640"/>
           </a:xfrm>
           <a:prstGeom prst="roundRect">
             <a:avLst>
-              <a:gd name="adj" fmla="val 47619"/>
+              <a:gd name="adj" fmla="val 1839"/>
             </a:avLst>
+          </a:prstGeom>
+          <a:solidFill>
+            <a:srgbClr val="FFFFFF"/>
+          </a:solidFill>
+          <a:ln w="9525">
+            <a:solidFill>
+              <a:srgbClr val="D8E0EC"/>
+            </a:solidFill>
+            <a:prstDash val="solid"/>
+          </a:ln>
+          <a:effectLst>
+            <a:outerShdw sx="100000" sy="100000" kx="0" ky="0" algn="bl" rotWithShape="0" blurRad="38100" dist="12700" dir="5400000">
+              <a:srgbClr val="000000">
+                <a:alpha val="8000"/>
+              </a:srgbClr>
+            </a:outerShdw>
+          </a:effectLst>
+        </p:spPr>
+      </p:sp>
+      <p:sp>
+        <p:nvSpPr>
+          <p:cNvPr id="14" name="Shape 11"/>
+          <p:cNvSpPr/>
+          <p:nvPr/>
+        </p:nvSpPr>
+        <p:spPr>
+          <a:xfrm>
+            <a:off x="6391656" y="1508760"/>
+            <a:ext cx="457200" cy="457200"/>
+          </a:xfrm>
+          <a:prstGeom prst="ellipse">
+            <a:avLst/>
           </a:prstGeom>
           <a:solidFill>
             <a:srgbClr val="F7A23B"/>
@@ -22325,14 +22291,14 @@
       </p:sp>
       <p:sp>
         <p:nvSpPr>
-          <p:cNvPr id="11" name="Text 8"/>
-          <p:cNvSpPr/>
-          <p:nvPr/>
-        </p:nvSpPr>
-        <p:spPr>
-          <a:xfrm>
-            <a:off x="731520" y="1508760"/>
-            <a:ext cx="822960" cy="384048"/>
+          <p:cNvPr id="15" name="Text 12"/>
+          <p:cNvSpPr/>
+          <p:nvPr/>
+        </p:nvSpPr>
+        <p:spPr>
+          <a:xfrm>
+            <a:off x="6391656" y="1508760"/>
+            <a:ext cx="457200" cy="457200"/>
           </a:xfrm>
           <a:prstGeom prst="rect">
             <a:avLst/>
@@ -22348,7 +22314,7 @@
               <a:buNone/>
             </a:pPr>
             <a:r>
-              <a:rPr lang="en-US" sz="1000" b="1" dirty="0">
+              <a:rPr lang="en-US" sz="1400" b="1" dirty="0">
                 <a:solidFill>
                   <a:srgbClr val="FFFFFF"/>
                 </a:solidFill>
@@ -22356,22 +22322,22 @@
                 <a:ea typeface="Arial" pitchFamily="34" charset="-122"/>
                 <a:cs typeface="Arial" pitchFamily="34" charset="-120"/>
               </a:rPr>
-              <a:t>PASSO 1</a:t>
-            </a:r>
-            <a:endParaRPr lang="en-US" sz="1000" dirty="0"/>
-          </a:p>
-        </p:txBody>
-      </p:sp>
-      <p:sp>
-        <p:nvSpPr>
-          <p:cNvPr id="12" name="Text 9"/>
-          <p:cNvSpPr/>
-          <p:nvPr/>
-        </p:nvSpPr>
-        <p:spPr>
-          <a:xfrm>
-            <a:off x="1645920" y="1463040"/>
-            <a:ext cx="9857232" cy="502920"/>
+              <a:t>2</a:t>
+            </a:r>
+            <a:endParaRPr lang="en-US" sz="1400" dirty="0"/>
+          </a:p>
+        </p:txBody>
+      </p:sp>
+      <p:sp>
+        <p:nvSpPr>
+          <p:cNvPr id="16" name="Text 13"/>
+          <p:cNvSpPr/>
+          <p:nvPr/>
+        </p:nvSpPr>
+        <p:spPr>
+          <a:xfrm>
+            <a:off x="6986016" y="1435608"/>
+            <a:ext cx="4517136" cy="3758184"/>
           </a:xfrm>
           <a:prstGeom prst="rect">
             <a:avLst/>
@@ -22389,41 +22355,86 @@
               <a:buNone/>
             </a:pPr>
             <a:r>
-              <a:rPr lang="en-US" sz="1400" b="1" dirty="0">
-                <a:solidFill>
-                  <a:srgbClr val="1B3A6B"/>
-                </a:solidFill>
-                <a:latin typeface="Arial" pitchFamily="34" charset="0"/>
-                <a:ea typeface="Arial" pitchFamily="34" charset="-122"/>
-                <a:cs typeface="Arial" pitchFamily="34" charset="-120"/>
-              </a:rPr>
-              <a:t>Onde encontrar os valores oficiais</a:t>
-            </a:r>
-            <a:endParaRPr lang="en-US" sz="1400" dirty="0"/>
-          </a:p>
-        </p:txBody>
-      </p:sp>
-      <p:sp>
-        <p:nvSpPr>
-          <p:cNvPr id="13" name="Text 10"/>
-          <p:cNvSpPr/>
-          <p:nvPr/>
-        </p:nvSpPr>
-        <p:spPr>
-          <a:xfrm>
-            <a:off x="777240" y="2057400"/>
-            <a:ext cx="10634472" cy="4069080"/>
-          </a:xfrm>
-          <a:prstGeom prst="rect">
-            <a:avLst/>
-          </a:prstGeom>
-          <a:noFill/>
-          <a:ln/>
-        </p:spPr>
-        <p:txBody>
-          <a:bodyPr wrap="square" rtlCol="0" anchor="t">
-            <a:normAutofit/>
-          </a:bodyPr>
+              <a:rPr lang="en-US" sz="1800" dirty="0">
+                <a:solidFill>
+                  <a:srgbClr val="1F2937"/>
+                </a:solidFill>
+                <a:latin typeface="Arial" pitchFamily="34" charset="0"/>
+                <a:ea typeface="Arial" pitchFamily="34" charset="-122"/>
+                <a:cs typeface="Arial" pitchFamily="34" charset="-120"/>
+              </a:rPr>
+              <a:t>Novos projetos: parte do Fio B volta a ser paga, subindo até 2028</a:t>
+            </a:r>
+            <a:endParaRPr lang="en-US" sz="1800" dirty="0"/>
+          </a:p>
+        </p:txBody>
+      </p:sp>
+      <p:sp>
+        <p:nvSpPr>
+          <p:cNvPr id="17" name="Shape 14"/>
+          <p:cNvSpPr/>
+          <p:nvPr/>
+        </p:nvSpPr>
+        <p:spPr>
+          <a:xfrm>
+            <a:off x="548640" y="5413248"/>
+            <a:ext cx="11091672" cy="868680"/>
+          </a:xfrm>
+          <a:prstGeom prst="roundRect">
+            <a:avLst>
+              <a:gd name="adj" fmla="val 8421"/>
+            </a:avLst>
+          </a:prstGeom>
+          <a:solidFill>
+            <a:srgbClr val="EEF3FA"/>
+          </a:solidFill>
+          <a:ln w="6350">
+            <a:solidFill>
+              <a:srgbClr val="D8E0EC"/>
+            </a:solidFill>
+            <a:prstDash val="solid"/>
+          </a:ln>
+        </p:spPr>
+      </p:sp>
+      <p:sp>
+        <p:nvSpPr>
+          <p:cNvPr id="18" name="Shape 15"/>
+          <p:cNvSpPr/>
+          <p:nvPr/>
+        </p:nvSpPr>
+        <p:spPr>
+          <a:xfrm>
+            <a:off x="548640" y="5413248"/>
+            <a:ext cx="91440" cy="868680"/>
+          </a:xfrm>
+          <a:prstGeom prst="rect">
+            <a:avLst/>
+          </a:prstGeom>
+          <a:solidFill>
+            <a:srgbClr val="F7A23B"/>
+          </a:solidFill>
+          <a:ln/>
+        </p:spPr>
+      </p:sp>
+      <p:sp>
+        <p:nvSpPr>
+          <p:cNvPr id="19" name="Text 16"/>
+          <p:cNvSpPr/>
+          <p:nvPr/>
+        </p:nvSpPr>
+        <p:spPr>
+          <a:xfrm>
+            <a:off x="777240" y="5458968"/>
+            <a:ext cx="10744200" cy="777240"/>
+          </a:xfrm>
+          <a:prstGeom prst="rect">
+            <a:avLst/>
+          </a:prstGeom>
+          <a:noFill/>
+          <a:ln/>
+        </p:spPr>
+        <p:txBody>
+          <a:bodyPr wrap="square" rtlCol="0" anchor="ctr"/>
           <a:lstStyle/>
           <a:p>
             <a:pPr indent="0" marL="0">
@@ -22438,7 +22449,7 @@
                 <a:ea typeface="Arial" pitchFamily="34" charset="-122"/>
                 <a:cs typeface="Arial" pitchFamily="34" charset="-120"/>
               </a:rPr>
-              <a:t>Fonte oficial: tarifas homologadas pela ANEEL para cada distribuidora</a:t>
+              <a:t>Para projetos novos, a lei fez uma parte do Fio B deixar de ser compensada, crescendo até 2028. Em 2026, sessenta por cento do Fio B continua sendo pago. No exemplo, o crédito cai de oitenta para sessenta e oito centavos. Esse número é a base de toda a conta do negócio.</a:t>
             </a:r>
             <a:endParaRPr lang="en-US" sz="1500" dirty="0"/>
           </a:p>
@@ -22503,6 +22514,406 @@
 <file path=ppt/slides/slide32.xml><?xml version="1.0" encoding="utf-8"?>
 <p:sld xmlns:a="http://schemas.openxmlformats.org/drawingml/2006/main" xmlns:r="http://schemas.openxmlformats.org/officeDocument/2006/relationships" xmlns:p="http://schemas.openxmlformats.org/presentationml/2006/main">
   <p:cSld name="Slide 32">
+    <p:bg>
+      <p:bgPr>
+        <a:solidFill>
+          <a:srgbClr val="F6F8FB"/>
+        </a:solidFill>
+      </p:bgPr>
+    </p:bg>
+    <p:spTree>
+      <p:nvGrpSpPr>
+        <p:cNvPr id="1" name=""/>
+        <p:cNvGrpSpPr/>
+        <p:nvPr/>
+      </p:nvGrpSpPr>
+      <p:grpSpPr>
+        <a:xfrm>
+          <a:off x="0" y="0"/>
+          <a:ext cx="0" cy="0"/>
+          <a:chOff x="0" y="0"/>
+          <a:chExt cx="0" cy="0"/>
+        </a:xfrm>
+      </p:grpSpPr>
+      <p:sp>
+        <p:nvSpPr>
+          <p:cNvPr id="2" name="Shape 0"/>
+          <p:cNvSpPr/>
+          <p:nvPr/>
+        </p:nvSpPr>
+        <p:spPr>
+          <a:xfrm>
+            <a:off x="0" y="6510528"/>
+            <a:ext cx="12191695" cy="347472"/>
+          </a:xfrm>
+          <a:prstGeom prst="rect">
+            <a:avLst/>
+          </a:prstGeom>
+          <a:solidFill>
+            <a:srgbClr val="FFFFFF"/>
+          </a:solidFill>
+          <a:ln w="6350">
+            <a:solidFill>
+              <a:srgbClr val="D8E0EC"/>
+            </a:solidFill>
+            <a:prstDash val="solid"/>
+          </a:ln>
+        </p:spPr>
+      </p:sp>
+      <p:pic>
+        <p:nvPicPr>
+          <p:cNvPr id="3" name="Image 0" descr="/www/wwwroot/rexar/gdsolar/docs/curso/slides/assets/logo-gdsolar.png">    </p:cNvPr>
+          <p:cNvPicPr>
+            <a:picLocks noChangeAspect="1"/>
+          </p:cNvPicPr>
+          <p:nvPr/>
+        </p:nvPicPr>
+        <p:blipFill>
+          <a:blip r:embed="rId1"/>
+          <a:stretch>
+            <a:fillRect/>
+          </a:stretch>
+        </p:blipFill>
+        <p:spPr>
+          <a:xfrm>
+            <a:off x="548640" y="6547104"/>
+            <a:ext cx="274320" cy="274320"/>
+          </a:xfrm>
+          <a:prstGeom prst="rect">
+            <a:avLst/>
+          </a:prstGeom>
+        </p:spPr>
+      </p:pic>
+      <p:sp>
+        <p:nvSpPr>
+          <p:cNvPr id="4" name="Text 1"/>
+          <p:cNvSpPr/>
+          <p:nvPr/>
+        </p:nvSpPr>
+        <p:spPr>
+          <a:xfrm>
+            <a:off x="886968" y="6528816"/>
+            <a:ext cx="6400800" cy="310896"/>
+          </a:xfrm>
+          <a:prstGeom prst="rect">
+            <a:avLst/>
+          </a:prstGeom>
+          <a:noFill/>
+          <a:ln/>
+        </p:spPr>
+        <p:txBody>
+          <a:bodyPr wrap="square" rtlCol="0" anchor="ctr"/>
+          <a:lstStyle/>
+          <a:p>
+            <a:pPr indent="0" marL="0">
+              <a:buNone/>
+            </a:pPr>
+            <a:r>
+              <a:rPr lang="en-US" sz="900" b="1" dirty="0">
+                <a:solidFill>
+                  <a:srgbClr val="64748B"/>
+                </a:solidFill>
+                <a:latin typeface="Arial" pitchFamily="34" charset="0"/>
+                <a:ea typeface="Arial" pitchFamily="34" charset="-122"/>
+                <a:cs typeface="Arial" pitchFamily="34" charset="-120"/>
+              </a:rPr>
+              <a:t>GD Solar  ·  Formação em Energia por Assinatura</a:t>
+            </a:r>
+            <a:endParaRPr lang="en-US" sz="900" dirty="0"/>
+          </a:p>
+        </p:txBody>
+      </p:sp>
+      <p:sp>
+        <p:nvSpPr>
+          <p:cNvPr id="5" name="Text 2"/>
+          <p:cNvSpPr/>
+          <p:nvPr/>
+        </p:nvSpPr>
+        <p:spPr>
+          <a:xfrm>
+            <a:off x="7132320" y="6528816"/>
+            <a:ext cx="4023360" cy="310896"/>
+          </a:xfrm>
+          <a:prstGeom prst="rect">
+            <a:avLst/>
+          </a:prstGeom>
+          <a:noFill/>
+          <a:ln/>
+        </p:spPr>
+        <p:txBody>
+          <a:bodyPr wrap="square" rtlCol="0" anchor="ctr"/>
+          <a:lstStyle/>
+          <a:p>
+            <a:pPr algn="r" indent="0" marL="0">
+              <a:buNone/>
+            </a:pPr>
+            <a:r>
+              <a:rPr lang="en-US" sz="900" dirty="0">
+                <a:solidFill>
+                  <a:srgbClr val="64748B"/>
+                </a:solidFill>
+                <a:latin typeface="Arial" pitchFamily="34" charset="0"/>
+                <a:ea typeface="Arial" pitchFamily="34" charset="-122"/>
+                <a:cs typeface="Arial" pitchFamily="34" charset="-120"/>
+              </a:rPr>
+              <a:t>M1 · Aula 6</a:t>
+            </a:r>
+            <a:endParaRPr lang="en-US" sz="900" dirty="0"/>
+          </a:p>
+        </p:txBody>
+      </p:sp>
+      <p:sp>
+        <p:nvSpPr>
+          <p:cNvPr id="6" name="Shape 3"/>
+          <p:cNvSpPr/>
+          <p:nvPr/>
+        </p:nvSpPr>
+        <p:spPr>
+          <a:xfrm>
+            <a:off x="548640" y="384048"/>
+            <a:ext cx="82296" cy="658368"/>
+          </a:xfrm>
+          <a:prstGeom prst="rect">
+            <a:avLst/>
+          </a:prstGeom>
+          <a:solidFill>
+            <a:srgbClr val="F7A23B"/>
+          </a:solidFill>
+          <a:ln/>
+        </p:spPr>
+      </p:sp>
+      <p:sp>
+        <p:nvSpPr>
+          <p:cNvPr id="7" name="Text 4"/>
+          <p:cNvSpPr/>
+          <p:nvPr/>
+        </p:nvSpPr>
+        <p:spPr>
+          <a:xfrm>
+            <a:off x="777240" y="292608"/>
+            <a:ext cx="10972800" cy="274320"/>
+          </a:xfrm>
+          <a:prstGeom prst="rect">
+            <a:avLst/>
+          </a:prstGeom>
+          <a:noFill/>
+          <a:ln/>
+        </p:spPr>
+        <p:txBody>
+          <a:bodyPr wrap="square" rtlCol="0" anchor="ctr"/>
+          <a:lstStyle/>
+          <a:p>
+            <a:pPr indent="0" marL="0">
+              <a:buNone/>
+            </a:pPr>
+            <a:r>
+              <a:rPr lang="en-US" sz="1000" b="1" spc="100" kern="0" dirty="0">
+                <a:solidFill>
+                  <a:srgbClr val="F7A23B"/>
+                </a:solidFill>
+                <a:latin typeface="Arial" pitchFamily="34" charset="0"/>
+                <a:ea typeface="Arial" pitchFamily="34" charset="-122"/>
+                <a:cs typeface="Arial" pitchFamily="34" charset="-120"/>
+              </a:rPr>
+              <a:t>AULA 6 · A TARIFA POR DENTRO: TE, TUSD, FIO A, FIO B E ENCARGOS</a:t>
+            </a:r>
+            <a:endParaRPr lang="en-US" sz="1000" dirty="0"/>
+          </a:p>
+        </p:txBody>
+      </p:sp>
+      <p:sp>
+        <p:nvSpPr>
+          <p:cNvPr id="8" name="Text 5"/>
+          <p:cNvSpPr/>
+          <p:nvPr/>
+        </p:nvSpPr>
+        <p:spPr>
+          <a:xfrm>
+            <a:off x="777240" y="530352"/>
+            <a:ext cx="10881360" cy="566928"/>
+          </a:xfrm>
+          <a:prstGeom prst="rect">
+            <a:avLst/>
+          </a:prstGeom>
+          <a:noFill/>
+          <a:ln/>
+        </p:spPr>
+        <p:txBody>
+          <a:bodyPr wrap="square" rtlCol="0" anchor="ctr">
+            <a:normAutofit/>
+          </a:bodyPr>
+          <a:lstStyle/>
+          <a:p>
+            <a:pPr indent="0" marL="0">
+              <a:buNone/>
+            </a:pPr>
+            <a:r>
+              <a:rPr lang="en-US" sz="2600" b="1" dirty="0">
+                <a:solidFill>
+                  <a:srgbClr val="1B3A6B"/>
+                </a:solidFill>
+                <a:latin typeface="Arial" pitchFamily="34" charset="0"/>
+                <a:ea typeface="Arial" pitchFamily="34" charset="-122"/>
+                <a:cs typeface="Arial" pitchFamily="34" charset="-120"/>
+              </a:rPr>
+              <a:t>Onde encontrar os valores oficiais</a:t>
+            </a:r>
+            <a:endParaRPr lang="en-US" sz="2600" dirty="0"/>
+          </a:p>
+        </p:txBody>
+      </p:sp>
+      <p:sp>
+        <p:nvSpPr>
+          <p:cNvPr id="9" name="Shape 6"/>
+          <p:cNvSpPr/>
+          <p:nvPr/>
+        </p:nvSpPr>
+        <p:spPr>
+          <a:xfrm>
+            <a:off x="1463040" y="1600200"/>
+            <a:ext cx="9262872" cy="4389120"/>
+          </a:xfrm>
+          <a:prstGeom prst="roundRect">
+            <a:avLst>
+              <a:gd name="adj" fmla="val 2500"/>
+            </a:avLst>
+          </a:prstGeom>
+          <a:solidFill>
+            <a:srgbClr val="FFFFFF"/>
+          </a:solidFill>
+          <a:ln w="9525">
+            <a:solidFill>
+              <a:srgbClr val="D8E0EC"/>
+            </a:solidFill>
+            <a:prstDash val="solid"/>
+          </a:ln>
+          <a:effectLst>
+            <a:outerShdw sx="100000" sy="100000" kx="0" ky="0" algn="bl" rotWithShape="0" blurRad="50800" dist="12700" dir="5400000">
+              <a:srgbClr val="000000">
+                <a:alpha val="10000"/>
+              </a:srgbClr>
+            </a:outerShdw>
+          </a:effectLst>
+        </p:spPr>
+      </p:sp>
+      <p:sp>
+        <p:nvSpPr>
+          <p:cNvPr id="10" name="Shape 7"/>
+          <p:cNvSpPr/>
+          <p:nvPr/>
+        </p:nvSpPr>
+        <p:spPr>
+          <a:xfrm>
+            <a:off x="1463040" y="1600200"/>
+            <a:ext cx="128016" cy="4389120"/>
+          </a:xfrm>
+          <a:prstGeom prst="rect">
+            <a:avLst/>
+          </a:prstGeom>
+          <a:solidFill>
+            <a:srgbClr val="F7A23B"/>
+          </a:solidFill>
+          <a:ln/>
+        </p:spPr>
+      </p:sp>
+      <p:sp>
+        <p:nvSpPr>
+          <p:cNvPr id="11" name="Text 8"/>
+          <p:cNvSpPr/>
+          <p:nvPr/>
+        </p:nvSpPr>
+        <p:spPr>
+          <a:xfrm>
+            <a:off x="2011680" y="1783080"/>
+            <a:ext cx="8412480" cy="4023360"/>
+          </a:xfrm>
+          <a:prstGeom prst="rect">
+            <a:avLst/>
+          </a:prstGeom>
+          <a:noFill/>
+          <a:ln/>
+        </p:spPr>
+        <p:txBody>
+          <a:bodyPr wrap="square" rtlCol="0" anchor="ctr"/>
+          <a:lstStyle/>
+          <a:p>
+            <a:pPr algn="ctr" indent="0" marL="0">
+              <a:buNone/>
+            </a:pPr>
+            <a:r>
+              <a:rPr lang="en-US" sz="3200" b="1" dirty="0">
+                <a:solidFill>
+                  <a:srgbClr val="1B3A6B"/>
+                </a:solidFill>
+                <a:latin typeface="Arial" pitchFamily="34" charset="0"/>
+                <a:ea typeface="Arial" pitchFamily="34" charset="-122"/>
+                <a:cs typeface="Arial" pitchFamily="34" charset="-120"/>
+              </a:rPr>
+              <a:t>Fonte oficial: tarifas homologadas pela ANEEL para cada distribuidora</a:t>
+            </a:r>
+            <a:endParaRPr lang="en-US" sz="3200" dirty="0"/>
+          </a:p>
+        </p:txBody>
+      </p:sp>
+      <p:sp>
+        <p:nvSpPr>
+          <p:cNvPr id="25" name="Slide Number Placeholder 0"/>
+          <p:cNvSpPr>
+            <a:spLocks noGrp="1"/>
+          </p:cNvSpPr>
+          <p:nvPr>
+            <p:ph type="sldNum" sz="quarter" idx="4294967295"/>
+          </p:nvPr>
+        </p:nvSpPr>
+        <p:spPr>
+          <a:xfrm>
+            <a:off x="11292840" y="6556248"/>
+            <a:ext cx="548640" cy="256032"/>
+          </a:xfrm>
+          <a:prstGeom prst="rect">
+            <a:avLst/>
+          </a:prstGeom>
+          <a:extLst>
+            <a:ext uri="{C572A759-6A51-4108-AA02-DFA0A04FC94B}">
+              <ma14:wrappingTextBoxFlag xmlns:ma14="http://schemas.microsoft.com/office/mac/drawingml/2011/main" val="0"/>
+            </a:ext>
+          </a:extLst>
+        </p:spPr>
+        <p:txBody>
+          <a:bodyPr/>
+          <a:lstStyle>
+            <a:lvl1pPr>
+              <a:defRPr sz="900">
+                <a:solidFill>
+                  <a:srgbClr val="1B3A6B"/>
+                </a:solidFill>
+                <a:latin typeface="Arial"/>
+                <a:ea typeface="Arial"/>
+                <a:cs typeface="Arial"/>
+              </a:defRPr>
+            </a:lvl1pPr>
+          </a:lstStyle>
+          <a:p>
+            <a:pPr algn="r"/>
+            <a:fld id="{F7021451-1387-4CA6-816F-3879F97B5CBC}" type="slidenum">
+              <a:rPr b="1" lang="en-US"/>
+              <a:t>32</a:t>
+            </a:fld>
+            <a:endParaRPr lang="en-US"/>
+          </a:p>
+        </p:txBody>
+      </p:sp>
+    </p:spTree>
+  </p:cSld>
+  <p:clrMapOvr>
+    <a:masterClrMapping/>
+  </p:clrMapOvr>
+</p:sld>
+</file>
+
+<file path=ppt/slides/slide33.xml><?xml version="1.0" encoding="utf-8"?>
+<p:sld xmlns:a="http://schemas.openxmlformats.org/drawingml/2006/main" xmlns:r="http://schemas.openxmlformats.org/officeDocument/2006/relationships" xmlns:p="http://schemas.openxmlformats.org/presentationml/2006/main">
+  <p:cSld name="Slide 33">
     <p:bg>
       <p:bgPr>
         <a:solidFill>
@@ -23329,7 +23740,7 @@
             <a:pPr algn="r"/>
             <a:fld id="{F7021451-1387-4CA6-816F-3879F97B5CBC}" type="slidenum">
               <a:rPr b="1" lang="en-US"/>
-              <a:t>32</a:t>
+              <a:t>33</a:t>
             </a:fld>
             <a:endParaRPr lang="en-US"/>
           </a:p>
@@ -23343,9 +23754,9 @@
 </p:sld>
 </file>
 
-<file path=ppt/slides/slide33.xml><?xml version="1.0" encoding="utf-8"?>
+<file path=ppt/slides/slide34.xml><?xml version="1.0" encoding="utf-8"?>
 <p:sld xmlns:a="http://schemas.openxmlformats.org/drawingml/2006/main" xmlns:r="http://schemas.openxmlformats.org/officeDocument/2006/relationships" xmlns:p="http://schemas.openxmlformats.org/presentationml/2006/main">
-  <p:cSld name="Slide 33">
+  <p:cSld name="Slide 34">
     <p:bg>
       <p:bgPr>
         <a:solidFill>
@@ -23414,7 +23825,7 @@
             <a:r>
               <a:rPr lang="en-US" sz="11000" b="1" dirty="0">
                 <a:solidFill>
-                  <a:srgbClr val="11396F"/>
+                  <a:srgbClr val="F7A23B"/>
                 </a:solidFill>
                 <a:latin typeface="Arial" pitchFamily="34" charset="0"/>
                 <a:ea typeface="Arial" pitchFamily="34" charset="-122"/>
@@ -23537,7 +23948,7 @@
                 <a:ea typeface="Arial" pitchFamily="34" charset="-122"/>
                 <a:cs typeface="Arial" pitchFamily="34" charset="-120"/>
               </a:rPr>
-              <a:t>Aula</a:t>
+              <a:t>Aula teórica</a:t>
             </a:r>
             <a:endParaRPr lang="en-US" sz="1400" dirty="0"/>
           </a:p>
@@ -23754,816 +24165,6 @@
               <a:t>E na geração distribuída?</a:t>
             </a:r>
             <a:endParaRPr lang="en-US" sz="1500" dirty="0"/>
-          </a:p>
-        </p:txBody>
-      </p:sp>
-    </p:spTree>
-  </p:cSld>
-  <p:clrMapOvr>
-    <a:masterClrMapping/>
-  </p:clrMapOvr>
-</p:sld>
-</file>
-
-<file path=ppt/slides/slide34.xml><?xml version="1.0" encoding="utf-8"?>
-<p:sld xmlns:a="http://schemas.openxmlformats.org/drawingml/2006/main" xmlns:r="http://schemas.openxmlformats.org/officeDocument/2006/relationships" xmlns:p="http://schemas.openxmlformats.org/presentationml/2006/main">
-  <p:cSld name="Slide 34">
-    <p:bg>
-      <p:bgPr>
-        <a:solidFill>
-          <a:srgbClr val="F6F8FB"/>
-        </a:solidFill>
-      </p:bgPr>
-    </p:bg>
-    <p:spTree>
-      <p:nvGrpSpPr>
-        <p:cNvPr id="1" name=""/>
-        <p:cNvGrpSpPr/>
-        <p:nvPr/>
-      </p:nvGrpSpPr>
-      <p:grpSpPr>
-        <a:xfrm>
-          <a:off x="0" y="0"/>
-          <a:ext cx="0" cy="0"/>
-          <a:chOff x="0" y="0"/>
-          <a:chExt cx="0" cy="0"/>
-        </a:xfrm>
-      </p:grpSpPr>
-      <p:sp>
-        <p:nvSpPr>
-          <p:cNvPr id="2" name="Shape 0"/>
-          <p:cNvSpPr/>
-          <p:nvPr/>
-        </p:nvSpPr>
-        <p:spPr>
-          <a:xfrm>
-            <a:off x="0" y="6510528"/>
-            <a:ext cx="12191695" cy="347472"/>
-          </a:xfrm>
-          <a:prstGeom prst="rect">
-            <a:avLst/>
-          </a:prstGeom>
-          <a:solidFill>
-            <a:srgbClr val="FFFFFF"/>
-          </a:solidFill>
-          <a:ln w="6350">
-            <a:solidFill>
-              <a:srgbClr val="D8E0EC"/>
-            </a:solidFill>
-            <a:prstDash val="solid"/>
-          </a:ln>
-        </p:spPr>
-      </p:sp>
-      <p:pic>
-        <p:nvPicPr>
-          <p:cNvPr id="3" name="Image 0" descr="/www/wwwroot/rexar/gdsolar/docs/curso/slides/assets/logo-gdsolar.png">    </p:cNvPr>
-          <p:cNvPicPr>
-            <a:picLocks noChangeAspect="1"/>
-          </p:cNvPicPr>
-          <p:nvPr/>
-        </p:nvPicPr>
-        <p:blipFill>
-          <a:blip r:embed="rId1"/>
-          <a:stretch>
-            <a:fillRect/>
-          </a:stretch>
-        </p:blipFill>
-        <p:spPr>
-          <a:xfrm>
-            <a:off x="548640" y="6547104"/>
-            <a:ext cx="274320" cy="274320"/>
-          </a:xfrm>
-          <a:prstGeom prst="rect">
-            <a:avLst/>
-          </a:prstGeom>
-        </p:spPr>
-      </p:pic>
-      <p:sp>
-        <p:nvSpPr>
-          <p:cNvPr id="4" name="Text 1"/>
-          <p:cNvSpPr/>
-          <p:nvPr/>
-        </p:nvSpPr>
-        <p:spPr>
-          <a:xfrm>
-            <a:off x="886968" y="6528816"/>
-            <a:ext cx="6400800" cy="310896"/>
-          </a:xfrm>
-          <a:prstGeom prst="rect">
-            <a:avLst/>
-          </a:prstGeom>
-          <a:noFill/>
-          <a:ln/>
-        </p:spPr>
-        <p:txBody>
-          <a:bodyPr wrap="square" rtlCol="0" anchor="ctr"/>
-          <a:lstStyle/>
-          <a:p>
-            <a:pPr indent="0" marL="0">
-              <a:buNone/>
-            </a:pPr>
-            <a:r>
-              <a:rPr lang="en-US" sz="900" b="1" dirty="0">
-                <a:solidFill>
-                  <a:srgbClr val="64748B"/>
-                </a:solidFill>
-                <a:latin typeface="Arial" pitchFamily="34" charset="0"/>
-                <a:ea typeface="Arial" pitchFamily="34" charset="-122"/>
-                <a:cs typeface="Arial" pitchFamily="34" charset="-120"/>
-              </a:rPr>
-              <a:t>GD Solar  ·  Formação em Energia por Assinatura</a:t>
-            </a:r>
-            <a:endParaRPr lang="en-US" sz="900" dirty="0"/>
-          </a:p>
-        </p:txBody>
-      </p:sp>
-      <p:sp>
-        <p:nvSpPr>
-          <p:cNvPr id="5" name="Text 2"/>
-          <p:cNvSpPr/>
-          <p:nvPr/>
-        </p:nvSpPr>
-        <p:spPr>
-          <a:xfrm>
-            <a:off x="7132320" y="6528816"/>
-            <a:ext cx="4023360" cy="310896"/>
-          </a:xfrm>
-          <a:prstGeom prst="rect">
-            <a:avLst/>
-          </a:prstGeom>
-          <a:noFill/>
-          <a:ln/>
-        </p:spPr>
-        <p:txBody>
-          <a:bodyPr wrap="square" rtlCol="0" anchor="ctr"/>
-          <a:lstStyle/>
-          <a:p>
-            <a:pPr algn="r" indent="0" marL="0">
-              <a:buNone/>
-            </a:pPr>
-            <a:r>
-              <a:rPr lang="en-US" sz="900" dirty="0">
-                <a:solidFill>
-                  <a:srgbClr val="64748B"/>
-                </a:solidFill>
-                <a:latin typeface="Arial" pitchFamily="34" charset="0"/>
-                <a:ea typeface="Arial" pitchFamily="34" charset="-122"/>
-                <a:cs typeface="Arial" pitchFamily="34" charset="-120"/>
-              </a:rPr>
-              <a:t>M1 · Aula 7</a:t>
-            </a:r>
-            <a:endParaRPr lang="en-US" sz="900" dirty="0"/>
-          </a:p>
-        </p:txBody>
-      </p:sp>
-      <p:sp>
-        <p:nvSpPr>
-          <p:cNvPr id="6" name="Shape 3"/>
-          <p:cNvSpPr/>
-          <p:nvPr/>
-        </p:nvSpPr>
-        <p:spPr>
-          <a:xfrm>
-            <a:off x="548640" y="384048"/>
-            <a:ext cx="82296" cy="658368"/>
-          </a:xfrm>
-          <a:prstGeom prst="rect">
-            <a:avLst/>
-          </a:prstGeom>
-          <a:solidFill>
-            <a:srgbClr val="F7A23B"/>
-          </a:solidFill>
-          <a:ln/>
-        </p:spPr>
-      </p:sp>
-      <p:sp>
-        <p:nvSpPr>
-          <p:cNvPr id="7" name="Text 4"/>
-          <p:cNvSpPr/>
-          <p:nvPr/>
-        </p:nvSpPr>
-        <p:spPr>
-          <a:xfrm>
-            <a:off x="777240" y="292608"/>
-            <a:ext cx="10972800" cy="274320"/>
-          </a:xfrm>
-          <a:prstGeom prst="rect">
-            <a:avLst/>
-          </a:prstGeom>
-          <a:noFill/>
-          <a:ln/>
-        </p:spPr>
-        <p:txBody>
-          <a:bodyPr wrap="square" rtlCol="0" anchor="ctr"/>
-          <a:lstStyle/>
-          <a:p>
-            <a:pPr indent="0" marL="0">
-              <a:buNone/>
-            </a:pPr>
-            <a:r>
-              <a:rPr lang="en-US" sz="1000" b="1" spc="100" kern="0" dirty="0">
-                <a:solidFill>
-                  <a:srgbClr val="F7A23B"/>
-                </a:solidFill>
-                <a:latin typeface="Arial" pitchFamily="34" charset="0"/>
-                <a:ea typeface="Arial" pitchFamily="34" charset="-122"/>
-                <a:cs typeface="Arial" pitchFamily="34" charset="-120"/>
-              </a:rPr>
-              <a:t>AULA 7</a:t>
-            </a:r>
-            <a:endParaRPr lang="en-US" sz="1000" dirty="0"/>
-          </a:p>
-        </p:txBody>
-      </p:sp>
-      <p:sp>
-        <p:nvSpPr>
-          <p:cNvPr id="8" name="Text 5"/>
-          <p:cNvSpPr/>
-          <p:nvPr/>
-        </p:nvSpPr>
-        <p:spPr>
-          <a:xfrm>
-            <a:off x="777240" y="530352"/>
-            <a:ext cx="10881360" cy="566928"/>
-          </a:xfrm>
-          <a:prstGeom prst="rect">
-            <a:avLst/>
-          </a:prstGeom>
-          <a:noFill/>
-          <a:ln/>
-        </p:spPr>
-        <p:txBody>
-          <a:bodyPr wrap="square" rtlCol="0" anchor="ctr">
-            <a:normAutofit/>
-          </a:bodyPr>
-          <a:lstStyle/>
-          <a:p>
-            <a:pPr indent="0" marL="0">
-              <a:buNone/>
-            </a:pPr>
-            <a:r>
-              <a:rPr lang="en-US" sz="2600" b="1" dirty="0">
-                <a:solidFill>
-                  <a:srgbClr val="1B3A6B"/>
-                </a:solidFill>
-                <a:latin typeface="Arial" pitchFamily="34" charset="0"/>
-                <a:ea typeface="Arial" pitchFamily="34" charset="-122"/>
-                <a:cs typeface="Arial" pitchFamily="34" charset="-120"/>
-              </a:rPr>
-              <a:t>Bandeiras, tributos e a conta de luz</a:t>
-            </a:r>
-            <a:endParaRPr lang="en-US" sz="2600" dirty="0"/>
-          </a:p>
-        </p:txBody>
-      </p:sp>
-      <p:sp>
-        <p:nvSpPr>
-          <p:cNvPr id="9" name="Shape 6"/>
-          <p:cNvSpPr/>
-          <p:nvPr/>
-        </p:nvSpPr>
-        <p:spPr>
-          <a:xfrm>
-            <a:off x="548640" y="1325880"/>
-            <a:ext cx="5408676" cy="4937760"/>
-          </a:xfrm>
-          <a:prstGeom prst="roundRect">
-            <a:avLst>
-              <a:gd name="adj" fmla="val 1481"/>
-            </a:avLst>
-          </a:prstGeom>
-          <a:solidFill>
-            <a:srgbClr val="FFFFFF"/>
-          </a:solidFill>
-          <a:ln w="9525">
-            <a:solidFill>
-              <a:srgbClr val="D8E0EC"/>
-            </a:solidFill>
-            <a:prstDash val="solid"/>
-          </a:ln>
-          <a:effectLst>
-            <a:outerShdw sx="100000" sy="100000" kx="0" ky="0" algn="bl" rotWithShape="0" blurRad="38100" dist="12700" dir="5400000">
-              <a:srgbClr val="000000">
-                <a:alpha val="8000"/>
-              </a:srgbClr>
-            </a:outerShdw>
-          </a:effectLst>
-        </p:spPr>
-      </p:sp>
-      <p:sp>
-        <p:nvSpPr>
-          <p:cNvPr id="10" name="Shape 7"/>
-          <p:cNvSpPr/>
-          <p:nvPr/>
-        </p:nvSpPr>
-        <p:spPr>
-          <a:xfrm>
-            <a:off x="548640" y="1325880"/>
-            <a:ext cx="5408676" cy="109728"/>
-          </a:xfrm>
-          <a:prstGeom prst="rect">
-            <a:avLst/>
-          </a:prstGeom>
-          <a:solidFill>
-            <a:srgbClr val="1B3A6B"/>
-          </a:solidFill>
-          <a:ln/>
-        </p:spPr>
-      </p:sp>
-      <p:sp>
-        <p:nvSpPr>
-          <p:cNvPr id="11" name="Text 8"/>
-          <p:cNvSpPr/>
-          <p:nvPr/>
-        </p:nvSpPr>
-        <p:spPr>
-          <a:xfrm>
-            <a:off x="822960" y="1554480"/>
-            <a:ext cx="4860036" cy="685800"/>
-          </a:xfrm>
-          <a:prstGeom prst="rect">
-            <a:avLst/>
-          </a:prstGeom>
-          <a:noFill/>
-          <a:ln/>
-        </p:spPr>
-        <p:txBody>
-          <a:bodyPr wrap="square" rtlCol="0" anchor="t">
-            <a:normAutofit/>
-          </a:bodyPr>
-          <a:lstStyle/>
-          <a:p>
-            <a:pPr indent="0" marL="0">
-              <a:buNone/>
-            </a:pPr>
-            <a:r>
-              <a:rPr lang="en-US" sz="1600" b="1" dirty="0">
-                <a:solidFill>
-                  <a:srgbClr val="1B3A6B"/>
-                </a:solidFill>
-                <a:latin typeface="Arial" pitchFamily="34" charset="0"/>
-                <a:ea typeface="Arial" pitchFamily="34" charset="-122"/>
-                <a:cs typeface="Arial" pitchFamily="34" charset="-120"/>
-              </a:rPr>
-              <a:t>Bandeiras tarifárias</a:t>
-            </a:r>
-            <a:endParaRPr lang="en-US" sz="1600" dirty="0"/>
-          </a:p>
-        </p:txBody>
-      </p:sp>
-      <p:sp>
-        <p:nvSpPr>
-          <p:cNvPr id="12" name="Text 9"/>
-          <p:cNvSpPr/>
-          <p:nvPr/>
-        </p:nvSpPr>
-        <p:spPr>
-          <a:xfrm>
-            <a:off x="822960" y="2286000"/>
-            <a:ext cx="4860036" cy="2286000"/>
-          </a:xfrm>
-          <a:prstGeom prst="rect">
-            <a:avLst/>
-          </a:prstGeom>
-          <a:noFill/>
-          <a:ln/>
-        </p:spPr>
-        <p:txBody>
-          <a:bodyPr wrap="square" rtlCol="0" anchor="t">
-            <a:normAutofit/>
-          </a:bodyPr>
-          <a:lstStyle/>
-          <a:p>
-            <a:pPr marL="342900" indent="-342900">
-              <a:spcAft>
-                <a:spcPts val="600"/>
-              </a:spcAft>
-              <a:buSzPct val="100000"/>
-              <a:buChar char="●"/>
-            </a:pPr>
-            <a:r>
-              <a:rPr lang="en-US" sz="1700" dirty="0">
-                <a:solidFill>
-                  <a:srgbClr val="1F2937"/>
-                </a:solidFill>
-                <a:latin typeface="Arial" pitchFamily="34" charset="0"/>
-                <a:ea typeface="Arial" pitchFamily="34" charset="-122"/>
-                <a:cs typeface="Arial" pitchFamily="34" charset="-120"/>
-              </a:rPr>
-              <a:t>Verde: sem acréscimo</a:t>
-            </a:r>
-            <a:endParaRPr lang="en-US" sz="1700" dirty="0"/>
-          </a:p>
-          <a:p>
-            <a:pPr marL="342900" indent="-342900">
-              <a:spcAft>
-                <a:spcPts val="600"/>
-              </a:spcAft>
-              <a:buSzPct val="100000"/>
-              <a:buChar char="●"/>
-            </a:pPr>
-            <a:r>
-              <a:rPr lang="en-US" sz="1700" dirty="0">
-                <a:solidFill>
-                  <a:srgbClr val="1F2937"/>
-                </a:solidFill>
-                <a:latin typeface="Arial" pitchFamily="34" charset="0"/>
-                <a:ea typeface="Arial" pitchFamily="34" charset="-122"/>
-                <a:cs typeface="Arial" pitchFamily="34" charset="-120"/>
-              </a:rPr>
-              <a:t>Amarela</a:t>
-            </a:r>
-            <a:endParaRPr lang="en-US" sz="1700" dirty="0"/>
-          </a:p>
-          <a:p>
-            <a:pPr marL="342900" indent="-342900">
-              <a:spcAft>
-                <a:spcPts val="600"/>
-              </a:spcAft>
-              <a:buSzPct val="100000"/>
-              <a:buChar char="●"/>
-            </a:pPr>
-            <a:r>
-              <a:rPr lang="en-US" sz="1700" dirty="0">
-                <a:solidFill>
-                  <a:srgbClr val="1F2937"/>
-                </a:solidFill>
-                <a:latin typeface="Arial" pitchFamily="34" charset="0"/>
-                <a:ea typeface="Arial" pitchFamily="34" charset="-122"/>
-                <a:cs typeface="Arial" pitchFamily="34" charset="-120"/>
-              </a:rPr>
-              <a:t>Vermelha 1</a:t>
-            </a:r>
-            <a:endParaRPr lang="en-US" sz="1700" dirty="0"/>
-          </a:p>
-          <a:p>
-            <a:pPr marL="342900" indent="-342900">
-              <a:spcAft>
-                <a:spcPts val="600"/>
-              </a:spcAft>
-              <a:buSzPct val="100000"/>
-              <a:buChar char="●"/>
-            </a:pPr>
-            <a:r>
-              <a:rPr lang="en-US" sz="1700" dirty="0">
-                <a:solidFill>
-                  <a:srgbClr val="1F2937"/>
-                </a:solidFill>
-                <a:latin typeface="Arial" pitchFamily="34" charset="0"/>
-                <a:ea typeface="Arial" pitchFamily="34" charset="-122"/>
-                <a:cs typeface="Arial" pitchFamily="34" charset="-120"/>
-              </a:rPr>
-              <a:t>Vermelha 2: acréscimo por kWh consumido</a:t>
-            </a:r>
-            <a:endParaRPr lang="en-US" sz="1700" dirty="0"/>
-          </a:p>
-        </p:txBody>
-      </p:sp>
-      <p:sp>
-        <p:nvSpPr>
-          <p:cNvPr id="13" name="Shape 10"/>
-          <p:cNvSpPr/>
-          <p:nvPr/>
-        </p:nvSpPr>
-        <p:spPr>
-          <a:xfrm>
-            <a:off x="822960" y="4663440"/>
-            <a:ext cx="4860036" cy="18288"/>
-          </a:xfrm>
-          <a:prstGeom prst="rect">
-            <a:avLst/>
-          </a:prstGeom>
-          <a:solidFill>
-            <a:srgbClr val="D8E0EC"/>
-          </a:solidFill>
-          <a:ln/>
-        </p:spPr>
-      </p:sp>
-      <p:sp>
-        <p:nvSpPr>
-          <p:cNvPr id="14" name="Text 11"/>
-          <p:cNvSpPr/>
-          <p:nvPr/>
-        </p:nvSpPr>
-        <p:spPr>
-          <a:xfrm>
-            <a:off x="822960" y="4754880"/>
-            <a:ext cx="4860036" cy="1371600"/>
-          </a:xfrm>
-          <a:prstGeom prst="rect">
-            <a:avLst/>
-          </a:prstGeom>
-          <a:noFill/>
-          <a:ln/>
-        </p:spPr>
-        <p:txBody>
-          <a:bodyPr wrap="square" rtlCol="0" anchor="t"/>
-          <a:lstStyle/>
-          <a:p>
-            <a:pPr indent="0" marL="0">
-              <a:buNone/>
-            </a:pPr>
-            <a:r>
-              <a:rPr lang="en-US" sz="1300" i="1" dirty="0">
-                <a:solidFill>
-                  <a:srgbClr val="64748B"/>
-                </a:solidFill>
-                <a:latin typeface="Arial" pitchFamily="34" charset="0"/>
-                <a:ea typeface="Arial" pitchFamily="34" charset="-122"/>
-                <a:cs typeface="Arial" pitchFamily="34" charset="-120"/>
-              </a:rPr>
-              <a:t>As bandeiras sinalizam o custo de gerar energia e acrescentam valor por quilowatt-hora. São um bom argumento comercial, mas prometa só o que a fatura mostra.</a:t>
-            </a:r>
-            <a:endParaRPr lang="en-US" sz="1300" dirty="0"/>
-          </a:p>
-        </p:txBody>
-      </p:sp>
-      <p:sp>
-        <p:nvSpPr>
-          <p:cNvPr id="15" name="Shape 12"/>
-          <p:cNvSpPr/>
-          <p:nvPr/>
-        </p:nvSpPr>
-        <p:spPr>
-          <a:xfrm>
-            <a:off x="6231636" y="1325880"/>
-            <a:ext cx="5408676" cy="4937760"/>
-          </a:xfrm>
-          <a:prstGeom prst="roundRect">
-            <a:avLst>
-              <a:gd name="adj" fmla="val 1481"/>
-            </a:avLst>
-          </a:prstGeom>
-          <a:solidFill>
-            <a:srgbClr val="FFFFFF"/>
-          </a:solidFill>
-          <a:ln w="9525">
-            <a:solidFill>
-              <a:srgbClr val="D8E0EC"/>
-            </a:solidFill>
-            <a:prstDash val="solid"/>
-          </a:ln>
-          <a:effectLst>
-            <a:outerShdw sx="100000" sy="100000" kx="0" ky="0" algn="bl" rotWithShape="0" blurRad="38100" dist="12700" dir="5400000">
-              <a:srgbClr val="000000">
-                <a:alpha val="8000"/>
-              </a:srgbClr>
-            </a:outerShdw>
-          </a:effectLst>
-        </p:spPr>
-      </p:sp>
-      <p:sp>
-        <p:nvSpPr>
-          <p:cNvPr id="16" name="Shape 13"/>
-          <p:cNvSpPr/>
-          <p:nvPr/>
-        </p:nvSpPr>
-        <p:spPr>
-          <a:xfrm>
-            <a:off x="6231636" y="1325880"/>
-            <a:ext cx="5408676" cy="109728"/>
-          </a:xfrm>
-          <a:prstGeom prst="rect">
-            <a:avLst/>
-          </a:prstGeom>
-          <a:solidFill>
-            <a:srgbClr val="F7A23B"/>
-          </a:solidFill>
-          <a:ln/>
-        </p:spPr>
-      </p:sp>
-      <p:sp>
-        <p:nvSpPr>
-          <p:cNvPr id="17" name="Text 14"/>
-          <p:cNvSpPr/>
-          <p:nvPr/>
-        </p:nvSpPr>
-        <p:spPr>
-          <a:xfrm>
-            <a:off x="6505956" y="1554480"/>
-            <a:ext cx="4860036" cy="685800"/>
-          </a:xfrm>
-          <a:prstGeom prst="rect">
-            <a:avLst/>
-          </a:prstGeom>
-          <a:noFill/>
-          <a:ln/>
-        </p:spPr>
-        <p:txBody>
-          <a:bodyPr wrap="square" rtlCol="0" anchor="t">
-            <a:normAutofit/>
-          </a:bodyPr>
-          <a:lstStyle/>
-          <a:p>
-            <a:pPr indent="0" marL="0">
-              <a:buNone/>
-            </a:pPr>
-            <a:r>
-              <a:rPr lang="en-US" sz="1600" b="1" dirty="0">
-                <a:solidFill>
-                  <a:srgbClr val="1B3A6B"/>
-                </a:solidFill>
-                <a:latin typeface="Arial" pitchFamily="34" charset="0"/>
-                <a:ea typeface="Arial" pitchFamily="34" charset="-122"/>
-                <a:cs typeface="Arial" pitchFamily="34" charset="-120"/>
-              </a:rPr>
-              <a:t>Os tributos</a:t>
-            </a:r>
-            <a:endParaRPr lang="en-US" sz="1600" dirty="0"/>
-          </a:p>
-        </p:txBody>
-      </p:sp>
-      <p:sp>
-        <p:nvSpPr>
-          <p:cNvPr id="18" name="Text 15"/>
-          <p:cNvSpPr/>
-          <p:nvPr/>
-        </p:nvSpPr>
-        <p:spPr>
-          <a:xfrm>
-            <a:off x="6505956" y="2286000"/>
-            <a:ext cx="4860036" cy="2286000"/>
-          </a:xfrm>
-          <a:prstGeom prst="rect">
-            <a:avLst/>
-          </a:prstGeom>
-          <a:noFill/>
-          <a:ln/>
-        </p:spPr>
-        <p:txBody>
-          <a:bodyPr wrap="square" rtlCol="0" anchor="t">
-            <a:normAutofit/>
-          </a:bodyPr>
-          <a:lstStyle/>
-          <a:p>
-            <a:pPr marL="342900" indent="-342900">
-              <a:spcAft>
-                <a:spcPts val="600"/>
-              </a:spcAft>
-              <a:buSzPct val="100000"/>
-              <a:buChar char="●"/>
-            </a:pPr>
-            <a:r>
-              <a:rPr lang="en-US" sz="1700" dirty="0">
-                <a:solidFill>
-                  <a:srgbClr val="1F2937"/>
-                </a:solidFill>
-                <a:latin typeface="Arial" pitchFamily="34" charset="0"/>
-                <a:ea typeface="Arial" pitchFamily="34" charset="-122"/>
-                <a:cs typeface="Arial" pitchFamily="34" charset="-120"/>
-              </a:rPr>
-              <a:t>ICMS — estadual · alíquota do estado</a:t>
-            </a:r>
-            <a:endParaRPr lang="en-US" sz="1700" dirty="0"/>
-          </a:p>
-          <a:p>
-            <a:pPr marL="342900" indent="-342900">
-              <a:spcAft>
-                <a:spcPts val="600"/>
-              </a:spcAft>
-              <a:buSzPct val="100000"/>
-              <a:buChar char="●"/>
-            </a:pPr>
-            <a:r>
-              <a:rPr lang="en-US" sz="1700" dirty="0">
-                <a:solidFill>
-                  <a:srgbClr val="1F2937"/>
-                </a:solidFill>
-                <a:latin typeface="Arial" pitchFamily="34" charset="0"/>
-                <a:ea typeface="Arial" pitchFamily="34" charset="-122"/>
-                <a:cs typeface="Arial" pitchFamily="34" charset="-120"/>
-              </a:rPr>
-              <a:t>PIS/COFINS — federais · variam mês a mês</a:t>
-            </a:r>
-            <a:endParaRPr lang="en-US" sz="1700" dirty="0"/>
-          </a:p>
-          <a:p>
-            <a:pPr marL="342900" indent="-342900">
-              <a:spcAft>
-                <a:spcPts val="600"/>
-              </a:spcAft>
-              <a:buSzPct val="100000"/>
-              <a:buChar char="●"/>
-            </a:pPr>
-            <a:r>
-              <a:rPr lang="en-US" sz="1700" dirty="0">
-                <a:solidFill>
-                  <a:srgbClr val="1F2937"/>
-                </a:solidFill>
-                <a:latin typeface="Arial" pitchFamily="34" charset="0"/>
-                <a:ea typeface="Arial" pitchFamily="34" charset="-122"/>
-                <a:cs typeface="Arial" pitchFamily="34" charset="-120"/>
-              </a:rPr>
-              <a:t>CIP/COSIP — municipal · iluminação pública</a:t>
-            </a:r>
-            <a:endParaRPr lang="en-US" sz="1700" dirty="0"/>
-          </a:p>
-        </p:txBody>
-      </p:sp>
-      <p:sp>
-        <p:nvSpPr>
-          <p:cNvPr id="19" name="Shape 16"/>
-          <p:cNvSpPr/>
-          <p:nvPr/>
-        </p:nvSpPr>
-        <p:spPr>
-          <a:xfrm>
-            <a:off x="6505956" y="4663440"/>
-            <a:ext cx="4860036" cy="18288"/>
-          </a:xfrm>
-          <a:prstGeom prst="rect">
-            <a:avLst/>
-          </a:prstGeom>
-          <a:solidFill>
-            <a:srgbClr val="D8E0EC"/>
-          </a:solidFill>
-          <a:ln/>
-        </p:spPr>
-      </p:sp>
-      <p:sp>
-        <p:nvSpPr>
-          <p:cNvPr id="20" name="Text 17"/>
-          <p:cNvSpPr/>
-          <p:nvPr/>
-        </p:nvSpPr>
-        <p:spPr>
-          <a:xfrm>
-            <a:off x="6505956" y="4754880"/>
-            <a:ext cx="4860036" cy="1371600"/>
-          </a:xfrm>
-          <a:prstGeom prst="rect">
-            <a:avLst/>
-          </a:prstGeom>
-          <a:noFill/>
-          <a:ln/>
-        </p:spPr>
-        <p:txBody>
-          <a:bodyPr wrap="square" rtlCol="0" anchor="t"/>
-          <a:lstStyle/>
-          <a:p>
-            <a:pPr indent="0" marL="0">
-              <a:buNone/>
-            </a:pPr>
-            <a:r>
-              <a:rPr lang="en-US" sz="1300" i="1" dirty="0">
-                <a:solidFill>
-                  <a:srgbClr val="64748B"/>
-                </a:solidFill>
-                <a:latin typeface="Arial" pitchFamily="34" charset="0"/>
-                <a:ea typeface="Arial" pitchFamily="34" charset="-122"/>
-                <a:cs typeface="Arial" pitchFamily="34" charset="-120"/>
-              </a:rPr>
-              <a:t>Os tributos são calculados por dentro: fazem parte da própria base de cálculo.</a:t>
-            </a:r>
-            <a:endParaRPr lang="en-US" sz="1300" dirty="0"/>
-          </a:p>
-        </p:txBody>
-      </p:sp>
-      <p:sp>
-        <p:nvSpPr>
-          <p:cNvPr id="25" name="Slide Number Placeholder 0"/>
-          <p:cNvSpPr>
-            <a:spLocks noGrp="1"/>
-          </p:cNvSpPr>
-          <p:nvPr>
-            <p:ph type="sldNum" sz="quarter" idx="4294967295"/>
-          </p:nvPr>
-        </p:nvSpPr>
-        <p:spPr>
-          <a:xfrm>
-            <a:off x="11292840" y="6556248"/>
-            <a:ext cx="548640" cy="256032"/>
-          </a:xfrm>
-          <a:prstGeom prst="rect">
-            <a:avLst/>
-          </a:prstGeom>
-          <a:extLst>
-            <a:ext uri="{C572A759-6A51-4108-AA02-DFA0A04FC94B}">
-              <ma14:wrappingTextBoxFlag xmlns:ma14="http://schemas.microsoft.com/office/mac/drawingml/2011/main" val="0"/>
-            </a:ext>
-          </a:extLst>
-        </p:spPr>
-        <p:txBody>
-          <a:bodyPr/>
-          <a:lstStyle>
-            <a:lvl1pPr>
-              <a:defRPr sz="900">
-                <a:solidFill>
-                  <a:srgbClr val="1B3A6B"/>
-                </a:solidFill>
-                <a:latin typeface="Arial"/>
-                <a:ea typeface="Arial"/>
-                <a:cs typeface="Arial"/>
-              </a:defRPr>
-            </a:lvl1pPr>
-          </a:lstStyle>
-          <a:p>
-            <a:pPr algn="r"/>
-            <a:fld id="{F7021451-1387-4CA6-816F-3879F97B5CBC}" type="slidenum">
-              <a:rPr b="1" lang="en-US"/>
-              <a:t>34</a:t>
-            </a:fld>
-            <a:endParaRPr lang="en-US"/>
           </a:p>
         </p:txBody>
       </p:sp>
@@ -24779,7 +24380,7 @@
                 <a:ea typeface="Arial" pitchFamily="34" charset="-122"/>
                 <a:cs typeface="Arial" pitchFamily="34" charset="-120"/>
               </a:rPr>
-              <a:t>AULA 7 · BANDEIRAS, TRIBUTOS E A CONTA DE LUZ</a:t>
+              <a:t>AULA 7</a:t>
             </a:r>
             <a:endParaRPr lang="en-US" sz="1000" dirty="0"/>
           </a:p>
@@ -24820,7 +24421,7 @@
                 <a:ea typeface="Arial" pitchFamily="34" charset="-122"/>
                 <a:cs typeface="Arial" pitchFamily="34" charset="-120"/>
               </a:rPr>
-              <a:t>Calculando a tarifa com impostos</a:t>
+              <a:t>Bandeiras, tributos e a conta de luz</a:t>
             </a:r>
             <a:endParaRPr lang="en-US" sz="2600" dirty="0"/>
           </a:p>
@@ -24835,120 +24436,303 @@
         <p:spPr>
           <a:xfrm>
             <a:off x="548640" y="1325880"/>
-            <a:ext cx="11091672" cy="3977640"/>
+            <a:ext cx="5408676" cy="4937760"/>
           </a:xfrm>
           <a:prstGeom prst="roundRect">
             <a:avLst>
-              <a:gd name="adj" fmla="val 2299"/>
+              <a:gd name="adj" fmla="val 1481"/>
             </a:avLst>
           </a:prstGeom>
           <a:solidFill>
-            <a:srgbClr val="0B1F3A"/>
+            <a:srgbClr val="FFFFFF"/>
           </a:solidFill>
-          <a:ln/>
-        </p:spPr>
-      </p:sp>
-      <p:sp>
-        <p:nvSpPr>
-          <p:cNvPr id="10" name="Text 7"/>
-          <p:cNvSpPr/>
-          <p:nvPr/>
-        </p:nvSpPr>
-        <p:spPr>
-          <a:xfrm>
-            <a:off x="914400" y="1554480"/>
-            <a:ext cx="10360152" cy="3520440"/>
-          </a:xfrm>
-          <a:prstGeom prst="rect">
-            <a:avLst/>
-          </a:prstGeom>
-          <a:noFill/>
-          <a:ln/>
-        </p:spPr>
-        <p:txBody>
-          <a:bodyPr wrap="square" rtlCol="0" anchor="ctr">
-            <a:normAutofit/>
-          </a:bodyPr>
-          <a:lstStyle/>
-          <a:p>
-            <a:pPr indent="0" marL="0">
-              <a:spcAft>
-                <a:spcPts val="1000"/>
-              </a:spcAft>
-              <a:buNone/>
-            </a:pPr>
-            <a:r>
-              <a:rPr lang="en-US" sz="2400" b="1" dirty="0">
-                <a:solidFill>
-                  <a:srgbClr val="FFFFFF"/>
-                </a:solidFill>
-                <a:latin typeface="Consolas" pitchFamily="34" charset="0"/>
-                <a:ea typeface="Consolas" pitchFamily="34" charset="-122"/>
-                <a:cs typeface="Consolas" pitchFamily="34" charset="-120"/>
-              </a:rPr>
-              <a:t>Tarifa com impostos = Tarifa sem impostos ÷ (1 − (ICMS + PIS + COFINS))</a:t>
-            </a:r>
-            <a:endParaRPr lang="en-US" sz="2400" dirty="0"/>
-          </a:p>
-          <a:p>
-            <a:pPr indent="0" marL="0">
-              <a:spcAft>
-                <a:spcPts val="1000"/>
-              </a:spcAft>
-              <a:buNone/>
-            </a:pPr>
-            <a:r>
-              <a:rPr lang="en-US" sz="2400" b="1" dirty="0">
-                <a:solidFill>
-                  <a:srgbClr val="F7A23B"/>
-                </a:solidFill>
-                <a:latin typeface="Consolas" pitchFamily="34" charset="0"/>
-                <a:ea typeface="Consolas" pitchFamily="34" charset="-122"/>
-                <a:cs typeface="Consolas" pitchFamily="34" charset="-120"/>
-              </a:rPr>
-              <a:t>Ex.: R$ 0,80 ÷ (1 − (0,18 + 0,05)) = R$ 0,80 ÷ 0,77 ≈ R$ 1,04/kWh</a:t>
-            </a:r>
-            <a:endParaRPr lang="en-US" sz="2400" dirty="0"/>
-          </a:p>
-        </p:txBody>
-      </p:sp>
-      <p:sp>
-        <p:nvSpPr>
-          <p:cNvPr id="11" name="Shape 8"/>
-          <p:cNvSpPr/>
-          <p:nvPr/>
-        </p:nvSpPr>
-        <p:spPr>
-          <a:xfrm>
-            <a:off x="548640" y="5413248"/>
-            <a:ext cx="11091672" cy="868680"/>
-          </a:xfrm>
-          <a:prstGeom prst="roundRect">
-            <a:avLst>
-              <a:gd name="adj" fmla="val 8421"/>
-            </a:avLst>
-          </a:prstGeom>
-          <a:solidFill>
-            <a:srgbClr val="EEF3FA"/>
-          </a:solidFill>
-          <a:ln w="6350">
+          <a:ln w="9525">
             <a:solidFill>
               <a:srgbClr val="D8E0EC"/>
             </a:solidFill>
             <a:prstDash val="solid"/>
           </a:ln>
-        </p:spPr>
-      </p:sp>
-      <p:sp>
-        <p:nvSpPr>
-          <p:cNvPr id="12" name="Shape 9"/>
-          <p:cNvSpPr/>
-          <p:nvPr/>
-        </p:nvSpPr>
-        <p:spPr>
-          <a:xfrm>
-            <a:off x="548640" y="5413248"/>
-            <a:ext cx="91440" cy="868680"/>
+          <a:effectLst>
+            <a:outerShdw sx="100000" sy="100000" kx="0" ky="0" algn="bl" rotWithShape="0" blurRad="38100" dist="12700" dir="5400000">
+              <a:srgbClr val="000000">
+                <a:alpha val="8000"/>
+              </a:srgbClr>
+            </a:outerShdw>
+          </a:effectLst>
+        </p:spPr>
+      </p:sp>
+      <p:sp>
+        <p:nvSpPr>
+          <p:cNvPr id="10" name="Shape 7"/>
+          <p:cNvSpPr/>
+          <p:nvPr/>
+        </p:nvSpPr>
+        <p:spPr>
+          <a:xfrm>
+            <a:off x="548640" y="1325880"/>
+            <a:ext cx="5408676" cy="109728"/>
+          </a:xfrm>
+          <a:prstGeom prst="rect">
+            <a:avLst/>
+          </a:prstGeom>
+          <a:solidFill>
+            <a:srgbClr val="1B3A6B"/>
+          </a:solidFill>
+          <a:ln/>
+        </p:spPr>
+      </p:sp>
+      <p:sp>
+        <p:nvSpPr>
+          <p:cNvPr id="11" name="Text 8"/>
+          <p:cNvSpPr/>
+          <p:nvPr/>
+        </p:nvSpPr>
+        <p:spPr>
+          <a:xfrm>
+            <a:off x="822960" y="1554480"/>
+            <a:ext cx="4860036" cy="685800"/>
+          </a:xfrm>
+          <a:prstGeom prst="rect">
+            <a:avLst/>
+          </a:prstGeom>
+          <a:noFill/>
+          <a:ln/>
+        </p:spPr>
+        <p:txBody>
+          <a:bodyPr wrap="square" rtlCol="0" anchor="t">
+            <a:normAutofit/>
+          </a:bodyPr>
+          <a:lstStyle/>
+          <a:p>
+            <a:pPr indent="0" marL="0">
+              <a:buNone/>
+            </a:pPr>
+            <a:r>
+              <a:rPr lang="en-US" sz="1600" b="1" dirty="0">
+                <a:solidFill>
+                  <a:srgbClr val="1B3A6B"/>
+                </a:solidFill>
+                <a:latin typeface="Arial" pitchFamily="34" charset="0"/>
+                <a:ea typeface="Arial" pitchFamily="34" charset="-122"/>
+                <a:cs typeface="Arial" pitchFamily="34" charset="-120"/>
+              </a:rPr>
+              <a:t>Bandeiras tarifárias</a:t>
+            </a:r>
+            <a:endParaRPr lang="en-US" sz="1600" dirty="0"/>
+          </a:p>
+        </p:txBody>
+      </p:sp>
+      <p:sp>
+        <p:nvSpPr>
+          <p:cNvPr id="12" name="Text 9"/>
+          <p:cNvSpPr/>
+          <p:nvPr/>
+        </p:nvSpPr>
+        <p:spPr>
+          <a:xfrm>
+            <a:off x="822960" y="2286000"/>
+            <a:ext cx="4860036" cy="2286000"/>
+          </a:xfrm>
+          <a:prstGeom prst="rect">
+            <a:avLst/>
+          </a:prstGeom>
+          <a:noFill/>
+          <a:ln/>
+        </p:spPr>
+        <p:txBody>
+          <a:bodyPr wrap="square" rtlCol="0" anchor="t">
+            <a:normAutofit/>
+          </a:bodyPr>
+          <a:lstStyle/>
+          <a:p>
+            <a:pPr marL="342900" indent="-342900">
+              <a:spcAft>
+                <a:spcPts val="600"/>
+              </a:spcAft>
+              <a:buSzPct val="100000"/>
+              <a:buChar char="●"/>
+            </a:pPr>
+            <a:r>
+              <a:rPr lang="en-US" sz="1700" dirty="0">
+                <a:solidFill>
+                  <a:srgbClr val="1F2937"/>
+                </a:solidFill>
+                <a:latin typeface="Arial" pitchFamily="34" charset="0"/>
+                <a:ea typeface="Arial" pitchFamily="34" charset="-122"/>
+                <a:cs typeface="Arial" pitchFamily="34" charset="-120"/>
+              </a:rPr>
+              <a:t>Verde: sem acréscimo</a:t>
+            </a:r>
+            <a:endParaRPr lang="en-US" sz="1700" dirty="0"/>
+          </a:p>
+          <a:p>
+            <a:pPr marL="342900" indent="-342900">
+              <a:spcAft>
+                <a:spcPts val="600"/>
+              </a:spcAft>
+              <a:buSzPct val="100000"/>
+              <a:buChar char="●"/>
+            </a:pPr>
+            <a:r>
+              <a:rPr lang="en-US" sz="1700" dirty="0">
+                <a:solidFill>
+                  <a:srgbClr val="1F2937"/>
+                </a:solidFill>
+                <a:latin typeface="Arial" pitchFamily="34" charset="0"/>
+                <a:ea typeface="Arial" pitchFamily="34" charset="-122"/>
+                <a:cs typeface="Arial" pitchFamily="34" charset="-120"/>
+              </a:rPr>
+              <a:t>Amarela</a:t>
+            </a:r>
+            <a:endParaRPr lang="en-US" sz="1700" dirty="0"/>
+          </a:p>
+          <a:p>
+            <a:pPr marL="342900" indent="-342900">
+              <a:spcAft>
+                <a:spcPts val="600"/>
+              </a:spcAft>
+              <a:buSzPct val="100000"/>
+              <a:buChar char="●"/>
+            </a:pPr>
+            <a:r>
+              <a:rPr lang="en-US" sz="1700" dirty="0">
+                <a:solidFill>
+                  <a:srgbClr val="1F2937"/>
+                </a:solidFill>
+                <a:latin typeface="Arial" pitchFamily="34" charset="0"/>
+                <a:ea typeface="Arial" pitchFamily="34" charset="-122"/>
+                <a:cs typeface="Arial" pitchFamily="34" charset="-120"/>
+              </a:rPr>
+              <a:t>Vermelha 1</a:t>
+            </a:r>
+            <a:endParaRPr lang="en-US" sz="1700" dirty="0"/>
+          </a:p>
+          <a:p>
+            <a:pPr marL="342900" indent="-342900">
+              <a:spcAft>
+                <a:spcPts val="600"/>
+              </a:spcAft>
+              <a:buSzPct val="100000"/>
+              <a:buChar char="●"/>
+            </a:pPr>
+            <a:r>
+              <a:rPr lang="en-US" sz="1700" dirty="0">
+                <a:solidFill>
+                  <a:srgbClr val="1F2937"/>
+                </a:solidFill>
+                <a:latin typeface="Arial" pitchFamily="34" charset="0"/>
+                <a:ea typeface="Arial" pitchFamily="34" charset="-122"/>
+                <a:cs typeface="Arial" pitchFamily="34" charset="-120"/>
+              </a:rPr>
+              <a:t>Vermelha 2: acréscimo por kWh consumido</a:t>
+            </a:r>
+            <a:endParaRPr lang="en-US" sz="1700" dirty="0"/>
+          </a:p>
+        </p:txBody>
+      </p:sp>
+      <p:sp>
+        <p:nvSpPr>
+          <p:cNvPr id="13" name="Shape 10"/>
+          <p:cNvSpPr/>
+          <p:nvPr/>
+        </p:nvSpPr>
+        <p:spPr>
+          <a:xfrm>
+            <a:off x="822960" y="4663440"/>
+            <a:ext cx="4860036" cy="18288"/>
+          </a:xfrm>
+          <a:prstGeom prst="rect">
+            <a:avLst/>
+          </a:prstGeom>
+          <a:solidFill>
+            <a:srgbClr val="D8E0EC"/>
+          </a:solidFill>
+          <a:ln/>
+        </p:spPr>
+      </p:sp>
+      <p:sp>
+        <p:nvSpPr>
+          <p:cNvPr id="14" name="Text 11"/>
+          <p:cNvSpPr/>
+          <p:nvPr/>
+        </p:nvSpPr>
+        <p:spPr>
+          <a:xfrm>
+            <a:off x="822960" y="4754880"/>
+            <a:ext cx="4860036" cy="1371600"/>
+          </a:xfrm>
+          <a:prstGeom prst="rect">
+            <a:avLst/>
+          </a:prstGeom>
+          <a:noFill/>
+          <a:ln/>
+        </p:spPr>
+        <p:txBody>
+          <a:bodyPr wrap="square" rtlCol="0" anchor="t"/>
+          <a:lstStyle/>
+          <a:p>
+            <a:pPr indent="0" marL="0">
+              <a:buNone/>
+            </a:pPr>
+            <a:r>
+              <a:rPr lang="en-US" sz="1400" i="1" dirty="0">
+                <a:solidFill>
+                  <a:srgbClr val="64748B"/>
+                </a:solidFill>
+                <a:latin typeface="Arial" pitchFamily="34" charset="0"/>
+                <a:ea typeface="Arial" pitchFamily="34" charset="-122"/>
+                <a:cs typeface="Arial" pitchFamily="34" charset="-120"/>
+              </a:rPr>
+              <a:t>As bandeiras sinalizam o custo de gerar energia e acrescentam valor por quilowatt-hora. São um bom argumento comercial, mas prometa só o que a fatura mostra.</a:t>
+            </a:r>
+            <a:endParaRPr lang="en-US" sz="1400" dirty="0"/>
+          </a:p>
+        </p:txBody>
+      </p:sp>
+      <p:sp>
+        <p:nvSpPr>
+          <p:cNvPr id="15" name="Shape 12"/>
+          <p:cNvSpPr/>
+          <p:nvPr/>
+        </p:nvSpPr>
+        <p:spPr>
+          <a:xfrm>
+            <a:off x="6231636" y="1325880"/>
+            <a:ext cx="5408676" cy="4937760"/>
+          </a:xfrm>
+          <a:prstGeom prst="roundRect">
+            <a:avLst>
+              <a:gd name="adj" fmla="val 1481"/>
+            </a:avLst>
+          </a:prstGeom>
+          <a:solidFill>
+            <a:srgbClr val="FFFFFF"/>
+          </a:solidFill>
+          <a:ln w="9525">
+            <a:solidFill>
+              <a:srgbClr val="D8E0EC"/>
+            </a:solidFill>
+            <a:prstDash val="solid"/>
+          </a:ln>
+          <a:effectLst>
+            <a:outerShdw sx="100000" sy="100000" kx="0" ky="0" algn="bl" rotWithShape="0" blurRad="38100" dist="12700" dir="5400000">
+              <a:srgbClr val="000000">
+                <a:alpha val="8000"/>
+              </a:srgbClr>
+            </a:outerShdw>
+          </a:effectLst>
+        </p:spPr>
+      </p:sp>
+      <p:sp>
+        <p:nvSpPr>
+          <p:cNvPr id="16" name="Shape 13"/>
+          <p:cNvSpPr/>
+          <p:nvPr/>
+        </p:nvSpPr>
+        <p:spPr>
+          <a:xfrm>
+            <a:off x="6231636" y="1325880"/>
+            <a:ext cx="5408676" cy="109728"/>
           </a:xfrm>
           <a:prstGeom prst="rect">
             <a:avLst/>
@@ -24961,30 +24745,77 @@
       </p:sp>
       <p:sp>
         <p:nvSpPr>
-          <p:cNvPr id="13" name="Text 10"/>
-          <p:cNvSpPr/>
-          <p:nvPr/>
-        </p:nvSpPr>
-        <p:spPr>
-          <a:xfrm>
-            <a:off x="777240" y="5458968"/>
-            <a:ext cx="10744200" cy="777240"/>
-          </a:xfrm>
-          <a:prstGeom prst="rect">
-            <a:avLst/>
-          </a:prstGeom>
-          <a:noFill/>
-          <a:ln/>
-        </p:spPr>
-        <p:txBody>
-          <a:bodyPr wrap="square" rtlCol="0" anchor="ctr"/>
+          <p:cNvPr id="17" name="Text 14"/>
+          <p:cNvSpPr/>
+          <p:nvPr/>
+        </p:nvSpPr>
+        <p:spPr>
+          <a:xfrm>
+            <a:off x="6505956" y="1554480"/>
+            <a:ext cx="4860036" cy="685800"/>
+          </a:xfrm>
+          <a:prstGeom prst="rect">
+            <a:avLst/>
+          </a:prstGeom>
+          <a:noFill/>
+          <a:ln/>
+        </p:spPr>
+        <p:txBody>
+          <a:bodyPr wrap="square" rtlCol="0" anchor="t">
+            <a:normAutofit/>
+          </a:bodyPr>
           <a:lstStyle/>
           <a:p>
             <a:pPr indent="0" marL="0">
               <a:buNone/>
             </a:pPr>
             <a:r>
-              <a:rPr lang="en-US" sz="1500" dirty="0">
+              <a:rPr lang="en-US" sz="1600" b="1" dirty="0">
+                <a:solidFill>
+                  <a:srgbClr val="1B3A6B"/>
+                </a:solidFill>
+                <a:latin typeface="Arial" pitchFamily="34" charset="0"/>
+                <a:ea typeface="Arial" pitchFamily="34" charset="-122"/>
+                <a:cs typeface="Arial" pitchFamily="34" charset="-120"/>
+              </a:rPr>
+              <a:t>Os tributos</a:t>
+            </a:r>
+            <a:endParaRPr lang="en-US" sz="1600" dirty="0"/>
+          </a:p>
+        </p:txBody>
+      </p:sp>
+      <p:sp>
+        <p:nvSpPr>
+          <p:cNvPr id="18" name="Text 15"/>
+          <p:cNvSpPr/>
+          <p:nvPr/>
+        </p:nvSpPr>
+        <p:spPr>
+          <a:xfrm>
+            <a:off x="6505956" y="2286000"/>
+            <a:ext cx="4860036" cy="2286000"/>
+          </a:xfrm>
+          <a:prstGeom prst="rect">
+            <a:avLst/>
+          </a:prstGeom>
+          <a:noFill/>
+          <a:ln/>
+        </p:spPr>
+        <p:txBody>
+          <a:bodyPr wrap="square" rtlCol="0" anchor="t">
+            <a:normAutofit/>
+          </a:bodyPr>
+          <a:lstStyle/>
+          <a:p>
+            <a:pPr marL="342900" indent="-342900">
+              <a:spcAft>
+                <a:spcPts val="600"/>
+              </a:spcAft>
+              <a:buSzPct val="100000"/>
+              <a:buChar char="●"/>
+            </a:pPr>
+            <a:r>
+              <a:rPr lang="en-US" sz="1700" dirty="0">
                 <a:solidFill>
                   <a:srgbClr val="1F2937"/>
                 </a:solidFill>
@@ -24992,9 +24823,110 @@
                 <a:ea typeface="Arial" pitchFamily="34" charset="-122"/>
                 <a:cs typeface="Arial" pitchFamily="34" charset="-120"/>
               </a:rPr>
-              <a:t>Por isso a tarifa com impostos é a tarifa dividida por um menos as alíquotas. No exemplo, oitenta centavos viram cerca de um real e quatro.</a:t>
-            </a:r>
-            <a:endParaRPr lang="en-US" sz="1500" dirty="0"/>
+              <a:t>ICMS — estadual · alíquota do estado</a:t>
+            </a:r>
+            <a:endParaRPr lang="en-US" sz="1700" dirty="0"/>
+          </a:p>
+          <a:p>
+            <a:pPr marL="342900" indent="-342900">
+              <a:spcAft>
+                <a:spcPts val="600"/>
+              </a:spcAft>
+              <a:buSzPct val="100000"/>
+              <a:buChar char="●"/>
+            </a:pPr>
+            <a:r>
+              <a:rPr lang="en-US" sz="1700" dirty="0">
+                <a:solidFill>
+                  <a:srgbClr val="1F2937"/>
+                </a:solidFill>
+                <a:latin typeface="Arial" pitchFamily="34" charset="0"/>
+                <a:ea typeface="Arial" pitchFamily="34" charset="-122"/>
+                <a:cs typeface="Arial" pitchFamily="34" charset="-120"/>
+              </a:rPr>
+              <a:t>PIS/COFINS — federais · variam mês a mês</a:t>
+            </a:r>
+            <a:endParaRPr lang="en-US" sz="1700" dirty="0"/>
+          </a:p>
+          <a:p>
+            <a:pPr marL="342900" indent="-342900">
+              <a:spcAft>
+                <a:spcPts val="600"/>
+              </a:spcAft>
+              <a:buSzPct val="100000"/>
+              <a:buChar char="●"/>
+            </a:pPr>
+            <a:r>
+              <a:rPr lang="en-US" sz="1700" dirty="0">
+                <a:solidFill>
+                  <a:srgbClr val="1F2937"/>
+                </a:solidFill>
+                <a:latin typeface="Arial" pitchFamily="34" charset="0"/>
+                <a:ea typeface="Arial" pitchFamily="34" charset="-122"/>
+                <a:cs typeface="Arial" pitchFamily="34" charset="-120"/>
+              </a:rPr>
+              <a:t>CIP/COSIP — municipal · iluminação pública</a:t>
+            </a:r>
+            <a:endParaRPr lang="en-US" sz="1700" dirty="0"/>
+          </a:p>
+        </p:txBody>
+      </p:sp>
+      <p:sp>
+        <p:nvSpPr>
+          <p:cNvPr id="19" name="Shape 16"/>
+          <p:cNvSpPr/>
+          <p:nvPr/>
+        </p:nvSpPr>
+        <p:spPr>
+          <a:xfrm>
+            <a:off x="6505956" y="4663440"/>
+            <a:ext cx="4860036" cy="18288"/>
+          </a:xfrm>
+          <a:prstGeom prst="rect">
+            <a:avLst/>
+          </a:prstGeom>
+          <a:solidFill>
+            <a:srgbClr val="D8E0EC"/>
+          </a:solidFill>
+          <a:ln/>
+        </p:spPr>
+      </p:sp>
+      <p:sp>
+        <p:nvSpPr>
+          <p:cNvPr id="20" name="Text 17"/>
+          <p:cNvSpPr/>
+          <p:nvPr/>
+        </p:nvSpPr>
+        <p:spPr>
+          <a:xfrm>
+            <a:off x="6505956" y="4754880"/>
+            <a:ext cx="4860036" cy="1371600"/>
+          </a:xfrm>
+          <a:prstGeom prst="rect">
+            <a:avLst/>
+          </a:prstGeom>
+          <a:noFill/>
+          <a:ln/>
+        </p:spPr>
+        <p:txBody>
+          <a:bodyPr wrap="square" rtlCol="0" anchor="t"/>
+          <a:lstStyle/>
+          <a:p>
+            <a:pPr indent="0" marL="0">
+              <a:buNone/>
+            </a:pPr>
+            <a:r>
+              <a:rPr lang="en-US" sz="1400" i="1" dirty="0">
+                <a:solidFill>
+                  <a:srgbClr val="64748B"/>
+                </a:solidFill>
+                <a:latin typeface="Arial" pitchFamily="34" charset="0"/>
+                <a:ea typeface="Arial" pitchFamily="34" charset="-122"/>
+                <a:cs typeface="Arial" pitchFamily="34" charset="-120"/>
+              </a:rPr>
+              <a:t>Os tributos são calculados por dentro: fazem parte da própria base de cálculo.</a:t>
+            </a:r>
+            <a:endParaRPr lang="en-US" sz="1400" dirty="0"/>
           </a:p>
         </p:txBody>
       </p:sp>
@@ -25299,7 +25231,7 @@
                 <a:ea typeface="Arial" pitchFamily="34" charset="-122"/>
                 <a:cs typeface="Arial" pitchFamily="34" charset="-120"/>
               </a:rPr>
-              <a:t>E na geração distribuída?</a:t>
+              <a:t>Calculando a tarifa com impostos</a:t>
             </a:r>
             <a:endParaRPr lang="en-US" sz="2600" dirty="0"/>
           </a:p>
@@ -25318,96 +25250,25 @@
           </a:xfrm>
           <a:prstGeom prst="roundRect">
             <a:avLst>
-              <a:gd name="adj" fmla="val 1839"/>
+              <a:gd name="adj" fmla="val 2299"/>
             </a:avLst>
           </a:prstGeom>
           <a:solidFill>
-            <a:srgbClr val="FFFFFF"/>
+            <a:srgbClr val="0B1F3A"/>
           </a:solidFill>
-          <a:ln w="9525">
-            <a:solidFill>
-              <a:srgbClr val="D8E0EC"/>
-            </a:solidFill>
-            <a:prstDash val="solid"/>
-          </a:ln>
-          <a:effectLst>
-            <a:outerShdw sx="100000" sy="100000" kx="0" ky="0" algn="bl" rotWithShape="0" blurRad="38100" dist="12700" dir="5400000">
-              <a:srgbClr val="000000">
-                <a:alpha val="8000"/>
-              </a:srgbClr>
-            </a:outerShdw>
-          </a:effectLst>
-        </p:spPr>
-      </p:sp>
-      <p:sp>
-        <p:nvSpPr>
-          <p:cNvPr id="10" name="Shape 7"/>
-          <p:cNvSpPr/>
-          <p:nvPr/>
-        </p:nvSpPr>
-        <p:spPr>
-          <a:xfrm>
-            <a:off x="731520" y="1508760"/>
-            <a:ext cx="457200" cy="457200"/>
-          </a:xfrm>
-          <a:prstGeom prst="ellipse">
-            <a:avLst/>
-          </a:prstGeom>
-          <a:solidFill>
-            <a:srgbClr val="1B3A6B"/>
-          </a:solidFill>
-          <a:ln/>
-        </p:spPr>
-      </p:sp>
-      <p:sp>
-        <p:nvSpPr>
-          <p:cNvPr id="11" name="Text 8"/>
-          <p:cNvSpPr/>
-          <p:nvPr/>
-        </p:nvSpPr>
-        <p:spPr>
-          <a:xfrm>
-            <a:off x="731520" y="1508760"/>
-            <a:ext cx="457200" cy="457200"/>
-          </a:xfrm>
-          <a:prstGeom prst="rect">
-            <a:avLst/>
-          </a:prstGeom>
-          <a:noFill/>
-          <a:ln/>
-        </p:spPr>
-        <p:txBody>
-          <a:bodyPr wrap="square" rtlCol="0" anchor="ctr"/>
-          <a:lstStyle/>
-          <a:p>
-            <a:pPr algn="ctr" indent="0" marL="0">
-              <a:buNone/>
-            </a:pPr>
-            <a:r>
-              <a:rPr lang="en-US" sz="1400" b="1" dirty="0">
-                <a:solidFill>
-                  <a:srgbClr val="FFFFFF"/>
-                </a:solidFill>
-                <a:latin typeface="Arial" pitchFamily="34" charset="0"/>
-                <a:ea typeface="Arial" pitchFamily="34" charset="-122"/>
-                <a:cs typeface="Arial" pitchFamily="34" charset="-120"/>
-              </a:rPr>
-              <a:t>1</a:t>
-            </a:r>
-            <a:endParaRPr lang="en-US" sz="1400" dirty="0"/>
-          </a:p>
-        </p:txBody>
-      </p:sp>
-      <p:sp>
-        <p:nvSpPr>
-          <p:cNvPr id="12" name="Text 9"/>
-          <p:cNvSpPr/>
-          <p:nvPr/>
-        </p:nvSpPr>
-        <p:spPr>
-          <a:xfrm>
-            <a:off x="1325880" y="1435608"/>
-            <a:ext cx="10177272" cy="3758184"/>
+          <a:ln/>
+        </p:spPr>
+      </p:sp>
+      <p:sp>
+        <p:nvSpPr>
+          <p:cNvPr id="10" name="Text 7"/>
+          <p:cNvSpPr/>
+          <p:nvPr/>
+        </p:nvSpPr>
+        <p:spPr>
+          <a:xfrm>
+            <a:off x="914400" y="1554480"/>
+            <a:ext cx="10360152" cy="3520440"/>
           </a:xfrm>
           <a:prstGeom prst="rect">
             <a:avLst/>
@@ -25422,26 +25283,49 @@
           <a:lstStyle/>
           <a:p>
             <a:pPr indent="0" marL="0">
-              <a:buNone/>
-            </a:pPr>
-            <a:r>
-              <a:rPr lang="en-US" sz="1800" dirty="0">
-                <a:solidFill>
-                  <a:srgbClr val="1F2937"/>
-                </a:solidFill>
-                <a:latin typeface="Arial" pitchFamily="34" charset="0"/>
-                <a:ea typeface="Arial" pitchFamily="34" charset="-122"/>
-                <a:cs typeface="Arial" pitchFamily="34" charset="-120"/>
-              </a:rPr>
-              <a:t>Tributos sobre a energia compensada: regras específicas — estudaremos no M11</a:t>
-            </a:r>
-            <a:endParaRPr lang="en-US" sz="1800" dirty="0"/>
-          </a:p>
-        </p:txBody>
-      </p:sp>
-      <p:sp>
-        <p:nvSpPr>
-          <p:cNvPr id="13" name="Shape 10"/>
+              <a:spcAft>
+                <a:spcPts val="1000"/>
+              </a:spcAft>
+              <a:buNone/>
+            </a:pPr>
+            <a:r>
+              <a:rPr lang="en-US" sz="2400" b="1" dirty="0">
+                <a:solidFill>
+                  <a:srgbClr val="FFFFFF"/>
+                </a:solidFill>
+                <a:latin typeface="Consolas" pitchFamily="34" charset="0"/>
+                <a:ea typeface="Consolas" pitchFamily="34" charset="-122"/>
+                <a:cs typeface="Consolas" pitchFamily="34" charset="-120"/>
+              </a:rPr>
+              <a:t>Tarifa com impostos = Tarifa sem impostos ÷ (1 − (ICMS + PIS + COFINS))</a:t>
+            </a:r>
+            <a:endParaRPr lang="en-US" sz="2400" dirty="0"/>
+          </a:p>
+          <a:p>
+            <a:pPr indent="0" marL="0">
+              <a:spcAft>
+                <a:spcPts val="1000"/>
+              </a:spcAft>
+              <a:buNone/>
+            </a:pPr>
+            <a:r>
+              <a:rPr lang="en-US" sz="2400" b="1" dirty="0">
+                <a:solidFill>
+                  <a:srgbClr val="F7A23B"/>
+                </a:solidFill>
+                <a:latin typeface="Consolas" pitchFamily="34" charset="0"/>
+                <a:ea typeface="Consolas" pitchFamily="34" charset="-122"/>
+                <a:cs typeface="Consolas" pitchFamily="34" charset="-120"/>
+              </a:rPr>
+              <a:t>Ex.: R$ 0,80 ÷ (1 − (0,18 + 0,05)) = R$ 0,80 ÷ 0,77 ≈ R$ 1,04/kWh</a:t>
+            </a:r>
+            <a:endParaRPr lang="en-US" sz="2400" dirty="0"/>
+          </a:p>
+        </p:txBody>
+      </p:sp>
+      <p:sp>
+        <p:nvSpPr>
+          <p:cNvPr id="11" name="Shape 8"/>
           <p:cNvSpPr/>
           <p:nvPr/>
         </p:nvSpPr>
@@ -25468,7 +25352,7 @@
       </p:sp>
       <p:sp>
         <p:nvSpPr>
-          <p:cNvPr id="14" name="Shape 11"/>
+          <p:cNvPr id="12" name="Shape 9"/>
           <p:cNvSpPr/>
           <p:nvPr/>
         </p:nvSpPr>
@@ -25488,7 +25372,7 @@
       </p:sp>
       <p:sp>
         <p:nvSpPr>
-          <p:cNvPr id="15" name="Text 12"/>
+          <p:cNvPr id="13" name="Text 10"/>
           <p:cNvSpPr/>
           <p:nvPr/>
         </p:nvSpPr>
@@ -25519,7 +25403,7 @@
                 <a:ea typeface="Arial" pitchFamily="34" charset="-122"/>
                 <a:cs typeface="Arial" pitchFamily="34" charset="-120"/>
               </a:rPr>
-              <a:t>Sobre a energia compensada há regras específicas, que variam por estado. Vamos tratá-las no módulo de gestão.</a:t>
+              <a:t>Por isso a tarifa com impostos é a tarifa dividida por um menos as alíquotas. No exemplo, oitenta centavos viram cerca de um real e quatro.</a:t>
             </a:r>
             <a:endParaRPr lang="en-US" sz="1500" dirty="0"/>
           </a:p>
@@ -25584,6 +25468,492 @@
 <file path=ppt/slides/slide37.xml><?xml version="1.0" encoding="utf-8"?>
 <p:sld xmlns:a="http://schemas.openxmlformats.org/drawingml/2006/main" xmlns:r="http://schemas.openxmlformats.org/officeDocument/2006/relationships" xmlns:p="http://schemas.openxmlformats.org/presentationml/2006/main">
   <p:cSld name="Slide 37">
+    <p:bg>
+      <p:bgPr>
+        <a:solidFill>
+          <a:srgbClr val="F6F8FB"/>
+        </a:solidFill>
+      </p:bgPr>
+    </p:bg>
+    <p:spTree>
+      <p:nvGrpSpPr>
+        <p:cNvPr id="1" name=""/>
+        <p:cNvGrpSpPr/>
+        <p:nvPr/>
+      </p:nvGrpSpPr>
+      <p:grpSpPr>
+        <a:xfrm>
+          <a:off x="0" y="0"/>
+          <a:ext cx="0" cy="0"/>
+          <a:chOff x="0" y="0"/>
+          <a:chExt cx="0" cy="0"/>
+        </a:xfrm>
+      </p:grpSpPr>
+      <p:sp>
+        <p:nvSpPr>
+          <p:cNvPr id="2" name="Shape 0"/>
+          <p:cNvSpPr/>
+          <p:nvPr/>
+        </p:nvSpPr>
+        <p:spPr>
+          <a:xfrm>
+            <a:off x="0" y="6510528"/>
+            <a:ext cx="12191695" cy="347472"/>
+          </a:xfrm>
+          <a:prstGeom prst="rect">
+            <a:avLst/>
+          </a:prstGeom>
+          <a:solidFill>
+            <a:srgbClr val="FFFFFF"/>
+          </a:solidFill>
+          <a:ln w="6350">
+            <a:solidFill>
+              <a:srgbClr val="D8E0EC"/>
+            </a:solidFill>
+            <a:prstDash val="solid"/>
+          </a:ln>
+        </p:spPr>
+      </p:sp>
+      <p:pic>
+        <p:nvPicPr>
+          <p:cNvPr id="3" name="Image 0" descr="/www/wwwroot/rexar/gdsolar/docs/curso/slides/assets/logo-gdsolar.png">    </p:cNvPr>
+          <p:cNvPicPr>
+            <a:picLocks noChangeAspect="1"/>
+          </p:cNvPicPr>
+          <p:nvPr/>
+        </p:nvPicPr>
+        <p:blipFill>
+          <a:blip r:embed="rId1"/>
+          <a:stretch>
+            <a:fillRect/>
+          </a:stretch>
+        </p:blipFill>
+        <p:spPr>
+          <a:xfrm>
+            <a:off x="548640" y="6547104"/>
+            <a:ext cx="274320" cy="274320"/>
+          </a:xfrm>
+          <a:prstGeom prst="rect">
+            <a:avLst/>
+          </a:prstGeom>
+        </p:spPr>
+      </p:pic>
+      <p:sp>
+        <p:nvSpPr>
+          <p:cNvPr id="4" name="Text 1"/>
+          <p:cNvSpPr/>
+          <p:nvPr/>
+        </p:nvSpPr>
+        <p:spPr>
+          <a:xfrm>
+            <a:off x="886968" y="6528816"/>
+            <a:ext cx="6400800" cy="310896"/>
+          </a:xfrm>
+          <a:prstGeom prst="rect">
+            <a:avLst/>
+          </a:prstGeom>
+          <a:noFill/>
+          <a:ln/>
+        </p:spPr>
+        <p:txBody>
+          <a:bodyPr wrap="square" rtlCol="0" anchor="ctr"/>
+          <a:lstStyle/>
+          <a:p>
+            <a:pPr indent="0" marL="0">
+              <a:buNone/>
+            </a:pPr>
+            <a:r>
+              <a:rPr lang="en-US" sz="900" b="1" dirty="0">
+                <a:solidFill>
+                  <a:srgbClr val="64748B"/>
+                </a:solidFill>
+                <a:latin typeface="Arial" pitchFamily="34" charset="0"/>
+                <a:ea typeface="Arial" pitchFamily="34" charset="-122"/>
+                <a:cs typeface="Arial" pitchFamily="34" charset="-120"/>
+              </a:rPr>
+              <a:t>GD Solar  ·  Formação em Energia por Assinatura</a:t>
+            </a:r>
+            <a:endParaRPr lang="en-US" sz="900" dirty="0"/>
+          </a:p>
+        </p:txBody>
+      </p:sp>
+      <p:sp>
+        <p:nvSpPr>
+          <p:cNvPr id="5" name="Text 2"/>
+          <p:cNvSpPr/>
+          <p:nvPr/>
+        </p:nvSpPr>
+        <p:spPr>
+          <a:xfrm>
+            <a:off x="7132320" y="6528816"/>
+            <a:ext cx="4023360" cy="310896"/>
+          </a:xfrm>
+          <a:prstGeom prst="rect">
+            <a:avLst/>
+          </a:prstGeom>
+          <a:noFill/>
+          <a:ln/>
+        </p:spPr>
+        <p:txBody>
+          <a:bodyPr wrap="square" rtlCol="0" anchor="ctr"/>
+          <a:lstStyle/>
+          <a:p>
+            <a:pPr algn="r" indent="0" marL="0">
+              <a:buNone/>
+            </a:pPr>
+            <a:r>
+              <a:rPr lang="en-US" sz="900" dirty="0">
+                <a:solidFill>
+                  <a:srgbClr val="64748B"/>
+                </a:solidFill>
+                <a:latin typeface="Arial" pitchFamily="34" charset="0"/>
+                <a:ea typeface="Arial" pitchFamily="34" charset="-122"/>
+                <a:cs typeface="Arial" pitchFamily="34" charset="-120"/>
+              </a:rPr>
+              <a:t>M1 · Aula 7</a:t>
+            </a:r>
+            <a:endParaRPr lang="en-US" sz="900" dirty="0"/>
+          </a:p>
+        </p:txBody>
+      </p:sp>
+      <p:sp>
+        <p:nvSpPr>
+          <p:cNvPr id="6" name="Shape 3"/>
+          <p:cNvSpPr/>
+          <p:nvPr/>
+        </p:nvSpPr>
+        <p:spPr>
+          <a:xfrm>
+            <a:off x="548640" y="384048"/>
+            <a:ext cx="82296" cy="658368"/>
+          </a:xfrm>
+          <a:prstGeom prst="rect">
+            <a:avLst/>
+          </a:prstGeom>
+          <a:solidFill>
+            <a:srgbClr val="F7A23B"/>
+          </a:solidFill>
+          <a:ln/>
+        </p:spPr>
+      </p:sp>
+      <p:sp>
+        <p:nvSpPr>
+          <p:cNvPr id="7" name="Text 4"/>
+          <p:cNvSpPr/>
+          <p:nvPr/>
+        </p:nvSpPr>
+        <p:spPr>
+          <a:xfrm>
+            <a:off x="777240" y="292608"/>
+            <a:ext cx="10972800" cy="274320"/>
+          </a:xfrm>
+          <a:prstGeom prst="rect">
+            <a:avLst/>
+          </a:prstGeom>
+          <a:noFill/>
+          <a:ln/>
+        </p:spPr>
+        <p:txBody>
+          <a:bodyPr wrap="square" rtlCol="0" anchor="ctr"/>
+          <a:lstStyle/>
+          <a:p>
+            <a:pPr indent="0" marL="0">
+              <a:buNone/>
+            </a:pPr>
+            <a:r>
+              <a:rPr lang="en-US" sz="1000" b="1" spc="100" kern="0" dirty="0">
+                <a:solidFill>
+                  <a:srgbClr val="F7A23B"/>
+                </a:solidFill>
+                <a:latin typeface="Arial" pitchFamily="34" charset="0"/>
+                <a:ea typeface="Arial" pitchFamily="34" charset="-122"/>
+                <a:cs typeface="Arial" pitchFamily="34" charset="-120"/>
+              </a:rPr>
+              <a:t>AULA 7 · BANDEIRAS, TRIBUTOS E A CONTA DE LUZ</a:t>
+            </a:r>
+            <a:endParaRPr lang="en-US" sz="1000" dirty="0"/>
+          </a:p>
+        </p:txBody>
+      </p:sp>
+      <p:sp>
+        <p:nvSpPr>
+          <p:cNvPr id="8" name="Text 5"/>
+          <p:cNvSpPr/>
+          <p:nvPr/>
+        </p:nvSpPr>
+        <p:spPr>
+          <a:xfrm>
+            <a:off x="777240" y="530352"/>
+            <a:ext cx="10881360" cy="566928"/>
+          </a:xfrm>
+          <a:prstGeom prst="rect">
+            <a:avLst/>
+          </a:prstGeom>
+          <a:noFill/>
+          <a:ln/>
+        </p:spPr>
+        <p:txBody>
+          <a:bodyPr wrap="square" rtlCol="0" anchor="ctr">
+            <a:normAutofit/>
+          </a:bodyPr>
+          <a:lstStyle/>
+          <a:p>
+            <a:pPr indent="0" marL="0">
+              <a:buNone/>
+            </a:pPr>
+            <a:r>
+              <a:rPr lang="en-US" sz="2600" b="1" dirty="0">
+                <a:solidFill>
+                  <a:srgbClr val="1B3A6B"/>
+                </a:solidFill>
+                <a:latin typeface="Arial" pitchFamily="34" charset="0"/>
+                <a:ea typeface="Arial" pitchFamily="34" charset="-122"/>
+                <a:cs typeface="Arial" pitchFamily="34" charset="-120"/>
+              </a:rPr>
+              <a:t>E na geração distribuída?</a:t>
+            </a:r>
+            <a:endParaRPr lang="en-US" sz="2600" dirty="0"/>
+          </a:p>
+        </p:txBody>
+      </p:sp>
+      <p:sp>
+        <p:nvSpPr>
+          <p:cNvPr id="9" name="Shape 6"/>
+          <p:cNvSpPr/>
+          <p:nvPr/>
+        </p:nvSpPr>
+        <p:spPr>
+          <a:xfrm>
+            <a:off x="1463040" y="1600200"/>
+            <a:ext cx="9262872" cy="3429000"/>
+          </a:xfrm>
+          <a:prstGeom prst="roundRect">
+            <a:avLst>
+              <a:gd name="adj" fmla="val 3200"/>
+            </a:avLst>
+          </a:prstGeom>
+          <a:solidFill>
+            <a:srgbClr val="FFFFFF"/>
+          </a:solidFill>
+          <a:ln w="9525">
+            <a:solidFill>
+              <a:srgbClr val="D8E0EC"/>
+            </a:solidFill>
+            <a:prstDash val="solid"/>
+          </a:ln>
+          <a:effectLst>
+            <a:outerShdw sx="100000" sy="100000" kx="0" ky="0" algn="bl" rotWithShape="0" blurRad="50800" dist="12700" dir="5400000">
+              <a:srgbClr val="000000">
+                <a:alpha val="10000"/>
+              </a:srgbClr>
+            </a:outerShdw>
+          </a:effectLst>
+        </p:spPr>
+      </p:sp>
+      <p:sp>
+        <p:nvSpPr>
+          <p:cNvPr id="10" name="Shape 7"/>
+          <p:cNvSpPr/>
+          <p:nvPr/>
+        </p:nvSpPr>
+        <p:spPr>
+          <a:xfrm>
+            <a:off x="1463040" y="1600200"/>
+            <a:ext cx="128016" cy="3429000"/>
+          </a:xfrm>
+          <a:prstGeom prst="rect">
+            <a:avLst/>
+          </a:prstGeom>
+          <a:solidFill>
+            <a:srgbClr val="F7A23B"/>
+          </a:solidFill>
+          <a:ln/>
+        </p:spPr>
+      </p:sp>
+      <p:sp>
+        <p:nvSpPr>
+          <p:cNvPr id="11" name="Text 8"/>
+          <p:cNvSpPr/>
+          <p:nvPr/>
+        </p:nvSpPr>
+        <p:spPr>
+          <a:xfrm>
+            <a:off x="2011680" y="1783080"/>
+            <a:ext cx="8412480" cy="3063240"/>
+          </a:xfrm>
+          <a:prstGeom prst="rect">
+            <a:avLst/>
+          </a:prstGeom>
+          <a:noFill/>
+          <a:ln/>
+        </p:spPr>
+        <p:txBody>
+          <a:bodyPr wrap="square" rtlCol="0" anchor="ctr"/>
+          <a:lstStyle/>
+          <a:p>
+            <a:pPr algn="ctr" indent="0" marL="0">
+              <a:buNone/>
+            </a:pPr>
+            <a:r>
+              <a:rPr lang="en-US" sz="3200" b="1" dirty="0">
+                <a:solidFill>
+                  <a:srgbClr val="1B3A6B"/>
+                </a:solidFill>
+                <a:latin typeface="Arial" pitchFamily="34" charset="0"/>
+                <a:ea typeface="Arial" pitchFamily="34" charset="-122"/>
+                <a:cs typeface="Arial" pitchFamily="34" charset="-120"/>
+              </a:rPr>
+              <a:t>Tributos sobre a energia compensada: regras específicas — estudaremos no M11</a:t>
+            </a:r>
+            <a:endParaRPr lang="en-US" sz="3200" dirty="0"/>
+          </a:p>
+        </p:txBody>
+      </p:sp>
+      <p:sp>
+        <p:nvSpPr>
+          <p:cNvPr id="12" name="Shape 9"/>
+          <p:cNvSpPr/>
+          <p:nvPr/>
+        </p:nvSpPr>
+        <p:spPr>
+          <a:xfrm>
+            <a:off x="548640" y="5413248"/>
+            <a:ext cx="11091672" cy="868680"/>
+          </a:xfrm>
+          <a:prstGeom prst="roundRect">
+            <a:avLst>
+              <a:gd name="adj" fmla="val 8421"/>
+            </a:avLst>
+          </a:prstGeom>
+          <a:solidFill>
+            <a:srgbClr val="EEF3FA"/>
+          </a:solidFill>
+          <a:ln w="6350">
+            <a:solidFill>
+              <a:srgbClr val="D8E0EC"/>
+            </a:solidFill>
+            <a:prstDash val="solid"/>
+          </a:ln>
+        </p:spPr>
+      </p:sp>
+      <p:sp>
+        <p:nvSpPr>
+          <p:cNvPr id="13" name="Shape 10"/>
+          <p:cNvSpPr/>
+          <p:nvPr/>
+        </p:nvSpPr>
+        <p:spPr>
+          <a:xfrm>
+            <a:off x="548640" y="5413248"/>
+            <a:ext cx="91440" cy="868680"/>
+          </a:xfrm>
+          <a:prstGeom prst="rect">
+            <a:avLst/>
+          </a:prstGeom>
+          <a:solidFill>
+            <a:srgbClr val="F7A23B"/>
+          </a:solidFill>
+          <a:ln/>
+        </p:spPr>
+      </p:sp>
+      <p:sp>
+        <p:nvSpPr>
+          <p:cNvPr id="14" name="Text 11"/>
+          <p:cNvSpPr/>
+          <p:nvPr/>
+        </p:nvSpPr>
+        <p:spPr>
+          <a:xfrm>
+            <a:off x="777240" y="5458968"/>
+            <a:ext cx="10744200" cy="777240"/>
+          </a:xfrm>
+          <a:prstGeom prst="rect">
+            <a:avLst/>
+          </a:prstGeom>
+          <a:noFill/>
+          <a:ln/>
+        </p:spPr>
+        <p:txBody>
+          <a:bodyPr wrap="square" rtlCol="0" anchor="ctr"/>
+          <a:lstStyle/>
+          <a:p>
+            <a:pPr indent="0" marL="0">
+              <a:buNone/>
+            </a:pPr>
+            <a:r>
+              <a:rPr lang="en-US" sz="1500" dirty="0">
+                <a:solidFill>
+                  <a:srgbClr val="1F2937"/>
+                </a:solidFill>
+                <a:latin typeface="Arial" pitchFamily="34" charset="0"/>
+                <a:ea typeface="Arial" pitchFamily="34" charset="-122"/>
+                <a:cs typeface="Arial" pitchFamily="34" charset="-120"/>
+              </a:rPr>
+              <a:t>Sobre a energia compensada há regras específicas, que variam por estado. Vamos tratá-las no módulo de gestão.</a:t>
+            </a:r>
+            <a:endParaRPr lang="en-US" sz="1500" dirty="0"/>
+          </a:p>
+        </p:txBody>
+      </p:sp>
+      <p:sp>
+        <p:nvSpPr>
+          <p:cNvPr id="25" name="Slide Number Placeholder 0"/>
+          <p:cNvSpPr>
+            <a:spLocks noGrp="1"/>
+          </p:cNvSpPr>
+          <p:nvPr>
+            <p:ph type="sldNum" sz="quarter" idx="4294967295"/>
+          </p:nvPr>
+        </p:nvSpPr>
+        <p:spPr>
+          <a:xfrm>
+            <a:off x="11292840" y="6556248"/>
+            <a:ext cx="548640" cy="256032"/>
+          </a:xfrm>
+          <a:prstGeom prst="rect">
+            <a:avLst/>
+          </a:prstGeom>
+          <a:extLst>
+            <a:ext uri="{C572A759-6A51-4108-AA02-DFA0A04FC94B}">
+              <ma14:wrappingTextBoxFlag xmlns:ma14="http://schemas.microsoft.com/office/mac/drawingml/2011/main" val="0"/>
+            </a:ext>
+          </a:extLst>
+        </p:spPr>
+        <p:txBody>
+          <a:bodyPr/>
+          <a:lstStyle>
+            <a:lvl1pPr>
+              <a:defRPr sz="900">
+                <a:solidFill>
+                  <a:srgbClr val="1B3A6B"/>
+                </a:solidFill>
+                <a:latin typeface="Arial"/>
+                <a:ea typeface="Arial"/>
+                <a:cs typeface="Arial"/>
+              </a:defRPr>
+            </a:lvl1pPr>
+          </a:lstStyle>
+          <a:p>
+            <a:pPr algn="r"/>
+            <a:fld id="{F7021451-1387-4CA6-816F-3879F97B5CBC}" type="slidenum">
+              <a:rPr b="1" lang="en-US"/>
+              <a:t>37</a:t>
+            </a:fld>
+            <a:endParaRPr lang="en-US"/>
+          </a:p>
+        </p:txBody>
+      </p:sp>
+    </p:spTree>
+  </p:cSld>
+  <p:clrMapOvr>
+    <a:masterClrMapping/>
+  </p:clrMapOvr>
+</p:sld>
+</file>
+
+<file path=ppt/slides/slide38.xml><?xml version="1.0" encoding="utf-8"?>
+<p:sld xmlns:a="http://schemas.openxmlformats.org/drawingml/2006/main" xmlns:r="http://schemas.openxmlformats.org/officeDocument/2006/relationships" xmlns:p="http://schemas.openxmlformats.org/presentationml/2006/main">
+  <p:cSld name="Slide 38">
     <p:bg>
       <p:bgPr>
         <a:solidFill>
@@ -26008,7 +26378,7 @@
             <a:pPr algn="r"/>
             <a:fld id="{F7021451-1387-4CA6-816F-3879F97B5CBC}" type="slidenum">
               <a:rPr b="1" lang="en-US"/>
-              <a:t>37</a:t>
+              <a:t>38</a:t>
             </a:fld>
             <a:endParaRPr lang="en-US"/>
           </a:p>
@@ -26022,9 +26392,9 @@
 </p:sld>
 </file>
 
-<file path=ppt/slides/slide38.xml><?xml version="1.0" encoding="utf-8"?>
+<file path=ppt/slides/slide39.xml><?xml version="1.0" encoding="utf-8"?>
 <p:sld xmlns:a="http://schemas.openxmlformats.org/drawingml/2006/main" xmlns:r="http://schemas.openxmlformats.org/officeDocument/2006/relationships" xmlns:p="http://schemas.openxmlformats.org/presentationml/2006/main">
-  <p:cSld name="Slide 38">
+  <p:cSld name="Slide 39">
     <p:bg>
       <p:bgPr>
         <a:solidFill>
@@ -26093,7 +26463,7 @@
             <a:r>
               <a:rPr lang="en-US" sz="11000" b="1" dirty="0">
                 <a:solidFill>
-                  <a:srgbClr val="11396F"/>
+                  <a:srgbClr val="F7A23B"/>
                 </a:solidFill>
                 <a:latin typeface="Arial" pitchFamily="34" charset="0"/>
                 <a:ea typeface="Arial" pitchFamily="34" charset="-122"/>
@@ -26281,7 +26651,7 @@
                 <a:ea typeface="Arial" pitchFamily="34" charset="-122"/>
                 <a:cs typeface="Arial" pitchFamily="34" charset="-120"/>
               </a:rPr>
-              <a:t>lendo uma fatura de concessionária na plataforma</a:t>
+              <a:t>Lendo uma fatura de concessionária na plataforma</a:t>
             </a:r>
             <a:endParaRPr lang="en-US" sz="3200" dirty="0"/>
           </a:p>
@@ -26391,1117 +26761,6 @@
               <a:t>Passo a passo na plataforma</a:t>
             </a:r>
             <a:endParaRPr lang="en-US" sz="1500" dirty="0"/>
-          </a:p>
-        </p:txBody>
-      </p:sp>
-    </p:spTree>
-  </p:cSld>
-  <p:clrMapOvr>
-    <a:masterClrMapping/>
-  </p:clrMapOvr>
-</p:sld>
-</file>
-
-<file path=ppt/slides/slide39.xml><?xml version="1.0" encoding="utf-8"?>
-<p:sld xmlns:a="http://schemas.openxmlformats.org/drawingml/2006/main" xmlns:r="http://schemas.openxmlformats.org/officeDocument/2006/relationships" xmlns:p="http://schemas.openxmlformats.org/presentationml/2006/main">
-  <p:cSld name="Slide 39">
-    <p:bg>
-      <p:bgPr>
-        <a:solidFill>
-          <a:srgbClr val="F6F8FB"/>
-        </a:solidFill>
-      </p:bgPr>
-    </p:bg>
-    <p:spTree>
-      <p:nvGrpSpPr>
-        <p:cNvPr id="1" name=""/>
-        <p:cNvGrpSpPr/>
-        <p:nvPr/>
-      </p:nvGrpSpPr>
-      <p:grpSpPr>
-        <a:xfrm>
-          <a:off x="0" y="0"/>
-          <a:ext cx="0" cy="0"/>
-          <a:chOff x="0" y="0"/>
-          <a:chExt cx="0" cy="0"/>
-        </a:xfrm>
-      </p:grpSpPr>
-      <p:sp>
-        <p:nvSpPr>
-          <p:cNvPr id="2" name="Shape 0"/>
-          <p:cNvSpPr/>
-          <p:nvPr/>
-        </p:nvSpPr>
-        <p:spPr>
-          <a:xfrm>
-            <a:off x="0" y="6510528"/>
-            <a:ext cx="12191695" cy="347472"/>
-          </a:xfrm>
-          <a:prstGeom prst="rect">
-            <a:avLst/>
-          </a:prstGeom>
-          <a:solidFill>
-            <a:srgbClr val="FFFFFF"/>
-          </a:solidFill>
-          <a:ln w="6350">
-            <a:solidFill>
-              <a:srgbClr val="D8E0EC"/>
-            </a:solidFill>
-            <a:prstDash val="solid"/>
-          </a:ln>
-        </p:spPr>
-      </p:sp>
-      <p:pic>
-        <p:nvPicPr>
-          <p:cNvPr id="3" name="Image 0" descr="/www/wwwroot/rexar/gdsolar/docs/curso/slides/assets/logo-gdsolar.png">    </p:cNvPr>
-          <p:cNvPicPr>
-            <a:picLocks noChangeAspect="1"/>
-          </p:cNvPicPr>
-          <p:nvPr/>
-        </p:nvPicPr>
-        <p:blipFill>
-          <a:blip r:embed="rId1"/>
-          <a:stretch>
-            <a:fillRect/>
-          </a:stretch>
-        </p:blipFill>
-        <p:spPr>
-          <a:xfrm>
-            <a:off x="548640" y="6547104"/>
-            <a:ext cx="274320" cy="274320"/>
-          </a:xfrm>
-          <a:prstGeom prst="rect">
-            <a:avLst/>
-          </a:prstGeom>
-        </p:spPr>
-      </p:pic>
-      <p:sp>
-        <p:nvSpPr>
-          <p:cNvPr id="4" name="Text 1"/>
-          <p:cNvSpPr/>
-          <p:nvPr/>
-        </p:nvSpPr>
-        <p:spPr>
-          <a:xfrm>
-            <a:off x="886968" y="6528816"/>
-            <a:ext cx="6400800" cy="310896"/>
-          </a:xfrm>
-          <a:prstGeom prst="rect">
-            <a:avLst/>
-          </a:prstGeom>
-          <a:noFill/>
-          <a:ln/>
-        </p:spPr>
-        <p:txBody>
-          <a:bodyPr wrap="square" rtlCol="0" anchor="ctr"/>
-          <a:lstStyle/>
-          <a:p>
-            <a:pPr indent="0" marL="0">
-              <a:buNone/>
-            </a:pPr>
-            <a:r>
-              <a:rPr lang="en-US" sz="900" b="1" dirty="0">
-                <a:solidFill>
-                  <a:srgbClr val="64748B"/>
-                </a:solidFill>
-                <a:latin typeface="Arial" pitchFamily="34" charset="0"/>
-                <a:ea typeface="Arial" pitchFamily="34" charset="-122"/>
-                <a:cs typeface="Arial" pitchFamily="34" charset="-120"/>
-              </a:rPr>
-              <a:t>GD Solar  ·  Formação em Energia por Assinatura</a:t>
-            </a:r>
-            <a:endParaRPr lang="en-US" sz="900" dirty="0"/>
-          </a:p>
-        </p:txBody>
-      </p:sp>
-      <p:sp>
-        <p:nvSpPr>
-          <p:cNvPr id="5" name="Text 2"/>
-          <p:cNvSpPr/>
-          <p:nvPr/>
-        </p:nvSpPr>
-        <p:spPr>
-          <a:xfrm>
-            <a:off x="7132320" y="6528816"/>
-            <a:ext cx="4023360" cy="310896"/>
-          </a:xfrm>
-          <a:prstGeom prst="rect">
-            <a:avLst/>
-          </a:prstGeom>
-          <a:noFill/>
-          <a:ln/>
-        </p:spPr>
-        <p:txBody>
-          <a:bodyPr wrap="square" rtlCol="0" anchor="ctr"/>
-          <a:lstStyle/>
-          <a:p>
-            <a:pPr algn="r" indent="0" marL="0">
-              <a:buNone/>
-            </a:pPr>
-            <a:r>
-              <a:rPr lang="en-US" sz="900" dirty="0">
-                <a:solidFill>
-                  <a:srgbClr val="64748B"/>
-                </a:solidFill>
-                <a:latin typeface="Arial" pitchFamily="34" charset="0"/>
-                <a:ea typeface="Arial" pitchFamily="34" charset="-122"/>
-                <a:cs typeface="Arial" pitchFamily="34" charset="-120"/>
-              </a:rPr>
-              <a:t>M1 · Aula 8</a:t>
-            </a:r>
-            <a:endParaRPr lang="en-US" sz="900" dirty="0"/>
-          </a:p>
-        </p:txBody>
-      </p:sp>
-      <p:sp>
-        <p:nvSpPr>
-          <p:cNvPr id="6" name="Shape 3"/>
-          <p:cNvSpPr/>
-          <p:nvPr/>
-        </p:nvSpPr>
-        <p:spPr>
-          <a:xfrm>
-            <a:off x="548640" y="384048"/>
-            <a:ext cx="82296" cy="658368"/>
-          </a:xfrm>
-          <a:prstGeom prst="rect">
-            <a:avLst/>
-          </a:prstGeom>
-          <a:solidFill>
-            <a:srgbClr val="F7A23B"/>
-          </a:solidFill>
-          <a:ln/>
-        </p:spPr>
-      </p:sp>
-      <p:sp>
-        <p:nvSpPr>
-          <p:cNvPr id="7" name="Text 4"/>
-          <p:cNvSpPr/>
-          <p:nvPr/>
-        </p:nvSpPr>
-        <p:spPr>
-          <a:xfrm>
-            <a:off x="777240" y="292608"/>
-            <a:ext cx="10972800" cy="274320"/>
-          </a:xfrm>
-          <a:prstGeom prst="rect">
-            <a:avLst/>
-          </a:prstGeom>
-          <a:noFill/>
-          <a:ln/>
-        </p:spPr>
-        <p:txBody>
-          <a:bodyPr wrap="square" rtlCol="0" anchor="ctr"/>
-          <a:lstStyle/>
-          <a:p>
-            <a:pPr indent="0" marL="0">
-              <a:buNone/>
-            </a:pPr>
-            <a:r>
-              <a:rPr lang="en-US" sz="1000" b="1" spc="100" kern="0" dirty="0">
-                <a:solidFill>
-                  <a:srgbClr val="F7A23B"/>
-                </a:solidFill>
-                <a:latin typeface="Arial" pitchFamily="34" charset="0"/>
-                <a:ea typeface="Arial" pitchFamily="34" charset="-122"/>
-                <a:cs typeface="Arial" pitchFamily="34" charset="-120"/>
-              </a:rPr>
-              <a:t>AULA 8 · LABORATÓRIO: LENDO UMA FATURA DE CONCESSIONÁRIA NA PLATAFORMA</a:t>
-            </a:r>
-            <a:endParaRPr lang="en-US" sz="1000" dirty="0"/>
-          </a:p>
-        </p:txBody>
-      </p:sp>
-      <p:sp>
-        <p:nvSpPr>
-          <p:cNvPr id="8" name="Text 5"/>
-          <p:cNvSpPr/>
-          <p:nvPr/>
-        </p:nvSpPr>
-        <p:spPr>
-          <a:xfrm>
-            <a:off x="777240" y="530352"/>
-            <a:ext cx="10881360" cy="566928"/>
-          </a:xfrm>
-          <a:prstGeom prst="rect">
-            <a:avLst/>
-          </a:prstGeom>
-          <a:noFill/>
-          <a:ln/>
-        </p:spPr>
-        <p:txBody>
-          <a:bodyPr wrap="square" rtlCol="0" anchor="ctr">
-            <a:normAutofit/>
-          </a:bodyPr>
-          <a:lstStyle/>
-          <a:p>
-            <a:pPr indent="0" marL="0">
-              <a:buNone/>
-            </a:pPr>
-            <a:r>
-              <a:rPr lang="en-US" sz="2600" b="1" dirty="0">
-                <a:solidFill>
-                  <a:srgbClr val="1B3A6B"/>
-                </a:solidFill>
-                <a:latin typeface="Arial" pitchFamily="34" charset="0"/>
-                <a:ea typeface="Arial" pitchFamily="34" charset="-122"/>
-                <a:cs typeface="Arial" pitchFamily="34" charset="-120"/>
-              </a:rPr>
-              <a:t>Exercício</a:t>
-            </a:r>
-            <a:endParaRPr lang="en-US" sz="2600" dirty="0"/>
-          </a:p>
-        </p:txBody>
-      </p:sp>
-      <p:sp>
-        <p:nvSpPr>
-          <p:cNvPr id="9" name="Shape 6"/>
-          <p:cNvSpPr/>
-          <p:nvPr/>
-        </p:nvSpPr>
-        <p:spPr>
-          <a:xfrm>
-            <a:off x="548640" y="1325880"/>
-            <a:ext cx="3544824" cy="2354580"/>
-          </a:xfrm>
-          <a:prstGeom prst="roundRect">
-            <a:avLst>
-              <a:gd name="adj" fmla="val 3107"/>
-            </a:avLst>
-          </a:prstGeom>
-          <a:solidFill>
-            <a:srgbClr val="FFFFFF"/>
-          </a:solidFill>
-          <a:ln w="9525">
-            <a:solidFill>
-              <a:srgbClr val="D8E0EC"/>
-            </a:solidFill>
-            <a:prstDash val="solid"/>
-          </a:ln>
-          <a:effectLst>
-            <a:outerShdw sx="100000" sy="100000" kx="0" ky="0" algn="bl" rotWithShape="0" blurRad="38100" dist="12700" dir="5400000">
-              <a:srgbClr val="000000">
-                <a:alpha val="8000"/>
-              </a:srgbClr>
-            </a:outerShdw>
-          </a:effectLst>
-        </p:spPr>
-      </p:sp>
-      <p:sp>
-        <p:nvSpPr>
-          <p:cNvPr id="10" name="Shape 7"/>
-          <p:cNvSpPr/>
-          <p:nvPr/>
-        </p:nvSpPr>
-        <p:spPr>
-          <a:xfrm>
-            <a:off x="731520" y="1508760"/>
-            <a:ext cx="457200" cy="457200"/>
-          </a:xfrm>
-          <a:prstGeom prst="ellipse">
-            <a:avLst/>
-          </a:prstGeom>
-          <a:solidFill>
-            <a:srgbClr val="1B3A6B"/>
-          </a:solidFill>
-          <a:ln/>
-        </p:spPr>
-      </p:sp>
-      <p:sp>
-        <p:nvSpPr>
-          <p:cNvPr id="11" name="Text 8"/>
-          <p:cNvSpPr/>
-          <p:nvPr/>
-        </p:nvSpPr>
-        <p:spPr>
-          <a:xfrm>
-            <a:off x="731520" y="1508760"/>
-            <a:ext cx="457200" cy="457200"/>
-          </a:xfrm>
-          <a:prstGeom prst="rect">
-            <a:avLst/>
-          </a:prstGeom>
-          <a:noFill/>
-          <a:ln/>
-        </p:spPr>
-        <p:txBody>
-          <a:bodyPr wrap="square" rtlCol="0" anchor="ctr"/>
-          <a:lstStyle/>
-          <a:p>
-            <a:pPr algn="ctr" indent="0" marL="0">
-              <a:buNone/>
-            </a:pPr>
-            <a:r>
-              <a:rPr lang="en-US" sz="1400" b="1" dirty="0">
-                <a:solidFill>
-                  <a:srgbClr val="FFFFFF"/>
-                </a:solidFill>
-                <a:latin typeface="Arial" pitchFamily="34" charset="0"/>
-                <a:ea typeface="Arial" pitchFamily="34" charset="-122"/>
-                <a:cs typeface="Arial" pitchFamily="34" charset="-120"/>
-              </a:rPr>
-              <a:t>1</a:t>
-            </a:r>
-            <a:endParaRPr lang="en-US" sz="1400" dirty="0"/>
-          </a:p>
-        </p:txBody>
-      </p:sp>
-      <p:sp>
-        <p:nvSpPr>
-          <p:cNvPr id="12" name="Text 9"/>
-          <p:cNvSpPr/>
-          <p:nvPr/>
-        </p:nvSpPr>
-        <p:spPr>
-          <a:xfrm>
-            <a:off x="1325880" y="1435608"/>
-            <a:ext cx="2630424" cy="2135124"/>
-          </a:xfrm>
-          <a:prstGeom prst="rect">
-            <a:avLst/>
-          </a:prstGeom>
-          <a:noFill/>
-          <a:ln/>
-        </p:spPr>
-        <p:txBody>
-          <a:bodyPr wrap="square" rtlCol="0" anchor="ctr">
-            <a:normAutofit/>
-          </a:bodyPr>
-          <a:lstStyle/>
-          <a:p>
-            <a:pPr indent="0" marL="0">
-              <a:buNone/>
-            </a:pPr>
-            <a:r>
-              <a:rPr lang="en-US" sz="1800" dirty="0">
-                <a:solidFill>
-                  <a:srgbClr val="1F2937"/>
-                </a:solidFill>
-                <a:latin typeface="Arial" pitchFamily="34" charset="0"/>
-                <a:ea typeface="Arial" pitchFamily="34" charset="-122"/>
-                <a:cs typeface="Arial" pitchFamily="34" charset="-120"/>
-              </a:rPr>
-              <a:t>Exercício — fatura da Residência:</a:t>
-            </a:r>
-            <a:endParaRPr lang="en-US" sz="1800" dirty="0"/>
-          </a:p>
-        </p:txBody>
-      </p:sp>
-      <p:sp>
-        <p:nvSpPr>
-          <p:cNvPr id="13" name="Shape 10"/>
-          <p:cNvSpPr/>
-          <p:nvPr/>
-        </p:nvSpPr>
-        <p:spPr>
-          <a:xfrm>
-            <a:off x="4322064" y="1325880"/>
-            <a:ext cx="3544824" cy="2354580"/>
-          </a:xfrm>
-          <a:prstGeom prst="roundRect">
-            <a:avLst>
-              <a:gd name="adj" fmla="val 3107"/>
-            </a:avLst>
-          </a:prstGeom>
-          <a:solidFill>
-            <a:srgbClr val="FFFFFF"/>
-          </a:solidFill>
-          <a:ln w="9525">
-            <a:solidFill>
-              <a:srgbClr val="D8E0EC"/>
-            </a:solidFill>
-            <a:prstDash val="solid"/>
-          </a:ln>
-          <a:effectLst>
-            <a:outerShdw sx="100000" sy="100000" kx="0" ky="0" algn="bl" rotWithShape="0" blurRad="38100" dist="12700" dir="5400000">
-              <a:srgbClr val="000000">
-                <a:alpha val="8000"/>
-              </a:srgbClr>
-            </a:outerShdw>
-          </a:effectLst>
-        </p:spPr>
-      </p:sp>
-      <p:sp>
-        <p:nvSpPr>
-          <p:cNvPr id="14" name="Shape 11"/>
-          <p:cNvSpPr/>
-          <p:nvPr/>
-        </p:nvSpPr>
-        <p:spPr>
-          <a:xfrm>
-            <a:off x="4504944" y="1508760"/>
-            <a:ext cx="457200" cy="457200"/>
-          </a:xfrm>
-          <a:prstGeom prst="ellipse">
-            <a:avLst/>
-          </a:prstGeom>
-          <a:solidFill>
-            <a:srgbClr val="F7A23B"/>
-          </a:solidFill>
-          <a:ln/>
-        </p:spPr>
-      </p:sp>
-      <p:sp>
-        <p:nvSpPr>
-          <p:cNvPr id="15" name="Text 12"/>
-          <p:cNvSpPr/>
-          <p:nvPr/>
-        </p:nvSpPr>
-        <p:spPr>
-          <a:xfrm>
-            <a:off x="4504944" y="1508760"/>
-            <a:ext cx="457200" cy="457200"/>
-          </a:xfrm>
-          <a:prstGeom prst="rect">
-            <a:avLst/>
-          </a:prstGeom>
-          <a:noFill/>
-          <a:ln/>
-        </p:spPr>
-        <p:txBody>
-          <a:bodyPr wrap="square" rtlCol="0" anchor="ctr"/>
-          <a:lstStyle/>
-          <a:p>
-            <a:pPr algn="ctr" indent="0" marL="0">
-              <a:buNone/>
-            </a:pPr>
-            <a:r>
-              <a:rPr lang="en-US" sz="1400" b="1" dirty="0">
-                <a:solidFill>
-                  <a:srgbClr val="FFFFFF"/>
-                </a:solidFill>
-                <a:latin typeface="Arial" pitchFamily="34" charset="0"/>
-                <a:ea typeface="Arial" pitchFamily="34" charset="-122"/>
-                <a:cs typeface="Arial" pitchFamily="34" charset="-120"/>
-              </a:rPr>
-              <a:t>2</a:t>
-            </a:r>
-            <a:endParaRPr lang="en-US" sz="1400" dirty="0"/>
-          </a:p>
-        </p:txBody>
-      </p:sp>
-      <p:sp>
-        <p:nvSpPr>
-          <p:cNvPr id="16" name="Text 13"/>
-          <p:cNvSpPr/>
-          <p:nvPr/>
-        </p:nvSpPr>
-        <p:spPr>
-          <a:xfrm>
-            <a:off x="5099304" y="1435608"/>
-            <a:ext cx="2630424" cy="2135124"/>
-          </a:xfrm>
-          <a:prstGeom prst="rect">
-            <a:avLst/>
-          </a:prstGeom>
-          <a:noFill/>
-          <a:ln/>
-        </p:spPr>
-        <p:txBody>
-          <a:bodyPr wrap="square" rtlCol="0" anchor="ctr">
-            <a:normAutofit/>
-          </a:bodyPr>
-          <a:lstStyle/>
-          <a:p>
-            <a:pPr indent="0" marL="0">
-              <a:buNone/>
-            </a:pPr>
-            <a:r>
-              <a:rPr lang="en-US" sz="1800" dirty="0">
-                <a:solidFill>
-                  <a:srgbClr val="1F2937"/>
-                </a:solidFill>
-                <a:latin typeface="Arial" pitchFamily="34" charset="0"/>
-                <a:ea typeface="Arial" pitchFamily="34" charset="-122"/>
-                <a:cs typeface="Arial" pitchFamily="34" charset="-120"/>
-              </a:rPr>
-              <a:t>Referência e vencimento</a:t>
-            </a:r>
-            <a:endParaRPr lang="en-US" sz="1800" dirty="0"/>
-          </a:p>
-        </p:txBody>
-      </p:sp>
-      <p:sp>
-        <p:nvSpPr>
-          <p:cNvPr id="17" name="Shape 14"/>
-          <p:cNvSpPr/>
-          <p:nvPr/>
-        </p:nvSpPr>
-        <p:spPr>
-          <a:xfrm>
-            <a:off x="8095488" y="1325880"/>
-            <a:ext cx="3544824" cy="2354580"/>
-          </a:xfrm>
-          <a:prstGeom prst="roundRect">
-            <a:avLst>
-              <a:gd name="adj" fmla="val 3107"/>
-            </a:avLst>
-          </a:prstGeom>
-          <a:solidFill>
-            <a:srgbClr val="FFFFFF"/>
-          </a:solidFill>
-          <a:ln w="9525">
-            <a:solidFill>
-              <a:srgbClr val="D8E0EC"/>
-            </a:solidFill>
-            <a:prstDash val="solid"/>
-          </a:ln>
-          <a:effectLst>
-            <a:outerShdw sx="100000" sy="100000" kx="0" ky="0" algn="bl" rotWithShape="0" blurRad="38100" dist="12700" dir="5400000">
-              <a:srgbClr val="000000">
-                <a:alpha val="8000"/>
-              </a:srgbClr>
-            </a:outerShdw>
-          </a:effectLst>
-        </p:spPr>
-      </p:sp>
-      <p:sp>
-        <p:nvSpPr>
-          <p:cNvPr id="18" name="Shape 15"/>
-          <p:cNvSpPr/>
-          <p:nvPr/>
-        </p:nvSpPr>
-        <p:spPr>
-          <a:xfrm>
-            <a:off x="8278368" y="1508760"/>
-            <a:ext cx="457200" cy="457200"/>
-          </a:xfrm>
-          <a:prstGeom prst="ellipse">
-            <a:avLst/>
-          </a:prstGeom>
-          <a:solidFill>
-            <a:srgbClr val="1B3A6B"/>
-          </a:solidFill>
-          <a:ln/>
-        </p:spPr>
-      </p:sp>
-      <p:sp>
-        <p:nvSpPr>
-          <p:cNvPr id="19" name="Text 16"/>
-          <p:cNvSpPr/>
-          <p:nvPr/>
-        </p:nvSpPr>
-        <p:spPr>
-          <a:xfrm>
-            <a:off x="8278368" y="1508760"/>
-            <a:ext cx="457200" cy="457200"/>
-          </a:xfrm>
-          <a:prstGeom prst="rect">
-            <a:avLst/>
-          </a:prstGeom>
-          <a:noFill/>
-          <a:ln/>
-        </p:spPr>
-        <p:txBody>
-          <a:bodyPr wrap="square" rtlCol="0" anchor="ctr"/>
-          <a:lstStyle/>
-          <a:p>
-            <a:pPr algn="ctr" indent="0" marL="0">
-              <a:buNone/>
-            </a:pPr>
-            <a:r>
-              <a:rPr lang="en-US" sz="1400" b="1" dirty="0">
-                <a:solidFill>
-                  <a:srgbClr val="FFFFFF"/>
-                </a:solidFill>
-                <a:latin typeface="Arial" pitchFamily="34" charset="0"/>
-                <a:ea typeface="Arial" pitchFamily="34" charset="-122"/>
-                <a:cs typeface="Arial" pitchFamily="34" charset="-120"/>
-              </a:rPr>
-              <a:t>3</a:t>
-            </a:r>
-            <a:endParaRPr lang="en-US" sz="1400" dirty="0"/>
-          </a:p>
-        </p:txBody>
-      </p:sp>
-      <p:sp>
-        <p:nvSpPr>
-          <p:cNvPr id="20" name="Text 17"/>
-          <p:cNvSpPr/>
-          <p:nvPr/>
-        </p:nvSpPr>
-        <p:spPr>
-          <a:xfrm>
-            <a:off x="8872728" y="1435608"/>
-            <a:ext cx="2630424" cy="2135124"/>
-          </a:xfrm>
-          <a:prstGeom prst="rect">
-            <a:avLst/>
-          </a:prstGeom>
-          <a:noFill/>
-          <a:ln/>
-        </p:spPr>
-        <p:txBody>
-          <a:bodyPr wrap="square" rtlCol="0" anchor="ctr">
-            <a:normAutofit/>
-          </a:bodyPr>
-          <a:lstStyle/>
-          <a:p>
-            <a:pPr indent="0" marL="0">
-              <a:buNone/>
-            </a:pPr>
-            <a:r>
-              <a:rPr lang="en-US" sz="1800" dirty="0">
-                <a:solidFill>
-                  <a:srgbClr val="1F2937"/>
-                </a:solidFill>
-                <a:latin typeface="Arial" pitchFamily="34" charset="0"/>
-                <a:ea typeface="Arial" pitchFamily="34" charset="-122"/>
-                <a:cs typeface="Arial" pitchFamily="34" charset="-120"/>
-              </a:rPr>
-              <a:t>Consumo (kWh) e tipo de ligação</a:t>
-            </a:r>
-            <a:endParaRPr lang="en-US" sz="1800" dirty="0"/>
-          </a:p>
-        </p:txBody>
-      </p:sp>
-      <p:sp>
-        <p:nvSpPr>
-          <p:cNvPr id="21" name="Shape 18"/>
-          <p:cNvSpPr/>
-          <p:nvPr/>
-        </p:nvSpPr>
-        <p:spPr>
-          <a:xfrm>
-            <a:off x="548640" y="3909060"/>
-            <a:ext cx="3544824" cy="2354580"/>
-          </a:xfrm>
-          <a:prstGeom prst="roundRect">
-            <a:avLst>
-              <a:gd name="adj" fmla="val 3107"/>
-            </a:avLst>
-          </a:prstGeom>
-          <a:solidFill>
-            <a:srgbClr val="FFFFFF"/>
-          </a:solidFill>
-          <a:ln w="9525">
-            <a:solidFill>
-              <a:srgbClr val="D8E0EC"/>
-            </a:solidFill>
-            <a:prstDash val="solid"/>
-          </a:ln>
-          <a:effectLst>
-            <a:outerShdw sx="100000" sy="100000" kx="0" ky="0" algn="bl" rotWithShape="0" blurRad="38100" dist="12700" dir="5400000">
-              <a:srgbClr val="000000">
-                <a:alpha val="8000"/>
-              </a:srgbClr>
-            </a:outerShdw>
-          </a:effectLst>
-        </p:spPr>
-      </p:sp>
-      <p:sp>
-        <p:nvSpPr>
-          <p:cNvPr id="22" name="Shape 19"/>
-          <p:cNvSpPr/>
-          <p:nvPr/>
-        </p:nvSpPr>
-        <p:spPr>
-          <a:xfrm>
-            <a:off x="731520" y="4091940"/>
-            <a:ext cx="457200" cy="457200"/>
-          </a:xfrm>
-          <a:prstGeom prst="ellipse">
-            <a:avLst/>
-          </a:prstGeom>
-          <a:solidFill>
-            <a:srgbClr val="F7A23B"/>
-          </a:solidFill>
-          <a:ln/>
-        </p:spPr>
-      </p:sp>
-      <p:sp>
-        <p:nvSpPr>
-          <p:cNvPr id="23" name="Text 20"/>
-          <p:cNvSpPr/>
-          <p:nvPr/>
-        </p:nvSpPr>
-        <p:spPr>
-          <a:xfrm>
-            <a:off x="731520" y="4091940"/>
-            <a:ext cx="457200" cy="457200"/>
-          </a:xfrm>
-          <a:prstGeom prst="rect">
-            <a:avLst/>
-          </a:prstGeom>
-          <a:noFill/>
-          <a:ln/>
-        </p:spPr>
-        <p:txBody>
-          <a:bodyPr wrap="square" rtlCol="0" anchor="ctr"/>
-          <a:lstStyle/>
-          <a:p>
-            <a:pPr algn="ctr" indent="0" marL="0">
-              <a:buNone/>
-            </a:pPr>
-            <a:r>
-              <a:rPr lang="en-US" sz="1400" b="1" dirty="0">
-                <a:solidFill>
-                  <a:srgbClr val="FFFFFF"/>
-                </a:solidFill>
-                <a:latin typeface="Arial" pitchFamily="34" charset="0"/>
-                <a:ea typeface="Arial" pitchFamily="34" charset="-122"/>
-                <a:cs typeface="Arial" pitchFamily="34" charset="-120"/>
-              </a:rPr>
-              <a:t>4</a:t>
-            </a:r>
-            <a:endParaRPr lang="en-US" sz="1400" dirty="0"/>
-          </a:p>
-        </p:txBody>
-      </p:sp>
-      <p:sp>
-        <p:nvSpPr>
-          <p:cNvPr id="24" name="Text 21"/>
-          <p:cNvSpPr/>
-          <p:nvPr/>
-        </p:nvSpPr>
-        <p:spPr>
-          <a:xfrm>
-            <a:off x="1325880" y="4018788"/>
-            <a:ext cx="2630424" cy="2135124"/>
-          </a:xfrm>
-          <a:prstGeom prst="rect">
-            <a:avLst/>
-          </a:prstGeom>
-          <a:noFill/>
-          <a:ln/>
-        </p:spPr>
-        <p:txBody>
-          <a:bodyPr wrap="square" rtlCol="0" anchor="ctr">
-            <a:normAutofit/>
-          </a:bodyPr>
-          <a:lstStyle/>
-          <a:p>
-            <a:pPr indent="0" marL="0">
-              <a:buNone/>
-            </a:pPr>
-            <a:r>
-              <a:rPr lang="en-US" sz="1800" dirty="0">
-                <a:solidFill>
-                  <a:srgbClr val="1F2937"/>
-                </a:solidFill>
-                <a:latin typeface="Arial" pitchFamily="34" charset="0"/>
-                <a:ea typeface="Arial" pitchFamily="34" charset="-122"/>
-                <a:cs typeface="Arial" pitchFamily="34" charset="-120"/>
-              </a:rPr>
-              <a:t>Custo de disponibilidade (kWh)</a:t>
-            </a:r>
-            <a:endParaRPr lang="en-US" sz="1800" dirty="0"/>
-          </a:p>
-        </p:txBody>
-      </p:sp>
-      <p:sp>
-        <p:nvSpPr>
-          <p:cNvPr id="25" name="Shape 22"/>
-          <p:cNvSpPr/>
-          <p:nvPr/>
-        </p:nvSpPr>
-        <p:spPr>
-          <a:xfrm>
-            <a:off x="4322064" y="3909060"/>
-            <a:ext cx="3544824" cy="2354580"/>
-          </a:xfrm>
-          <a:prstGeom prst="roundRect">
-            <a:avLst>
-              <a:gd name="adj" fmla="val 3107"/>
-            </a:avLst>
-          </a:prstGeom>
-          <a:solidFill>
-            <a:srgbClr val="FFFFFF"/>
-          </a:solidFill>
-          <a:ln w="9525">
-            <a:solidFill>
-              <a:srgbClr val="D8E0EC"/>
-            </a:solidFill>
-            <a:prstDash val="solid"/>
-          </a:ln>
-          <a:effectLst>
-            <a:outerShdw sx="100000" sy="100000" kx="0" ky="0" algn="bl" rotWithShape="0" blurRad="38100" dist="12700" dir="5400000">
-              <a:srgbClr val="000000">
-                <a:alpha val="8000"/>
-              </a:srgbClr>
-            </a:outerShdw>
-          </a:effectLst>
-        </p:spPr>
-      </p:sp>
-      <p:sp>
-        <p:nvSpPr>
-          <p:cNvPr id="26" name="Shape 23"/>
-          <p:cNvSpPr/>
-          <p:nvPr/>
-        </p:nvSpPr>
-        <p:spPr>
-          <a:xfrm>
-            <a:off x="4504944" y="4091940"/>
-            <a:ext cx="457200" cy="457200"/>
-          </a:xfrm>
-          <a:prstGeom prst="ellipse">
-            <a:avLst/>
-          </a:prstGeom>
-          <a:solidFill>
-            <a:srgbClr val="1B3A6B"/>
-          </a:solidFill>
-          <a:ln/>
-        </p:spPr>
-      </p:sp>
-      <p:sp>
-        <p:nvSpPr>
-          <p:cNvPr id="27" name="Text 24"/>
-          <p:cNvSpPr/>
-          <p:nvPr/>
-        </p:nvSpPr>
-        <p:spPr>
-          <a:xfrm>
-            <a:off x="4504944" y="4091940"/>
-            <a:ext cx="457200" cy="457200"/>
-          </a:xfrm>
-          <a:prstGeom prst="rect">
-            <a:avLst/>
-          </a:prstGeom>
-          <a:noFill/>
-          <a:ln/>
-        </p:spPr>
-        <p:txBody>
-          <a:bodyPr wrap="square" rtlCol="0" anchor="ctr"/>
-          <a:lstStyle/>
-          <a:p>
-            <a:pPr algn="ctr" indent="0" marL="0">
-              <a:buNone/>
-            </a:pPr>
-            <a:r>
-              <a:rPr lang="en-US" sz="1400" b="1" dirty="0">
-                <a:solidFill>
-                  <a:srgbClr val="FFFFFF"/>
-                </a:solidFill>
-                <a:latin typeface="Arial" pitchFamily="34" charset="0"/>
-                <a:ea typeface="Arial" pitchFamily="34" charset="-122"/>
-                <a:cs typeface="Arial" pitchFamily="34" charset="-120"/>
-              </a:rPr>
-              <a:t>5</a:t>
-            </a:r>
-            <a:endParaRPr lang="en-US" sz="1400" dirty="0"/>
-          </a:p>
-        </p:txBody>
-      </p:sp>
-      <p:sp>
-        <p:nvSpPr>
-          <p:cNvPr id="28" name="Text 25"/>
-          <p:cNvSpPr/>
-          <p:nvPr/>
-        </p:nvSpPr>
-        <p:spPr>
-          <a:xfrm>
-            <a:off x="5099304" y="4018788"/>
-            <a:ext cx="2630424" cy="2135124"/>
-          </a:xfrm>
-          <a:prstGeom prst="rect">
-            <a:avLst/>
-          </a:prstGeom>
-          <a:noFill/>
-          <a:ln/>
-        </p:spPr>
-        <p:txBody>
-          <a:bodyPr wrap="square" rtlCol="0" anchor="ctr">
-            <a:normAutofit/>
-          </a:bodyPr>
-          <a:lstStyle/>
-          <a:p>
-            <a:pPr indent="0" marL="0">
-              <a:buNone/>
-            </a:pPr>
-            <a:r>
-              <a:rPr lang="en-US" sz="1800" dirty="0">
-                <a:solidFill>
-                  <a:srgbClr val="1F2937"/>
-                </a:solidFill>
-                <a:latin typeface="Arial" pitchFamily="34" charset="0"/>
-                <a:ea typeface="Arial" pitchFamily="34" charset="-122"/>
-                <a:cs typeface="Arial" pitchFamily="34" charset="-120"/>
-              </a:rPr>
-              <a:t>Valor total</a:t>
-            </a:r>
-            <a:endParaRPr lang="en-US" sz="1800" dirty="0"/>
-          </a:p>
-        </p:txBody>
-      </p:sp>
-      <p:sp>
-        <p:nvSpPr>
-          <p:cNvPr id="29" name="Shape 26"/>
-          <p:cNvSpPr/>
-          <p:nvPr/>
-        </p:nvSpPr>
-        <p:spPr>
-          <a:xfrm>
-            <a:off x="8095488" y="3909060"/>
-            <a:ext cx="3544824" cy="2354580"/>
-          </a:xfrm>
-          <a:prstGeom prst="roundRect">
-            <a:avLst>
-              <a:gd name="adj" fmla="val 3107"/>
-            </a:avLst>
-          </a:prstGeom>
-          <a:solidFill>
-            <a:srgbClr val="FFFFFF"/>
-          </a:solidFill>
-          <a:ln w="9525">
-            <a:solidFill>
-              <a:srgbClr val="D8E0EC"/>
-            </a:solidFill>
-            <a:prstDash val="solid"/>
-          </a:ln>
-          <a:effectLst>
-            <a:outerShdw sx="100000" sy="100000" kx="0" ky="0" algn="bl" rotWithShape="0" blurRad="38100" dist="12700" dir="5400000">
-              <a:srgbClr val="000000">
-                <a:alpha val="8000"/>
-              </a:srgbClr>
-            </a:outerShdw>
-          </a:effectLst>
-        </p:spPr>
-      </p:sp>
-      <p:sp>
-        <p:nvSpPr>
-          <p:cNvPr id="30" name="Shape 27"/>
-          <p:cNvSpPr/>
-          <p:nvPr/>
-        </p:nvSpPr>
-        <p:spPr>
-          <a:xfrm>
-            <a:off x="8278368" y="4091940"/>
-            <a:ext cx="457200" cy="457200"/>
-          </a:xfrm>
-          <a:prstGeom prst="ellipse">
-            <a:avLst/>
-          </a:prstGeom>
-          <a:solidFill>
-            <a:srgbClr val="F7A23B"/>
-          </a:solidFill>
-          <a:ln/>
-        </p:spPr>
-      </p:sp>
-      <p:sp>
-        <p:nvSpPr>
-          <p:cNvPr id="31" name="Text 28"/>
-          <p:cNvSpPr/>
-          <p:nvPr/>
-        </p:nvSpPr>
-        <p:spPr>
-          <a:xfrm>
-            <a:off x="8278368" y="4091940"/>
-            <a:ext cx="457200" cy="457200"/>
-          </a:xfrm>
-          <a:prstGeom prst="rect">
-            <a:avLst/>
-          </a:prstGeom>
-          <a:noFill/>
-          <a:ln/>
-        </p:spPr>
-        <p:txBody>
-          <a:bodyPr wrap="square" rtlCol="0" anchor="ctr"/>
-          <a:lstStyle/>
-          <a:p>
-            <a:pPr algn="ctr" indent="0" marL="0">
-              <a:buNone/>
-            </a:pPr>
-            <a:r>
-              <a:rPr lang="en-US" sz="1400" b="1" dirty="0">
-                <a:solidFill>
-                  <a:srgbClr val="FFFFFF"/>
-                </a:solidFill>
-                <a:latin typeface="Arial" pitchFamily="34" charset="0"/>
-                <a:ea typeface="Arial" pitchFamily="34" charset="-122"/>
-                <a:cs typeface="Arial" pitchFamily="34" charset="-120"/>
-              </a:rPr>
-              <a:t>6</a:t>
-            </a:r>
-            <a:endParaRPr lang="en-US" sz="1400" dirty="0"/>
-          </a:p>
-        </p:txBody>
-      </p:sp>
-      <p:sp>
-        <p:nvSpPr>
-          <p:cNvPr id="32" name="Text 29"/>
-          <p:cNvSpPr/>
-          <p:nvPr/>
-        </p:nvSpPr>
-        <p:spPr>
-          <a:xfrm>
-            <a:off x="8872728" y="4018788"/>
-            <a:ext cx="2630424" cy="2135124"/>
-          </a:xfrm>
-          <a:prstGeom prst="rect">
-            <a:avLst/>
-          </a:prstGeom>
-          <a:noFill/>
-          <a:ln/>
-        </p:spPr>
-        <p:txBody>
-          <a:bodyPr wrap="square" rtlCol="0" anchor="ctr">
-            <a:normAutofit/>
-          </a:bodyPr>
-          <a:lstStyle/>
-          <a:p>
-            <a:pPr indent="0" marL="0">
-              <a:buNone/>
-            </a:pPr>
-            <a:r>
-              <a:rPr lang="en-US" sz="1800" dirty="0">
-                <a:solidFill>
-                  <a:srgbClr val="1F2937"/>
-                </a:solidFill>
-                <a:latin typeface="Arial" pitchFamily="34" charset="0"/>
-                <a:ea typeface="Arial" pitchFamily="34" charset="-122"/>
-                <a:cs typeface="Arial" pitchFamily="34" charset="-120"/>
-              </a:rPr>
-              <a:t>Tarifa com impostos aproximada (valor ÷ kWh)</a:t>
-            </a:r>
-            <a:endParaRPr lang="en-US" sz="1800" dirty="0"/>
-          </a:p>
-        </p:txBody>
-      </p:sp>
-      <p:sp>
-        <p:nvSpPr>
-          <p:cNvPr id="25" name="Slide Number Placeholder 0"/>
-          <p:cNvSpPr>
-            <a:spLocks noGrp="1"/>
-          </p:cNvSpPr>
-          <p:nvPr>
-            <p:ph type="sldNum" sz="quarter" idx="4294967295"/>
-          </p:nvPr>
-        </p:nvSpPr>
-        <p:spPr>
-          <a:xfrm>
-            <a:off x="11292840" y="6556248"/>
-            <a:ext cx="548640" cy="256032"/>
-          </a:xfrm>
-          <a:prstGeom prst="rect">
-            <a:avLst/>
-          </a:prstGeom>
-          <a:extLst>
-            <a:ext uri="{C572A759-6A51-4108-AA02-DFA0A04FC94B}">
-              <ma14:wrappingTextBoxFlag xmlns:ma14="http://schemas.microsoft.com/office/mac/drawingml/2011/main" val="0"/>
-            </a:ext>
-          </a:extLst>
-        </p:spPr>
-        <p:txBody>
-          <a:bodyPr/>
-          <a:lstStyle>
-            <a:lvl1pPr>
-              <a:defRPr sz="900">
-                <a:solidFill>
-                  <a:srgbClr val="1B3A6B"/>
-                </a:solidFill>
-                <a:latin typeface="Arial"/>
-                <a:ea typeface="Arial"/>
-                <a:cs typeface="Arial"/>
-              </a:defRPr>
-            </a:lvl1pPr>
-          </a:lstStyle>
-          <a:p>
-            <a:pPr algn="r"/>
-            <a:fld id="{F7021451-1387-4CA6-816F-3879F97B5CBC}" type="slidenum">
-              <a:rPr b="1" lang="en-US"/>
-              <a:t>39</a:t>
-            </a:fld>
-            <a:endParaRPr lang="en-US"/>
           </a:p>
         </p:txBody>
       </p:sp>
@@ -28196,7 +27455,7 @@
                 <a:ea typeface="Arial" pitchFamily="34" charset="-122"/>
                 <a:cs typeface="Arial" pitchFamily="34" charset="-120"/>
               </a:rPr>
-              <a:t>AULA 8 · LENDO UMA FATURA DE CONCESSIONÁRIA NA PLATAFORMA</a:t>
+              <a:t>AULA 8 · LABORATÓRIO: LENDO UMA FATURA DE CONCESSIONÁRIA NA PLATAFORMA</a:t>
             </a:r>
             <a:endParaRPr lang="en-US" sz="1000" dirty="0"/>
           </a:p>
@@ -28237,7 +27496,7 @@
                 <a:ea typeface="Arial" pitchFamily="34" charset="-122"/>
                 <a:cs typeface="Arial" pitchFamily="34" charset="-120"/>
               </a:rPr>
-              <a:t>Passo a passo na plataforma</a:t>
+              <a:t>Exercício</a:t>
             </a:r>
             <a:endParaRPr lang="en-US" sz="2600" dirty="0"/>
           </a:p>
@@ -28251,66 +27510,62 @@
         </p:nvSpPr>
         <p:spPr>
           <a:xfrm>
-            <a:off x="420624" y="1289304"/>
-            <a:ext cx="7114032" cy="4033647"/>
+            <a:off x="548640" y="1325880"/>
+            <a:ext cx="3544824" cy="2354580"/>
           </a:xfrm>
           <a:prstGeom prst="roundRect">
             <a:avLst>
-              <a:gd name="adj" fmla="val 1360"/>
+              <a:gd name="adj" fmla="val 3107"/>
             </a:avLst>
           </a:prstGeom>
           <a:solidFill>
             <a:srgbClr val="FFFFFF"/>
           </a:solidFill>
-          <a:ln w="12700">
+          <a:ln w="9525">
             <a:solidFill>
               <a:srgbClr val="D8E0EC"/>
             </a:solidFill>
             <a:prstDash val="solid"/>
           </a:ln>
           <a:effectLst>
-            <a:outerShdw sx="100000" sy="100000" kx="0" ky="0" algn="bl" rotWithShape="0" blurRad="76200" dist="25400" dir="5400000">
+            <a:outerShdw sx="100000" sy="100000" kx="0" ky="0" algn="bl" rotWithShape="0" blurRad="38100" dist="12700" dir="5400000">
               <a:srgbClr val="000000">
-                <a:alpha val="15000"/>
+                <a:alpha val="8000"/>
               </a:srgbClr>
             </a:outerShdw>
           </a:effectLst>
         </p:spPr>
       </p:sp>
-      <p:pic>
-        <p:nvPicPr>
-          <p:cNvPr id="10" name="Image 1" descr="/www/wwwroot/rexar/gdsolar/docs/curso/slides/telas/fatura.jpg">    </p:cNvPr>
-          <p:cNvPicPr>
-            <a:picLocks noChangeAspect="1"/>
-          </p:cNvPicPr>
-          <p:nvPr/>
-        </p:nvPicPr>
-        <p:blipFill>
-          <a:blip r:embed="rId2"/>
-          <a:stretch>
-            <a:fillRect/>
-          </a:stretch>
-        </p:blipFill>
-        <p:spPr>
-          <a:xfrm>
-            <a:off x="457200" y="1325880"/>
-            <a:ext cx="7040880" cy="3960495"/>
-          </a:xfrm>
-          <a:prstGeom prst="rect">
-            <a:avLst/>
-          </a:prstGeom>
-        </p:spPr>
-      </p:pic>
-      <p:sp>
-        <p:nvSpPr>
-          <p:cNvPr id="11" name="Text 7"/>
-          <p:cNvSpPr/>
-          <p:nvPr/>
-        </p:nvSpPr>
-        <p:spPr>
-          <a:xfrm>
-            <a:off x="457200" y="5332095"/>
-            <a:ext cx="7040880" cy="320040"/>
+      <p:sp>
+        <p:nvSpPr>
+          <p:cNvPr id="10" name="Shape 7"/>
+          <p:cNvSpPr/>
+          <p:nvPr/>
+        </p:nvSpPr>
+        <p:spPr>
+          <a:xfrm>
+            <a:off x="731520" y="1508760"/>
+            <a:ext cx="457200" cy="457200"/>
+          </a:xfrm>
+          <a:prstGeom prst="ellipse">
+            <a:avLst/>
+          </a:prstGeom>
+          <a:solidFill>
+            <a:srgbClr val="1B3A6B"/>
+          </a:solidFill>
+          <a:ln/>
+        </p:spPr>
+      </p:sp>
+      <p:sp>
+        <p:nvSpPr>
+          <p:cNvPr id="11" name="Text 8"/>
+          <p:cNvSpPr/>
+          <p:nvPr/>
+        </p:nvSpPr>
+        <p:spPr>
+          <a:xfrm>
+            <a:off x="731520" y="1508760"/>
+            <a:ext cx="457200" cy="457200"/>
           </a:xfrm>
           <a:prstGeom prst="rect">
             <a:avLst/>
@@ -28326,39 +27581,39 @@
               <a:buNone/>
             </a:pPr>
             <a:r>
-              <a:rPr lang="en-US" sz="1100" i="1" dirty="0">
-                <a:solidFill>
-                  <a:srgbClr val="64748B"/>
-                </a:solidFill>
-                <a:latin typeface="Arial" pitchFamily="34" charset="0"/>
-                <a:ea typeface="Arial" pitchFamily="34" charset="-122"/>
-                <a:cs typeface="Arial" pitchFamily="34" charset="-120"/>
-              </a:rPr>
-              <a:t>Fatura de concessionária</a:t>
-            </a:r>
-            <a:endParaRPr lang="en-US" sz="1100" dirty="0"/>
-          </a:p>
-        </p:txBody>
-      </p:sp>
-      <p:sp>
-        <p:nvSpPr>
-          <p:cNvPr id="12" name="Text 8"/>
-          <p:cNvSpPr/>
-          <p:nvPr/>
-        </p:nvSpPr>
-        <p:spPr>
-          <a:xfrm>
-            <a:off x="7818120" y="1325880"/>
-            <a:ext cx="3977640" cy="4937760"/>
-          </a:xfrm>
-          <a:prstGeom prst="rect">
-            <a:avLst/>
-          </a:prstGeom>
-          <a:noFill/>
-          <a:ln/>
-        </p:spPr>
-        <p:txBody>
-          <a:bodyPr wrap="square" rtlCol="0" anchor="t">
+              <a:rPr lang="en-US" sz="1400" b="1" dirty="0">
+                <a:solidFill>
+                  <a:srgbClr val="FFFFFF"/>
+                </a:solidFill>
+                <a:latin typeface="Arial" pitchFamily="34" charset="0"/>
+                <a:ea typeface="Arial" pitchFamily="34" charset="-122"/>
+                <a:cs typeface="Arial" pitchFamily="34" charset="-120"/>
+              </a:rPr>
+              <a:t>1</a:t>
+            </a:r>
+            <a:endParaRPr lang="en-US" sz="1400" dirty="0"/>
+          </a:p>
+        </p:txBody>
+      </p:sp>
+      <p:sp>
+        <p:nvSpPr>
+          <p:cNvPr id="12" name="Text 9"/>
+          <p:cNvSpPr/>
+          <p:nvPr/>
+        </p:nvSpPr>
+        <p:spPr>
+          <a:xfrm>
+            <a:off x="1325880" y="1435608"/>
+            <a:ext cx="2630424" cy="2135124"/>
+          </a:xfrm>
+          <a:prstGeom prst="rect">
+            <a:avLst/>
+          </a:prstGeom>
+          <a:noFill/>
+          <a:ln/>
+        </p:spPr>
+        <p:txBody>
+          <a:bodyPr wrap="square" rtlCol="0" anchor="ctr">
             <a:normAutofit/>
           </a:bodyPr>
           <a:lstStyle/>
@@ -28367,41 +27622,275 @@
               <a:buNone/>
             </a:pPr>
             <a:r>
-              <a:rPr lang="en-US" sz="1500" b="1" dirty="0">
-                <a:solidFill>
-                  <a:srgbClr val="F7A23B"/>
-                </a:solidFill>
-                <a:latin typeface="Arial" pitchFamily="34" charset="0"/>
-                <a:ea typeface="Arial" pitchFamily="34" charset="-122"/>
-                <a:cs typeface="Arial" pitchFamily="34" charset="-120"/>
-              </a:rPr>
-              <a:t>1  </a:t>
-            </a:r>
+              <a:rPr lang="en-US" sz="1800" dirty="0">
+                <a:solidFill>
+                  <a:srgbClr val="1F2937"/>
+                </a:solidFill>
+                <a:latin typeface="Arial" pitchFamily="34" charset="0"/>
+                <a:ea typeface="Arial" pitchFamily="34" charset="-122"/>
+                <a:cs typeface="Arial" pitchFamily="34" charset="-120"/>
+              </a:rPr>
+              <a:t>Exercício — fatura da Residência:</a:t>
+            </a:r>
+            <a:endParaRPr lang="en-US" sz="1800" dirty="0"/>
+          </a:p>
+        </p:txBody>
+      </p:sp>
+      <p:sp>
+        <p:nvSpPr>
+          <p:cNvPr id="13" name="Shape 10"/>
+          <p:cNvSpPr/>
+          <p:nvPr/>
+        </p:nvSpPr>
+        <p:spPr>
+          <a:xfrm>
+            <a:off x="4322064" y="1325880"/>
+            <a:ext cx="3544824" cy="2354580"/>
+          </a:xfrm>
+          <a:prstGeom prst="roundRect">
+            <a:avLst>
+              <a:gd name="adj" fmla="val 3107"/>
+            </a:avLst>
+          </a:prstGeom>
+          <a:solidFill>
+            <a:srgbClr val="FFFFFF"/>
+          </a:solidFill>
+          <a:ln w="9525">
+            <a:solidFill>
+              <a:srgbClr val="D8E0EC"/>
+            </a:solidFill>
+            <a:prstDash val="solid"/>
+          </a:ln>
+          <a:effectLst>
+            <a:outerShdw sx="100000" sy="100000" kx="0" ky="0" algn="bl" rotWithShape="0" blurRad="38100" dist="12700" dir="5400000">
+              <a:srgbClr val="000000">
+                <a:alpha val="8000"/>
+              </a:srgbClr>
+            </a:outerShdw>
+          </a:effectLst>
+        </p:spPr>
+      </p:sp>
+      <p:sp>
+        <p:nvSpPr>
+          <p:cNvPr id="14" name="Shape 11"/>
+          <p:cNvSpPr/>
+          <p:nvPr/>
+        </p:nvSpPr>
+        <p:spPr>
+          <a:xfrm>
+            <a:off x="4504944" y="1508760"/>
+            <a:ext cx="457200" cy="457200"/>
+          </a:xfrm>
+          <a:prstGeom prst="ellipse">
+            <a:avLst/>
+          </a:prstGeom>
+          <a:solidFill>
+            <a:srgbClr val="F7A23B"/>
+          </a:solidFill>
+          <a:ln/>
+        </p:spPr>
+      </p:sp>
+      <p:sp>
+        <p:nvSpPr>
+          <p:cNvPr id="15" name="Text 12"/>
+          <p:cNvSpPr/>
+          <p:nvPr/>
+        </p:nvSpPr>
+        <p:spPr>
+          <a:xfrm>
+            <a:off x="4504944" y="1508760"/>
+            <a:ext cx="457200" cy="457200"/>
+          </a:xfrm>
+          <a:prstGeom prst="rect">
+            <a:avLst/>
+          </a:prstGeom>
+          <a:noFill/>
+          <a:ln/>
+        </p:spPr>
+        <p:txBody>
+          <a:bodyPr wrap="square" rtlCol="0" anchor="ctr"/>
+          <a:lstStyle/>
+          <a:p>
+            <a:pPr algn="ctr" indent="0" marL="0">
+              <a:buNone/>
+            </a:pPr>
+            <a:r>
+              <a:rPr lang="en-US" sz="1400" b="1" dirty="0">
+                <a:solidFill>
+                  <a:srgbClr val="FFFFFF"/>
+                </a:solidFill>
+                <a:latin typeface="Arial" pitchFamily="34" charset="0"/>
+                <a:ea typeface="Arial" pitchFamily="34" charset="-122"/>
+                <a:cs typeface="Arial" pitchFamily="34" charset="-120"/>
+              </a:rPr>
+              <a:t>2</a:t>
+            </a:r>
+            <a:endParaRPr lang="en-US" sz="1400" dirty="0"/>
+          </a:p>
+        </p:txBody>
+      </p:sp>
+      <p:sp>
+        <p:nvSpPr>
+          <p:cNvPr id="16" name="Text 13"/>
+          <p:cNvSpPr/>
+          <p:nvPr/>
+        </p:nvSpPr>
+        <p:spPr>
+          <a:xfrm>
+            <a:off x="5099304" y="1435608"/>
+            <a:ext cx="2630424" cy="2135124"/>
+          </a:xfrm>
+          <a:prstGeom prst="rect">
+            <a:avLst/>
+          </a:prstGeom>
+          <a:noFill/>
+          <a:ln/>
+        </p:spPr>
+        <p:txBody>
+          <a:bodyPr wrap="square" rtlCol="0" anchor="ctr">
+            <a:normAutofit/>
+          </a:bodyPr>
+          <a:lstStyle/>
+          <a:p>
             <a:pPr indent="0" marL="0">
               <a:buNone/>
             </a:pPr>
             <a:r>
+              <a:rPr lang="en-US" sz="1800" dirty="0">
+                <a:solidFill>
+                  <a:srgbClr val="1F2937"/>
+                </a:solidFill>
+                <a:latin typeface="Arial" pitchFamily="34" charset="0"/>
+                <a:ea typeface="Arial" pitchFamily="34" charset="-122"/>
+                <a:cs typeface="Arial" pitchFamily="34" charset="-120"/>
+              </a:rPr>
+              <a:t>Referência e vencimento</a:t>
+            </a:r>
+            <a:endParaRPr lang="en-US" sz="1800" dirty="0"/>
+          </a:p>
+        </p:txBody>
+      </p:sp>
+      <p:sp>
+        <p:nvSpPr>
+          <p:cNvPr id="17" name="Shape 14"/>
+          <p:cNvSpPr/>
+          <p:nvPr/>
+        </p:nvSpPr>
+        <p:spPr>
+          <a:xfrm>
+            <a:off x="8095488" y="1325880"/>
+            <a:ext cx="3544824" cy="2354580"/>
+          </a:xfrm>
+          <a:prstGeom prst="roundRect">
+            <a:avLst>
+              <a:gd name="adj" fmla="val 3107"/>
+            </a:avLst>
+          </a:prstGeom>
+          <a:solidFill>
+            <a:srgbClr val="FFFFFF"/>
+          </a:solidFill>
+          <a:ln w="9525">
+            <a:solidFill>
+              <a:srgbClr val="D8E0EC"/>
+            </a:solidFill>
+            <a:prstDash val="solid"/>
+          </a:ln>
+          <a:effectLst>
+            <a:outerShdw sx="100000" sy="100000" kx="0" ky="0" algn="bl" rotWithShape="0" blurRad="38100" dist="12700" dir="5400000">
+              <a:srgbClr val="000000">
+                <a:alpha val="8000"/>
+              </a:srgbClr>
+            </a:outerShdw>
+          </a:effectLst>
+        </p:spPr>
+      </p:sp>
+      <p:sp>
+        <p:nvSpPr>
+          <p:cNvPr id="18" name="Shape 15"/>
+          <p:cNvSpPr/>
+          <p:nvPr/>
+        </p:nvSpPr>
+        <p:spPr>
+          <a:xfrm>
+            <a:off x="8278368" y="1508760"/>
+            <a:ext cx="457200" cy="457200"/>
+          </a:xfrm>
+          <a:prstGeom prst="ellipse">
+            <a:avLst/>
+          </a:prstGeom>
+          <a:solidFill>
+            <a:srgbClr val="1B3A6B"/>
+          </a:solidFill>
+          <a:ln/>
+        </p:spPr>
+      </p:sp>
+      <p:sp>
+        <p:nvSpPr>
+          <p:cNvPr id="19" name="Text 16"/>
+          <p:cNvSpPr/>
+          <p:nvPr/>
+        </p:nvSpPr>
+        <p:spPr>
+          <a:xfrm>
+            <a:off x="8278368" y="1508760"/>
+            <a:ext cx="457200" cy="457200"/>
+          </a:xfrm>
+          <a:prstGeom prst="rect">
+            <a:avLst/>
+          </a:prstGeom>
+          <a:noFill/>
+          <a:ln/>
+        </p:spPr>
+        <p:txBody>
+          <a:bodyPr wrap="square" rtlCol="0" anchor="ctr"/>
+          <a:lstStyle/>
+          <a:p>
+            <a:pPr algn="ctr" indent="0" marL="0">
+              <a:buNone/>
+            </a:pPr>
+            <a:r>
               <a:rPr lang="en-US" sz="1400" b="1" dirty="0">
                 <a:solidFill>
-                  <a:srgbClr val="1B3A6B"/>
-                </a:solidFill>
-                <a:latin typeface="Arial" pitchFamily="34" charset="0"/>
-                <a:ea typeface="Arial" pitchFamily="34" charset="-122"/>
-                <a:cs typeface="Arial" pitchFamily="34" charset="-120"/>
-              </a:rPr>
-              <a:t>Encontrando a fatura</a:t>
-            </a:r>
-            <a:endParaRPr lang="en-US" sz="1500" dirty="0"/>
-          </a:p>
+                  <a:srgbClr val="FFFFFF"/>
+                </a:solidFill>
+                <a:latin typeface="Arial" pitchFamily="34" charset="0"/>
+                <a:ea typeface="Arial" pitchFamily="34" charset="-122"/>
+                <a:cs typeface="Arial" pitchFamily="34" charset="-120"/>
+              </a:rPr>
+              <a:t>3</a:t>
+            </a:r>
+            <a:endParaRPr lang="en-US" sz="1400" dirty="0"/>
+          </a:p>
+        </p:txBody>
+      </p:sp>
+      <p:sp>
+        <p:nvSpPr>
+          <p:cNvPr id="20" name="Text 17"/>
+          <p:cNvSpPr/>
+          <p:nvPr/>
+        </p:nvSpPr>
+        <p:spPr>
+          <a:xfrm>
+            <a:off x="8872728" y="1435608"/>
+            <a:ext cx="2630424" cy="2135124"/>
+          </a:xfrm>
+          <a:prstGeom prst="rect">
+            <a:avLst/>
+          </a:prstGeom>
+          <a:noFill/>
+          <a:ln/>
+        </p:spPr>
+        <p:txBody>
+          <a:bodyPr wrap="square" rtlCol="0" anchor="ctr">
+            <a:normAutofit/>
+          </a:bodyPr>
+          <a:lstStyle/>
           <a:p>
             <a:pPr indent="0" marL="0">
-              <a:spcAft>
-                <a:spcPts val="800"/>
-              </a:spcAft>
-              <a:buNone/>
-            </a:pPr>
-            <a:r>
-              <a:rPr lang="en-US" sz="1100" dirty="0">
+              <a:buNone/>
+            </a:pPr>
+            <a:r>
+              <a:rPr lang="en-US" sz="1800" dirty="0">
                 <a:solidFill>
                   <a:srgbClr val="1F2937"/>
                 </a:solidFill>
@@ -28409,50 +27898,401 @@
                 <a:ea typeface="Arial" pitchFamily="34" charset="-122"/>
                 <a:cs typeface="Arial" pitchFamily="34" charset="-120"/>
               </a:rPr>
-              <a:t>Em Cliente Consumidor, Clientes, abra a Padaria e a fatura mais recente. Atalho: Financeiro, Faturas de Concessionárias.</a:t>
-            </a:r>
-            <a:endParaRPr lang="en-US" sz="1500" dirty="0"/>
-          </a:p>
+              <a:t>Consumo (kWh) e tipo de ligação</a:t>
+            </a:r>
+            <a:endParaRPr lang="en-US" sz="1800" dirty="0"/>
+          </a:p>
+        </p:txBody>
+      </p:sp>
+      <p:sp>
+        <p:nvSpPr>
+          <p:cNvPr id="21" name="Shape 18"/>
+          <p:cNvSpPr/>
+          <p:nvPr/>
+        </p:nvSpPr>
+        <p:spPr>
+          <a:xfrm>
+            <a:off x="548640" y="3909060"/>
+            <a:ext cx="3544824" cy="2354580"/>
+          </a:xfrm>
+          <a:prstGeom prst="roundRect">
+            <a:avLst>
+              <a:gd name="adj" fmla="val 3107"/>
+            </a:avLst>
+          </a:prstGeom>
+          <a:solidFill>
+            <a:srgbClr val="FFFFFF"/>
+          </a:solidFill>
+          <a:ln w="9525">
+            <a:solidFill>
+              <a:srgbClr val="D8E0EC"/>
+            </a:solidFill>
+            <a:prstDash val="solid"/>
+          </a:ln>
+          <a:effectLst>
+            <a:outerShdw sx="100000" sy="100000" kx="0" ky="0" algn="bl" rotWithShape="0" blurRad="38100" dist="12700" dir="5400000">
+              <a:srgbClr val="000000">
+                <a:alpha val="8000"/>
+              </a:srgbClr>
+            </a:outerShdw>
+          </a:effectLst>
+        </p:spPr>
+      </p:sp>
+      <p:sp>
+        <p:nvSpPr>
+          <p:cNvPr id="22" name="Shape 19"/>
+          <p:cNvSpPr/>
+          <p:nvPr/>
+        </p:nvSpPr>
+        <p:spPr>
+          <a:xfrm>
+            <a:off x="731520" y="4091940"/>
+            <a:ext cx="457200" cy="457200"/>
+          </a:xfrm>
+          <a:prstGeom prst="ellipse">
+            <a:avLst/>
+          </a:prstGeom>
+          <a:solidFill>
+            <a:srgbClr val="F7A23B"/>
+          </a:solidFill>
+          <a:ln/>
+        </p:spPr>
+      </p:sp>
+      <p:sp>
+        <p:nvSpPr>
+          <p:cNvPr id="23" name="Text 20"/>
+          <p:cNvSpPr/>
+          <p:nvPr/>
+        </p:nvSpPr>
+        <p:spPr>
+          <a:xfrm>
+            <a:off x="731520" y="4091940"/>
+            <a:ext cx="457200" cy="457200"/>
+          </a:xfrm>
+          <a:prstGeom prst="rect">
+            <a:avLst/>
+          </a:prstGeom>
+          <a:noFill/>
+          <a:ln/>
+        </p:spPr>
+        <p:txBody>
+          <a:bodyPr wrap="square" rtlCol="0" anchor="ctr"/>
+          <a:lstStyle/>
+          <a:p>
+            <a:pPr algn="ctr" indent="0" marL="0">
+              <a:buNone/>
+            </a:pPr>
+            <a:r>
+              <a:rPr lang="en-US" sz="1400" b="1" dirty="0">
+                <a:solidFill>
+                  <a:srgbClr val="FFFFFF"/>
+                </a:solidFill>
+                <a:latin typeface="Arial" pitchFamily="34" charset="0"/>
+                <a:ea typeface="Arial" pitchFamily="34" charset="-122"/>
+                <a:cs typeface="Arial" pitchFamily="34" charset="-120"/>
+              </a:rPr>
+              <a:t>4</a:t>
+            </a:r>
+            <a:endParaRPr lang="en-US" sz="1400" dirty="0"/>
+          </a:p>
+        </p:txBody>
+      </p:sp>
+      <p:sp>
+        <p:nvSpPr>
+          <p:cNvPr id="24" name="Text 21"/>
+          <p:cNvSpPr/>
+          <p:nvPr/>
+        </p:nvSpPr>
+        <p:spPr>
+          <a:xfrm>
+            <a:off x="1325880" y="4018788"/>
+            <a:ext cx="2630424" cy="2135124"/>
+          </a:xfrm>
+          <a:prstGeom prst="rect">
+            <a:avLst/>
+          </a:prstGeom>
+          <a:noFill/>
+          <a:ln/>
+        </p:spPr>
+        <p:txBody>
+          <a:bodyPr wrap="square" rtlCol="0" anchor="ctr">
+            <a:normAutofit/>
+          </a:bodyPr>
+          <a:lstStyle/>
           <a:p>
             <a:pPr indent="0" marL="0">
               <a:buNone/>
             </a:pPr>
             <a:r>
-              <a:rPr lang="en-US" sz="1500" b="1" dirty="0">
-                <a:solidFill>
-                  <a:srgbClr val="F7A23B"/>
-                </a:solidFill>
-                <a:latin typeface="Arial" pitchFamily="34" charset="0"/>
-                <a:ea typeface="Arial" pitchFamily="34" charset="-122"/>
-                <a:cs typeface="Arial" pitchFamily="34" charset="-120"/>
-              </a:rPr>
-              <a:t>2  </a:t>
-            </a:r>
+              <a:rPr lang="en-US" sz="1800" dirty="0">
+                <a:solidFill>
+                  <a:srgbClr val="1F2937"/>
+                </a:solidFill>
+                <a:latin typeface="Arial" pitchFamily="34" charset="0"/>
+                <a:ea typeface="Arial" pitchFamily="34" charset="-122"/>
+                <a:cs typeface="Arial" pitchFamily="34" charset="-120"/>
+              </a:rPr>
+              <a:t>Custo de disponibilidade (kWh)</a:t>
+            </a:r>
+            <a:endParaRPr lang="en-US" sz="1800" dirty="0"/>
+          </a:p>
+        </p:txBody>
+      </p:sp>
+      <p:sp>
+        <p:nvSpPr>
+          <p:cNvPr id="25" name="Shape 22"/>
+          <p:cNvSpPr/>
+          <p:nvPr/>
+        </p:nvSpPr>
+        <p:spPr>
+          <a:xfrm>
+            <a:off x="4322064" y="3909060"/>
+            <a:ext cx="3544824" cy="2354580"/>
+          </a:xfrm>
+          <a:prstGeom prst="roundRect">
+            <a:avLst>
+              <a:gd name="adj" fmla="val 3107"/>
+            </a:avLst>
+          </a:prstGeom>
+          <a:solidFill>
+            <a:srgbClr val="FFFFFF"/>
+          </a:solidFill>
+          <a:ln w="9525">
+            <a:solidFill>
+              <a:srgbClr val="D8E0EC"/>
+            </a:solidFill>
+            <a:prstDash val="solid"/>
+          </a:ln>
+          <a:effectLst>
+            <a:outerShdw sx="100000" sy="100000" kx="0" ky="0" algn="bl" rotWithShape="0" blurRad="38100" dist="12700" dir="5400000">
+              <a:srgbClr val="000000">
+                <a:alpha val="8000"/>
+              </a:srgbClr>
+            </a:outerShdw>
+          </a:effectLst>
+        </p:spPr>
+      </p:sp>
+      <p:sp>
+        <p:nvSpPr>
+          <p:cNvPr id="26" name="Shape 23"/>
+          <p:cNvSpPr/>
+          <p:nvPr/>
+        </p:nvSpPr>
+        <p:spPr>
+          <a:xfrm>
+            <a:off x="4504944" y="4091940"/>
+            <a:ext cx="457200" cy="457200"/>
+          </a:xfrm>
+          <a:prstGeom prst="ellipse">
+            <a:avLst/>
+          </a:prstGeom>
+          <a:solidFill>
+            <a:srgbClr val="1B3A6B"/>
+          </a:solidFill>
+          <a:ln/>
+        </p:spPr>
+      </p:sp>
+      <p:sp>
+        <p:nvSpPr>
+          <p:cNvPr id="27" name="Text 24"/>
+          <p:cNvSpPr/>
+          <p:nvPr/>
+        </p:nvSpPr>
+        <p:spPr>
+          <a:xfrm>
+            <a:off x="4504944" y="4091940"/>
+            <a:ext cx="457200" cy="457200"/>
+          </a:xfrm>
+          <a:prstGeom prst="rect">
+            <a:avLst/>
+          </a:prstGeom>
+          <a:noFill/>
+          <a:ln/>
+        </p:spPr>
+        <p:txBody>
+          <a:bodyPr wrap="square" rtlCol="0" anchor="ctr"/>
+          <a:lstStyle/>
+          <a:p>
+            <a:pPr algn="ctr" indent="0" marL="0">
+              <a:buNone/>
+            </a:pPr>
+            <a:r>
+              <a:rPr lang="en-US" sz="1400" b="1" dirty="0">
+                <a:solidFill>
+                  <a:srgbClr val="FFFFFF"/>
+                </a:solidFill>
+                <a:latin typeface="Arial" pitchFamily="34" charset="0"/>
+                <a:ea typeface="Arial" pitchFamily="34" charset="-122"/>
+                <a:cs typeface="Arial" pitchFamily="34" charset="-120"/>
+              </a:rPr>
+              <a:t>5</a:t>
+            </a:r>
+            <a:endParaRPr lang="en-US" sz="1400" dirty="0"/>
+          </a:p>
+        </p:txBody>
+      </p:sp>
+      <p:sp>
+        <p:nvSpPr>
+          <p:cNvPr id="28" name="Text 25"/>
+          <p:cNvSpPr/>
+          <p:nvPr/>
+        </p:nvSpPr>
+        <p:spPr>
+          <a:xfrm>
+            <a:off x="5099304" y="4018788"/>
+            <a:ext cx="2630424" cy="2135124"/>
+          </a:xfrm>
+          <a:prstGeom prst="rect">
+            <a:avLst/>
+          </a:prstGeom>
+          <a:noFill/>
+          <a:ln/>
+        </p:spPr>
+        <p:txBody>
+          <a:bodyPr wrap="square" rtlCol="0" anchor="ctr">
+            <a:normAutofit/>
+          </a:bodyPr>
+          <a:lstStyle/>
+          <a:p>
             <a:pPr indent="0" marL="0">
               <a:buNone/>
             </a:pPr>
             <a:r>
+              <a:rPr lang="en-US" sz="1800" dirty="0">
+                <a:solidFill>
+                  <a:srgbClr val="1F2937"/>
+                </a:solidFill>
+                <a:latin typeface="Arial" pitchFamily="34" charset="0"/>
+                <a:ea typeface="Arial" pitchFamily="34" charset="-122"/>
+                <a:cs typeface="Arial" pitchFamily="34" charset="-120"/>
+              </a:rPr>
+              <a:t>Valor total</a:t>
+            </a:r>
+            <a:endParaRPr lang="en-US" sz="1800" dirty="0"/>
+          </a:p>
+        </p:txBody>
+      </p:sp>
+      <p:sp>
+        <p:nvSpPr>
+          <p:cNvPr id="29" name="Shape 26"/>
+          <p:cNvSpPr/>
+          <p:nvPr/>
+        </p:nvSpPr>
+        <p:spPr>
+          <a:xfrm>
+            <a:off x="8095488" y="3909060"/>
+            <a:ext cx="3544824" cy="2354580"/>
+          </a:xfrm>
+          <a:prstGeom prst="roundRect">
+            <a:avLst>
+              <a:gd name="adj" fmla="val 3107"/>
+            </a:avLst>
+          </a:prstGeom>
+          <a:solidFill>
+            <a:srgbClr val="FFFFFF"/>
+          </a:solidFill>
+          <a:ln w="9525">
+            <a:solidFill>
+              <a:srgbClr val="D8E0EC"/>
+            </a:solidFill>
+            <a:prstDash val="solid"/>
+          </a:ln>
+          <a:effectLst>
+            <a:outerShdw sx="100000" sy="100000" kx="0" ky="0" algn="bl" rotWithShape="0" blurRad="38100" dist="12700" dir="5400000">
+              <a:srgbClr val="000000">
+                <a:alpha val="8000"/>
+              </a:srgbClr>
+            </a:outerShdw>
+          </a:effectLst>
+        </p:spPr>
+      </p:sp>
+      <p:sp>
+        <p:nvSpPr>
+          <p:cNvPr id="30" name="Shape 27"/>
+          <p:cNvSpPr/>
+          <p:nvPr/>
+        </p:nvSpPr>
+        <p:spPr>
+          <a:xfrm>
+            <a:off x="8278368" y="4091940"/>
+            <a:ext cx="457200" cy="457200"/>
+          </a:xfrm>
+          <a:prstGeom prst="ellipse">
+            <a:avLst/>
+          </a:prstGeom>
+          <a:solidFill>
+            <a:srgbClr val="F7A23B"/>
+          </a:solidFill>
+          <a:ln/>
+        </p:spPr>
+      </p:sp>
+      <p:sp>
+        <p:nvSpPr>
+          <p:cNvPr id="31" name="Text 28"/>
+          <p:cNvSpPr/>
+          <p:nvPr/>
+        </p:nvSpPr>
+        <p:spPr>
+          <a:xfrm>
+            <a:off x="8278368" y="4091940"/>
+            <a:ext cx="457200" cy="457200"/>
+          </a:xfrm>
+          <a:prstGeom prst="rect">
+            <a:avLst/>
+          </a:prstGeom>
+          <a:noFill/>
+          <a:ln/>
+        </p:spPr>
+        <p:txBody>
+          <a:bodyPr wrap="square" rtlCol="0" anchor="ctr"/>
+          <a:lstStyle/>
+          <a:p>
+            <a:pPr algn="ctr" indent="0" marL="0">
+              <a:buNone/>
+            </a:pPr>
+            <a:r>
               <a:rPr lang="en-US" sz="1400" b="1" dirty="0">
                 <a:solidFill>
-                  <a:srgbClr val="1B3A6B"/>
-                </a:solidFill>
-                <a:latin typeface="Arial" pitchFamily="34" charset="0"/>
-                <a:ea typeface="Arial" pitchFamily="34" charset="-122"/>
-                <a:cs typeface="Arial" pitchFamily="34" charset="-120"/>
-              </a:rPr>
-              <a:t>O PDF original</a:t>
-            </a:r>
-            <a:endParaRPr lang="en-US" sz="1500" dirty="0"/>
-          </a:p>
+                  <a:srgbClr val="FFFFFF"/>
+                </a:solidFill>
+                <a:latin typeface="Arial" pitchFamily="34" charset="0"/>
+                <a:ea typeface="Arial" pitchFamily="34" charset="-122"/>
+                <a:cs typeface="Arial" pitchFamily="34" charset="-120"/>
+              </a:rPr>
+              <a:t>6</a:t>
+            </a:r>
+            <a:endParaRPr lang="en-US" sz="1400" dirty="0"/>
+          </a:p>
+        </p:txBody>
+      </p:sp>
+      <p:sp>
+        <p:nvSpPr>
+          <p:cNvPr id="32" name="Text 29"/>
+          <p:cNvSpPr/>
+          <p:nvPr/>
+        </p:nvSpPr>
+        <p:spPr>
+          <a:xfrm>
+            <a:off x="8872728" y="4018788"/>
+            <a:ext cx="2630424" cy="2135124"/>
+          </a:xfrm>
+          <a:prstGeom prst="rect">
+            <a:avLst/>
+          </a:prstGeom>
+          <a:noFill/>
+          <a:ln/>
+        </p:spPr>
+        <p:txBody>
+          <a:bodyPr wrap="square" rtlCol="0" anchor="ctr">
+            <a:normAutofit/>
+          </a:bodyPr>
+          <a:lstStyle/>
           <a:p>
             <a:pPr indent="0" marL="0">
-              <a:spcAft>
-                <a:spcPts val="800"/>
-              </a:spcAft>
-              <a:buNone/>
-            </a:pPr>
-            <a:r>
-              <a:rPr lang="en-US" sz="1100" dirty="0">
+              <a:buNone/>
+            </a:pPr>
+            <a:r>
+              <a:rPr lang="en-US" sz="1800" dirty="0">
                 <a:solidFill>
                   <a:srgbClr val="1F2937"/>
                 </a:solidFill>
@@ -28460,111 +28300,9 @@
                 <a:ea typeface="Arial" pitchFamily="34" charset="-122"/>
                 <a:cs typeface="Arial" pitchFamily="34" charset="-120"/>
               </a:rPr>
-              <a:t>Abra o PDF original e localize titular, instalação, classe, ligação, consumo, tributos, bandeira e total.</a:t>
-            </a:r>
-            <a:endParaRPr lang="en-US" sz="1500" dirty="0"/>
-          </a:p>
-          <a:p>
-            <a:pPr indent="0" marL="0">
-              <a:buNone/>
-            </a:pPr>
-            <a:r>
-              <a:rPr lang="en-US" sz="1500" b="1" dirty="0">
-                <a:solidFill>
-                  <a:srgbClr val="F7A23B"/>
-                </a:solidFill>
-                <a:latin typeface="Arial" pitchFamily="34" charset="0"/>
-                <a:ea typeface="Arial" pitchFamily="34" charset="-122"/>
-                <a:cs typeface="Arial" pitchFamily="34" charset="-120"/>
-              </a:rPr>
-              <a:t>3  </a:t>
-            </a:r>
-            <a:pPr indent="0" marL="0">
-              <a:buNone/>
-            </a:pPr>
-            <a:r>
-              <a:rPr lang="en-US" sz="1400" b="1" dirty="0">
-                <a:solidFill>
-                  <a:srgbClr val="1B3A6B"/>
-                </a:solidFill>
-                <a:latin typeface="Arial" pitchFamily="34" charset="0"/>
-                <a:ea typeface="Arial" pitchFamily="34" charset="-122"/>
-                <a:cs typeface="Arial" pitchFamily="34" charset="-120"/>
-              </a:rPr>
-              <a:t>O resumo técnico extraído</a:t>
-            </a:r>
-            <a:endParaRPr lang="en-US" sz="1500" dirty="0"/>
-          </a:p>
-          <a:p>
-            <a:pPr indent="0" marL="0">
-              <a:spcAft>
-                <a:spcPts val="800"/>
-              </a:spcAft>
-              <a:buNone/>
-            </a:pPr>
-            <a:r>
-              <a:rPr lang="en-US" sz="1100" dirty="0">
-                <a:solidFill>
-                  <a:srgbClr val="1F2937"/>
-                </a:solidFill>
-                <a:latin typeface="Arial" pitchFamily="34" charset="0"/>
-                <a:ea typeface="Arial" pitchFamily="34" charset="-122"/>
-                <a:cs typeface="Arial" pitchFamily="34" charset="-120"/>
-              </a:rPr>
-              <a:t>Compare com o Resumo Técnico extraído automaticamente: os campos devem bater. Veja o status da extração.</a:t>
-            </a:r>
-            <a:endParaRPr lang="en-US" sz="1500" dirty="0"/>
-          </a:p>
-          <a:p>
-            <a:pPr indent="0" marL="0">
-              <a:buNone/>
-            </a:pPr>
-            <a:r>
-              <a:rPr lang="en-US" sz="1500" b="1" dirty="0">
-                <a:solidFill>
-                  <a:srgbClr val="F7A23B"/>
-                </a:solidFill>
-                <a:latin typeface="Arial" pitchFamily="34" charset="0"/>
-                <a:ea typeface="Arial" pitchFamily="34" charset="-122"/>
-                <a:cs typeface="Arial" pitchFamily="34" charset="-120"/>
-              </a:rPr>
-              <a:t>4  </a:t>
-            </a:r>
-            <a:pPr indent="0" marL="0">
-              <a:buNone/>
-            </a:pPr>
-            <a:r>
-              <a:rPr lang="en-US" sz="1400" b="1" dirty="0">
-                <a:solidFill>
-                  <a:srgbClr val="1B3A6B"/>
-                </a:solidFill>
-                <a:latin typeface="Arial" pitchFamily="34" charset="0"/>
-                <a:ea typeface="Arial" pitchFamily="34" charset="-122"/>
-                <a:cs typeface="Arial" pitchFamily="34" charset="-120"/>
-              </a:rPr>
-              <a:t>Primeiro contato com energia injetada</a:t>
-            </a:r>
-            <a:endParaRPr lang="en-US" sz="1500" dirty="0"/>
-          </a:p>
-          <a:p>
-            <a:pPr indent="0" marL="0">
-              <a:spcAft>
-                <a:spcPts val="800"/>
-              </a:spcAft>
-              <a:buNone/>
-            </a:pPr>
-            <a:r>
-              <a:rPr lang="en-US" sz="1100" dirty="0">
-                <a:solidFill>
-                  <a:srgbClr val="1F2937"/>
-                </a:solidFill>
-                <a:latin typeface="Arial" pitchFamily="34" charset="0"/>
-                <a:ea typeface="Arial" pitchFamily="34" charset="-122"/>
-                <a:cs typeface="Arial" pitchFamily="34" charset="-120"/>
-              </a:rPr>
-              <a:t>Localize a seção Energia Injetada e Consumo Injetado: são os créditos da geração distribuída, base da cobrança.</a:t>
-            </a:r>
-            <a:endParaRPr lang="en-US" sz="1500" dirty="0"/>
+              <a:t>Tarifa com impostos aproximada (valor ÷ kWh)</a:t>
+            </a:r>
+            <a:endParaRPr lang="en-US" sz="1800" dirty="0"/>
           </a:p>
         </p:txBody>
       </p:sp>
@@ -28769,7 +28507,7 @@
                 <a:ea typeface="Arial" pitchFamily="34" charset="-122"/>
                 <a:cs typeface="Arial" pitchFamily="34" charset="-120"/>
               </a:rPr>
-              <a:t>M1 · Teste rápido</a:t>
+              <a:t>M1 · Aula 8</a:t>
             </a:r>
             <a:endParaRPr lang="en-US" sz="900" dirty="0"/>
           </a:p>
@@ -28828,7 +28566,7 @@
                 <a:ea typeface="Arial" pitchFamily="34" charset="-122"/>
                 <a:cs typeface="Arial" pitchFamily="34" charset="-120"/>
               </a:rPr>
-              <a:t>QUESTÕES 1–2 DE 8</a:t>
+              <a:t>AULA 8 · LENDO UMA FATURA DE CONCESSIONÁRIA NA PLATAFORMA</a:t>
             </a:r>
             <a:endParaRPr lang="en-US" sz="1000" dirty="0"/>
           </a:p>
@@ -28869,7 +28607,7 @@
                 <a:ea typeface="Arial" pitchFamily="34" charset="-122"/>
                 <a:cs typeface="Arial" pitchFamily="34" charset="-120"/>
               </a:rPr>
-              <a:t>Teste rápido</a:t>
+              <a:t>Passo a passo na plataforma</a:t>
             </a:r>
             <a:endParaRPr lang="en-US" sz="2600" dirty="0"/>
           </a:p>
@@ -28883,133 +28621,66 @@
         </p:nvSpPr>
         <p:spPr>
           <a:xfrm>
-            <a:off x="548640" y="1325880"/>
-            <a:ext cx="502920" cy="502920"/>
-          </a:xfrm>
-          <a:prstGeom prst="ellipse">
-            <a:avLst/>
-          </a:prstGeom>
-          <a:solidFill>
-            <a:srgbClr val="1B3A6B"/>
-          </a:solidFill>
-          <a:ln/>
-        </p:spPr>
-      </p:sp>
-      <p:sp>
-        <p:nvSpPr>
-          <p:cNvPr id="10" name="Text 7"/>
-          <p:cNvSpPr/>
-          <p:nvPr/>
-        </p:nvSpPr>
-        <p:spPr>
-          <a:xfrm>
-            <a:off x="548640" y="1325880"/>
-            <a:ext cx="502920" cy="502920"/>
-          </a:xfrm>
-          <a:prstGeom prst="rect">
-            <a:avLst/>
-          </a:prstGeom>
-          <a:noFill/>
-          <a:ln/>
-        </p:spPr>
-        <p:txBody>
-          <a:bodyPr wrap="square" rtlCol="0" anchor="ctr"/>
-          <a:lstStyle/>
-          <a:p>
-            <a:pPr algn="ctr" indent="0" marL="0">
-              <a:buNone/>
-            </a:pPr>
-            <a:r>
-              <a:rPr lang="en-US" sz="1600" b="1" dirty="0">
-                <a:solidFill>
-                  <a:srgbClr val="FFFFFF"/>
-                </a:solidFill>
-                <a:latin typeface="Arial" pitchFamily="34" charset="0"/>
-                <a:ea typeface="Arial" pitchFamily="34" charset="-122"/>
-                <a:cs typeface="Arial" pitchFamily="34" charset="-120"/>
-              </a:rPr>
-              <a:t>1</a:t>
-            </a:r>
-            <a:endParaRPr lang="en-US" sz="1600" dirty="0"/>
-          </a:p>
-        </p:txBody>
-      </p:sp>
-      <p:sp>
-        <p:nvSpPr>
-          <p:cNvPr id="11" name="Text 8"/>
-          <p:cNvSpPr/>
-          <p:nvPr/>
-        </p:nvSpPr>
-        <p:spPr>
-          <a:xfrm>
-            <a:off x="1234440" y="1280160"/>
-            <a:ext cx="10424160" cy="640080"/>
-          </a:xfrm>
-          <a:prstGeom prst="rect">
-            <a:avLst/>
-          </a:prstGeom>
-          <a:noFill/>
-          <a:ln/>
-        </p:spPr>
-        <p:txBody>
-          <a:bodyPr wrap="square" rtlCol="0" anchor="ctr"/>
-          <a:lstStyle/>
-          <a:p>
-            <a:pPr indent="0" marL="0">
-              <a:buNone/>
-            </a:pPr>
-            <a:r>
-              <a:rPr lang="en-US" sz="1800" b="1" dirty="0">
-                <a:solidFill>
-                  <a:srgbClr val="1B3A6B"/>
-                </a:solidFill>
-                <a:latin typeface="Arial" pitchFamily="34" charset="0"/>
-                <a:ea typeface="Arial" pitchFamily="34" charset="-122"/>
-                <a:cs typeface="Arial" pitchFamily="34" charset="-120"/>
-              </a:rPr>
-              <a:t>kWh mede:</a:t>
-            </a:r>
-            <a:endParaRPr lang="en-US" sz="1800" dirty="0"/>
-          </a:p>
-        </p:txBody>
-      </p:sp>
-      <p:sp>
-        <p:nvSpPr>
-          <p:cNvPr id="12" name="Shape 9"/>
-          <p:cNvSpPr/>
-          <p:nvPr/>
-        </p:nvSpPr>
-        <p:spPr>
-          <a:xfrm>
-            <a:off x="548640" y="2057400"/>
-            <a:ext cx="2601468" cy="1463040"/>
+            <a:off x="420624" y="1289304"/>
+            <a:ext cx="7114032" cy="4033647"/>
           </a:xfrm>
           <a:prstGeom prst="roundRect">
             <a:avLst>
-              <a:gd name="adj" fmla="val 5000"/>
+              <a:gd name="adj" fmla="val 1360"/>
             </a:avLst>
           </a:prstGeom>
           <a:solidFill>
             <a:srgbClr val="FFFFFF"/>
           </a:solidFill>
-          <a:ln w="9525">
+          <a:ln w="12700">
             <a:solidFill>
               <a:srgbClr val="D8E0EC"/>
             </a:solidFill>
             <a:prstDash val="solid"/>
           </a:ln>
-        </p:spPr>
-      </p:sp>
-      <p:sp>
-        <p:nvSpPr>
-          <p:cNvPr id="13" name="Text 10"/>
-          <p:cNvSpPr/>
-          <p:nvPr/>
-        </p:nvSpPr>
-        <p:spPr>
-          <a:xfrm>
-            <a:off x="685800" y="2148840"/>
-            <a:ext cx="365760" cy="365760"/>
+          <a:effectLst>
+            <a:outerShdw sx="100000" sy="100000" kx="0" ky="0" algn="bl" rotWithShape="0" blurRad="76200" dist="25400" dir="5400000">
+              <a:srgbClr val="000000">
+                <a:alpha val="15000"/>
+              </a:srgbClr>
+            </a:outerShdw>
+          </a:effectLst>
+        </p:spPr>
+      </p:sp>
+      <p:pic>
+        <p:nvPicPr>
+          <p:cNvPr id="10" name="Image 1" descr="/www/wwwroot/rexar/gdsolar/docs/curso/slides/telas/fatura.jpg">    </p:cNvPr>
+          <p:cNvPicPr>
+            <a:picLocks noChangeAspect="1"/>
+          </p:cNvPicPr>
+          <p:nvPr/>
+        </p:nvPicPr>
+        <p:blipFill>
+          <a:blip r:embed="rId2"/>
+          <a:stretch>
+            <a:fillRect/>
+          </a:stretch>
+        </p:blipFill>
+        <p:spPr>
+          <a:xfrm>
+            <a:off x="457200" y="1325880"/>
+            <a:ext cx="7040880" cy="3960495"/>
+          </a:xfrm>
+          <a:prstGeom prst="rect">
+            <a:avLst/>
+          </a:prstGeom>
+        </p:spPr>
+      </p:pic>
+      <p:sp>
+        <p:nvSpPr>
+          <p:cNvPr id="11" name="Text 7"/>
+          <p:cNvSpPr/>
+          <p:nvPr/>
+        </p:nvSpPr>
+        <p:spPr>
+          <a:xfrm>
+            <a:off x="457200" y="5332095"/>
+            <a:ext cx="7040880" cy="320040"/>
           </a:xfrm>
           <a:prstGeom prst="rect">
             <a:avLst/>
@@ -29021,50 +28692,137 @@
           <a:bodyPr wrap="square" rtlCol="0" anchor="ctr"/>
           <a:lstStyle/>
           <a:p>
+            <a:pPr algn="ctr" indent="0" marL="0">
+              <a:buNone/>
+            </a:pPr>
+            <a:r>
+              <a:rPr lang="en-US" sz="1100" i="1" dirty="0">
+                <a:solidFill>
+                  <a:srgbClr val="64748B"/>
+                </a:solidFill>
+                <a:latin typeface="Arial" pitchFamily="34" charset="0"/>
+                <a:ea typeface="Arial" pitchFamily="34" charset="-122"/>
+                <a:cs typeface="Arial" pitchFamily="34" charset="-120"/>
+              </a:rPr>
+              <a:t>Fatura de concessionária</a:t>
+            </a:r>
+            <a:endParaRPr lang="en-US" sz="1100" dirty="0"/>
+          </a:p>
+        </p:txBody>
+      </p:sp>
+      <p:sp>
+        <p:nvSpPr>
+          <p:cNvPr id="12" name="Text 8"/>
+          <p:cNvSpPr/>
+          <p:nvPr/>
+        </p:nvSpPr>
+        <p:spPr>
+          <a:xfrm>
+            <a:off x="7818120" y="1325880"/>
+            <a:ext cx="3977640" cy="4937760"/>
+          </a:xfrm>
+          <a:prstGeom prst="rect">
+            <a:avLst/>
+          </a:prstGeom>
+          <a:noFill/>
+          <a:ln/>
+        </p:spPr>
+        <p:txBody>
+          <a:bodyPr wrap="square" rtlCol="0" anchor="t">
+            <a:normAutofit/>
+          </a:bodyPr>
+          <a:lstStyle/>
+          <a:p>
             <a:pPr indent="0" marL="0">
               <a:buNone/>
             </a:pPr>
             <a:r>
+              <a:rPr lang="en-US" sz="1500" b="1" dirty="0">
+                <a:solidFill>
+                  <a:srgbClr val="F7A23B"/>
+                </a:solidFill>
+                <a:latin typeface="Arial" pitchFamily="34" charset="0"/>
+                <a:ea typeface="Arial" pitchFamily="34" charset="-122"/>
+                <a:cs typeface="Arial" pitchFamily="34" charset="-120"/>
+              </a:rPr>
+              <a:t>1  </a:t>
+            </a:r>
+            <a:pPr indent="0" marL="0">
+              <a:buNone/>
+            </a:pPr>
+            <a:r>
               <a:rPr lang="en-US" sz="1400" b="1" dirty="0">
                 <a:solidFill>
+                  <a:srgbClr val="1B3A6B"/>
+                </a:solidFill>
+                <a:latin typeface="Arial" pitchFamily="34" charset="0"/>
+                <a:ea typeface="Arial" pitchFamily="34" charset="-122"/>
+                <a:cs typeface="Arial" pitchFamily="34" charset="-120"/>
+              </a:rPr>
+              <a:t>Encontrando a fatura</a:t>
+            </a:r>
+            <a:endParaRPr lang="en-US" sz="1500" dirty="0"/>
+          </a:p>
+          <a:p>
+            <a:pPr indent="0" marL="0">
+              <a:spcAft>
+                <a:spcPts val="800"/>
+              </a:spcAft>
+              <a:buNone/>
+            </a:pPr>
+            <a:r>
+              <a:rPr lang="en-US" sz="1100" dirty="0">
+                <a:solidFill>
+                  <a:srgbClr val="1F2937"/>
+                </a:solidFill>
+                <a:latin typeface="Arial" pitchFamily="34" charset="0"/>
+                <a:ea typeface="Arial" pitchFamily="34" charset="-122"/>
+                <a:cs typeface="Arial" pitchFamily="34" charset="-120"/>
+              </a:rPr>
+              <a:t>Em Cliente Consumidor, Clientes, abra a Padaria e a fatura mais recente. Atalho: Financeiro, Faturas de Concessionárias.</a:t>
+            </a:r>
+            <a:endParaRPr lang="en-US" sz="1500" dirty="0"/>
+          </a:p>
+          <a:p>
+            <a:pPr indent="0" marL="0">
+              <a:buNone/>
+            </a:pPr>
+            <a:r>
+              <a:rPr lang="en-US" sz="1500" b="1" dirty="0">
+                <a:solidFill>
                   <a:srgbClr val="F7A23B"/>
                 </a:solidFill>
                 <a:latin typeface="Arial" pitchFamily="34" charset="0"/>
                 <a:ea typeface="Arial" pitchFamily="34" charset="-122"/>
                 <a:cs typeface="Arial" pitchFamily="34" charset="-120"/>
               </a:rPr>
-              <a:t>A</a:t>
-            </a:r>
-            <a:endParaRPr lang="en-US" sz="1400" dirty="0"/>
-          </a:p>
-        </p:txBody>
-      </p:sp>
-      <p:sp>
-        <p:nvSpPr>
-          <p:cNvPr id="14" name="Text 11"/>
-          <p:cNvSpPr/>
-          <p:nvPr/>
-        </p:nvSpPr>
-        <p:spPr>
-          <a:xfrm>
-            <a:off x="685800" y="2514600"/>
-            <a:ext cx="2327148" cy="914400"/>
-          </a:xfrm>
-          <a:prstGeom prst="rect">
-            <a:avLst/>
-          </a:prstGeom>
-          <a:noFill/>
-          <a:ln/>
-        </p:spPr>
-        <p:txBody>
-          <a:bodyPr wrap="square" rtlCol="0" anchor="t"/>
-          <a:lstStyle/>
-          <a:p>
+              <a:t>2  </a:t>
+            </a:r>
             <a:pPr indent="0" marL="0">
               <a:buNone/>
             </a:pPr>
             <a:r>
-              <a:rPr lang="en-US" sz="1500" dirty="0">
+              <a:rPr lang="en-US" sz="1400" b="1" dirty="0">
+                <a:solidFill>
+                  <a:srgbClr val="1B3A6B"/>
+                </a:solidFill>
+                <a:latin typeface="Arial" pitchFamily="34" charset="0"/>
+                <a:ea typeface="Arial" pitchFamily="34" charset="-122"/>
+                <a:cs typeface="Arial" pitchFamily="34" charset="-120"/>
+              </a:rPr>
+              <a:t>O PDF original</a:t>
+            </a:r>
+            <a:endParaRPr lang="en-US" sz="1500" dirty="0"/>
+          </a:p>
+          <a:p>
+            <a:pPr indent="0" marL="0">
+              <a:spcAft>
+                <a:spcPts val="800"/>
+              </a:spcAft>
+              <a:buNone/>
+            </a:pPr>
+            <a:r>
+              <a:rPr lang="en-US" sz="1100" dirty="0">
                 <a:solidFill>
                   <a:srgbClr val="1F2937"/>
                 </a:solidFill>
@@ -29072,104 +28830,101 @@
                 <a:ea typeface="Arial" pitchFamily="34" charset="-122"/>
                 <a:cs typeface="Arial" pitchFamily="34" charset="-120"/>
               </a:rPr>
-              <a:t>potência</a:t>
+              <a:t>Abra o PDF original e localize titular, instalação, classe, ligação, consumo, tributos, bandeira e total.</a:t>
             </a:r>
             <a:endParaRPr lang="en-US" sz="1500" dirty="0"/>
           </a:p>
-        </p:txBody>
-      </p:sp>
-      <p:sp>
-        <p:nvSpPr>
-          <p:cNvPr id="15" name="Shape 12"/>
-          <p:cNvSpPr/>
-          <p:nvPr/>
-        </p:nvSpPr>
-        <p:spPr>
-          <a:xfrm>
-            <a:off x="3378708" y="2057400"/>
-            <a:ext cx="2601468" cy="1463040"/>
-          </a:xfrm>
-          <a:prstGeom prst="roundRect">
-            <a:avLst>
-              <a:gd name="adj" fmla="val 5000"/>
-            </a:avLst>
-          </a:prstGeom>
-          <a:solidFill>
-            <a:srgbClr val="FFFFFF"/>
-          </a:solidFill>
-          <a:ln w="9525">
-            <a:solidFill>
-              <a:srgbClr val="D8E0EC"/>
-            </a:solidFill>
-            <a:prstDash val="solid"/>
-          </a:ln>
-        </p:spPr>
-      </p:sp>
-      <p:sp>
-        <p:nvSpPr>
-          <p:cNvPr id="16" name="Text 13"/>
-          <p:cNvSpPr/>
-          <p:nvPr/>
-        </p:nvSpPr>
-        <p:spPr>
-          <a:xfrm>
-            <a:off x="3515868" y="2148840"/>
-            <a:ext cx="365760" cy="365760"/>
-          </a:xfrm>
-          <a:prstGeom prst="rect">
-            <a:avLst/>
-          </a:prstGeom>
-          <a:noFill/>
-          <a:ln/>
-        </p:spPr>
-        <p:txBody>
-          <a:bodyPr wrap="square" rtlCol="0" anchor="ctr"/>
-          <a:lstStyle/>
           <a:p>
             <a:pPr indent="0" marL="0">
               <a:buNone/>
             </a:pPr>
             <a:r>
+              <a:rPr lang="en-US" sz="1500" b="1" dirty="0">
+                <a:solidFill>
+                  <a:srgbClr val="F7A23B"/>
+                </a:solidFill>
+                <a:latin typeface="Arial" pitchFamily="34" charset="0"/>
+                <a:ea typeface="Arial" pitchFamily="34" charset="-122"/>
+                <a:cs typeface="Arial" pitchFamily="34" charset="-120"/>
+              </a:rPr>
+              <a:t>3  </a:t>
+            </a:r>
+            <a:pPr indent="0" marL="0">
+              <a:buNone/>
+            </a:pPr>
+            <a:r>
               <a:rPr lang="en-US" sz="1400" b="1" dirty="0">
                 <a:solidFill>
+                  <a:srgbClr val="1B3A6B"/>
+                </a:solidFill>
+                <a:latin typeface="Arial" pitchFamily="34" charset="0"/>
+                <a:ea typeface="Arial" pitchFamily="34" charset="-122"/>
+                <a:cs typeface="Arial" pitchFamily="34" charset="-120"/>
+              </a:rPr>
+              <a:t>O resumo técnico extraído</a:t>
+            </a:r>
+            <a:endParaRPr lang="en-US" sz="1500" dirty="0"/>
+          </a:p>
+          <a:p>
+            <a:pPr indent="0" marL="0">
+              <a:spcAft>
+                <a:spcPts val="800"/>
+              </a:spcAft>
+              <a:buNone/>
+            </a:pPr>
+            <a:r>
+              <a:rPr lang="en-US" sz="1100" dirty="0">
+                <a:solidFill>
+                  <a:srgbClr val="1F2937"/>
+                </a:solidFill>
+                <a:latin typeface="Arial" pitchFamily="34" charset="0"/>
+                <a:ea typeface="Arial" pitchFamily="34" charset="-122"/>
+                <a:cs typeface="Arial" pitchFamily="34" charset="-120"/>
+              </a:rPr>
+              <a:t>Compare com o Resumo Técnico extraído automaticamente: os campos devem bater. Veja o status da extração.</a:t>
+            </a:r>
+            <a:endParaRPr lang="en-US" sz="1500" dirty="0"/>
+          </a:p>
+          <a:p>
+            <a:pPr indent="0" marL="0">
+              <a:buNone/>
+            </a:pPr>
+            <a:r>
+              <a:rPr lang="en-US" sz="1500" b="1" dirty="0">
+                <a:solidFill>
                   <a:srgbClr val="F7A23B"/>
                 </a:solidFill>
                 <a:latin typeface="Arial" pitchFamily="34" charset="0"/>
                 <a:ea typeface="Arial" pitchFamily="34" charset="-122"/>
                 <a:cs typeface="Arial" pitchFamily="34" charset="-120"/>
               </a:rPr>
-              <a:t>B</a:t>
-            </a:r>
-            <a:endParaRPr lang="en-US" sz="1400" dirty="0"/>
-          </a:p>
-        </p:txBody>
-      </p:sp>
-      <p:sp>
-        <p:nvSpPr>
-          <p:cNvPr id="17" name="Text 14"/>
-          <p:cNvSpPr/>
-          <p:nvPr/>
-        </p:nvSpPr>
-        <p:spPr>
-          <a:xfrm>
-            <a:off x="3515868" y="2514600"/>
-            <a:ext cx="2327148" cy="914400"/>
-          </a:xfrm>
-          <a:prstGeom prst="rect">
-            <a:avLst/>
-          </a:prstGeom>
-          <a:noFill/>
-          <a:ln/>
-        </p:spPr>
-        <p:txBody>
-          <a:bodyPr wrap="square" rtlCol="0" anchor="t"/>
-          <a:lstStyle/>
-          <a:p>
+              <a:t>4  </a:t>
+            </a:r>
             <a:pPr indent="0" marL="0">
               <a:buNone/>
             </a:pPr>
             <a:r>
-              <a:rPr lang="en-US" sz="1500" dirty="0">
+              <a:rPr lang="en-US" sz="1400" b="1" dirty="0">
+                <a:solidFill>
+                  <a:srgbClr val="1B3A6B"/>
+                </a:solidFill>
+                <a:latin typeface="Arial" pitchFamily="34" charset="0"/>
+                <a:ea typeface="Arial" pitchFamily="34" charset="-122"/>
+                <a:cs typeface="Arial" pitchFamily="34" charset="-120"/>
+              </a:rPr>
+              <a:t>Primeiro contato com energia injetada</a:t>
+            </a:r>
+            <a:endParaRPr lang="en-US" sz="1500" dirty="0"/>
+          </a:p>
+          <a:p>
+            <a:pPr indent="0" marL="0">
+              <a:spcAft>
+                <a:spcPts val="800"/>
+              </a:spcAft>
+              <a:buNone/>
+            </a:pPr>
+            <a:r>
+              <a:rPr lang="en-US" sz="1100" dirty="0">
                 <a:solidFill>
                   <a:srgbClr val="1F2937"/>
                 </a:solidFill>
@@ -29177,735 +28932,7 @@
                 <a:ea typeface="Arial" pitchFamily="34" charset="-122"/>
                 <a:cs typeface="Arial" pitchFamily="34" charset="-120"/>
               </a:rPr>
-              <a:t>energia</a:t>
-            </a:r>
-            <a:endParaRPr lang="en-US" sz="1500" dirty="0"/>
-          </a:p>
-        </p:txBody>
-      </p:sp>
-      <p:sp>
-        <p:nvSpPr>
-          <p:cNvPr id="18" name="Shape 15"/>
-          <p:cNvSpPr/>
-          <p:nvPr/>
-        </p:nvSpPr>
-        <p:spPr>
-          <a:xfrm>
-            <a:off x="6208776" y="2057400"/>
-            <a:ext cx="2601468" cy="1463040"/>
-          </a:xfrm>
-          <a:prstGeom prst="roundRect">
-            <a:avLst>
-              <a:gd name="adj" fmla="val 5000"/>
-            </a:avLst>
-          </a:prstGeom>
-          <a:solidFill>
-            <a:srgbClr val="FFFFFF"/>
-          </a:solidFill>
-          <a:ln w="9525">
-            <a:solidFill>
-              <a:srgbClr val="D8E0EC"/>
-            </a:solidFill>
-            <a:prstDash val="solid"/>
-          </a:ln>
-        </p:spPr>
-      </p:sp>
-      <p:sp>
-        <p:nvSpPr>
-          <p:cNvPr id="19" name="Text 16"/>
-          <p:cNvSpPr/>
-          <p:nvPr/>
-        </p:nvSpPr>
-        <p:spPr>
-          <a:xfrm>
-            <a:off x="6345936" y="2148840"/>
-            <a:ext cx="365760" cy="365760"/>
-          </a:xfrm>
-          <a:prstGeom prst="rect">
-            <a:avLst/>
-          </a:prstGeom>
-          <a:noFill/>
-          <a:ln/>
-        </p:spPr>
-        <p:txBody>
-          <a:bodyPr wrap="square" rtlCol="0" anchor="ctr"/>
-          <a:lstStyle/>
-          <a:p>
-            <a:pPr indent="0" marL="0">
-              <a:buNone/>
-            </a:pPr>
-            <a:r>
-              <a:rPr lang="en-US" sz="1400" b="1" dirty="0">
-                <a:solidFill>
-                  <a:srgbClr val="F7A23B"/>
-                </a:solidFill>
-                <a:latin typeface="Arial" pitchFamily="34" charset="0"/>
-                <a:ea typeface="Arial" pitchFamily="34" charset="-122"/>
-                <a:cs typeface="Arial" pitchFamily="34" charset="-120"/>
-              </a:rPr>
-              <a:t>C</a:t>
-            </a:r>
-            <a:endParaRPr lang="en-US" sz="1400" dirty="0"/>
-          </a:p>
-        </p:txBody>
-      </p:sp>
-      <p:sp>
-        <p:nvSpPr>
-          <p:cNvPr id="20" name="Text 17"/>
-          <p:cNvSpPr/>
-          <p:nvPr/>
-        </p:nvSpPr>
-        <p:spPr>
-          <a:xfrm>
-            <a:off x="6345936" y="2514600"/>
-            <a:ext cx="2327148" cy="914400"/>
-          </a:xfrm>
-          <a:prstGeom prst="rect">
-            <a:avLst/>
-          </a:prstGeom>
-          <a:noFill/>
-          <a:ln/>
-        </p:spPr>
-        <p:txBody>
-          <a:bodyPr wrap="square" rtlCol="0" anchor="t"/>
-          <a:lstStyle/>
-          <a:p>
-            <a:pPr indent="0" marL="0">
-              <a:buNone/>
-            </a:pPr>
-            <a:r>
-              <a:rPr lang="en-US" sz="1500" dirty="0">
-                <a:solidFill>
-                  <a:srgbClr val="1F2937"/>
-                </a:solidFill>
-                <a:latin typeface="Arial" pitchFamily="34" charset="0"/>
-                <a:ea typeface="Arial" pitchFamily="34" charset="-122"/>
-                <a:cs typeface="Arial" pitchFamily="34" charset="-120"/>
-              </a:rPr>
-              <a:t>tensão</a:t>
-            </a:r>
-            <a:endParaRPr lang="en-US" sz="1500" dirty="0"/>
-          </a:p>
-        </p:txBody>
-      </p:sp>
-      <p:sp>
-        <p:nvSpPr>
-          <p:cNvPr id="21" name="Shape 18"/>
-          <p:cNvSpPr/>
-          <p:nvPr/>
-        </p:nvSpPr>
-        <p:spPr>
-          <a:xfrm>
-            <a:off x="9038844" y="2057400"/>
-            <a:ext cx="2601468" cy="1463040"/>
-          </a:xfrm>
-          <a:prstGeom prst="roundRect">
-            <a:avLst>
-              <a:gd name="adj" fmla="val 5000"/>
-            </a:avLst>
-          </a:prstGeom>
-          <a:solidFill>
-            <a:srgbClr val="FFFFFF"/>
-          </a:solidFill>
-          <a:ln w="9525">
-            <a:solidFill>
-              <a:srgbClr val="D8E0EC"/>
-            </a:solidFill>
-            <a:prstDash val="solid"/>
-          </a:ln>
-        </p:spPr>
-      </p:sp>
-      <p:sp>
-        <p:nvSpPr>
-          <p:cNvPr id="22" name="Text 19"/>
-          <p:cNvSpPr/>
-          <p:nvPr/>
-        </p:nvSpPr>
-        <p:spPr>
-          <a:xfrm>
-            <a:off x="9176004" y="2148840"/>
-            <a:ext cx="365760" cy="365760"/>
-          </a:xfrm>
-          <a:prstGeom prst="rect">
-            <a:avLst/>
-          </a:prstGeom>
-          <a:noFill/>
-          <a:ln/>
-        </p:spPr>
-        <p:txBody>
-          <a:bodyPr wrap="square" rtlCol="0" anchor="ctr"/>
-          <a:lstStyle/>
-          <a:p>
-            <a:pPr indent="0" marL="0">
-              <a:buNone/>
-            </a:pPr>
-            <a:r>
-              <a:rPr lang="en-US" sz="1400" b="1" dirty="0">
-                <a:solidFill>
-                  <a:srgbClr val="F7A23B"/>
-                </a:solidFill>
-                <a:latin typeface="Arial" pitchFamily="34" charset="0"/>
-                <a:ea typeface="Arial" pitchFamily="34" charset="-122"/>
-                <a:cs typeface="Arial" pitchFamily="34" charset="-120"/>
-              </a:rPr>
-              <a:t>D</a:t>
-            </a:r>
-            <a:endParaRPr lang="en-US" sz="1400" dirty="0"/>
-          </a:p>
-        </p:txBody>
-      </p:sp>
-      <p:sp>
-        <p:nvSpPr>
-          <p:cNvPr id="23" name="Text 20"/>
-          <p:cNvSpPr/>
-          <p:nvPr/>
-        </p:nvSpPr>
-        <p:spPr>
-          <a:xfrm>
-            <a:off x="9176004" y="2514600"/>
-            <a:ext cx="2327148" cy="914400"/>
-          </a:xfrm>
-          <a:prstGeom prst="rect">
-            <a:avLst/>
-          </a:prstGeom>
-          <a:noFill/>
-          <a:ln/>
-        </p:spPr>
-        <p:txBody>
-          <a:bodyPr wrap="square" rtlCol="0" anchor="t"/>
-          <a:lstStyle/>
-          <a:p>
-            <a:pPr indent="0" marL="0">
-              <a:buNone/>
-            </a:pPr>
-            <a:r>
-              <a:rPr lang="en-US" sz="1500" dirty="0">
-                <a:solidFill>
-                  <a:srgbClr val="1F2937"/>
-                </a:solidFill>
-                <a:latin typeface="Arial" pitchFamily="34" charset="0"/>
-                <a:ea typeface="Arial" pitchFamily="34" charset="-122"/>
-                <a:cs typeface="Arial" pitchFamily="34" charset="-120"/>
-              </a:rPr>
-              <a:t>corrente</a:t>
-            </a:r>
-            <a:endParaRPr lang="en-US" sz="1500" dirty="0"/>
-          </a:p>
-        </p:txBody>
-      </p:sp>
-      <p:sp>
-        <p:nvSpPr>
-          <p:cNvPr id="24" name="Shape 21"/>
-          <p:cNvSpPr/>
-          <p:nvPr/>
-        </p:nvSpPr>
-        <p:spPr>
-          <a:xfrm>
-            <a:off x="548640" y="3840480"/>
-            <a:ext cx="502920" cy="502920"/>
-          </a:xfrm>
-          <a:prstGeom prst="ellipse">
-            <a:avLst/>
-          </a:prstGeom>
-          <a:solidFill>
-            <a:srgbClr val="1B3A6B"/>
-          </a:solidFill>
-          <a:ln/>
-        </p:spPr>
-      </p:sp>
-      <p:sp>
-        <p:nvSpPr>
-          <p:cNvPr id="25" name="Text 22"/>
-          <p:cNvSpPr/>
-          <p:nvPr/>
-        </p:nvSpPr>
-        <p:spPr>
-          <a:xfrm>
-            <a:off x="548640" y="3840480"/>
-            <a:ext cx="502920" cy="502920"/>
-          </a:xfrm>
-          <a:prstGeom prst="rect">
-            <a:avLst/>
-          </a:prstGeom>
-          <a:noFill/>
-          <a:ln/>
-        </p:spPr>
-        <p:txBody>
-          <a:bodyPr wrap="square" rtlCol="0" anchor="ctr"/>
-          <a:lstStyle/>
-          <a:p>
-            <a:pPr algn="ctr" indent="0" marL="0">
-              <a:buNone/>
-            </a:pPr>
-            <a:r>
-              <a:rPr lang="en-US" sz="1600" b="1" dirty="0">
-                <a:solidFill>
-                  <a:srgbClr val="FFFFFF"/>
-                </a:solidFill>
-                <a:latin typeface="Arial" pitchFamily="34" charset="0"/>
-                <a:ea typeface="Arial" pitchFamily="34" charset="-122"/>
-                <a:cs typeface="Arial" pitchFamily="34" charset="-120"/>
-              </a:rPr>
-              <a:t>2</a:t>
-            </a:r>
-            <a:endParaRPr lang="en-US" sz="1600" dirty="0"/>
-          </a:p>
-        </p:txBody>
-      </p:sp>
-      <p:sp>
-        <p:nvSpPr>
-          <p:cNvPr id="26" name="Text 23"/>
-          <p:cNvSpPr/>
-          <p:nvPr/>
-        </p:nvSpPr>
-        <p:spPr>
-          <a:xfrm>
-            <a:off x="1234440" y="3794760"/>
-            <a:ext cx="10424160" cy="640080"/>
-          </a:xfrm>
-          <a:prstGeom prst="rect">
-            <a:avLst/>
-          </a:prstGeom>
-          <a:noFill/>
-          <a:ln/>
-        </p:spPr>
-        <p:txBody>
-          <a:bodyPr wrap="square" rtlCol="0" anchor="ctr"/>
-          <a:lstStyle/>
-          <a:p>
-            <a:pPr indent="0" marL="0">
-              <a:buNone/>
-            </a:pPr>
-            <a:r>
-              <a:rPr lang="en-US" sz="1800" b="1" dirty="0">
-                <a:solidFill>
-                  <a:srgbClr val="1B3A6B"/>
-                </a:solidFill>
-                <a:latin typeface="Arial" pitchFamily="34" charset="0"/>
-                <a:ea typeface="Arial" pitchFamily="34" charset="-122"/>
-                <a:cs typeface="Arial" pitchFamily="34" charset="-120"/>
-              </a:rPr>
-              <a:t>Um equipamento de 2 kW ligado por 3 horas consome:</a:t>
-            </a:r>
-            <a:endParaRPr lang="en-US" sz="1800" dirty="0"/>
-          </a:p>
-        </p:txBody>
-      </p:sp>
-      <p:sp>
-        <p:nvSpPr>
-          <p:cNvPr id="27" name="Shape 24"/>
-          <p:cNvSpPr/>
-          <p:nvPr/>
-        </p:nvSpPr>
-        <p:spPr>
-          <a:xfrm>
-            <a:off x="548640" y="4572000"/>
-            <a:ext cx="2601468" cy="1463040"/>
-          </a:xfrm>
-          <a:prstGeom prst="roundRect">
-            <a:avLst>
-              <a:gd name="adj" fmla="val 5000"/>
-            </a:avLst>
-          </a:prstGeom>
-          <a:solidFill>
-            <a:srgbClr val="FFFFFF"/>
-          </a:solidFill>
-          <a:ln w="9525">
-            <a:solidFill>
-              <a:srgbClr val="D8E0EC"/>
-            </a:solidFill>
-            <a:prstDash val="solid"/>
-          </a:ln>
-        </p:spPr>
-      </p:sp>
-      <p:sp>
-        <p:nvSpPr>
-          <p:cNvPr id="28" name="Text 25"/>
-          <p:cNvSpPr/>
-          <p:nvPr/>
-        </p:nvSpPr>
-        <p:spPr>
-          <a:xfrm>
-            <a:off x="685800" y="4663440"/>
-            <a:ext cx="365760" cy="365760"/>
-          </a:xfrm>
-          <a:prstGeom prst="rect">
-            <a:avLst/>
-          </a:prstGeom>
-          <a:noFill/>
-          <a:ln/>
-        </p:spPr>
-        <p:txBody>
-          <a:bodyPr wrap="square" rtlCol="0" anchor="ctr"/>
-          <a:lstStyle/>
-          <a:p>
-            <a:pPr indent="0" marL="0">
-              <a:buNone/>
-            </a:pPr>
-            <a:r>
-              <a:rPr lang="en-US" sz="1400" b="1" dirty="0">
-                <a:solidFill>
-                  <a:srgbClr val="F7A23B"/>
-                </a:solidFill>
-                <a:latin typeface="Arial" pitchFamily="34" charset="0"/>
-                <a:ea typeface="Arial" pitchFamily="34" charset="-122"/>
-                <a:cs typeface="Arial" pitchFamily="34" charset="-120"/>
-              </a:rPr>
-              <a:t>A</a:t>
-            </a:r>
-            <a:endParaRPr lang="en-US" sz="1400" dirty="0"/>
-          </a:p>
-        </p:txBody>
-      </p:sp>
-      <p:sp>
-        <p:nvSpPr>
-          <p:cNvPr id="29" name="Text 26"/>
-          <p:cNvSpPr/>
-          <p:nvPr/>
-        </p:nvSpPr>
-        <p:spPr>
-          <a:xfrm>
-            <a:off x="685800" y="5029200"/>
-            <a:ext cx="2327148" cy="914400"/>
-          </a:xfrm>
-          <a:prstGeom prst="rect">
-            <a:avLst/>
-          </a:prstGeom>
-          <a:noFill/>
-          <a:ln/>
-        </p:spPr>
-        <p:txBody>
-          <a:bodyPr wrap="square" rtlCol="0" anchor="t"/>
-          <a:lstStyle/>
-          <a:p>
-            <a:pPr indent="0" marL="0">
-              <a:buNone/>
-            </a:pPr>
-            <a:r>
-              <a:rPr lang="en-US" sz="1500" dirty="0">
-                <a:solidFill>
-                  <a:srgbClr val="1F2937"/>
-                </a:solidFill>
-                <a:latin typeface="Arial" pitchFamily="34" charset="0"/>
-                <a:ea typeface="Arial" pitchFamily="34" charset="-122"/>
-                <a:cs typeface="Arial" pitchFamily="34" charset="-120"/>
-              </a:rPr>
-              <a:t>2 kWh</a:t>
-            </a:r>
-            <a:endParaRPr lang="en-US" sz="1500" dirty="0"/>
-          </a:p>
-        </p:txBody>
-      </p:sp>
-      <p:sp>
-        <p:nvSpPr>
-          <p:cNvPr id="30" name="Shape 27"/>
-          <p:cNvSpPr/>
-          <p:nvPr/>
-        </p:nvSpPr>
-        <p:spPr>
-          <a:xfrm>
-            <a:off x="3378708" y="4572000"/>
-            <a:ext cx="2601468" cy="1463040"/>
-          </a:xfrm>
-          <a:prstGeom prst="roundRect">
-            <a:avLst>
-              <a:gd name="adj" fmla="val 5000"/>
-            </a:avLst>
-          </a:prstGeom>
-          <a:solidFill>
-            <a:srgbClr val="FFFFFF"/>
-          </a:solidFill>
-          <a:ln w="9525">
-            <a:solidFill>
-              <a:srgbClr val="D8E0EC"/>
-            </a:solidFill>
-            <a:prstDash val="solid"/>
-          </a:ln>
-        </p:spPr>
-      </p:sp>
-      <p:sp>
-        <p:nvSpPr>
-          <p:cNvPr id="31" name="Text 28"/>
-          <p:cNvSpPr/>
-          <p:nvPr/>
-        </p:nvSpPr>
-        <p:spPr>
-          <a:xfrm>
-            <a:off x="3515868" y="4663440"/>
-            <a:ext cx="365760" cy="365760"/>
-          </a:xfrm>
-          <a:prstGeom prst="rect">
-            <a:avLst/>
-          </a:prstGeom>
-          <a:noFill/>
-          <a:ln/>
-        </p:spPr>
-        <p:txBody>
-          <a:bodyPr wrap="square" rtlCol="0" anchor="ctr"/>
-          <a:lstStyle/>
-          <a:p>
-            <a:pPr indent="0" marL="0">
-              <a:buNone/>
-            </a:pPr>
-            <a:r>
-              <a:rPr lang="en-US" sz="1400" b="1" dirty="0">
-                <a:solidFill>
-                  <a:srgbClr val="F7A23B"/>
-                </a:solidFill>
-                <a:latin typeface="Arial" pitchFamily="34" charset="0"/>
-                <a:ea typeface="Arial" pitchFamily="34" charset="-122"/>
-                <a:cs typeface="Arial" pitchFamily="34" charset="-120"/>
-              </a:rPr>
-              <a:t>B</a:t>
-            </a:r>
-            <a:endParaRPr lang="en-US" sz="1400" dirty="0"/>
-          </a:p>
-        </p:txBody>
-      </p:sp>
-      <p:sp>
-        <p:nvSpPr>
-          <p:cNvPr id="32" name="Text 29"/>
-          <p:cNvSpPr/>
-          <p:nvPr/>
-        </p:nvSpPr>
-        <p:spPr>
-          <a:xfrm>
-            <a:off x="3515868" y="5029200"/>
-            <a:ext cx="2327148" cy="914400"/>
-          </a:xfrm>
-          <a:prstGeom prst="rect">
-            <a:avLst/>
-          </a:prstGeom>
-          <a:noFill/>
-          <a:ln/>
-        </p:spPr>
-        <p:txBody>
-          <a:bodyPr wrap="square" rtlCol="0" anchor="t"/>
-          <a:lstStyle/>
-          <a:p>
-            <a:pPr indent="0" marL="0">
-              <a:buNone/>
-            </a:pPr>
-            <a:r>
-              <a:rPr lang="en-US" sz="1500" dirty="0">
-                <a:solidFill>
-                  <a:srgbClr val="1F2937"/>
-                </a:solidFill>
-                <a:latin typeface="Arial" pitchFamily="34" charset="0"/>
-                <a:ea typeface="Arial" pitchFamily="34" charset="-122"/>
-                <a:cs typeface="Arial" pitchFamily="34" charset="-120"/>
-              </a:rPr>
-              <a:t>5 kWh</a:t>
-            </a:r>
-            <a:endParaRPr lang="en-US" sz="1500" dirty="0"/>
-          </a:p>
-        </p:txBody>
-      </p:sp>
-      <p:sp>
-        <p:nvSpPr>
-          <p:cNvPr id="33" name="Shape 30"/>
-          <p:cNvSpPr/>
-          <p:nvPr/>
-        </p:nvSpPr>
-        <p:spPr>
-          <a:xfrm>
-            <a:off x="6208776" y="4572000"/>
-            <a:ext cx="2601468" cy="1463040"/>
-          </a:xfrm>
-          <a:prstGeom prst="roundRect">
-            <a:avLst>
-              <a:gd name="adj" fmla="val 5000"/>
-            </a:avLst>
-          </a:prstGeom>
-          <a:solidFill>
-            <a:srgbClr val="FFFFFF"/>
-          </a:solidFill>
-          <a:ln w="9525">
-            <a:solidFill>
-              <a:srgbClr val="D8E0EC"/>
-            </a:solidFill>
-            <a:prstDash val="solid"/>
-          </a:ln>
-        </p:spPr>
-      </p:sp>
-      <p:sp>
-        <p:nvSpPr>
-          <p:cNvPr id="34" name="Text 31"/>
-          <p:cNvSpPr/>
-          <p:nvPr/>
-        </p:nvSpPr>
-        <p:spPr>
-          <a:xfrm>
-            <a:off x="6345936" y="4663440"/>
-            <a:ext cx="365760" cy="365760"/>
-          </a:xfrm>
-          <a:prstGeom prst="rect">
-            <a:avLst/>
-          </a:prstGeom>
-          <a:noFill/>
-          <a:ln/>
-        </p:spPr>
-        <p:txBody>
-          <a:bodyPr wrap="square" rtlCol="0" anchor="ctr"/>
-          <a:lstStyle/>
-          <a:p>
-            <a:pPr indent="0" marL="0">
-              <a:buNone/>
-            </a:pPr>
-            <a:r>
-              <a:rPr lang="en-US" sz="1400" b="1" dirty="0">
-                <a:solidFill>
-                  <a:srgbClr val="F7A23B"/>
-                </a:solidFill>
-                <a:latin typeface="Arial" pitchFamily="34" charset="0"/>
-                <a:ea typeface="Arial" pitchFamily="34" charset="-122"/>
-                <a:cs typeface="Arial" pitchFamily="34" charset="-120"/>
-              </a:rPr>
-              <a:t>C</a:t>
-            </a:r>
-            <a:endParaRPr lang="en-US" sz="1400" dirty="0"/>
-          </a:p>
-        </p:txBody>
-      </p:sp>
-      <p:sp>
-        <p:nvSpPr>
-          <p:cNvPr id="35" name="Text 32"/>
-          <p:cNvSpPr/>
-          <p:nvPr/>
-        </p:nvSpPr>
-        <p:spPr>
-          <a:xfrm>
-            <a:off x="6345936" y="5029200"/>
-            <a:ext cx="2327148" cy="914400"/>
-          </a:xfrm>
-          <a:prstGeom prst="rect">
-            <a:avLst/>
-          </a:prstGeom>
-          <a:noFill/>
-          <a:ln/>
-        </p:spPr>
-        <p:txBody>
-          <a:bodyPr wrap="square" rtlCol="0" anchor="t"/>
-          <a:lstStyle/>
-          <a:p>
-            <a:pPr indent="0" marL="0">
-              <a:buNone/>
-            </a:pPr>
-            <a:r>
-              <a:rPr lang="en-US" sz="1500" dirty="0">
-                <a:solidFill>
-                  <a:srgbClr val="1F2937"/>
-                </a:solidFill>
-                <a:latin typeface="Arial" pitchFamily="34" charset="0"/>
-                <a:ea typeface="Arial" pitchFamily="34" charset="-122"/>
-                <a:cs typeface="Arial" pitchFamily="34" charset="-120"/>
-              </a:rPr>
-              <a:t>6 kWh</a:t>
-            </a:r>
-            <a:endParaRPr lang="en-US" sz="1500" dirty="0"/>
-          </a:p>
-        </p:txBody>
-      </p:sp>
-      <p:sp>
-        <p:nvSpPr>
-          <p:cNvPr id="36" name="Shape 33"/>
-          <p:cNvSpPr/>
-          <p:nvPr/>
-        </p:nvSpPr>
-        <p:spPr>
-          <a:xfrm>
-            <a:off x="9038844" y="4572000"/>
-            <a:ext cx="2601468" cy="1463040"/>
-          </a:xfrm>
-          <a:prstGeom prst="roundRect">
-            <a:avLst>
-              <a:gd name="adj" fmla="val 5000"/>
-            </a:avLst>
-          </a:prstGeom>
-          <a:solidFill>
-            <a:srgbClr val="FFFFFF"/>
-          </a:solidFill>
-          <a:ln w="9525">
-            <a:solidFill>
-              <a:srgbClr val="D8E0EC"/>
-            </a:solidFill>
-            <a:prstDash val="solid"/>
-          </a:ln>
-        </p:spPr>
-      </p:sp>
-      <p:sp>
-        <p:nvSpPr>
-          <p:cNvPr id="37" name="Text 34"/>
-          <p:cNvSpPr/>
-          <p:nvPr/>
-        </p:nvSpPr>
-        <p:spPr>
-          <a:xfrm>
-            <a:off x="9176004" y="4663440"/>
-            <a:ext cx="365760" cy="365760"/>
-          </a:xfrm>
-          <a:prstGeom prst="rect">
-            <a:avLst/>
-          </a:prstGeom>
-          <a:noFill/>
-          <a:ln/>
-        </p:spPr>
-        <p:txBody>
-          <a:bodyPr wrap="square" rtlCol="0" anchor="ctr"/>
-          <a:lstStyle/>
-          <a:p>
-            <a:pPr indent="0" marL="0">
-              <a:buNone/>
-            </a:pPr>
-            <a:r>
-              <a:rPr lang="en-US" sz="1400" b="1" dirty="0">
-                <a:solidFill>
-                  <a:srgbClr val="F7A23B"/>
-                </a:solidFill>
-                <a:latin typeface="Arial" pitchFamily="34" charset="0"/>
-                <a:ea typeface="Arial" pitchFamily="34" charset="-122"/>
-                <a:cs typeface="Arial" pitchFamily="34" charset="-120"/>
-              </a:rPr>
-              <a:t>D</a:t>
-            </a:r>
-            <a:endParaRPr lang="en-US" sz="1400" dirty="0"/>
-          </a:p>
-        </p:txBody>
-      </p:sp>
-      <p:sp>
-        <p:nvSpPr>
-          <p:cNvPr id="38" name="Text 35"/>
-          <p:cNvSpPr/>
-          <p:nvPr/>
-        </p:nvSpPr>
-        <p:spPr>
-          <a:xfrm>
-            <a:off x="9176004" y="5029200"/>
-            <a:ext cx="2327148" cy="914400"/>
-          </a:xfrm>
-          <a:prstGeom prst="rect">
-            <a:avLst/>
-          </a:prstGeom>
-          <a:noFill/>
-          <a:ln/>
-        </p:spPr>
-        <p:txBody>
-          <a:bodyPr wrap="square" rtlCol="0" anchor="t"/>
-          <a:lstStyle/>
-          <a:p>
-            <a:pPr indent="0" marL="0">
-              <a:buNone/>
-            </a:pPr>
-            <a:r>
-              <a:rPr lang="en-US" sz="1500" dirty="0">
-                <a:solidFill>
-                  <a:srgbClr val="1F2937"/>
-                </a:solidFill>
-                <a:latin typeface="Arial" pitchFamily="34" charset="0"/>
-                <a:ea typeface="Arial" pitchFamily="34" charset="-122"/>
-                <a:cs typeface="Arial" pitchFamily="34" charset="-120"/>
-              </a:rPr>
-              <a:t>0,6 kWh</a:t>
+              <a:t>Localize a seção Energia Injetada e Consumo Injetado: são os créditos da geração distribuída, base da cobrança.</a:t>
             </a:r>
             <a:endParaRPr lang="en-US" sz="1500" dirty="0"/>
           </a:p>
@@ -30171,7 +29198,7 @@
                 <a:ea typeface="Arial" pitchFamily="34" charset="-122"/>
                 <a:cs typeface="Arial" pitchFamily="34" charset="-120"/>
               </a:rPr>
-              <a:t>QUESTÕES 3–4 DE 8</a:t>
+              <a:t>QUESTÕES 1–2 DE 8</a:t>
             </a:r>
             <a:endParaRPr lang="en-US" sz="1000" dirty="0"/>
           </a:p>
@@ -30271,7 +29298,7 @@
                 <a:ea typeface="Arial" pitchFamily="34" charset="-122"/>
                 <a:cs typeface="Arial" pitchFamily="34" charset="-120"/>
               </a:rPr>
-              <a:t>3</a:t>
+              <a:t>1</a:t>
             </a:r>
             <a:endParaRPr lang="en-US" sz="1600" dirty="0"/>
           </a:p>
@@ -30310,7 +29337,7 @@
                 <a:ea typeface="Arial" pitchFamily="34" charset="-122"/>
                 <a:cs typeface="Arial" pitchFamily="34" charset="-120"/>
               </a:rPr>
-              <a:t>O inversor numa usina solar serve para:</a:t>
+              <a:t>kWh mede:</a:t>
             </a:r>
             <a:endParaRPr lang="en-US" sz="1800" dirty="0"/>
           </a:p>
@@ -30415,7 +29442,7 @@
                 <a:ea typeface="Arial" pitchFamily="34" charset="-122"/>
                 <a:cs typeface="Arial" pitchFamily="34" charset="-120"/>
               </a:rPr>
-              <a:t>armazenar energia</a:t>
+              <a:t>potência</a:t>
             </a:r>
             <a:endParaRPr lang="en-US" sz="1500" dirty="0"/>
           </a:p>
@@ -30520,7 +29547,7 @@
                 <a:ea typeface="Arial" pitchFamily="34" charset="-122"/>
                 <a:cs typeface="Arial" pitchFamily="34" charset="-120"/>
               </a:rPr>
-              <a:t>converter corrente contínua em alternada</a:t>
+              <a:t>energia</a:t>
             </a:r>
             <a:endParaRPr lang="en-US" sz="1500" dirty="0"/>
           </a:p>
@@ -30625,7 +29652,7 @@
                 <a:ea typeface="Arial" pitchFamily="34" charset="-122"/>
                 <a:cs typeface="Arial" pitchFamily="34" charset="-120"/>
               </a:rPr>
-              <a:t>medir o consumo</a:t>
+              <a:t>tensão</a:t>
             </a:r>
             <a:endParaRPr lang="en-US" sz="1500" dirty="0"/>
           </a:p>
@@ -30730,7 +29757,7 @@
                 <a:ea typeface="Arial" pitchFamily="34" charset="-122"/>
                 <a:cs typeface="Arial" pitchFamily="34" charset="-120"/>
               </a:rPr>
-              <a:t>aumentar a geração</a:t>
+              <a:t>corrente</a:t>
             </a:r>
             <a:endParaRPr lang="en-US" sz="1500" dirty="0"/>
           </a:p>
@@ -30789,7 +29816,7 @@
                 <a:ea typeface="Arial" pitchFamily="34" charset="-122"/>
                 <a:cs typeface="Arial" pitchFamily="34" charset="-120"/>
               </a:rPr>
-              <a:t>4</a:t>
+              <a:t>2</a:t>
             </a:r>
             <a:endParaRPr lang="en-US" sz="1600" dirty="0"/>
           </a:p>
@@ -30828,7 +29855,7 @@
                 <a:ea typeface="Arial" pitchFamily="34" charset="-122"/>
                 <a:cs typeface="Arial" pitchFamily="34" charset="-120"/>
               </a:rPr>
-              <a:t>Quem regula o setor elétrico brasileiro?</a:t>
+              <a:t>Um equipamento de 2 kW ligado por 3 horas consome:</a:t>
             </a:r>
             <a:endParaRPr lang="en-US" sz="1800" dirty="0"/>
           </a:p>
@@ -30933,7 +29960,7 @@
                 <a:ea typeface="Arial" pitchFamily="34" charset="-122"/>
                 <a:cs typeface="Arial" pitchFamily="34" charset="-120"/>
               </a:rPr>
-              <a:t>ONS</a:t>
+              <a:t>2 kWh</a:t>
             </a:r>
             <a:endParaRPr lang="en-US" sz="1500" dirty="0"/>
           </a:p>
@@ -31038,7 +30065,7 @@
                 <a:ea typeface="Arial" pitchFamily="34" charset="-122"/>
                 <a:cs typeface="Arial" pitchFamily="34" charset="-120"/>
               </a:rPr>
-              <a:t>ANEEL</a:t>
+              <a:t>5 kWh</a:t>
             </a:r>
             <a:endParaRPr lang="en-US" sz="1500" dirty="0"/>
           </a:p>
@@ -31143,7 +30170,7 @@
                 <a:ea typeface="Arial" pitchFamily="34" charset="-122"/>
                 <a:cs typeface="Arial" pitchFamily="34" charset="-120"/>
               </a:rPr>
-              <a:t>CCEE</a:t>
+              <a:t>6 kWh</a:t>
             </a:r>
             <a:endParaRPr lang="en-US" sz="1500" dirty="0"/>
           </a:p>
@@ -31248,7 +30275,7 @@
                 <a:ea typeface="Arial" pitchFamily="34" charset="-122"/>
                 <a:cs typeface="Arial" pitchFamily="34" charset="-120"/>
               </a:rPr>
-              <a:t>a distribuidora</a:t>
+              <a:t>0,6 kWh</a:t>
             </a:r>
             <a:endParaRPr lang="en-US" sz="1500" dirty="0"/>
           </a:p>
@@ -31514,7 +30541,7 @@
                 <a:ea typeface="Arial" pitchFamily="34" charset="-122"/>
                 <a:cs typeface="Arial" pitchFamily="34" charset="-120"/>
               </a:rPr>
-              <a:t>QUESTÕES 5–6 DE 8</a:t>
+              <a:t>QUESTÕES 3–4 DE 8</a:t>
             </a:r>
             <a:endParaRPr lang="en-US" sz="1000" dirty="0"/>
           </a:p>
@@ -31614,7 +30641,7 @@
                 <a:ea typeface="Arial" pitchFamily="34" charset="-122"/>
                 <a:cs typeface="Arial" pitchFamily="34" charset="-120"/>
               </a:rPr>
-              <a:t>5</a:t>
+              <a:t>3</a:t>
             </a:r>
             <a:endParaRPr lang="en-US" sz="1600" dirty="0"/>
           </a:p>
@@ -31653,7 +30680,7 @@
                 <a:ea typeface="Arial" pitchFamily="34" charset="-122"/>
                 <a:cs typeface="Arial" pitchFamily="34" charset="-120"/>
               </a:rPr>
-              <a:t>Clientes de baixa tensão (residências, pequenos comércios) pertencem ao:</a:t>
+              <a:t>O inversor numa usina solar serve para:</a:t>
             </a:r>
             <a:endParaRPr lang="en-US" sz="1800" dirty="0"/>
           </a:p>
@@ -31758,7 +30785,7 @@
                 <a:ea typeface="Arial" pitchFamily="34" charset="-122"/>
                 <a:cs typeface="Arial" pitchFamily="34" charset="-120"/>
               </a:rPr>
-              <a:t>Grupo A</a:t>
+              <a:t>armazenar energia</a:t>
             </a:r>
             <a:endParaRPr lang="en-US" sz="1500" dirty="0"/>
           </a:p>
@@ -31863,7 +30890,7 @@
                 <a:ea typeface="Arial" pitchFamily="34" charset="-122"/>
                 <a:cs typeface="Arial" pitchFamily="34" charset="-120"/>
               </a:rPr>
-              <a:t>Grupo B</a:t>
+              <a:t>converter corrente contínua em alternada</a:t>
             </a:r>
             <a:endParaRPr lang="en-US" sz="1500" dirty="0"/>
           </a:p>
@@ -31968,7 +30995,7 @@
                 <a:ea typeface="Arial" pitchFamily="34" charset="-122"/>
                 <a:cs typeface="Arial" pitchFamily="34" charset="-120"/>
               </a:rPr>
-              <a:t>Mercado livre</a:t>
+              <a:t>medir o consumo</a:t>
             </a:r>
             <a:endParaRPr lang="en-US" sz="1500" dirty="0"/>
           </a:p>
@@ -32073,7 +31100,7 @@
                 <a:ea typeface="Arial" pitchFamily="34" charset="-122"/>
                 <a:cs typeface="Arial" pitchFamily="34" charset="-120"/>
               </a:rPr>
-              <a:t>Grupo C</a:t>
+              <a:t>aumentar a geração</a:t>
             </a:r>
             <a:endParaRPr lang="en-US" sz="1500" dirty="0"/>
           </a:p>
@@ -32132,7 +31159,7 @@
                 <a:ea typeface="Arial" pitchFamily="34" charset="-122"/>
                 <a:cs typeface="Arial" pitchFamily="34" charset="-120"/>
               </a:rPr>
-              <a:t>6</a:t>
+              <a:t>4</a:t>
             </a:r>
             <a:endParaRPr lang="en-US" sz="1600" dirty="0"/>
           </a:p>
@@ -32171,7 +31198,7 @@
                 <a:ea typeface="Arial" pitchFamily="34" charset="-122"/>
                 <a:cs typeface="Arial" pitchFamily="34" charset="-120"/>
               </a:rPr>
-              <a:t>O Fio B remunera:</a:t>
+              <a:t>Quem regula o setor elétrico brasileiro?</a:t>
             </a:r>
             <a:endParaRPr lang="en-US" sz="1800" dirty="0"/>
           </a:p>
@@ -32276,7 +31303,7 @@
                 <a:ea typeface="Arial" pitchFamily="34" charset="-122"/>
                 <a:cs typeface="Arial" pitchFamily="34" charset="-120"/>
               </a:rPr>
-              <a:t>a geração</a:t>
+              <a:t>ONS</a:t>
             </a:r>
             <a:endParaRPr lang="en-US" sz="1500" dirty="0"/>
           </a:p>
@@ -32381,7 +31408,7 @@
                 <a:ea typeface="Arial" pitchFamily="34" charset="-122"/>
                 <a:cs typeface="Arial" pitchFamily="34" charset="-120"/>
               </a:rPr>
-              <a:t>a transmissão</a:t>
+              <a:t>ANEEL</a:t>
             </a:r>
             <a:endParaRPr lang="en-US" sz="1500" dirty="0"/>
           </a:p>
@@ -32486,7 +31513,7 @@
                 <a:ea typeface="Arial" pitchFamily="34" charset="-122"/>
                 <a:cs typeface="Arial" pitchFamily="34" charset="-120"/>
               </a:rPr>
-              <a:t>a rede de distribuição</a:t>
+              <a:t>CCEE</a:t>
             </a:r>
             <a:endParaRPr lang="en-US" sz="1500" dirty="0"/>
           </a:p>
@@ -32591,7 +31618,7 @@
                 <a:ea typeface="Arial" pitchFamily="34" charset="-122"/>
                 <a:cs typeface="Arial" pitchFamily="34" charset="-120"/>
               </a:rPr>
-              <a:t>os impostos</a:t>
+              <a:t>a distribuidora</a:t>
             </a:r>
             <a:endParaRPr lang="en-US" sz="1500" dirty="0"/>
           </a:p>
@@ -32857,7 +31884,7 @@
                 <a:ea typeface="Arial" pitchFamily="34" charset="-122"/>
                 <a:cs typeface="Arial" pitchFamily="34" charset="-120"/>
               </a:rPr>
-              <a:t>QUESTÕES 7–8 DE 8</a:t>
+              <a:t>QUESTÕES 5–6 DE 8</a:t>
             </a:r>
             <a:endParaRPr lang="en-US" sz="1000" dirty="0"/>
           </a:p>
@@ -32957,7 +31984,7 @@
                 <a:ea typeface="Arial" pitchFamily="34" charset="-122"/>
                 <a:cs typeface="Arial" pitchFamily="34" charset="-120"/>
               </a:rPr>
-              <a:t>7</a:t>
+              <a:t>5</a:t>
             </a:r>
             <a:endParaRPr lang="en-US" sz="1600" dirty="0"/>
           </a:p>
@@ -32996,7 +32023,7 @@
                 <a:ea typeface="Arial" pitchFamily="34" charset="-122"/>
                 <a:cs typeface="Arial" pitchFamily="34" charset="-120"/>
               </a:rPr>
-              <a:t>A bandeira vermelha indica:</a:t>
+              <a:t>Clientes de baixa tensão (residências, pequenos comércios) pertencem ao:</a:t>
             </a:r>
             <a:endParaRPr lang="en-US" sz="1800" dirty="0"/>
           </a:p>
@@ -33101,7 +32128,7 @@
                 <a:ea typeface="Arial" pitchFamily="34" charset="-122"/>
                 <a:cs typeface="Arial" pitchFamily="34" charset="-120"/>
               </a:rPr>
-              <a:t>desconto</a:t>
+              <a:t>Grupo A</a:t>
             </a:r>
             <a:endParaRPr lang="en-US" sz="1500" dirty="0"/>
           </a:p>
@@ -33206,7 +32233,7 @@
                 <a:ea typeface="Arial" pitchFamily="34" charset="-122"/>
                 <a:cs typeface="Arial" pitchFamily="34" charset="-120"/>
               </a:rPr>
-              <a:t>custo maior de geração no período</a:t>
+              <a:t>Grupo B</a:t>
             </a:r>
             <a:endParaRPr lang="en-US" sz="1500" dirty="0"/>
           </a:p>
@@ -33311,7 +32338,7 @@
                 <a:ea typeface="Arial" pitchFamily="34" charset="-122"/>
                 <a:cs typeface="Arial" pitchFamily="34" charset="-120"/>
               </a:rPr>
-              <a:t>falta de pagamento</a:t>
+              <a:t>Mercado livre</a:t>
             </a:r>
             <a:endParaRPr lang="en-US" sz="1500" dirty="0"/>
           </a:p>
@@ -33416,7 +32443,7 @@
                 <a:ea typeface="Arial" pitchFamily="34" charset="-122"/>
                 <a:cs typeface="Arial" pitchFamily="34" charset="-120"/>
               </a:rPr>
-              <a:t>energia solar</a:t>
+              <a:t>Grupo C</a:t>
             </a:r>
             <a:endParaRPr lang="en-US" sz="1500" dirty="0"/>
           </a:p>
@@ -33475,7 +32502,7 @@
                 <a:ea typeface="Arial" pitchFamily="34" charset="-122"/>
                 <a:cs typeface="Arial" pitchFamily="34" charset="-120"/>
               </a:rPr>
-              <a:t>8</a:t>
+              <a:t>6</a:t>
             </a:r>
             <a:endParaRPr lang="en-US" sz="1600" dirty="0"/>
           </a:p>
@@ -33514,7 +32541,7 @@
                 <a:ea typeface="Arial" pitchFamily="34" charset="-122"/>
                 <a:cs typeface="Arial" pitchFamily="34" charset="-120"/>
               </a:rPr>
-              <a:t>O ICMS na conta de luz é um tributo:</a:t>
+              <a:t>O Fio B remunera:</a:t>
             </a:r>
             <a:endParaRPr lang="en-US" sz="1800" dirty="0"/>
           </a:p>
@@ -33619,7 +32646,7 @@
                 <a:ea typeface="Arial" pitchFamily="34" charset="-122"/>
                 <a:cs typeface="Arial" pitchFamily="34" charset="-120"/>
               </a:rPr>
-              <a:t>federal</a:t>
+              <a:t>a geração</a:t>
             </a:r>
             <a:endParaRPr lang="en-US" sz="1500" dirty="0"/>
           </a:p>
@@ -33724,7 +32751,7 @@
                 <a:ea typeface="Arial" pitchFamily="34" charset="-122"/>
                 <a:cs typeface="Arial" pitchFamily="34" charset="-120"/>
               </a:rPr>
-              <a:t>estadual</a:t>
+              <a:t>a transmissão</a:t>
             </a:r>
             <a:endParaRPr lang="en-US" sz="1500" dirty="0"/>
           </a:p>
@@ -33829,7 +32856,7 @@
                 <a:ea typeface="Arial" pitchFamily="34" charset="-122"/>
                 <a:cs typeface="Arial" pitchFamily="34" charset="-120"/>
               </a:rPr>
-              <a:t>municipal</a:t>
+              <a:t>a rede de distribuição</a:t>
             </a:r>
             <a:endParaRPr lang="en-US" sz="1500" dirty="0"/>
           </a:p>
@@ -33934,7 +32961,7 @@
                 <a:ea typeface="Arial" pitchFamily="34" charset="-122"/>
                 <a:cs typeface="Arial" pitchFamily="34" charset="-120"/>
               </a:rPr>
-              <a:t>da ANEEL</a:t>
+              <a:t>os impostos</a:t>
             </a:r>
             <a:endParaRPr lang="en-US" sz="1500" dirty="0"/>
           </a:p>
@@ -33999,6 +33026,1349 @@
 <file path=ppt/slides/slide45.xml><?xml version="1.0" encoding="utf-8"?>
 <p:sld xmlns:a="http://schemas.openxmlformats.org/drawingml/2006/main" xmlns:r="http://schemas.openxmlformats.org/officeDocument/2006/relationships" xmlns:p="http://schemas.openxmlformats.org/presentationml/2006/main">
   <p:cSld name="Slide 45">
+    <p:bg>
+      <p:bgPr>
+        <a:solidFill>
+          <a:srgbClr val="F6F8FB"/>
+        </a:solidFill>
+      </p:bgPr>
+    </p:bg>
+    <p:spTree>
+      <p:nvGrpSpPr>
+        <p:cNvPr id="1" name=""/>
+        <p:cNvGrpSpPr/>
+        <p:nvPr/>
+      </p:nvGrpSpPr>
+      <p:grpSpPr>
+        <a:xfrm>
+          <a:off x="0" y="0"/>
+          <a:ext cx="0" cy="0"/>
+          <a:chOff x="0" y="0"/>
+          <a:chExt cx="0" cy="0"/>
+        </a:xfrm>
+      </p:grpSpPr>
+      <p:sp>
+        <p:nvSpPr>
+          <p:cNvPr id="2" name="Shape 0"/>
+          <p:cNvSpPr/>
+          <p:nvPr/>
+        </p:nvSpPr>
+        <p:spPr>
+          <a:xfrm>
+            <a:off x="0" y="6510528"/>
+            <a:ext cx="12191695" cy="347472"/>
+          </a:xfrm>
+          <a:prstGeom prst="rect">
+            <a:avLst/>
+          </a:prstGeom>
+          <a:solidFill>
+            <a:srgbClr val="FFFFFF"/>
+          </a:solidFill>
+          <a:ln w="6350">
+            <a:solidFill>
+              <a:srgbClr val="D8E0EC"/>
+            </a:solidFill>
+            <a:prstDash val="solid"/>
+          </a:ln>
+        </p:spPr>
+      </p:sp>
+      <p:pic>
+        <p:nvPicPr>
+          <p:cNvPr id="3" name="Image 0" descr="/www/wwwroot/rexar/gdsolar/docs/curso/slides/assets/logo-gdsolar.png">    </p:cNvPr>
+          <p:cNvPicPr>
+            <a:picLocks noChangeAspect="1"/>
+          </p:cNvPicPr>
+          <p:nvPr/>
+        </p:nvPicPr>
+        <p:blipFill>
+          <a:blip r:embed="rId1"/>
+          <a:stretch>
+            <a:fillRect/>
+          </a:stretch>
+        </p:blipFill>
+        <p:spPr>
+          <a:xfrm>
+            <a:off x="548640" y="6547104"/>
+            <a:ext cx="274320" cy="274320"/>
+          </a:xfrm>
+          <a:prstGeom prst="rect">
+            <a:avLst/>
+          </a:prstGeom>
+        </p:spPr>
+      </p:pic>
+      <p:sp>
+        <p:nvSpPr>
+          <p:cNvPr id="4" name="Text 1"/>
+          <p:cNvSpPr/>
+          <p:nvPr/>
+        </p:nvSpPr>
+        <p:spPr>
+          <a:xfrm>
+            <a:off x="886968" y="6528816"/>
+            <a:ext cx="6400800" cy="310896"/>
+          </a:xfrm>
+          <a:prstGeom prst="rect">
+            <a:avLst/>
+          </a:prstGeom>
+          <a:noFill/>
+          <a:ln/>
+        </p:spPr>
+        <p:txBody>
+          <a:bodyPr wrap="square" rtlCol="0" anchor="ctr"/>
+          <a:lstStyle/>
+          <a:p>
+            <a:pPr indent="0" marL="0">
+              <a:buNone/>
+            </a:pPr>
+            <a:r>
+              <a:rPr lang="en-US" sz="900" b="1" dirty="0">
+                <a:solidFill>
+                  <a:srgbClr val="64748B"/>
+                </a:solidFill>
+                <a:latin typeface="Arial" pitchFamily="34" charset="0"/>
+                <a:ea typeface="Arial" pitchFamily="34" charset="-122"/>
+                <a:cs typeface="Arial" pitchFamily="34" charset="-120"/>
+              </a:rPr>
+              <a:t>GD Solar  ·  Formação em Energia por Assinatura</a:t>
+            </a:r>
+            <a:endParaRPr lang="en-US" sz="900" dirty="0"/>
+          </a:p>
+        </p:txBody>
+      </p:sp>
+      <p:sp>
+        <p:nvSpPr>
+          <p:cNvPr id="5" name="Text 2"/>
+          <p:cNvSpPr/>
+          <p:nvPr/>
+        </p:nvSpPr>
+        <p:spPr>
+          <a:xfrm>
+            <a:off x="7132320" y="6528816"/>
+            <a:ext cx="4023360" cy="310896"/>
+          </a:xfrm>
+          <a:prstGeom prst="rect">
+            <a:avLst/>
+          </a:prstGeom>
+          <a:noFill/>
+          <a:ln/>
+        </p:spPr>
+        <p:txBody>
+          <a:bodyPr wrap="square" rtlCol="0" anchor="ctr"/>
+          <a:lstStyle/>
+          <a:p>
+            <a:pPr algn="r" indent="0" marL="0">
+              <a:buNone/>
+            </a:pPr>
+            <a:r>
+              <a:rPr lang="en-US" sz="900" dirty="0">
+                <a:solidFill>
+                  <a:srgbClr val="64748B"/>
+                </a:solidFill>
+                <a:latin typeface="Arial" pitchFamily="34" charset="0"/>
+                <a:ea typeface="Arial" pitchFamily="34" charset="-122"/>
+                <a:cs typeface="Arial" pitchFamily="34" charset="-120"/>
+              </a:rPr>
+              <a:t>M1 · Teste rápido</a:t>
+            </a:r>
+            <a:endParaRPr lang="en-US" sz="900" dirty="0"/>
+          </a:p>
+        </p:txBody>
+      </p:sp>
+      <p:sp>
+        <p:nvSpPr>
+          <p:cNvPr id="6" name="Shape 3"/>
+          <p:cNvSpPr/>
+          <p:nvPr/>
+        </p:nvSpPr>
+        <p:spPr>
+          <a:xfrm>
+            <a:off x="548640" y="384048"/>
+            <a:ext cx="82296" cy="658368"/>
+          </a:xfrm>
+          <a:prstGeom prst="rect">
+            <a:avLst/>
+          </a:prstGeom>
+          <a:solidFill>
+            <a:srgbClr val="F7A23B"/>
+          </a:solidFill>
+          <a:ln/>
+        </p:spPr>
+      </p:sp>
+      <p:sp>
+        <p:nvSpPr>
+          <p:cNvPr id="7" name="Text 4"/>
+          <p:cNvSpPr/>
+          <p:nvPr/>
+        </p:nvSpPr>
+        <p:spPr>
+          <a:xfrm>
+            <a:off x="777240" y="292608"/>
+            <a:ext cx="10972800" cy="274320"/>
+          </a:xfrm>
+          <a:prstGeom prst="rect">
+            <a:avLst/>
+          </a:prstGeom>
+          <a:noFill/>
+          <a:ln/>
+        </p:spPr>
+        <p:txBody>
+          <a:bodyPr wrap="square" rtlCol="0" anchor="ctr"/>
+          <a:lstStyle/>
+          <a:p>
+            <a:pPr indent="0" marL="0">
+              <a:buNone/>
+            </a:pPr>
+            <a:r>
+              <a:rPr lang="en-US" sz="1000" b="1" spc="100" kern="0" dirty="0">
+                <a:solidFill>
+                  <a:srgbClr val="F7A23B"/>
+                </a:solidFill>
+                <a:latin typeface="Arial" pitchFamily="34" charset="0"/>
+                <a:ea typeface="Arial" pitchFamily="34" charset="-122"/>
+                <a:cs typeface="Arial" pitchFamily="34" charset="-120"/>
+              </a:rPr>
+              <a:t>QUESTÕES 7–8 DE 8</a:t>
+            </a:r>
+            <a:endParaRPr lang="en-US" sz="1000" dirty="0"/>
+          </a:p>
+        </p:txBody>
+      </p:sp>
+      <p:sp>
+        <p:nvSpPr>
+          <p:cNvPr id="8" name="Text 5"/>
+          <p:cNvSpPr/>
+          <p:nvPr/>
+        </p:nvSpPr>
+        <p:spPr>
+          <a:xfrm>
+            <a:off x="777240" y="530352"/>
+            <a:ext cx="10881360" cy="566928"/>
+          </a:xfrm>
+          <a:prstGeom prst="rect">
+            <a:avLst/>
+          </a:prstGeom>
+          <a:noFill/>
+          <a:ln/>
+        </p:spPr>
+        <p:txBody>
+          <a:bodyPr wrap="square" rtlCol="0" anchor="ctr">
+            <a:normAutofit/>
+          </a:bodyPr>
+          <a:lstStyle/>
+          <a:p>
+            <a:pPr indent="0" marL="0">
+              <a:buNone/>
+            </a:pPr>
+            <a:r>
+              <a:rPr lang="en-US" sz="2600" b="1" dirty="0">
+                <a:solidFill>
+                  <a:srgbClr val="1B3A6B"/>
+                </a:solidFill>
+                <a:latin typeface="Arial" pitchFamily="34" charset="0"/>
+                <a:ea typeface="Arial" pitchFamily="34" charset="-122"/>
+                <a:cs typeface="Arial" pitchFamily="34" charset="-120"/>
+              </a:rPr>
+              <a:t>Teste rápido</a:t>
+            </a:r>
+            <a:endParaRPr lang="en-US" sz="2600" dirty="0"/>
+          </a:p>
+        </p:txBody>
+      </p:sp>
+      <p:sp>
+        <p:nvSpPr>
+          <p:cNvPr id="9" name="Shape 6"/>
+          <p:cNvSpPr/>
+          <p:nvPr/>
+        </p:nvSpPr>
+        <p:spPr>
+          <a:xfrm>
+            <a:off x="548640" y="1325880"/>
+            <a:ext cx="502920" cy="502920"/>
+          </a:xfrm>
+          <a:prstGeom prst="ellipse">
+            <a:avLst/>
+          </a:prstGeom>
+          <a:solidFill>
+            <a:srgbClr val="1B3A6B"/>
+          </a:solidFill>
+          <a:ln/>
+        </p:spPr>
+      </p:sp>
+      <p:sp>
+        <p:nvSpPr>
+          <p:cNvPr id="10" name="Text 7"/>
+          <p:cNvSpPr/>
+          <p:nvPr/>
+        </p:nvSpPr>
+        <p:spPr>
+          <a:xfrm>
+            <a:off x="548640" y="1325880"/>
+            <a:ext cx="502920" cy="502920"/>
+          </a:xfrm>
+          <a:prstGeom prst="rect">
+            <a:avLst/>
+          </a:prstGeom>
+          <a:noFill/>
+          <a:ln/>
+        </p:spPr>
+        <p:txBody>
+          <a:bodyPr wrap="square" rtlCol="0" anchor="ctr"/>
+          <a:lstStyle/>
+          <a:p>
+            <a:pPr algn="ctr" indent="0" marL="0">
+              <a:buNone/>
+            </a:pPr>
+            <a:r>
+              <a:rPr lang="en-US" sz="1600" b="1" dirty="0">
+                <a:solidFill>
+                  <a:srgbClr val="FFFFFF"/>
+                </a:solidFill>
+                <a:latin typeface="Arial" pitchFamily="34" charset="0"/>
+                <a:ea typeface="Arial" pitchFamily="34" charset="-122"/>
+                <a:cs typeface="Arial" pitchFamily="34" charset="-120"/>
+              </a:rPr>
+              <a:t>7</a:t>
+            </a:r>
+            <a:endParaRPr lang="en-US" sz="1600" dirty="0"/>
+          </a:p>
+        </p:txBody>
+      </p:sp>
+      <p:sp>
+        <p:nvSpPr>
+          <p:cNvPr id="11" name="Text 8"/>
+          <p:cNvSpPr/>
+          <p:nvPr/>
+        </p:nvSpPr>
+        <p:spPr>
+          <a:xfrm>
+            <a:off x="1234440" y="1280160"/>
+            <a:ext cx="10424160" cy="640080"/>
+          </a:xfrm>
+          <a:prstGeom prst="rect">
+            <a:avLst/>
+          </a:prstGeom>
+          <a:noFill/>
+          <a:ln/>
+        </p:spPr>
+        <p:txBody>
+          <a:bodyPr wrap="square" rtlCol="0" anchor="ctr"/>
+          <a:lstStyle/>
+          <a:p>
+            <a:pPr indent="0" marL="0">
+              <a:buNone/>
+            </a:pPr>
+            <a:r>
+              <a:rPr lang="en-US" sz="1800" b="1" dirty="0">
+                <a:solidFill>
+                  <a:srgbClr val="1B3A6B"/>
+                </a:solidFill>
+                <a:latin typeface="Arial" pitchFamily="34" charset="0"/>
+                <a:ea typeface="Arial" pitchFamily="34" charset="-122"/>
+                <a:cs typeface="Arial" pitchFamily="34" charset="-120"/>
+              </a:rPr>
+              <a:t>A bandeira vermelha indica:</a:t>
+            </a:r>
+            <a:endParaRPr lang="en-US" sz="1800" dirty="0"/>
+          </a:p>
+        </p:txBody>
+      </p:sp>
+      <p:sp>
+        <p:nvSpPr>
+          <p:cNvPr id="12" name="Shape 9"/>
+          <p:cNvSpPr/>
+          <p:nvPr/>
+        </p:nvSpPr>
+        <p:spPr>
+          <a:xfrm>
+            <a:off x="548640" y="2057400"/>
+            <a:ext cx="2601468" cy="1463040"/>
+          </a:xfrm>
+          <a:prstGeom prst="roundRect">
+            <a:avLst>
+              <a:gd name="adj" fmla="val 5000"/>
+            </a:avLst>
+          </a:prstGeom>
+          <a:solidFill>
+            <a:srgbClr val="FFFFFF"/>
+          </a:solidFill>
+          <a:ln w="9525">
+            <a:solidFill>
+              <a:srgbClr val="D8E0EC"/>
+            </a:solidFill>
+            <a:prstDash val="solid"/>
+          </a:ln>
+        </p:spPr>
+      </p:sp>
+      <p:sp>
+        <p:nvSpPr>
+          <p:cNvPr id="13" name="Text 10"/>
+          <p:cNvSpPr/>
+          <p:nvPr/>
+        </p:nvSpPr>
+        <p:spPr>
+          <a:xfrm>
+            <a:off x="685800" y="2148840"/>
+            <a:ext cx="365760" cy="365760"/>
+          </a:xfrm>
+          <a:prstGeom prst="rect">
+            <a:avLst/>
+          </a:prstGeom>
+          <a:noFill/>
+          <a:ln/>
+        </p:spPr>
+        <p:txBody>
+          <a:bodyPr wrap="square" rtlCol="0" anchor="ctr"/>
+          <a:lstStyle/>
+          <a:p>
+            <a:pPr indent="0" marL="0">
+              <a:buNone/>
+            </a:pPr>
+            <a:r>
+              <a:rPr lang="en-US" sz="1400" b="1" dirty="0">
+                <a:solidFill>
+                  <a:srgbClr val="F7A23B"/>
+                </a:solidFill>
+                <a:latin typeface="Arial" pitchFamily="34" charset="0"/>
+                <a:ea typeface="Arial" pitchFamily="34" charset="-122"/>
+                <a:cs typeface="Arial" pitchFamily="34" charset="-120"/>
+              </a:rPr>
+              <a:t>A</a:t>
+            </a:r>
+            <a:endParaRPr lang="en-US" sz="1400" dirty="0"/>
+          </a:p>
+        </p:txBody>
+      </p:sp>
+      <p:sp>
+        <p:nvSpPr>
+          <p:cNvPr id="14" name="Text 11"/>
+          <p:cNvSpPr/>
+          <p:nvPr/>
+        </p:nvSpPr>
+        <p:spPr>
+          <a:xfrm>
+            <a:off x="685800" y="2514600"/>
+            <a:ext cx="2327148" cy="914400"/>
+          </a:xfrm>
+          <a:prstGeom prst="rect">
+            <a:avLst/>
+          </a:prstGeom>
+          <a:noFill/>
+          <a:ln/>
+        </p:spPr>
+        <p:txBody>
+          <a:bodyPr wrap="square" rtlCol="0" anchor="t"/>
+          <a:lstStyle/>
+          <a:p>
+            <a:pPr indent="0" marL="0">
+              <a:buNone/>
+            </a:pPr>
+            <a:r>
+              <a:rPr lang="en-US" sz="1500" dirty="0">
+                <a:solidFill>
+                  <a:srgbClr val="1F2937"/>
+                </a:solidFill>
+                <a:latin typeface="Arial" pitchFamily="34" charset="0"/>
+                <a:ea typeface="Arial" pitchFamily="34" charset="-122"/>
+                <a:cs typeface="Arial" pitchFamily="34" charset="-120"/>
+              </a:rPr>
+              <a:t>desconto</a:t>
+            </a:r>
+            <a:endParaRPr lang="en-US" sz="1500" dirty="0"/>
+          </a:p>
+        </p:txBody>
+      </p:sp>
+      <p:sp>
+        <p:nvSpPr>
+          <p:cNvPr id="15" name="Shape 12"/>
+          <p:cNvSpPr/>
+          <p:nvPr/>
+        </p:nvSpPr>
+        <p:spPr>
+          <a:xfrm>
+            <a:off x="3378708" y="2057400"/>
+            <a:ext cx="2601468" cy="1463040"/>
+          </a:xfrm>
+          <a:prstGeom prst="roundRect">
+            <a:avLst>
+              <a:gd name="adj" fmla="val 5000"/>
+            </a:avLst>
+          </a:prstGeom>
+          <a:solidFill>
+            <a:srgbClr val="FFFFFF"/>
+          </a:solidFill>
+          <a:ln w="9525">
+            <a:solidFill>
+              <a:srgbClr val="D8E0EC"/>
+            </a:solidFill>
+            <a:prstDash val="solid"/>
+          </a:ln>
+        </p:spPr>
+      </p:sp>
+      <p:sp>
+        <p:nvSpPr>
+          <p:cNvPr id="16" name="Text 13"/>
+          <p:cNvSpPr/>
+          <p:nvPr/>
+        </p:nvSpPr>
+        <p:spPr>
+          <a:xfrm>
+            <a:off x="3515868" y="2148840"/>
+            <a:ext cx="365760" cy="365760"/>
+          </a:xfrm>
+          <a:prstGeom prst="rect">
+            <a:avLst/>
+          </a:prstGeom>
+          <a:noFill/>
+          <a:ln/>
+        </p:spPr>
+        <p:txBody>
+          <a:bodyPr wrap="square" rtlCol="0" anchor="ctr"/>
+          <a:lstStyle/>
+          <a:p>
+            <a:pPr indent="0" marL="0">
+              <a:buNone/>
+            </a:pPr>
+            <a:r>
+              <a:rPr lang="en-US" sz="1400" b="1" dirty="0">
+                <a:solidFill>
+                  <a:srgbClr val="F7A23B"/>
+                </a:solidFill>
+                <a:latin typeface="Arial" pitchFamily="34" charset="0"/>
+                <a:ea typeface="Arial" pitchFamily="34" charset="-122"/>
+                <a:cs typeface="Arial" pitchFamily="34" charset="-120"/>
+              </a:rPr>
+              <a:t>B</a:t>
+            </a:r>
+            <a:endParaRPr lang="en-US" sz="1400" dirty="0"/>
+          </a:p>
+        </p:txBody>
+      </p:sp>
+      <p:sp>
+        <p:nvSpPr>
+          <p:cNvPr id="17" name="Text 14"/>
+          <p:cNvSpPr/>
+          <p:nvPr/>
+        </p:nvSpPr>
+        <p:spPr>
+          <a:xfrm>
+            <a:off x="3515868" y="2514600"/>
+            <a:ext cx="2327148" cy="914400"/>
+          </a:xfrm>
+          <a:prstGeom prst="rect">
+            <a:avLst/>
+          </a:prstGeom>
+          <a:noFill/>
+          <a:ln/>
+        </p:spPr>
+        <p:txBody>
+          <a:bodyPr wrap="square" rtlCol="0" anchor="t"/>
+          <a:lstStyle/>
+          <a:p>
+            <a:pPr indent="0" marL="0">
+              <a:buNone/>
+            </a:pPr>
+            <a:r>
+              <a:rPr lang="en-US" sz="1500" dirty="0">
+                <a:solidFill>
+                  <a:srgbClr val="1F2937"/>
+                </a:solidFill>
+                <a:latin typeface="Arial" pitchFamily="34" charset="0"/>
+                <a:ea typeface="Arial" pitchFamily="34" charset="-122"/>
+                <a:cs typeface="Arial" pitchFamily="34" charset="-120"/>
+              </a:rPr>
+              <a:t>custo maior de geração no período</a:t>
+            </a:r>
+            <a:endParaRPr lang="en-US" sz="1500" dirty="0"/>
+          </a:p>
+        </p:txBody>
+      </p:sp>
+      <p:sp>
+        <p:nvSpPr>
+          <p:cNvPr id="18" name="Shape 15"/>
+          <p:cNvSpPr/>
+          <p:nvPr/>
+        </p:nvSpPr>
+        <p:spPr>
+          <a:xfrm>
+            <a:off x="6208776" y="2057400"/>
+            <a:ext cx="2601468" cy="1463040"/>
+          </a:xfrm>
+          <a:prstGeom prst="roundRect">
+            <a:avLst>
+              <a:gd name="adj" fmla="val 5000"/>
+            </a:avLst>
+          </a:prstGeom>
+          <a:solidFill>
+            <a:srgbClr val="FFFFFF"/>
+          </a:solidFill>
+          <a:ln w="9525">
+            <a:solidFill>
+              <a:srgbClr val="D8E0EC"/>
+            </a:solidFill>
+            <a:prstDash val="solid"/>
+          </a:ln>
+        </p:spPr>
+      </p:sp>
+      <p:sp>
+        <p:nvSpPr>
+          <p:cNvPr id="19" name="Text 16"/>
+          <p:cNvSpPr/>
+          <p:nvPr/>
+        </p:nvSpPr>
+        <p:spPr>
+          <a:xfrm>
+            <a:off x="6345936" y="2148840"/>
+            <a:ext cx="365760" cy="365760"/>
+          </a:xfrm>
+          <a:prstGeom prst="rect">
+            <a:avLst/>
+          </a:prstGeom>
+          <a:noFill/>
+          <a:ln/>
+        </p:spPr>
+        <p:txBody>
+          <a:bodyPr wrap="square" rtlCol="0" anchor="ctr"/>
+          <a:lstStyle/>
+          <a:p>
+            <a:pPr indent="0" marL="0">
+              <a:buNone/>
+            </a:pPr>
+            <a:r>
+              <a:rPr lang="en-US" sz="1400" b="1" dirty="0">
+                <a:solidFill>
+                  <a:srgbClr val="F7A23B"/>
+                </a:solidFill>
+                <a:latin typeface="Arial" pitchFamily="34" charset="0"/>
+                <a:ea typeface="Arial" pitchFamily="34" charset="-122"/>
+                <a:cs typeface="Arial" pitchFamily="34" charset="-120"/>
+              </a:rPr>
+              <a:t>C</a:t>
+            </a:r>
+            <a:endParaRPr lang="en-US" sz="1400" dirty="0"/>
+          </a:p>
+        </p:txBody>
+      </p:sp>
+      <p:sp>
+        <p:nvSpPr>
+          <p:cNvPr id="20" name="Text 17"/>
+          <p:cNvSpPr/>
+          <p:nvPr/>
+        </p:nvSpPr>
+        <p:spPr>
+          <a:xfrm>
+            <a:off x="6345936" y="2514600"/>
+            <a:ext cx="2327148" cy="914400"/>
+          </a:xfrm>
+          <a:prstGeom prst="rect">
+            <a:avLst/>
+          </a:prstGeom>
+          <a:noFill/>
+          <a:ln/>
+        </p:spPr>
+        <p:txBody>
+          <a:bodyPr wrap="square" rtlCol="0" anchor="t"/>
+          <a:lstStyle/>
+          <a:p>
+            <a:pPr indent="0" marL="0">
+              <a:buNone/>
+            </a:pPr>
+            <a:r>
+              <a:rPr lang="en-US" sz="1500" dirty="0">
+                <a:solidFill>
+                  <a:srgbClr val="1F2937"/>
+                </a:solidFill>
+                <a:latin typeface="Arial" pitchFamily="34" charset="0"/>
+                <a:ea typeface="Arial" pitchFamily="34" charset="-122"/>
+                <a:cs typeface="Arial" pitchFamily="34" charset="-120"/>
+              </a:rPr>
+              <a:t>falta de pagamento</a:t>
+            </a:r>
+            <a:endParaRPr lang="en-US" sz="1500" dirty="0"/>
+          </a:p>
+        </p:txBody>
+      </p:sp>
+      <p:sp>
+        <p:nvSpPr>
+          <p:cNvPr id="21" name="Shape 18"/>
+          <p:cNvSpPr/>
+          <p:nvPr/>
+        </p:nvSpPr>
+        <p:spPr>
+          <a:xfrm>
+            <a:off x="9038844" y="2057400"/>
+            <a:ext cx="2601468" cy="1463040"/>
+          </a:xfrm>
+          <a:prstGeom prst="roundRect">
+            <a:avLst>
+              <a:gd name="adj" fmla="val 5000"/>
+            </a:avLst>
+          </a:prstGeom>
+          <a:solidFill>
+            <a:srgbClr val="FFFFFF"/>
+          </a:solidFill>
+          <a:ln w="9525">
+            <a:solidFill>
+              <a:srgbClr val="D8E0EC"/>
+            </a:solidFill>
+            <a:prstDash val="solid"/>
+          </a:ln>
+        </p:spPr>
+      </p:sp>
+      <p:sp>
+        <p:nvSpPr>
+          <p:cNvPr id="22" name="Text 19"/>
+          <p:cNvSpPr/>
+          <p:nvPr/>
+        </p:nvSpPr>
+        <p:spPr>
+          <a:xfrm>
+            <a:off x="9176004" y="2148840"/>
+            <a:ext cx="365760" cy="365760"/>
+          </a:xfrm>
+          <a:prstGeom prst="rect">
+            <a:avLst/>
+          </a:prstGeom>
+          <a:noFill/>
+          <a:ln/>
+        </p:spPr>
+        <p:txBody>
+          <a:bodyPr wrap="square" rtlCol="0" anchor="ctr"/>
+          <a:lstStyle/>
+          <a:p>
+            <a:pPr indent="0" marL="0">
+              <a:buNone/>
+            </a:pPr>
+            <a:r>
+              <a:rPr lang="en-US" sz="1400" b="1" dirty="0">
+                <a:solidFill>
+                  <a:srgbClr val="F7A23B"/>
+                </a:solidFill>
+                <a:latin typeface="Arial" pitchFamily="34" charset="0"/>
+                <a:ea typeface="Arial" pitchFamily="34" charset="-122"/>
+                <a:cs typeface="Arial" pitchFamily="34" charset="-120"/>
+              </a:rPr>
+              <a:t>D</a:t>
+            </a:r>
+            <a:endParaRPr lang="en-US" sz="1400" dirty="0"/>
+          </a:p>
+        </p:txBody>
+      </p:sp>
+      <p:sp>
+        <p:nvSpPr>
+          <p:cNvPr id="23" name="Text 20"/>
+          <p:cNvSpPr/>
+          <p:nvPr/>
+        </p:nvSpPr>
+        <p:spPr>
+          <a:xfrm>
+            <a:off x="9176004" y="2514600"/>
+            <a:ext cx="2327148" cy="914400"/>
+          </a:xfrm>
+          <a:prstGeom prst="rect">
+            <a:avLst/>
+          </a:prstGeom>
+          <a:noFill/>
+          <a:ln/>
+        </p:spPr>
+        <p:txBody>
+          <a:bodyPr wrap="square" rtlCol="0" anchor="t"/>
+          <a:lstStyle/>
+          <a:p>
+            <a:pPr indent="0" marL="0">
+              <a:buNone/>
+            </a:pPr>
+            <a:r>
+              <a:rPr lang="en-US" sz="1500" dirty="0">
+                <a:solidFill>
+                  <a:srgbClr val="1F2937"/>
+                </a:solidFill>
+                <a:latin typeface="Arial" pitchFamily="34" charset="0"/>
+                <a:ea typeface="Arial" pitchFamily="34" charset="-122"/>
+                <a:cs typeface="Arial" pitchFamily="34" charset="-120"/>
+              </a:rPr>
+              <a:t>energia solar</a:t>
+            </a:r>
+            <a:endParaRPr lang="en-US" sz="1500" dirty="0"/>
+          </a:p>
+        </p:txBody>
+      </p:sp>
+      <p:sp>
+        <p:nvSpPr>
+          <p:cNvPr id="24" name="Shape 21"/>
+          <p:cNvSpPr/>
+          <p:nvPr/>
+        </p:nvSpPr>
+        <p:spPr>
+          <a:xfrm>
+            <a:off x="548640" y="3840480"/>
+            <a:ext cx="502920" cy="502920"/>
+          </a:xfrm>
+          <a:prstGeom prst="ellipse">
+            <a:avLst/>
+          </a:prstGeom>
+          <a:solidFill>
+            <a:srgbClr val="1B3A6B"/>
+          </a:solidFill>
+          <a:ln/>
+        </p:spPr>
+      </p:sp>
+      <p:sp>
+        <p:nvSpPr>
+          <p:cNvPr id="25" name="Text 22"/>
+          <p:cNvSpPr/>
+          <p:nvPr/>
+        </p:nvSpPr>
+        <p:spPr>
+          <a:xfrm>
+            <a:off x="548640" y="3840480"/>
+            <a:ext cx="502920" cy="502920"/>
+          </a:xfrm>
+          <a:prstGeom prst="rect">
+            <a:avLst/>
+          </a:prstGeom>
+          <a:noFill/>
+          <a:ln/>
+        </p:spPr>
+        <p:txBody>
+          <a:bodyPr wrap="square" rtlCol="0" anchor="ctr"/>
+          <a:lstStyle/>
+          <a:p>
+            <a:pPr algn="ctr" indent="0" marL="0">
+              <a:buNone/>
+            </a:pPr>
+            <a:r>
+              <a:rPr lang="en-US" sz="1600" b="1" dirty="0">
+                <a:solidFill>
+                  <a:srgbClr val="FFFFFF"/>
+                </a:solidFill>
+                <a:latin typeface="Arial" pitchFamily="34" charset="0"/>
+                <a:ea typeface="Arial" pitchFamily="34" charset="-122"/>
+                <a:cs typeface="Arial" pitchFamily="34" charset="-120"/>
+              </a:rPr>
+              <a:t>8</a:t>
+            </a:r>
+            <a:endParaRPr lang="en-US" sz="1600" dirty="0"/>
+          </a:p>
+        </p:txBody>
+      </p:sp>
+      <p:sp>
+        <p:nvSpPr>
+          <p:cNvPr id="26" name="Text 23"/>
+          <p:cNvSpPr/>
+          <p:nvPr/>
+        </p:nvSpPr>
+        <p:spPr>
+          <a:xfrm>
+            <a:off x="1234440" y="3794760"/>
+            <a:ext cx="10424160" cy="640080"/>
+          </a:xfrm>
+          <a:prstGeom prst="rect">
+            <a:avLst/>
+          </a:prstGeom>
+          <a:noFill/>
+          <a:ln/>
+        </p:spPr>
+        <p:txBody>
+          <a:bodyPr wrap="square" rtlCol="0" anchor="ctr"/>
+          <a:lstStyle/>
+          <a:p>
+            <a:pPr indent="0" marL="0">
+              <a:buNone/>
+            </a:pPr>
+            <a:r>
+              <a:rPr lang="en-US" sz="1800" b="1" dirty="0">
+                <a:solidFill>
+                  <a:srgbClr val="1B3A6B"/>
+                </a:solidFill>
+                <a:latin typeface="Arial" pitchFamily="34" charset="0"/>
+                <a:ea typeface="Arial" pitchFamily="34" charset="-122"/>
+                <a:cs typeface="Arial" pitchFamily="34" charset="-120"/>
+              </a:rPr>
+              <a:t>O ICMS na conta de luz é um tributo:</a:t>
+            </a:r>
+            <a:endParaRPr lang="en-US" sz="1800" dirty="0"/>
+          </a:p>
+        </p:txBody>
+      </p:sp>
+      <p:sp>
+        <p:nvSpPr>
+          <p:cNvPr id="27" name="Shape 24"/>
+          <p:cNvSpPr/>
+          <p:nvPr/>
+        </p:nvSpPr>
+        <p:spPr>
+          <a:xfrm>
+            <a:off x="548640" y="4572000"/>
+            <a:ext cx="2601468" cy="1463040"/>
+          </a:xfrm>
+          <a:prstGeom prst="roundRect">
+            <a:avLst>
+              <a:gd name="adj" fmla="val 5000"/>
+            </a:avLst>
+          </a:prstGeom>
+          <a:solidFill>
+            <a:srgbClr val="FFFFFF"/>
+          </a:solidFill>
+          <a:ln w="9525">
+            <a:solidFill>
+              <a:srgbClr val="D8E0EC"/>
+            </a:solidFill>
+            <a:prstDash val="solid"/>
+          </a:ln>
+        </p:spPr>
+      </p:sp>
+      <p:sp>
+        <p:nvSpPr>
+          <p:cNvPr id="28" name="Text 25"/>
+          <p:cNvSpPr/>
+          <p:nvPr/>
+        </p:nvSpPr>
+        <p:spPr>
+          <a:xfrm>
+            <a:off x="685800" y="4663440"/>
+            <a:ext cx="365760" cy="365760"/>
+          </a:xfrm>
+          <a:prstGeom prst="rect">
+            <a:avLst/>
+          </a:prstGeom>
+          <a:noFill/>
+          <a:ln/>
+        </p:spPr>
+        <p:txBody>
+          <a:bodyPr wrap="square" rtlCol="0" anchor="ctr"/>
+          <a:lstStyle/>
+          <a:p>
+            <a:pPr indent="0" marL="0">
+              <a:buNone/>
+            </a:pPr>
+            <a:r>
+              <a:rPr lang="en-US" sz="1400" b="1" dirty="0">
+                <a:solidFill>
+                  <a:srgbClr val="F7A23B"/>
+                </a:solidFill>
+                <a:latin typeface="Arial" pitchFamily="34" charset="0"/>
+                <a:ea typeface="Arial" pitchFamily="34" charset="-122"/>
+                <a:cs typeface="Arial" pitchFamily="34" charset="-120"/>
+              </a:rPr>
+              <a:t>A</a:t>
+            </a:r>
+            <a:endParaRPr lang="en-US" sz="1400" dirty="0"/>
+          </a:p>
+        </p:txBody>
+      </p:sp>
+      <p:sp>
+        <p:nvSpPr>
+          <p:cNvPr id="29" name="Text 26"/>
+          <p:cNvSpPr/>
+          <p:nvPr/>
+        </p:nvSpPr>
+        <p:spPr>
+          <a:xfrm>
+            <a:off x="685800" y="5029200"/>
+            <a:ext cx="2327148" cy="914400"/>
+          </a:xfrm>
+          <a:prstGeom prst="rect">
+            <a:avLst/>
+          </a:prstGeom>
+          <a:noFill/>
+          <a:ln/>
+        </p:spPr>
+        <p:txBody>
+          <a:bodyPr wrap="square" rtlCol="0" anchor="t"/>
+          <a:lstStyle/>
+          <a:p>
+            <a:pPr indent="0" marL="0">
+              <a:buNone/>
+            </a:pPr>
+            <a:r>
+              <a:rPr lang="en-US" sz="1500" dirty="0">
+                <a:solidFill>
+                  <a:srgbClr val="1F2937"/>
+                </a:solidFill>
+                <a:latin typeface="Arial" pitchFamily="34" charset="0"/>
+                <a:ea typeface="Arial" pitchFamily="34" charset="-122"/>
+                <a:cs typeface="Arial" pitchFamily="34" charset="-120"/>
+              </a:rPr>
+              <a:t>federal</a:t>
+            </a:r>
+            <a:endParaRPr lang="en-US" sz="1500" dirty="0"/>
+          </a:p>
+        </p:txBody>
+      </p:sp>
+      <p:sp>
+        <p:nvSpPr>
+          <p:cNvPr id="30" name="Shape 27"/>
+          <p:cNvSpPr/>
+          <p:nvPr/>
+        </p:nvSpPr>
+        <p:spPr>
+          <a:xfrm>
+            <a:off x="3378708" y="4572000"/>
+            <a:ext cx="2601468" cy="1463040"/>
+          </a:xfrm>
+          <a:prstGeom prst="roundRect">
+            <a:avLst>
+              <a:gd name="adj" fmla="val 5000"/>
+            </a:avLst>
+          </a:prstGeom>
+          <a:solidFill>
+            <a:srgbClr val="FFFFFF"/>
+          </a:solidFill>
+          <a:ln w="9525">
+            <a:solidFill>
+              <a:srgbClr val="D8E0EC"/>
+            </a:solidFill>
+            <a:prstDash val="solid"/>
+          </a:ln>
+        </p:spPr>
+      </p:sp>
+      <p:sp>
+        <p:nvSpPr>
+          <p:cNvPr id="31" name="Text 28"/>
+          <p:cNvSpPr/>
+          <p:nvPr/>
+        </p:nvSpPr>
+        <p:spPr>
+          <a:xfrm>
+            <a:off x="3515868" y="4663440"/>
+            <a:ext cx="365760" cy="365760"/>
+          </a:xfrm>
+          <a:prstGeom prst="rect">
+            <a:avLst/>
+          </a:prstGeom>
+          <a:noFill/>
+          <a:ln/>
+        </p:spPr>
+        <p:txBody>
+          <a:bodyPr wrap="square" rtlCol="0" anchor="ctr"/>
+          <a:lstStyle/>
+          <a:p>
+            <a:pPr indent="0" marL="0">
+              <a:buNone/>
+            </a:pPr>
+            <a:r>
+              <a:rPr lang="en-US" sz="1400" b="1" dirty="0">
+                <a:solidFill>
+                  <a:srgbClr val="F7A23B"/>
+                </a:solidFill>
+                <a:latin typeface="Arial" pitchFamily="34" charset="0"/>
+                <a:ea typeface="Arial" pitchFamily="34" charset="-122"/>
+                <a:cs typeface="Arial" pitchFamily="34" charset="-120"/>
+              </a:rPr>
+              <a:t>B</a:t>
+            </a:r>
+            <a:endParaRPr lang="en-US" sz="1400" dirty="0"/>
+          </a:p>
+        </p:txBody>
+      </p:sp>
+      <p:sp>
+        <p:nvSpPr>
+          <p:cNvPr id="32" name="Text 29"/>
+          <p:cNvSpPr/>
+          <p:nvPr/>
+        </p:nvSpPr>
+        <p:spPr>
+          <a:xfrm>
+            <a:off x="3515868" y="5029200"/>
+            <a:ext cx="2327148" cy="914400"/>
+          </a:xfrm>
+          <a:prstGeom prst="rect">
+            <a:avLst/>
+          </a:prstGeom>
+          <a:noFill/>
+          <a:ln/>
+        </p:spPr>
+        <p:txBody>
+          <a:bodyPr wrap="square" rtlCol="0" anchor="t"/>
+          <a:lstStyle/>
+          <a:p>
+            <a:pPr indent="0" marL="0">
+              <a:buNone/>
+            </a:pPr>
+            <a:r>
+              <a:rPr lang="en-US" sz="1500" dirty="0">
+                <a:solidFill>
+                  <a:srgbClr val="1F2937"/>
+                </a:solidFill>
+                <a:latin typeface="Arial" pitchFamily="34" charset="0"/>
+                <a:ea typeface="Arial" pitchFamily="34" charset="-122"/>
+                <a:cs typeface="Arial" pitchFamily="34" charset="-120"/>
+              </a:rPr>
+              <a:t>estadual</a:t>
+            </a:r>
+            <a:endParaRPr lang="en-US" sz="1500" dirty="0"/>
+          </a:p>
+        </p:txBody>
+      </p:sp>
+      <p:sp>
+        <p:nvSpPr>
+          <p:cNvPr id="33" name="Shape 30"/>
+          <p:cNvSpPr/>
+          <p:nvPr/>
+        </p:nvSpPr>
+        <p:spPr>
+          <a:xfrm>
+            <a:off x="6208776" y="4572000"/>
+            <a:ext cx="2601468" cy="1463040"/>
+          </a:xfrm>
+          <a:prstGeom prst="roundRect">
+            <a:avLst>
+              <a:gd name="adj" fmla="val 5000"/>
+            </a:avLst>
+          </a:prstGeom>
+          <a:solidFill>
+            <a:srgbClr val="FFFFFF"/>
+          </a:solidFill>
+          <a:ln w="9525">
+            <a:solidFill>
+              <a:srgbClr val="D8E0EC"/>
+            </a:solidFill>
+            <a:prstDash val="solid"/>
+          </a:ln>
+        </p:spPr>
+      </p:sp>
+      <p:sp>
+        <p:nvSpPr>
+          <p:cNvPr id="34" name="Text 31"/>
+          <p:cNvSpPr/>
+          <p:nvPr/>
+        </p:nvSpPr>
+        <p:spPr>
+          <a:xfrm>
+            <a:off x="6345936" y="4663440"/>
+            <a:ext cx="365760" cy="365760"/>
+          </a:xfrm>
+          <a:prstGeom prst="rect">
+            <a:avLst/>
+          </a:prstGeom>
+          <a:noFill/>
+          <a:ln/>
+        </p:spPr>
+        <p:txBody>
+          <a:bodyPr wrap="square" rtlCol="0" anchor="ctr"/>
+          <a:lstStyle/>
+          <a:p>
+            <a:pPr indent="0" marL="0">
+              <a:buNone/>
+            </a:pPr>
+            <a:r>
+              <a:rPr lang="en-US" sz="1400" b="1" dirty="0">
+                <a:solidFill>
+                  <a:srgbClr val="F7A23B"/>
+                </a:solidFill>
+                <a:latin typeface="Arial" pitchFamily="34" charset="0"/>
+                <a:ea typeface="Arial" pitchFamily="34" charset="-122"/>
+                <a:cs typeface="Arial" pitchFamily="34" charset="-120"/>
+              </a:rPr>
+              <a:t>C</a:t>
+            </a:r>
+            <a:endParaRPr lang="en-US" sz="1400" dirty="0"/>
+          </a:p>
+        </p:txBody>
+      </p:sp>
+      <p:sp>
+        <p:nvSpPr>
+          <p:cNvPr id="35" name="Text 32"/>
+          <p:cNvSpPr/>
+          <p:nvPr/>
+        </p:nvSpPr>
+        <p:spPr>
+          <a:xfrm>
+            <a:off x="6345936" y="5029200"/>
+            <a:ext cx="2327148" cy="914400"/>
+          </a:xfrm>
+          <a:prstGeom prst="rect">
+            <a:avLst/>
+          </a:prstGeom>
+          <a:noFill/>
+          <a:ln/>
+        </p:spPr>
+        <p:txBody>
+          <a:bodyPr wrap="square" rtlCol="0" anchor="t"/>
+          <a:lstStyle/>
+          <a:p>
+            <a:pPr indent="0" marL="0">
+              <a:buNone/>
+            </a:pPr>
+            <a:r>
+              <a:rPr lang="en-US" sz="1500" dirty="0">
+                <a:solidFill>
+                  <a:srgbClr val="1F2937"/>
+                </a:solidFill>
+                <a:latin typeface="Arial" pitchFamily="34" charset="0"/>
+                <a:ea typeface="Arial" pitchFamily="34" charset="-122"/>
+                <a:cs typeface="Arial" pitchFamily="34" charset="-120"/>
+              </a:rPr>
+              <a:t>municipal</a:t>
+            </a:r>
+            <a:endParaRPr lang="en-US" sz="1500" dirty="0"/>
+          </a:p>
+        </p:txBody>
+      </p:sp>
+      <p:sp>
+        <p:nvSpPr>
+          <p:cNvPr id="36" name="Shape 33"/>
+          <p:cNvSpPr/>
+          <p:nvPr/>
+        </p:nvSpPr>
+        <p:spPr>
+          <a:xfrm>
+            <a:off x="9038844" y="4572000"/>
+            <a:ext cx="2601468" cy="1463040"/>
+          </a:xfrm>
+          <a:prstGeom prst="roundRect">
+            <a:avLst>
+              <a:gd name="adj" fmla="val 5000"/>
+            </a:avLst>
+          </a:prstGeom>
+          <a:solidFill>
+            <a:srgbClr val="FFFFFF"/>
+          </a:solidFill>
+          <a:ln w="9525">
+            <a:solidFill>
+              <a:srgbClr val="D8E0EC"/>
+            </a:solidFill>
+            <a:prstDash val="solid"/>
+          </a:ln>
+        </p:spPr>
+      </p:sp>
+      <p:sp>
+        <p:nvSpPr>
+          <p:cNvPr id="37" name="Text 34"/>
+          <p:cNvSpPr/>
+          <p:nvPr/>
+        </p:nvSpPr>
+        <p:spPr>
+          <a:xfrm>
+            <a:off x="9176004" y="4663440"/>
+            <a:ext cx="365760" cy="365760"/>
+          </a:xfrm>
+          <a:prstGeom prst="rect">
+            <a:avLst/>
+          </a:prstGeom>
+          <a:noFill/>
+          <a:ln/>
+        </p:spPr>
+        <p:txBody>
+          <a:bodyPr wrap="square" rtlCol="0" anchor="ctr"/>
+          <a:lstStyle/>
+          <a:p>
+            <a:pPr indent="0" marL="0">
+              <a:buNone/>
+            </a:pPr>
+            <a:r>
+              <a:rPr lang="en-US" sz="1400" b="1" dirty="0">
+                <a:solidFill>
+                  <a:srgbClr val="F7A23B"/>
+                </a:solidFill>
+                <a:latin typeface="Arial" pitchFamily="34" charset="0"/>
+                <a:ea typeface="Arial" pitchFamily="34" charset="-122"/>
+                <a:cs typeface="Arial" pitchFamily="34" charset="-120"/>
+              </a:rPr>
+              <a:t>D</a:t>
+            </a:r>
+            <a:endParaRPr lang="en-US" sz="1400" dirty="0"/>
+          </a:p>
+        </p:txBody>
+      </p:sp>
+      <p:sp>
+        <p:nvSpPr>
+          <p:cNvPr id="38" name="Text 35"/>
+          <p:cNvSpPr/>
+          <p:nvPr/>
+        </p:nvSpPr>
+        <p:spPr>
+          <a:xfrm>
+            <a:off x="9176004" y="5029200"/>
+            <a:ext cx="2327148" cy="914400"/>
+          </a:xfrm>
+          <a:prstGeom prst="rect">
+            <a:avLst/>
+          </a:prstGeom>
+          <a:noFill/>
+          <a:ln/>
+        </p:spPr>
+        <p:txBody>
+          <a:bodyPr wrap="square" rtlCol="0" anchor="t"/>
+          <a:lstStyle/>
+          <a:p>
+            <a:pPr indent="0" marL="0">
+              <a:buNone/>
+            </a:pPr>
+            <a:r>
+              <a:rPr lang="en-US" sz="1500" dirty="0">
+                <a:solidFill>
+                  <a:srgbClr val="1F2937"/>
+                </a:solidFill>
+                <a:latin typeface="Arial" pitchFamily="34" charset="0"/>
+                <a:ea typeface="Arial" pitchFamily="34" charset="-122"/>
+                <a:cs typeface="Arial" pitchFamily="34" charset="-120"/>
+              </a:rPr>
+              <a:t>da ANEEL</a:t>
+            </a:r>
+            <a:endParaRPr lang="en-US" sz="1500" dirty="0"/>
+          </a:p>
+        </p:txBody>
+      </p:sp>
+      <p:sp>
+        <p:nvSpPr>
+          <p:cNvPr id="25" name="Slide Number Placeholder 0"/>
+          <p:cNvSpPr>
+            <a:spLocks noGrp="1"/>
+          </p:cNvSpPr>
+          <p:nvPr>
+            <p:ph type="sldNum" sz="quarter" idx="4294967295"/>
+          </p:nvPr>
+        </p:nvSpPr>
+        <p:spPr>
+          <a:xfrm>
+            <a:off x="11292840" y="6556248"/>
+            <a:ext cx="548640" cy="256032"/>
+          </a:xfrm>
+          <a:prstGeom prst="rect">
+            <a:avLst/>
+          </a:prstGeom>
+          <a:extLst>
+            <a:ext uri="{C572A759-6A51-4108-AA02-DFA0A04FC94B}">
+              <ma14:wrappingTextBoxFlag xmlns:ma14="http://schemas.microsoft.com/office/mac/drawingml/2011/main" val="0"/>
+            </a:ext>
+          </a:extLst>
+        </p:spPr>
+        <p:txBody>
+          <a:bodyPr/>
+          <a:lstStyle>
+            <a:lvl1pPr>
+              <a:defRPr sz="900">
+                <a:solidFill>
+                  <a:srgbClr val="1B3A6B"/>
+                </a:solidFill>
+                <a:latin typeface="Arial"/>
+                <a:ea typeface="Arial"/>
+                <a:cs typeface="Arial"/>
+              </a:defRPr>
+            </a:lvl1pPr>
+          </a:lstStyle>
+          <a:p>
+            <a:pPr algn="r"/>
+            <a:fld id="{F7021451-1387-4CA6-816F-3879F97B5CBC}" type="slidenum">
+              <a:rPr b="1" lang="en-US"/>
+              <a:t>45</a:t>
+            </a:fld>
+            <a:endParaRPr lang="en-US"/>
+          </a:p>
+        </p:txBody>
+      </p:sp>
+    </p:spTree>
+  </p:cSld>
+  <p:clrMapOvr>
+    <a:masterClrMapping/>
+  </p:clrMapOvr>
+</p:sld>
+</file>
+
+<file path=ppt/slides/slide46.xml><?xml version="1.0" encoding="utf-8"?>
+<p:sld xmlns:a="http://schemas.openxmlformats.org/drawingml/2006/main" xmlns:r="http://schemas.openxmlformats.org/officeDocument/2006/relationships" xmlns:p="http://schemas.openxmlformats.org/presentationml/2006/main">
+  <p:cSld name="Slide 46">
     <p:bg>
       <p:bgPr>
         <a:solidFill>
@@ -35361,7 +35731,7 @@
             <a:pPr algn="r"/>
             <a:fld id="{F7021451-1387-4CA6-816F-3879F97B5CBC}" type="slidenum">
               <a:rPr b="1" lang="en-US"/>
-              <a:t>45</a:t>
+              <a:t>46</a:t>
             </a:fld>
             <a:endParaRPr lang="en-US"/>
           </a:p>
@@ -35375,9 +35745,9 @@
 </p:sld>
 </file>
 
-<file path=ppt/slides/slide46.xml><?xml version="1.0" encoding="utf-8"?>
+<file path=ppt/slides/slide47.xml><?xml version="1.0" encoding="utf-8"?>
 <p:sld xmlns:a="http://schemas.openxmlformats.org/drawingml/2006/main" xmlns:r="http://schemas.openxmlformats.org/officeDocument/2006/relationships" xmlns:p="http://schemas.openxmlformats.org/presentationml/2006/main">
-  <p:cSld name="Slide 46">
+  <p:cSld name="Slide 47">
     <p:bg>
       <p:bgPr>
         <a:solidFill>
@@ -35869,7 +36239,7 @@
             <a:pPr algn="r"/>
             <a:fld id="{F7021451-1387-4CA6-816F-3879F97B5CBC}" type="slidenum">
               <a:rPr b="1" lang="en-US"/>
-              <a:t>46</a:t>
+              <a:t>47</a:t>
             </a:fld>
             <a:endParaRPr lang="en-US"/>
           </a:p>
@@ -37888,12 +38258,12 @@
         </p:nvSpPr>
         <p:spPr>
           <a:xfrm>
-            <a:off x="548640" y="1325880"/>
-            <a:ext cx="11091672" cy="3977640"/>
+            <a:off x="1463040" y="1600200"/>
+            <a:ext cx="9262872" cy="3429000"/>
           </a:xfrm>
           <a:prstGeom prst="roundRect">
             <a:avLst>
-              <a:gd name="adj" fmla="val 1839"/>
+              <a:gd name="adj" fmla="val 3200"/>
             </a:avLst>
           </a:prstGeom>
           <a:solidFill>
@@ -37906,9 +38276,9 @@
             <a:prstDash val="solid"/>
           </a:ln>
           <a:effectLst>
-            <a:outerShdw sx="100000" sy="100000" kx="0" ky="0" algn="bl" rotWithShape="0" blurRad="38100" dist="12700" dir="5400000">
+            <a:outerShdw sx="100000" sy="100000" kx="0" ky="0" algn="bl" rotWithShape="0" blurRad="50800" dist="12700" dir="5400000">
               <a:srgbClr val="000000">
-                <a:alpha val="8000"/>
+                <a:alpha val="10000"/>
               </a:srgbClr>
             </a:outerShdw>
           </a:effectLst>
@@ -37922,14 +38292,14 @@
         </p:nvSpPr>
         <p:spPr>
           <a:xfrm>
-            <a:off x="731520" y="1508760"/>
-            <a:ext cx="457200" cy="457200"/>
-          </a:xfrm>
-          <a:prstGeom prst="ellipse">
+            <a:off x="1463040" y="1600200"/>
+            <a:ext cx="128016" cy="3429000"/>
+          </a:xfrm>
+          <a:prstGeom prst="rect">
             <a:avLst/>
           </a:prstGeom>
           <a:solidFill>
-            <a:srgbClr val="1B3A6B"/>
+            <a:srgbClr val="F7A23B"/>
           </a:solidFill>
           <a:ln/>
         </p:spPr>
@@ -37942,8 +38312,8 @@
         </p:nvSpPr>
         <p:spPr>
           <a:xfrm>
-            <a:off x="731520" y="1508760"/>
-            <a:ext cx="457200" cy="457200"/>
+            <a:off x="2011680" y="1783080"/>
+            <a:ext cx="8412480" cy="3063240"/>
           </a:xfrm>
           <a:prstGeom prst="rect">
             <a:avLst/>
@@ -37959,50 +38329,9 @@
               <a:buNone/>
             </a:pPr>
             <a:r>
-              <a:rPr lang="en-US" sz="1400" b="1" dirty="0">
-                <a:solidFill>
-                  <a:srgbClr val="FFFFFF"/>
-                </a:solidFill>
-                <a:latin typeface="Arial" pitchFamily="34" charset="0"/>
-                <a:ea typeface="Arial" pitchFamily="34" charset="-122"/>
-                <a:cs typeface="Arial" pitchFamily="34" charset="-120"/>
-              </a:rPr>
-              <a:t>1</a:t>
-            </a:r>
-            <a:endParaRPr lang="en-US" sz="1400" dirty="0"/>
-          </a:p>
-        </p:txBody>
-      </p:sp>
-      <p:sp>
-        <p:nvSpPr>
-          <p:cNvPr id="12" name="Text 9"/>
-          <p:cNvSpPr/>
-          <p:nvPr/>
-        </p:nvSpPr>
-        <p:spPr>
-          <a:xfrm>
-            <a:off x="1325880" y="1435608"/>
-            <a:ext cx="10177272" cy="3758184"/>
-          </a:xfrm>
-          <a:prstGeom prst="rect">
-            <a:avLst/>
-          </a:prstGeom>
-          <a:noFill/>
-          <a:ln/>
-        </p:spPr>
-        <p:txBody>
-          <a:bodyPr wrap="square" rtlCol="0" anchor="ctr">
-            <a:normAutofit/>
-          </a:bodyPr>
-          <a:lstStyle/>
-          <a:p>
-            <a:pPr indent="0" marL="0">
-              <a:buNone/>
-            </a:pPr>
-            <a:r>
-              <a:rPr lang="en-US" sz="1800" dirty="0">
-                <a:solidFill>
-                  <a:srgbClr val="1F2937"/>
+              <a:rPr lang="en-US" sz="3200" b="1" dirty="0">
+                <a:solidFill>
+                  <a:srgbClr val="1B3A6B"/>
                 </a:solidFill>
                 <a:latin typeface="Arial" pitchFamily="34" charset="0"/>
                 <a:ea typeface="Arial" pitchFamily="34" charset="-122"/>
@@ -38010,13 +38339,13 @@
               </a:rPr>
               <a:t>kWp = quilowatt-pico: potência máxima dos painéis em condições ideais</a:t>
             </a:r>
-            <a:endParaRPr lang="en-US" sz="1800" dirty="0"/>
-          </a:p>
-        </p:txBody>
-      </p:sp>
-      <p:sp>
-        <p:nvSpPr>
-          <p:cNvPr id="13" name="Shape 10"/>
+            <a:endParaRPr lang="en-US" sz="3200" dirty="0"/>
+          </a:p>
+        </p:txBody>
+      </p:sp>
+      <p:sp>
+        <p:nvSpPr>
+          <p:cNvPr id="12" name="Shape 9"/>
           <p:cNvSpPr/>
           <p:nvPr/>
         </p:nvSpPr>
@@ -38043,7 +38372,7 @@
       </p:sp>
       <p:sp>
         <p:nvSpPr>
-          <p:cNvPr id="14" name="Shape 11"/>
+          <p:cNvPr id="13" name="Shape 10"/>
           <p:cNvSpPr/>
           <p:nvPr/>
         </p:nvSpPr>
@@ -38063,7 +38392,7 @@
       </p:sp>
       <p:sp>
         <p:nvSpPr>
-          <p:cNvPr id="15" name="Text 12"/>
+          <p:cNvPr id="14" name="Text 11"/>
           <p:cNvSpPr/>
           <p:nvPr/>
         </p:nvSpPr>
@@ -38936,7 +39265,7 @@
             <a:r>
               <a:rPr lang="en-US" sz="11000" b="1" dirty="0">
                 <a:solidFill>
-                  <a:srgbClr val="11396F"/>
+                  <a:srgbClr val="F7A23B"/>
                 </a:solidFill>
                 <a:latin typeface="Arial" pitchFamily="34" charset="0"/>
                 <a:ea typeface="Arial" pitchFamily="34" charset="-122"/>
@@ -39059,7 +39388,7 @@
                 <a:ea typeface="Arial" pitchFamily="34" charset="-122"/>
                 <a:cs typeface="Arial" pitchFamily="34" charset="-120"/>
               </a:rPr>
-              <a:t>Aula</a:t>
+              <a:t>Aula teórica</a:t>
             </a:r>
             <a:endParaRPr lang="en-US" sz="1400" dirty="0"/>
           </a:p>
